--- a/data/raw/templates/template_reporte.pptx
+++ b/data/raw/templates/template_reporte.pptx
@@ -483,32 +483,6 @@
 </pc:chgInfo>
 </file>
 
-<file path=ppt/comments/modernComment_103_12C69EF3.xml><?xml version="1.0" encoding="utf-8"?>
-<p188:cmLst xmlns:a="http://schemas.openxmlformats.org/drawingml/2006/main" xmlns:r="http://schemas.openxmlformats.org/officeDocument/2006/relationships" xmlns:p188="http://schemas.microsoft.com/office/powerpoint/2018/8/main">
-  <p188:cm id="{E9B8F684-EACF-425B-8EC9-B513DFD35E62}" authorId="{753DE3C9-1154-C860-D529-4EC0F397B11F}" created="2026-03-18T20:05:24.413">
-    <ac:txMkLst xmlns:ac="http://schemas.microsoft.com/office/drawing/2013/main/command">
-      <pc:docMk xmlns:pc="http://schemas.microsoft.com/office/powerpoint/2013/main/command"/>
-      <pc:sldMk xmlns:pc="http://schemas.microsoft.com/office/powerpoint/2013/main/command" cId="315006707" sldId="259"/>
-      <ac:spMk id="2" creationId="{805E9EFF-9DE1-C7E9-5893-DD7195680F49}"/>
-      <ac:txMk cp="265" len="7">
-        <ac:context len="641" hash="2100521420"/>
-      </ac:txMk>
-    </ac:txMkLst>
-    <p188:pos x="3302904" y="1631785"/>
-    <p188:txBody>
-      <a:bodyPr/>
-      <a:lstStyle/>
-      <a:p>
-        <a:r>
-          <a:rPr lang="es-CL"/>
-          <a:t>Revisar este valor</a:t>
-        </a:r>
-      </a:p>
-    </p188:txBody>
-  </p188:cm>
-</p188:cmLst>
-</file>
-
 <file path=ppt/slideLayouts/slideLayout1.xml><?xml version="1.0" encoding="utf-8"?>
 <p:sldLayout xmlns:a="http://schemas.openxmlformats.org/drawingml/2006/main" xmlns:r="http://schemas.openxmlformats.org/officeDocument/2006/relationships" xmlns:p="http://schemas.openxmlformats.org/presentationml/2006/main" type="title" preserve="1">
   <p:cSld name="Diapositiva de título">
@@ -640,7 +614,7 @@
           <a:p>
             <a:fld id="{C1175F80-2F39-40DD-909D-7A02119CCA88}" type="datetimeFigureOut">
               <a:rPr lang="es-CL" smtClean="0"/>
-              <a:t>18-03-2026</a:t>
+              <a:t>20-03-2026</a:t>
             </a:fld>
             <a:endParaRPr lang="es-CL"/>
           </a:p>
@@ -810,7 +784,7 @@
           <a:p>
             <a:fld id="{C1175F80-2F39-40DD-909D-7A02119CCA88}" type="datetimeFigureOut">
               <a:rPr lang="es-CL" smtClean="0"/>
-              <a:t>18-03-2026</a:t>
+              <a:t>20-03-2026</a:t>
             </a:fld>
             <a:endParaRPr lang="es-CL"/>
           </a:p>
@@ -990,7 +964,7 @@
           <a:p>
             <a:fld id="{C1175F80-2F39-40DD-909D-7A02119CCA88}" type="datetimeFigureOut">
               <a:rPr lang="es-CL" smtClean="0"/>
-              <a:t>18-03-2026</a:t>
+              <a:t>20-03-2026</a:t>
             </a:fld>
             <a:endParaRPr lang="es-CL"/>
           </a:p>
@@ -1160,7 +1134,7 @@
           <a:p>
             <a:fld id="{C1175F80-2F39-40DD-909D-7A02119CCA88}" type="datetimeFigureOut">
               <a:rPr lang="es-CL" smtClean="0"/>
-              <a:t>18-03-2026</a:t>
+              <a:t>20-03-2026</a:t>
             </a:fld>
             <a:endParaRPr lang="es-CL"/>
           </a:p>
@@ -1406,7 +1380,7 @@
           <a:p>
             <a:fld id="{C1175F80-2F39-40DD-909D-7A02119CCA88}" type="datetimeFigureOut">
               <a:rPr lang="es-CL" smtClean="0"/>
-              <a:t>18-03-2026</a:t>
+              <a:t>20-03-2026</a:t>
             </a:fld>
             <a:endParaRPr lang="es-CL"/>
           </a:p>
@@ -1638,7 +1612,7 @@
           <a:p>
             <a:fld id="{C1175F80-2F39-40DD-909D-7A02119CCA88}" type="datetimeFigureOut">
               <a:rPr lang="es-CL" smtClean="0"/>
-              <a:t>18-03-2026</a:t>
+              <a:t>20-03-2026</a:t>
             </a:fld>
             <a:endParaRPr lang="es-CL"/>
           </a:p>
@@ -2005,7 +1979,7 @@
           <a:p>
             <a:fld id="{C1175F80-2F39-40DD-909D-7A02119CCA88}" type="datetimeFigureOut">
               <a:rPr lang="es-CL" smtClean="0"/>
-              <a:t>18-03-2026</a:t>
+              <a:t>20-03-2026</a:t>
             </a:fld>
             <a:endParaRPr lang="es-CL"/>
           </a:p>
@@ -2123,7 +2097,7 @@
           <a:p>
             <a:fld id="{C1175F80-2F39-40DD-909D-7A02119CCA88}" type="datetimeFigureOut">
               <a:rPr lang="es-CL" smtClean="0"/>
-              <a:t>18-03-2026</a:t>
+              <a:t>20-03-2026</a:t>
             </a:fld>
             <a:endParaRPr lang="es-CL"/>
           </a:p>
@@ -2218,7 +2192,7 @@
           <a:p>
             <a:fld id="{C1175F80-2F39-40DD-909D-7A02119CCA88}" type="datetimeFigureOut">
               <a:rPr lang="es-CL" smtClean="0"/>
-              <a:t>18-03-2026</a:t>
+              <a:t>20-03-2026</a:t>
             </a:fld>
             <a:endParaRPr lang="es-CL"/>
           </a:p>
@@ -2495,7 +2469,7 @@
           <a:p>
             <a:fld id="{C1175F80-2F39-40DD-909D-7A02119CCA88}" type="datetimeFigureOut">
               <a:rPr lang="es-CL" smtClean="0"/>
-              <a:t>18-03-2026</a:t>
+              <a:t>20-03-2026</a:t>
             </a:fld>
             <a:endParaRPr lang="es-CL"/>
           </a:p>
@@ -2752,7 +2726,7 @@
           <a:p>
             <a:fld id="{C1175F80-2F39-40DD-909D-7A02119CCA88}" type="datetimeFigureOut">
               <a:rPr lang="es-CL" smtClean="0"/>
-              <a:t>18-03-2026</a:t>
+              <a:t>20-03-2026</a:t>
             </a:fld>
             <a:endParaRPr lang="es-CL"/>
           </a:p>
@@ -2965,7 +2939,7 @@
           <a:p>
             <a:fld id="{C1175F80-2F39-40DD-909D-7A02119CCA88}" type="datetimeFigureOut">
               <a:rPr lang="es-CL" smtClean="0"/>
-              <a:t>18-03-2026</a:t>
+              <a:t>20-03-2026</a:t>
             </a:fld>
             <a:endParaRPr lang="es-CL"/>
           </a:p>
@@ -3407,7 +3381,7 @@
             <p:nvPr/>
           </p:nvPicPr>
           <p:blipFill rotWithShape="1">
-            <a:blip r:embed="rId3" cstate="print">
+            <a:blip r:embed="rId2" cstate="print">
               <a:extLst>
                 <a:ext uri="{28A0092B-C50C-407E-A947-70E740481C1C}">
                   <a14:useLocalDpi xmlns:a14="http://schemas.microsoft.com/office/drawing/2010/main" val="0"/>
@@ -3619,7 +3593,7 @@
             <p:nvPr/>
           </p:nvPicPr>
           <p:blipFill>
-            <a:blip r:embed="rId4" cstate="print">
+            <a:blip r:embed="rId3" cstate="print">
               <a:extLst>
                 <a:ext uri="{28A0092B-C50C-407E-A947-70E740481C1C}">
                   <a14:useLocalDpi xmlns:a14="http://schemas.microsoft.com/office/drawing/2010/main" val="0"/>
@@ -4349,7 +4323,18 @@
                 <a:ea typeface="Calibri" panose="020F0502020204030204" pitchFamily="34" charset="0"/>
                 <a:cs typeface="Calibri" panose="020F0502020204030204" pitchFamily="34" charset="0"/>
               </a:rPr>
-              <a:t>kpis.cmg_spread_max_charrua</a:t>
+              <a:t>kpis.cmg_spread_max_crucero</a:t>
+            </a:r>
+            <a:r>
+              <a:rPr lang="es-CL" sz="1400" b="1">
+                <a:solidFill>
+                  <a:srgbClr val="002060"/>
+                </a:solidFill>
+                <a:latin typeface="Candara" panose="020E0502030303020204" pitchFamily="34" charset="0"/>
+                <a:ea typeface="Calibri" panose="020F0502020204030204" pitchFamily="34" charset="0"/>
+                <a:cs typeface="Calibri" panose="020F0502020204030204" pitchFamily="34" charset="0"/>
+              </a:rPr>
+              <a:t>}} en </a:t>
             </a:r>
             <a:r>
               <a:rPr lang="es-CL" sz="1400" b="1" dirty="0">
@@ -4360,7 +4345,7 @@
                 <a:ea typeface="Calibri" panose="020F0502020204030204" pitchFamily="34" charset="0"/>
                 <a:cs typeface="Calibri" panose="020F0502020204030204" pitchFamily="34" charset="0"/>
               </a:rPr>
-              <a:t>}} $/kWh en la barra Charrúa 500kV , mientras que en la barra Puerto Montt 220 kV el valor ascendió a {{</a:t>
+              <a:t>la barra Crucero 220kV , mientras que en la barra Puerto Montt 220kV el valor ascendió a {{</a:t>
             </a:r>
             <a:r>
               <a:rPr lang="es-CL" sz="1400" b="1" dirty="0" err="1">
@@ -4371,7 +4356,7 @@
                 <a:ea typeface="Calibri" panose="020F0502020204030204" pitchFamily="34" charset="0"/>
                 <a:cs typeface="Calibri" panose="020F0502020204030204" pitchFamily="34" charset="0"/>
               </a:rPr>
-              <a:t>kpis.dia_cmg_spread_max_p_montt</a:t>
+              <a:t>kpis.cmg_spread_max_p_montt</a:t>
             </a:r>
             <a:r>
               <a:rPr lang="es-CL" sz="1400" b="1" dirty="0">
@@ -4691,6 +4676,17 @@
               <a:t>kpis.vert_empresa_vert_max</a:t>
             </a:r>
             <a:r>
+              <a:rPr lang="es-CL" sz="1400" b="1">
+                <a:solidFill>
+                  <a:srgbClr val="002060"/>
+                </a:solidFill>
+                <a:latin typeface="Candara" panose="020E0502030303020204" pitchFamily="34" charset="0"/>
+                <a:ea typeface="Calibri" panose="020F0502020204030204" pitchFamily="34" charset="0"/>
+                <a:cs typeface="Calibri" panose="020F0502020204030204" pitchFamily="34" charset="0"/>
+              </a:rPr>
+              <a:t>}} durante </a:t>
+            </a:r>
+            <a:r>
               <a:rPr lang="es-CL" sz="1400" b="1" dirty="0">
                 <a:solidFill>
                   <a:srgbClr val="002060"/>
@@ -4699,29 +4695,7 @@
                 <a:ea typeface="Calibri" panose="020F0502020204030204" pitchFamily="34" charset="0"/>
                 <a:cs typeface="Calibri" panose="020F0502020204030204" pitchFamily="34" charset="0"/>
               </a:rPr>
-              <a:t>}} </a:t>
-            </a:r>
-            <a:r>
-              <a:rPr lang="es-CL" sz="1400" b="1" dirty="0" err="1">
-                <a:solidFill>
-                  <a:srgbClr val="002060"/>
-                </a:solidFill>
-                <a:latin typeface="Candara" panose="020E0502030303020204" pitchFamily="34" charset="0"/>
-                <a:ea typeface="Calibri" panose="020F0502020204030204" pitchFamily="34" charset="0"/>
-                <a:cs typeface="Calibri" panose="020F0502020204030204" pitchFamily="34" charset="0"/>
-              </a:rPr>
-              <a:t>MWh</a:t>
-            </a:r>
-            <a:r>
-              <a:rPr lang="es-CL" sz="1400" b="1" dirty="0">
-                <a:solidFill>
-                  <a:srgbClr val="002060"/>
-                </a:solidFill>
-                <a:latin typeface="Candara" panose="020E0502030303020204" pitchFamily="34" charset="0"/>
-                <a:ea typeface="Calibri" panose="020F0502020204030204" pitchFamily="34" charset="0"/>
-                <a:cs typeface="Calibri" panose="020F0502020204030204" pitchFamily="34" charset="0"/>
-              </a:rPr>
-              <a:t> durante el periodo de estudio. </a:t>
+              <a:t>el periodo de estudio. </a:t>
             </a:r>
           </a:p>
           <a:p>
@@ -5129,7 +5103,7 @@
             </a:endParaRPr>
           </a:p>
           <a:p>
-            <a:pPr algn="just"/>
+            <a:pPr algn="ctr"/>
             <a:r>
               <a:rPr lang="es-CL" sz="1200" b="1" dirty="0">
                 <a:solidFill>
@@ -5202,7 +5176,7 @@
             </a:endParaRPr>
           </a:p>
           <a:p>
-            <a:pPr algn="just"/>
+            <a:pPr algn="ctr"/>
             <a:r>
               <a:rPr lang="es-CL" sz="1200" b="1" dirty="0">
                 <a:solidFill>
@@ -5387,7 +5361,7 @@
                 <a:latin typeface="Candara" panose="020E0502030303020204" pitchFamily="34" charset="0"/>
                 <a:ea typeface="Calibri" panose="020F0502020204030204" pitchFamily="34" charset="0"/>
                 <a:cs typeface="Calibri" panose="020F0502020204030204" pitchFamily="34" charset="0"/>
-                <a:hlinkClick r:id="rId5"/>
+                <a:hlinkClick r:id="rId4"/>
               </a:rPr>
               <a:t>Reportes Mercados</a:t>
             </a:r>
@@ -5511,7 +5485,7 @@
         </p:nvSpPr>
         <p:spPr>
           <a:xfrm>
-            <a:off x="6635482" y="4956104"/>
+            <a:off x="5699062" y="4944820"/>
             <a:ext cx="943163" cy="215444"/>
           </a:xfrm>
           <a:prstGeom prst="rect">
@@ -5553,7 +5527,7 @@
         </p:nvSpPr>
         <p:spPr>
           <a:xfrm>
-            <a:off x="8752803" y="4934987"/>
+            <a:off x="8054055" y="4944820"/>
             <a:ext cx="1105804" cy="215444"/>
           </a:xfrm>
           <a:prstGeom prst="rect">
@@ -5591,11 +5565,6 @@
   <p:clrMapOvr>
     <a:masterClrMapping/>
   </p:clrMapOvr>
-  <p:extLst>
-    <p:ext uri="{6950BFC3-D8DA-4A85-94F7-54DA5524770B}">
-      <p188:commentRel xmlns:p188="http://schemas.microsoft.com/office/powerpoint/2018/8/main" r:id="rId2"/>
-    </p:ext>
-  </p:extLst>
 </p:sld>
 </file>
 
@@ -7511,7 +7480,29 @@
                 <a:ea typeface="Calibri" panose="020F0502020204030204" pitchFamily="34" charset="0"/>
                 <a:cs typeface="Calibri" panose="020F0502020204030204" pitchFamily="34" charset="0"/>
               </a:rPr>
-              <a:t>La presente sección profundiza en el análisis de los vertimientos de energía renovable registrados durante 2025. Para dimensionar la evolución del fenómeno, se presentan dos perfiles diarios típicos de generación correspondientes a fechas de referencia distintas dentro del período —{{kpis.fecha_perfil_1}} y {{kpis.fecha_perfil_2}}— lo que permite observar cómo la participación de cada tecnología en la curva de carga varía según la estación y las condiciones del sistema. La comparación entre ambos perfiles ilustra el rol creciente del almacenamiento BESS en la gestión de la rampa vespertina, así como la persistencia de la generación solar como principal fuente de excedentes en horas centrales del día.</a:t>
+              <a:t>La presente sección profundiza en el análisis de los vertimientos de energía renovable y el perfil </a:t>
+            </a:r>
+            <a:r>
+              <a:rPr lang="es-CL" sz="1400" b="1">
+                <a:solidFill>
+                  <a:srgbClr val="002060"/>
+                </a:solidFill>
+                <a:latin typeface="Candara" panose="020E0502030303020204" pitchFamily="34" charset="0"/>
+                <a:ea typeface="Calibri" panose="020F0502020204030204" pitchFamily="34" charset="0"/>
+                <a:cs typeface="Calibri" panose="020F0502020204030204" pitchFamily="34" charset="0"/>
+              </a:rPr>
+              <a:t>de generación registrados </a:t>
+            </a:r>
+            <a:r>
+              <a:rPr lang="es-CL" sz="1400" b="1" dirty="0">
+                <a:solidFill>
+                  <a:srgbClr val="002060"/>
+                </a:solidFill>
+                <a:latin typeface="Candara" panose="020E0502030303020204" pitchFamily="34" charset="0"/>
+                <a:ea typeface="Calibri" panose="020F0502020204030204" pitchFamily="34" charset="0"/>
+                <a:cs typeface="Calibri" panose="020F0502020204030204" pitchFamily="34" charset="0"/>
+              </a:rPr>
+              <a:t>durante 2025. Para dimensionar la evolución del fenómeno, se presentan dos perfiles diarios típicos de generación correspondientes a fechas de referencia distintas dentro del período —{{kpis.fecha_perfil_1}} y {{kpis.fecha_perfil_2}}— lo que permite observar cómo la participación de cada tecnología en la curva de carga varía según la estación y las condiciones del sistema. La comparación entre ambos perfiles ilustra el rol creciente del almacenamiento BESS en la gestión de la rampa vespertina, así como la persistencia de la generación solar como principal fuente de excedentes en horas centrales del día.</a:t>
             </a:r>
           </a:p>
           <a:p>

--- a/data/raw/templates/template_reporte.pptx
+++ b/data/raw/templates/template_reporte.pptx
@@ -4326,17 +4326,6 @@
               <a:t>kpis.cmg_spread_max_crucero</a:t>
             </a:r>
             <a:r>
-              <a:rPr lang="es-CL" sz="1400" b="1">
-                <a:solidFill>
-                  <a:srgbClr val="002060"/>
-                </a:solidFill>
-                <a:latin typeface="Candara" panose="020E0502030303020204" pitchFamily="34" charset="0"/>
-                <a:ea typeface="Calibri" panose="020F0502020204030204" pitchFamily="34" charset="0"/>
-                <a:cs typeface="Calibri" panose="020F0502020204030204" pitchFamily="34" charset="0"/>
-              </a:rPr>
-              <a:t>}} en </a:t>
-            </a:r>
-            <a:r>
               <a:rPr lang="es-CL" sz="1400" b="1" dirty="0">
                 <a:solidFill>
                   <a:srgbClr val="002060"/>
@@ -4345,7 +4334,7 @@
                 <a:ea typeface="Calibri" panose="020F0502020204030204" pitchFamily="34" charset="0"/>
                 <a:cs typeface="Calibri" panose="020F0502020204030204" pitchFamily="34" charset="0"/>
               </a:rPr>
-              <a:t>la barra Crucero 220kV , mientras que en la barra Puerto Montt 220kV el valor ascendió a {{</a:t>
+              <a:t>}} en la barra Crucero 220kV , mientras que en la barra Puerto Montt 220kV el valor ascendió a {{</a:t>
             </a:r>
             <a:r>
               <a:rPr lang="es-CL" sz="1400" b="1" dirty="0" err="1">
@@ -4367,7 +4356,7 @@
                 <a:ea typeface="Calibri" panose="020F0502020204030204" pitchFamily="34" charset="0"/>
                 <a:cs typeface="Calibri" panose="020F0502020204030204" pitchFamily="34" charset="0"/>
               </a:rPr>
-              <a:t>}} $/kWh. Esta última barra presenta la mayor variabilidad estacional de costos marginales, donde meses con baja disponibilidad de recurso hídrico presentan desacoples económicos y costos mayores respecto otras zonas del país. </a:t>
+              <a:t>}} $/kWh. Esta última barra presenta la mayor variabilidad estacional de costos marginales, donde meses con baja disponibilidad de recurso hídrico presentan desacoples económicos y costos mayores respecto de otras zonas del país. </a:t>
             </a:r>
           </a:p>
           <a:p>
@@ -6570,7 +6559,29 @@
                 <a:ea typeface="Calibri" panose="020F0502020204030204" pitchFamily="34" charset="0"/>
                 <a:cs typeface="Calibri" panose="020F0502020204030204" pitchFamily="34" charset="0"/>
               </a:rPr>
-              <a:t>Los 3 primeros trimestres del 2025 superaron sus homólogos del 2024 en cuanto a la energía renovable reducida. No obstante, al comparar los últimos trimestres de ambos años, se observa una disminución de estas reducciones, lo que se condice con el acelerado aumento de la participación BESS en el sistema. Sin embargo, aún falta tiempo para poder concluir de manera certera que esta tecnología esté generando la tendencia a la baja. </a:t>
+              <a:t>Los 3 primeros trimestres del 2025 </a:t>
+            </a:r>
+            <a:r>
+              <a:rPr lang="es-CL" sz="1400" b="1">
+                <a:solidFill>
+                  <a:srgbClr val="002060"/>
+                </a:solidFill>
+                <a:latin typeface="Candara" panose="020E0502030303020204" pitchFamily="34" charset="0"/>
+                <a:ea typeface="Calibri" panose="020F0502020204030204" pitchFamily="34" charset="0"/>
+                <a:cs typeface="Calibri" panose="020F0502020204030204" pitchFamily="34" charset="0"/>
+              </a:rPr>
+              <a:t>superaron a sus </a:t>
+            </a:r>
+            <a:r>
+              <a:rPr lang="es-CL" sz="1400" b="1" dirty="0">
+                <a:solidFill>
+                  <a:srgbClr val="002060"/>
+                </a:solidFill>
+                <a:latin typeface="Candara" panose="020E0502030303020204" pitchFamily="34" charset="0"/>
+                <a:ea typeface="Calibri" panose="020F0502020204030204" pitchFamily="34" charset="0"/>
+                <a:cs typeface="Calibri" panose="020F0502020204030204" pitchFamily="34" charset="0"/>
+              </a:rPr>
+              <a:t>homólogos del 2024 en cuanto a la energía renovable reducida. No obstante, al comparar los últimos trimestres de ambos años, se observa una disminución de estas reducciones, lo que se condice con el acelerado aumento de la participación BESS en el sistema. Sin embargo, aún falta tiempo para poder concluir de manera certera que esta tecnología esté generando la tendencia a la baja. </a:t>
             </a:r>
             <a:endParaRPr lang="es-CL" sz="1400" dirty="0"/>
           </a:p>
@@ -7326,7 +7337,7 @@
       </p:sp>
       <p:sp>
         <p:nvSpPr>
-          <p:cNvPr id="14" name="Rectángulo: esquinas redondeadas 13">
+          <p:cNvPr id="14" name="tabla_top">
             <a:extLst>
               <a:ext uri="{FF2B5EF4-FFF2-40B4-BE49-F238E27FC236}">
                 <a16:creationId xmlns:a16="http://schemas.microsoft.com/office/drawing/2014/main" id="{BC640CFB-D442-9CAF-05C2-333332C40FD7}"/>
@@ -7448,8 +7459,8 @@
         </p:nvSpPr>
         <p:spPr>
           <a:xfrm>
-            <a:off x="541157" y="2626105"/>
-            <a:ext cx="9231737" cy="2221827"/>
+            <a:off x="541157" y="2477436"/>
+            <a:ext cx="9231737" cy="2372637"/>
           </a:xfrm>
           <a:prstGeom prst="rect">
             <a:avLst/>
@@ -7470,7 +7481,11 @@
             </a:endParaRPr>
           </a:p>
           <a:p>
-            <a:pPr algn="just"/>
+            <a:pPr algn="just">
+              <a:lnSpc>
+                <a:spcPct val="110000"/>
+              </a:lnSpc>
+            </a:pPr>
             <a:r>
               <a:rPr lang="es-CL" sz="1400" b="1" dirty="0">
                 <a:solidFill>
@@ -7480,29 +7495,7 @@
                 <a:ea typeface="Calibri" panose="020F0502020204030204" pitchFamily="34" charset="0"/>
                 <a:cs typeface="Calibri" panose="020F0502020204030204" pitchFamily="34" charset="0"/>
               </a:rPr>
-              <a:t>La presente sección profundiza en el análisis de los vertimientos de energía renovable y el perfil </a:t>
-            </a:r>
-            <a:r>
-              <a:rPr lang="es-CL" sz="1400" b="1">
-                <a:solidFill>
-                  <a:srgbClr val="002060"/>
-                </a:solidFill>
-                <a:latin typeface="Candara" panose="020E0502030303020204" pitchFamily="34" charset="0"/>
-                <a:ea typeface="Calibri" panose="020F0502020204030204" pitchFamily="34" charset="0"/>
-                <a:cs typeface="Calibri" panose="020F0502020204030204" pitchFamily="34" charset="0"/>
-              </a:rPr>
-              <a:t>de generación registrados </a:t>
-            </a:r>
-            <a:r>
-              <a:rPr lang="es-CL" sz="1400" b="1" dirty="0">
-                <a:solidFill>
-                  <a:srgbClr val="002060"/>
-                </a:solidFill>
-                <a:latin typeface="Candara" panose="020E0502030303020204" pitchFamily="34" charset="0"/>
-                <a:ea typeface="Calibri" panose="020F0502020204030204" pitchFamily="34" charset="0"/>
-                <a:cs typeface="Calibri" panose="020F0502020204030204" pitchFamily="34" charset="0"/>
-              </a:rPr>
-              <a:t>durante 2025. Para dimensionar la evolución del fenómeno, se presentan dos perfiles diarios típicos de generación correspondientes a fechas de referencia distintas dentro del período —{{kpis.fecha_perfil_1}} y {{kpis.fecha_perfil_2}}— lo que permite observar cómo la participación de cada tecnología en la curva de carga varía según la estación y las condiciones del sistema. La comparación entre ambos perfiles ilustra el rol creciente del almacenamiento BESS en la gestión de la rampa vespertina, así como la persistencia de la generación solar como principal fuente de excedentes en horas centrales del día.</a:t>
+              <a:t>La presente sección profundiza en el análisis de los vertimientos de energía renovable y el perfil de generación registrados durante 2025. Para dimensionar la evolución del fenómeno, se presentan dos perfiles diarios típicos de generación correspondientes a fechas de referencia distintas dentro del período —{{kpis.fecha_perfil_1}} y {{kpis.fecha_perfil_2}}— lo que permite observar cómo la participación de cada tecnología en la curva de carga varía según la estación y las condiciones del sistema. La comparación entre ambos perfiles ilustra el rol creciente del almacenamiento BESS en la gestión de la rampa vespertina, así como la persistencia de la generación solar como principal fuente de excedentes en horas centrales del día.</a:t>
             </a:r>
           </a:p>
           <a:p>
@@ -7565,1487 +7558,6 @@
           </a:fontRef>
         </p:style>
       </p:cxnSp>
-      <p:graphicFrame>
-        <p:nvGraphicFramePr>
-          <p:cNvPr id="17" name="tabla_top">
-            <a:extLst>
-              <a:ext uri="{FF2B5EF4-FFF2-40B4-BE49-F238E27FC236}">
-                <a16:creationId xmlns:a16="http://schemas.microsoft.com/office/drawing/2014/main" id="{B963FD58-34D3-2CB0-FFF7-3C93D19EE26E}"/>
-              </a:ext>
-            </a:extLst>
-          </p:cNvPr>
-          <p:cNvGraphicFramePr>
-            <a:graphicFrameLocks noGrp="1"/>
-          </p:cNvGraphicFramePr>
-          <p:nvPr>
-            <p:extLst>
-              <p:ext uri="{D42A27DB-BD31-4B8C-83A1-F6EECF244321}">
-                <p14:modId xmlns:p14="http://schemas.microsoft.com/office/powerpoint/2010/main" val="1701107333"/>
-              </p:ext>
-            </p:extLst>
-          </p:nvPr>
-        </p:nvGraphicFramePr>
-        <p:xfrm>
-          <a:off x="5822845" y="10940619"/>
-          <a:ext cx="4101147" cy="3361996"/>
-        </p:xfrm>
-        <a:graphic>
-          <a:graphicData uri="http://schemas.openxmlformats.org/drawingml/2006/table">
-            <a:tbl>
-              <a:tblPr firstRow="1" bandRow="1">
-                <a:tableStyleId>{B301B821-A1FF-4177-AEE7-76D212191A09}</a:tableStyleId>
-              </a:tblPr>
-              <a:tblGrid>
-                <a:gridCol w="1881548">
-                  <a:extLst>
-                    <a:ext uri="{9D8B030D-6E8A-4147-A177-3AD203B41FA5}">
-                      <a16:colId xmlns:a16="http://schemas.microsoft.com/office/drawing/2014/main" val="62531903"/>
-                    </a:ext>
-                  </a:extLst>
-                </a:gridCol>
-                <a:gridCol w="890984">
-                  <a:extLst>
-                    <a:ext uri="{9D8B030D-6E8A-4147-A177-3AD203B41FA5}">
-                      <a16:colId xmlns:a16="http://schemas.microsoft.com/office/drawing/2014/main" val="349776303"/>
-                    </a:ext>
-                  </a:extLst>
-                </a:gridCol>
-                <a:gridCol w="1328615">
-                  <a:extLst>
-                    <a:ext uri="{9D8B030D-6E8A-4147-A177-3AD203B41FA5}">
-                      <a16:colId xmlns:a16="http://schemas.microsoft.com/office/drawing/2014/main" val="2840734177"/>
-                    </a:ext>
-                  </a:extLst>
-                </a:gridCol>
-              </a:tblGrid>
-              <a:tr h="305636">
-                <a:tc>
-                  <a:txBody>
-                    <a:bodyPr/>
-                    <a:lstStyle/>
-                    <a:p>
-                      <a:r>
-                        <a:rPr lang="es-CL" sz="1000" dirty="0">
-                          <a:latin typeface="Abadi" panose="020B0604020104020204" pitchFamily="34" charset="0"/>
-                        </a:rPr>
-                        <a:t>Nombre central</a:t>
-                      </a:r>
-                    </a:p>
-                  </a:txBody>
-                  <a:tcPr marL="125786" marR="125786" marT="62893" marB="62893">
-                    <a:solidFill>
-                      <a:srgbClr val="F4B89A"/>
-                    </a:solidFill>
-                  </a:tcPr>
-                </a:tc>
-                <a:tc>
-                  <a:txBody>
-                    <a:bodyPr/>
-                    <a:lstStyle/>
-                    <a:p>
-                      <a:r>
-                        <a:rPr lang="es-CL" sz="1000" b="1" kern="1200" dirty="0">
-                          <a:solidFill>
-                            <a:schemeClr val="lt1"/>
-                          </a:solidFill>
-                          <a:latin typeface="Abadi" panose="020B0604020104020204" pitchFamily="34" charset="0"/>
-                          <a:ea typeface="+mn-ea"/>
-                          <a:cs typeface="+mn-cs"/>
-                        </a:rPr>
-                        <a:t>Tecnología</a:t>
-                      </a:r>
-                    </a:p>
-                  </a:txBody>
-                  <a:tcPr marL="125786" marR="125786" marT="62893" marB="62893">
-                    <a:solidFill>
-                      <a:srgbClr val="F4B89A"/>
-                    </a:solidFill>
-                  </a:tcPr>
-                </a:tc>
-                <a:tc>
-                  <a:txBody>
-                    <a:bodyPr/>
-                    <a:lstStyle/>
-                    <a:p>
-                      <a:r>
-                        <a:rPr lang="es-CL" sz="1000" b="1" kern="1200" dirty="0">
-                          <a:solidFill>
-                            <a:schemeClr val="lt1"/>
-                          </a:solidFill>
-                          <a:latin typeface="Abadi" panose="020B0604020104020204" pitchFamily="34" charset="0"/>
-                          <a:ea typeface="+mn-ea"/>
-                          <a:cs typeface="+mn-cs"/>
-                        </a:rPr>
-                        <a:t>Vertimiento (</a:t>
-                      </a:r>
-                      <a:r>
-                        <a:rPr lang="es-CL" sz="1000" b="1" kern="1200">
-                          <a:solidFill>
-                            <a:schemeClr val="lt1"/>
-                          </a:solidFill>
-                          <a:latin typeface="Abadi" panose="020B0604020104020204" pitchFamily="34" charset="0"/>
-                          <a:ea typeface="+mn-ea"/>
-                          <a:cs typeface="+mn-cs"/>
-                        </a:rPr>
-                        <a:t>mWh</a:t>
-                      </a:r>
-                      <a:r>
-                        <a:rPr lang="es-CL" sz="1000" b="1" kern="1200" dirty="0">
-                          <a:solidFill>
-                            <a:schemeClr val="lt1"/>
-                          </a:solidFill>
-                          <a:latin typeface="Abadi" panose="020B0604020104020204" pitchFamily="34" charset="0"/>
-                          <a:ea typeface="+mn-ea"/>
-                          <a:cs typeface="+mn-cs"/>
-                        </a:rPr>
-                        <a:t>)</a:t>
-                      </a:r>
-                    </a:p>
-                  </a:txBody>
-                  <a:tcPr marL="125786" marR="125786" marT="62893" marB="62893">
-                    <a:solidFill>
-                      <a:srgbClr val="F4B89A"/>
-                    </a:solidFill>
-                  </a:tcPr>
-                </a:tc>
-                <a:extLst>
-                  <a:ext uri="{0D108BD9-81ED-4DB2-BD59-A6C34878D82A}">
-                    <a16:rowId xmlns:a16="http://schemas.microsoft.com/office/drawing/2014/main" val="2508995904"/>
-                  </a:ext>
-                </a:extLst>
-              </a:tr>
-              <a:tr h="305636">
-                <a:tc>
-                  <a:txBody>
-                    <a:bodyPr/>
-                    <a:lstStyle/>
-                    <a:p>
-                      <a:r>
-                        <a:rPr sz="900" dirty="0" err="1">
-                          <a:solidFill>
-                            <a:srgbClr val="003366"/>
-                          </a:solidFill>
-                        </a:rPr>
-                        <a:t>Pfv</a:t>
-                      </a:r>
-                      <a:r>
-                        <a:rPr sz="900" dirty="0">
-                          <a:solidFill>
-                            <a:srgbClr val="003366"/>
-                          </a:solidFill>
-                        </a:rPr>
-                        <a:t> Ceme 1</a:t>
-                      </a:r>
-                    </a:p>
-                  </a:txBody>
-                  <a:tcPr marL="125786" marR="125786" marT="62893" marB="62893">
-                    <a:lnB w="12700" cap="flat" cmpd="sng" algn="ctr">
-                      <a:solidFill>
-                        <a:srgbClr val="D0D5DD"/>
-                      </a:solidFill>
-                      <a:prstDash val="solid"/>
-                      <a:round/>
-                      <a:headEnd type="none" w="med" len="med"/>
-                      <a:tailEnd type="none" w="med" len="med"/>
-                    </a:lnB>
-                    <a:solidFill>
-                      <a:srgbClr val="EEF2F7"/>
-                    </a:solidFill>
-                  </a:tcPr>
-                </a:tc>
-                <a:tc>
-                  <a:txBody>
-                    <a:bodyPr/>
-                    <a:lstStyle/>
-                    <a:p>
-                      <a:r>
-                        <a:rPr sz="900" dirty="0">
-                          <a:solidFill>
-                            <a:srgbClr val="003366"/>
-                          </a:solidFill>
-                        </a:rPr>
-                        <a:t>Solar</a:t>
-                      </a:r>
-                    </a:p>
-                  </a:txBody>
-                  <a:tcPr marL="125786" marR="125786" marT="62893" marB="62893">
-                    <a:lnB w="12700" cap="flat" cmpd="sng" algn="ctr">
-                      <a:solidFill>
-                        <a:srgbClr val="D0D5DD"/>
-                      </a:solidFill>
-                      <a:prstDash val="solid"/>
-                      <a:round/>
-                      <a:headEnd type="none" w="med" len="med"/>
-                      <a:tailEnd type="none" w="med" len="med"/>
-                    </a:lnB>
-                    <a:solidFill>
-                      <a:srgbClr val="EEF2F7"/>
-                    </a:solidFill>
-                  </a:tcPr>
-                </a:tc>
-                <a:tc>
-                  <a:txBody>
-                    <a:bodyPr/>
-                    <a:lstStyle/>
-                    <a:p>
-                      <a:r>
-                        <a:rPr sz="900" dirty="0">
-                          <a:solidFill>
-                            <a:srgbClr val="003366"/>
-                          </a:solidFill>
-                        </a:rPr>
-                        <a:t>259.127</a:t>
-                      </a:r>
-                    </a:p>
-                  </a:txBody>
-                  <a:tcPr marL="125786" marR="125786" marT="62893" marB="62893">
-                    <a:lnB w="12700" cap="flat" cmpd="sng" algn="ctr">
-                      <a:solidFill>
-                        <a:srgbClr val="D0D5DD"/>
-                      </a:solidFill>
-                      <a:prstDash val="solid"/>
-                      <a:round/>
-                      <a:headEnd type="none" w="med" len="med"/>
-                      <a:tailEnd type="none" w="med" len="med"/>
-                    </a:lnB>
-                    <a:solidFill>
-                      <a:srgbClr val="EEF2F7"/>
-                    </a:solidFill>
-                  </a:tcPr>
-                </a:tc>
-                <a:extLst>
-                  <a:ext uri="{0D108BD9-81ED-4DB2-BD59-A6C34878D82A}">
-                    <a16:rowId xmlns:a16="http://schemas.microsoft.com/office/drawing/2014/main" val="2158430718"/>
-                  </a:ext>
-                </a:extLst>
-              </a:tr>
-              <a:tr h="305636">
-                <a:tc>
-                  <a:txBody>
-                    <a:bodyPr/>
-                    <a:lstStyle/>
-                    <a:p>
-                      <a:r>
-                        <a:rPr sz="900" dirty="0" err="1">
-                          <a:solidFill>
-                            <a:srgbClr val="003366"/>
-                          </a:solidFill>
-                        </a:rPr>
-                        <a:t>Pfv</a:t>
-                      </a:r>
-                      <a:r>
-                        <a:rPr sz="900" dirty="0">
-                          <a:solidFill>
-                            <a:srgbClr val="003366"/>
-                          </a:solidFill>
-                        </a:rPr>
-                        <a:t> Campos Del Sol</a:t>
-                      </a:r>
-                    </a:p>
-                  </a:txBody>
-                  <a:tcPr marL="125786" marR="125786" marT="62893" marB="62893">
-                    <a:lnT w="12700" cap="flat" cmpd="sng" algn="ctr">
-                      <a:solidFill>
-                        <a:srgbClr val="D0D5DD"/>
-                      </a:solidFill>
-                      <a:prstDash val="solid"/>
-                      <a:round/>
-                      <a:headEnd type="none" w="med" len="med"/>
-                      <a:tailEnd type="none" w="med" len="med"/>
-                    </a:lnT>
-                    <a:lnB w="12700" cap="flat" cmpd="sng" algn="ctr">
-                      <a:solidFill>
-                        <a:srgbClr val="D0D5DD"/>
-                      </a:solidFill>
-                      <a:prstDash val="solid"/>
-                      <a:round/>
-                      <a:headEnd type="none" w="med" len="med"/>
-                      <a:tailEnd type="none" w="med" len="med"/>
-                    </a:lnB>
-                    <a:solidFill>
-                      <a:srgbClr val="EEF2F7"/>
-                    </a:solidFill>
-                  </a:tcPr>
-                </a:tc>
-                <a:tc>
-                  <a:txBody>
-                    <a:bodyPr/>
-                    <a:lstStyle/>
-                    <a:p>
-                      <a:r>
-                        <a:rPr sz="900" dirty="0">
-                          <a:solidFill>
-                            <a:srgbClr val="003366"/>
-                          </a:solidFill>
-                        </a:rPr>
-                        <a:t>Solar</a:t>
-                      </a:r>
-                    </a:p>
-                  </a:txBody>
-                  <a:tcPr marL="125786" marR="125786" marT="62893" marB="62893">
-                    <a:lnT w="12700" cap="flat" cmpd="sng" algn="ctr">
-                      <a:solidFill>
-                        <a:srgbClr val="D0D5DD"/>
-                      </a:solidFill>
-                      <a:prstDash val="solid"/>
-                      <a:round/>
-                      <a:headEnd type="none" w="med" len="med"/>
-                      <a:tailEnd type="none" w="med" len="med"/>
-                    </a:lnT>
-                    <a:lnB w="12700" cap="flat" cmpd="sng" algn="ctr">
-                      <a:solidFill>
-                        <a:srgbClr val="D0D5DD"/>
-                      </a:solidFill>
-                      <a:prstDash val="solid"/>
-                      <a:round/>
-                      <a:headEnd type="none" w="med" len="med"/>
-                      <a:tailEnd type="none" w="med" len="med"/>
-                    </a:lnB>
-                    <a:solidFill>
-                      <a:srgbClr val="EEF2F7"/>
-                    </a:solidFill>
-                  </a:tcPr>
-                </a:tc>
-                <a:tc>
-                  <a:txBody>
-                    <a:bodyPr/>
-                    <a:lstStyle/>
-                    <a:p>
-                      <a:r>
-                        <a:rPr sz="900" dirty="0">
-                          <a:solidFill>
-                            <a:srgbClr val="003366"/>
-                          </a:solidFill>
-                        </a:rPr>
-                        <a:t>242.573</a:t>
-                      </a:r>
-                    </a:p>
-                  </a:txBody>
-                  <a:tcPr marL="125786" marR="125786" marT="62893" marB="62893">
-                    <a:lnT w="12700" cap="flat" cmpd="sng" algn="ctr">
-                      <a:solidFill>
-                        <a:srgbClr val="D0D5DD"/>
-                      </a:solidFill>
-                      <a:prstDash val="solid"/>
-                      <a:round/>
-                      <a:headEnd type="none" w="med" len="med"/>
-                      <a:tailEnd type="none" w="med" len="med"/>
-                    </a:lnT>
-                    <a:lnB w="12700" cap="flat" cmpd="sng" algn="ctr">
-                      <a:solidFill>
-                        <a:srgbClr val="D0D5DD"/>
-                      </a:solidFill>
-                      <a:prstDash val="solid"/>
-                      <a:round/>
-                      <a:headEnd type="none" w="med" len="med"/>
-                      <a:tailEnd type="none" w="med" len="med"/>
-                    </a:lnB>
-                    <a:solidFill>
-                      <a:srgbClr val="EEF2F7"/>
-                    </a:solidFill>
-                  </a:tcPr>
-                </a:tc>
-                <a:extLst>
-                  <a:ext uri="{0D108BD9-81ED-4DB2-BD59-A6C34878D82A}">
-                    <a16:rowId xmlns:a16="http://schemas.microsoft.com/office/drawing/2014/main" val="811146200"/>
-                  </a:ext>
-                </a:extLst>
-              </a:tr>
-              <a:tr h="305636">
-                <a:tc>
-                  <a:txBody>
-                    <a:bodyPr/>
-                    <a:lstStyle/>
-                    <a:p>
-                      <a:r>
-                        <a:rPr sz="900" dirty="0" err="1">
-                          <a:solidFill>
-                            <a:srgbClr val="003366"/>
-                          </a:solidFill>
-                        </a:rPr>
-                        <a:t>Pfv</a:t>
-                      </a:r>
-                      <a:r>
-                        <a:rPr sz="900" dirty="0">
-                          <a:solidFill>
-                            <a:srgbClr val="003366"/>
-                          </a:solidFill>
-                        </a:rPr>
-                        <a:t> Sol Del Desierto</a:t>
-                      </a:r>
-                    </a:p>
-                  </a:txBody>
-                  <a:tcPr marL="125786" marR="125786" marT="62893" marB="62893">
-                    <a:lnT w="12700" cap="flat" cmpd="sng" algn="ctr">
-                      <a:solidFill>
-                        <a:srgbClr val="D0D5DD"/>
-                      </a:solidFill>
-                      <a:prstDash val="solid"/>
-                      <a:round/>
-                      <a:headEnd type="none" w="med" len="med"/>
-                      <a:tailEnd type="none" w="med" len="med"/>
-                    </a:lnT>
-                    <a:lnB w="12700" cap="flat" cmpd="sng" algn="ctr">
-                      <a:solidFill>
-                        <a:srgbClr val="D0D5DD"/>
-                      </a:solidFill>
-                      <a:prstDash val="solid"/>
-                      <a:round/>
-                      <a:headEnd type="none" w="med" len="med"/>
-                      <a:tailEnd type="none" w="med" len="med"/>
-                    </a:lnB>
-                    <a:solidFill>
-                      <a:srgbClr val="EEF2F7"/>
-                    </a:solidFill>
-                  </a:tcPr>
-                </a:tc>
-                <a:tc>
-                  <a:txBody>
-                    <a:bodyPr/>
-                    <a:lstStyle/>
-                    <a:p>
-                      <a:r>
-                        <a:rPr sz="900" dirty="0">
-                          <a:solidFill>
-                            <a:srgbClr val="003366"/>
-                          </a:solidFill>
-                        </a:rPr>
-                        <a:t>Solar</a:t>
-                      </a:r>
-                    </a:p>
-                  </a:txBody>
-                  <a:tcPr marL="125786" marR="125786" marT="62893" marB="62893">
-                    <a:lnT w="12700" cap="flat" cmpd="sng" algn="ctr">
-                      <a:solidFill>
-                        <a:srgbClr val="D0D5DD"/>
-                      </a:solidFill>
-                      <a:prstDash val="solid"/>
-                      <a:round/>
-                      <a:headEnd type="none" w="med" len="med"/>
-                      <a:tailEnd type="none" w="med" len="med"/>
-                    </a:lnT>
-                    <a:lnB w="12700" cap="flat" cmpd="sng" algn="ctr">
-                      <a:solidFill>
-                        <a:srgbClr val="D0D5DD"/>
-                      </a:solidFill>
-                      <a:prstDash val="solid"/>
-                      <a:round/>
-                      <a:headEnd type="none" w="med" len="med"/>
-                      <a:tailEnd type="none" w="med" len="med"/>
-                    </a:lnB>
-                    <a:solidFill>
-                      <a:srgbClr val="EEF2F7"/>
-                    </a:solidFill>
-                  </a:tcPr>
-                </a:tc>
-                <a:tc>
-                  <a:txBody>
-                    <a:bodyPr/>
-                    <a:lstStyle/>
-                    <a:p>
-                      <a:r>
-                        <a:rPr sz="900" dirty="0">
-                          <a:solidFill>
-                            <a:srgbClr val="003366"/>
-                          </a:solidFill>
-                        </a:rPr>
-                        <a:t>235.521</a:t>
-                      </a:r>
-                    </a:p>
-                  </a:txBody>
-                  <a:tcPr marL="125786" marR="125786" marT="62893" marB="62893">
-                    <a:lnT w="12700" cap="flat" cmpd="sng" algn="ctr">
-                      <a:solidFill>
-                        <a:srgbClr val="D0D5DD"/>
-                      </a:solidFill>
-                      <a:prstDash val="solid"/>
-                      <a:round/>
-                      <a:headEnd type="none" w="med" len="med"/>
-                      <a:tailEnd type="none" w="med" len="med"/>
-                    </a:lnT>
-                    <a:lnB w="12700" cap="flat" cmpd="sng" algn="ctr">
-                      <a:solidFill>
-                        <a:srgbClr val="D0D5DD"/>
-                      </a:solidFill>
-                      <a:prstDash val="solid"/>
-                      <a:round/>
-                      <a:headEnd type="none" w="med" len="med"/>
-                      <a:tailEnd type="none" w="med" len="med"/>
-                    </a:lnB>
-                    <a:solidFill>
-                      <a:srgbClr val="EEF2F7"/>
-                    </a:solidFill>
-                  </a:tcPr>
-                </a:tc>
-                <a:extLst>
-                  <a:ext uri="{0D108BD9-81ED-4DB2-BD59-A6C34878D82A}">
-                    <a16:rowId xmlns:a16="http://schemas.microsoft.com/office/drawing/2014/main" val="411056454"/>
-                  </a:ext>
-                </a:extLst>
-              </a:tr>
-              <a:tr h="305636">
-                <a:tc>
-                  <a:txBody>
-                    <a:bodyPr/>
-                    <a:lstStyle/>
-                    <a:p>
-                      <a:r>
-                        <a:rPr sz="900" dirty="0" err="1">
-                          <a:solidFill>
-                            <a:srgbClr val="003366"/>
-                          </a:solidFill>
-                        </a:rPr>
-                        <a:t>Pfv</a:t>
-                      </a:r>
-                      <a:r>
-                        <a:rPr sz="900" dirty="0">
-                          <a:solidFill>
-                            <a:srgbClr val="003366"/>
-                          </a:solidFill>
-                        </a:rPr>
-                        <a:t> </a:t>
-                      </a:r>
-                      <a:r>
-                        <a:rPr sz="900" dirty="0" err="1">
-                          <a:solidFill>
-                            <a:srgbClr val="003366"/>
-                          </a:solidFill>
-                        </a:rPr>
-                        <a:t>Guanchoi</a:t>
-                      </a:r>
-                      <a:endParaRPr sz="900" dirty="0">
-                        <a:solidFill>
-                          <a:srgbClr val="003366"/>
-                        </a:solidFill>
-                      </a:endParaRPr>
-                    </a:p>
-                  </a:txBody>
-                  <a:tcPr marL="125786" marR="125786" marT="62893" marB="62893">
-                    <a:lnT w="12700" cap="flat" cmpd="sng" algn="ctr">
-                      <a:solidFill>
-                        <a:srgbClr val="D0D5DD"/>
-                      </a:solidFill>
-                      <a:prstDash val="solid"/>
-                      <a:round/>
-                      <a:headEnd type="none" w="med" len="med"/>
-                      <a:tailEnd type="none" w="med" len="med"/>
-                    </a:lnT>
-                    <a:lnB w="12700" cap="flat" cmpd="sng" algn="ctr">
-                      <a:solidFill>
-                        <a:srgbClr val="D0D5DD"/>
-                      </a:solidFill>
-                      <a:prstDash val="solid"/>
-                      <a:round/>
-                      <a:headEnd type="none" w="med" len="med"/>
-                      <a:tailEnd type="none" w="med" len="med"/>
-                    </a:lnB>
-                    <a:solidFill>
-                      <a:srgbClr val="EEF2F7"/>
-                    </a:solidFill>
-                  </a:tcPr>
-                </a:tc>
-                <a:tc>
-                  <a:txBody>
-                    <a:bodyPr/>
-                    <a:lstStyle/>
-                    <a:p>
-                      <a:r>
-                        <a:rPr sz="900" dirty="0">
-                          <a:solidFill>
-                            <a:srgbClr val="003366"/>
-                          </a:solidFill>
-                        </a:rPr>
-                        <a:t>Solar</a:t>
-                      </a:r>
-                    </a:p>
-                  </a:txBody>
-                  <a:tcPr marL="125786" marR="125786" marT="62893" marB="62893">
-                    <a:lnT w="12700" cap="flat" cmpd="sng" algn="ctr">
-                      <a:solidFill>
-                        <a:srgbClr val="D0D5DD"/>
-                      </a:solidFill>
-                      <a:prstDash val="solid"/>
-                      <a:round/>
-                      <a:headEnd type="none" w="med" len="med"/>
-                      <a:tailEnd type="none" w="med" len="med"/>
-                    </a:lnT>
-                    <a:lnB w="12700" cap="flat" cmpd="sng" algn="ctr">
-                      <a:solidFill>
-                        <a:srgbClr val="D0D5DD"/>
-                      </a:solidFill>
-                      <a:prstDash val="solid"/>
-                      <a:round/>
-                      <a:headEnd type="none" w="med" len="med"/>
-                      <a:tailEnd type="none" w="med" len="med"/>
-                    </a:lnB>
-                    <a:solidFill>
-                      <a:srgbClr val="EEF2F7"/>
-                    </a:solidFill>
-                  </a:tcPr>
-                </a:tc>
-                <a:tc>
-                  <a:txBody>
-                    <a:bodyPr/>
-                    <a:lstStyle/>
-                    <a:p>
-                      <a:r>
-                        <a:rPr sz="900" dirty="0">
-                          <a:solidFill>
-                            <a:srgbClr val="003366"/>
-                          </a:solidFill>
-                        </a:rPr>
-                        <a:t>210.370</a:t>
-                      </a:r>
-                    </a:p>
-                  </a:txBody>
-                  <a:tcPr marL="125786" marR="125786" marT="62893" marB="62893">
-                    <a:lnT w="12700" cap="flat" cmpd="sng" algn="ctr">
-                      <a:solidFill>
-                        <a:srgbClr val="D0D5DD"/>
-                      </a:solidFill>
-                      <a:prstDash val="solid"/>
-                      <a:round/>
-                      <a:headEnd type="none" w="med" len="med"/>
-                      <a:tailEnd type="none" w="med" len="med"/>
-                    </a:lnT>
-                    <a:lnB w="12700" cap="flat" cmpd="sng" algn="ctr">
-                      <a:solidFill>
-                        <a:srgbClr val="D0D5DD"/>
-                      </a:solidFill>
-                      <a:prstDash val="solid"/>
-                      <a:round/>
-                      <a:headEnd type="none" w="med" len="med"/>
-                      <a:tailEnd type="none" w="med" len="med"/>
-                    </a:lnB>
-                    <a:solidFill>
-                      <a:srgbClr val="EEF2F7"/>
-                    </a:solidFill>
-                  </a:tcPr>
-                </a:tc>
-                <a:extLst>
-                  <a:ext uri="{0D108BD9-81ED-4DB2-BD59-A6C34878D82A}">
-                    <a16:rowId xmlns:a16="http://schemas.microsoft.com/office/drawing/2014/main" val="3391898113"/>
-                  </a:ext>
-                </a:extLst>
-              </a:tr>
-              <a:tr h="305636">
-                <a:tc>
-                  <a:txBody>
-                    <a:bodyPr/>
-                    <a:lstStyle/>
-                    <a:p>
-                      <a:r>
-                        <a:rPr sz="900" dirty="0" err="1">
-                          <a:solidFill>
-                            <a:srgbClr val="003366"/>
-                          </a:solidFill>
-                        </a:rPr>
-                        <a:t>Pfv</a:t>
-                      </a:r>
-                      <a:r>
-                        <a:rPr sz="900" dirty="0">
-                          <a:solidFill>
-                            <a:srgbClr val="003366"/>
-                          </a:solidFill>
-                        </a:rPr>
-                        <a:t> Finis Terrae</a:t>
-                      </a:r>
-                    </a:p>
-                  </a:txBody>
-                  <a:tcPr marL="125786" marR="125786" marT="62893" marB="62893">
-                    <a:lnT w="12700" cap="flat" cmpd="sng" algn="ctr">
-                      <a:solidFill>
-                        <a:srgbClr val="D0D5DD"/>
-                      </a:solidFill>
-                      <a:prstDash val="solid"/>
-                      <a:round/>
-                      <a:headEnd type="none" w="med" len="med"/>
-                      <a:tailEnd type="none" w="med" len="med"/>
-                    </a:lnT>
-                    <a:lnB w="12700" cap="flat" cmpd="sng" algn="ctr">
-                      <a:solidFill>
-                        <a:srgbClr val="D0D5DD"/>
-                      </a:solidFill>
-                      <a:prstDash val="solid"/>
-                      <a:round/>
-                      <a:headEnd type="none" w="med" len="med"/>
-                      <a:tailEnd type="none" w="med" len="med"/>
-                    </a:lnB>
-                    <a:solidFill>
-                      <a:srgbClr val="EEF2F7"/>
-                    </a:solidFill>
-                  </a:tcPr>
-                </a:tc>
-                <a:tc>
-                  <a:txBody>
-                    <a:bodyPr/>
-                    <a:lstStyle/>
-                    <a:p>
-                      <a:r>
-                        <a:rPr sz="900" dirty="0">
-                          <a:solidFill>
-                            <a:srgbClr val="003366"/>
-                          </a:solidFill>
-                        </a:rPr>
-                        <a:t>Solar</a:t>
-                      </a:r>
-                    </a:p>
-                  </a:txBody>
-                  <a:tcPr marL="125786" marR="125786" marT="62893" marB="62893">
-                    <a:lnT w="12700" cap="flat" cmpd="sng" algn="ctr">
-                      <a:solidFill>
-                        <a:srgbClr val="D0D5DD"/>
-                      </a:solidFill>
-                      <a:prstDash val="solid"/>
-                      <a:round/>
-                      <a:headEnd type="none" w="med" len="med"/>
-                      <a:tailEnd type="none" w="med" len="med"/>
-                    </a:lnT>
-                    <a:lnB w="12700" cap="flat" cmpd="sng" algn="ctr">
-                      <a:solidFill>
-                        <a:srgbClr val="D0D5DD"/>
-                      </a:solidFill>
-                      <a:prstDash val="solid"/>
-                      <a:round/>
-                      <a:headEnd type="none" w="med" len="med"/>
-                      <a:tailEnd type="none" w="med" len="med"/>
-                    </a:lnB>
-                    <a:solidFill>
-                      <a:srgbClr val="EEF2F7"/>
-                    </a:solidFill>
-                  </a:tcPr>
-                </a:tc>
-                <a:tc>
-                  <a:txBody>
-                    <a:bodyPr/>
-                    <a:lstStyle/>
-                    <a:p>
-                      <a:r>
-                        <a:rPr sz="900" dirty="0">
-                          <a:solidFill>
-                            <a:srgbClr val="003366"/>
-                          </a:solidFill>
-                        </a:rPr>
-                        <a:t>206.644</a:t>
-                      </a:r>
-                    </a:p>
-                  </a:txBody>
-                  <a:tcPr marL="125786" marR="125786" marT="62893" marB="62893">
-                    <a:lnT w="12700" cap="flat" cmpd="sng" algn="ctr">
-                      <a:solidFill>
-                        <a:srgbClr val="D0D5DD"/>
-                      </a:solidFill>
-                      <a:prstDash val="solid"/>
-                      <a:round/>
-                      <a:headEnd type="none" w="med" len="med"/>
-                      <a:tailEnd type="none" w="med" len="med"/>
-                    </a:lnT>
-                    <a:lnB w="12700" cap="flat" cmpd="sng" algn="ctr">
-                      <a:solidFill>
-                        <a:srgbClr val="D0D5DD"/>
-                      </a:solidFill>
-                      <a:prstDash val="solid"/>
-                      <a:round/>
-                      <a:headEnd type="none" w="med" len="med"/>
-                      <a:tailEnd type="none" w="med" len="med"/>
-                    </a:lnB>
-                    <a:solidFill>
-                      <a:srgbClr val="EEF2F7"/>
-                    </a:solidFill>
-                  </a:tcPr>
-                </a:tc>
-                <a:extLst>
-                  <a:ext uri="{0D108BD9-81ED-4DB2-BD59-A6C34878D82A}">
-                    <a16:rowId xmlns:a16="http://schemas.microsoft.com/office/drawing/2014/main" val="9923209"/>
-                  </a:ext>
-                </a:extLst>
-              </a:tr>
-              <a:tr h="305636">
-                <a:tc>
-                  <a:txBody>
-                    <a:bodyPr/>
-                    <a:lstStyle/>
-                    <a:p>
-                      <a:r>
-                        <a:rPr sz="900" dirty="0" err="1">
-                          <a:solidFill>
-                            <a:srgbClr val="003366"/>
-                          </a:solidFill>
-                        </a:rPr>
-                        <a:t>Pfv</a:t>
-                      </a:r>
-                      <a:r>
-                        <a:rPr sz="900" dirty="0">
-                          <a:solidFill>
-                            <a:srgbClr val="003366"/>
-                          </a:solidFill>
-                        </a:rPr>
-                        <a:t> Las Salinas</a:t>
-                      </a:r>
-                    </a:p>
-                  </a:txBody>
-                  <a:tcPr marL="125786" marR="125786" marT="62893" marB="62893">
-                    <a:lnT w="12700" cap="flat" cmpd="sng" algn="ctr">
-                      <a:solidFill>
-                        <a:srgbClr val="D0D5DD"/>
-                      </a:solidFill>
-                      <a:prstDash val="solid"/>
-                      <a:round/>
-                      <a:headEnd type="none" w="med" len="med"/>
-                      <a:tailEnd type="none" w="med" len="med"/>
-                    </a:lnT>
-                    <a:lnB w="12700" cap="flat" cmpd="sng" algn="ctr">
-                      <a:solidFill>
-                        <a:srgbClr val="D0D5DD"/>
-                      </a:solidFill>
-                      <a:prstDash val="solid"/>
-                      <a:round/>
-                      <a:headEnd type="none" w="med" len="med"/>
-                      <a:tailEnd type="none" w="med" len="med"/>
-                    </a:lnB>
-                    <a:solidFill>
-                      <a:srgbClr val="EEF2F7"/>
-                    </a:solidFill>
-                  </a:tcPr>
-                </a:tc>
-                <a:tc>
-                  <a:txBody>
-                    <a:bodyPr/>
-                    <a:lstStyle/>
-                    <a:p>
-                      <a:r>
-                        <a:rPr sz="900" dirty="0">
-                          <a:solidFill>
-                            <a:srgbClr val="003366"/>
-                          </a:solidFill>
-                        </a:rPr>
-                        <a:t>Solar</a:t>
-                      </a:r>
-                    </a:p>
-                  </a:txBody>
-                  <a:tcPr marL="125786" marR="125786" marT="62893" marB="62893">
-                    <a:lnT w="12700" cap="flat" cmpd="sng" algn="ctr">
-                      <a:solidFill>
-                        <a:srgbClr val="D0D5DD"/>
-                      </a:solidFill>
-                      <a:prstDash val="solid"/>
-                      <a:round/>
-                      <a:headEnd type="none" w="med" len="med"/>
-                      <a:tailEnd type="none" w="med" len="med"/>
-                    </a:lnT>
-                    <a:lnB w="12700" cap="flat" cmpd="sng" algn="ctr">
-                      <a:solidFill>
-                        <a:srgbClr val="D0D5DD"/>
-                      </a:solidFill>
-                      <a:prstDash val="solid"/>
-                      <a:round/>
-                      <a:headEnd type="none" w="med" len="med"/>
-                      <a:tailEnd type="none" w="med" len="med"/>
-                    </a:lnB>
-                    <a:solidFill>
-                      <a:srgbClr val="EEF2F7"/>
-                    </a:solidFill>
-                  </a:tcPr>
-                </a:tc>
-                <a:tc>
-                  <a:txBody>
-                    <a:bodyPr/>
-                    <a:lstStyle/>
-                    <a:p>
-                      <a:r>
-                        <a:rPr sz="900" dirty="0">
-                          <a:solidFill>
-                            <a:srgbClr val="003366"/>
-                          </a:solidFill>
-                        </a:rPr>
-                        <a:t>178.591</a:t>
-                      </a:r>
-                    </a:p>
-                  </a:txBody>
-                  <a:tcPr marL="125786" marR="125786" marT="62893" marB="62893">
-                    <a:lnT w="12700" cap="flat" cmpd="sng" algn="ctr">
-                      <a:solidFill>
-                        <a:srgbClr val="D0D5DD"/>
-                      </a:solidFill>
-                      <a:prstDash val="solid"/>
-                      <a:round/>
-                      <a:headEnd type="none" w="med" len="med"/>
-                      <a:tailEnd type="none" w="med" len="med"/>
-                    </a:lnT>
-                    <a:lnB w="12700" cap="flat" cmpd="sng" algn="ctr">
-                      <a:solidFill>
-                        <a:srgbClr val="D0D5DD"/>
-                      </a:solidFill>
-                      <a:prstDash val="solid"/>
-                      <a:round/>
-                      <a:headEnd type="none" w="med" len="med"/>
-                      <a:tailEnd type="none" w="med" len="med"/>
-                    </a:lnB>
-                    <a:solidFill>
-                      <a:srgbClr val="EEF2F7"/>
-                    </a:solidFill>
-                  </a:tcPr>
-                </a:tc>
-                <a:extLst>
-                  <a:ext uri="{0D108BD9-81ED-4DB2-BD59-A6C34878D82A}">
-                    <a16:rowId xmlns:a16="http://schemas.microsoft.com/office/drawing/2014/main" val="3533212332"/>
-                  </a:ext>
-                </a:extLst>
-              </a:tr>
-              <a:tr h="305636">
-                <a:tc>
-                  <a:txBody>
-                    <a:bodyPr/>
-                    <a:lstStyle/>
-                    <a:p>
-                      <a:r>
-                        <a:rPr sz="900" dirty="0" err="1">
-                          <a:solidFill>
-                            <a:srgbClr val="003366"/>
-                          </a:solidFill>
-                        </a:rPr>
-                        <a:t>Pfv</a:t>
-                      </a:r>
-                      <a:r>
-                        <a:rPr sz="900" dirty="0">
-                          <a:solidFill>
-                            <a:srgbClr val="003366"/>
-                          </a:solidFill>
-                        </a:rPr>
-                        <a:t> </a:t>
-                      </a:r>
-                      <a:r>
-                        <a:rPr sz="900" dirty="0" err="1">
-                          <a:solidFill>
-                            <a:srgbClr val="003366"/>
-                          </a:solidFill>
-                        </a:rPr>
-                        <a:t>Malgarida</a:t>
-                      </a:r>
-                      <a:endParaRPr sz="900" dirty="0">
-                        <a:solidFill>
-                          <a:srgbClr val="003366"/>
-                        </a:solidFill>
-                      </a:endParaRPr>
-                    </a:p>
-                  </a:txBody>
-                  <a:tcPr marL="125786" marR="125786" marT="62893" marB="62893">
-                    <a:lnT w="12700" cap="flat" cmpd="sng" algn="ctr">
-                      <a:solidFill>
-                        <a:srgbClr val="D0D5DD"/>
-                      </a:solidFill>
-                      <a:prstDash val="solid"/>
-                      <a:round/>
-                      <a:headEnd type="none" w="med" len="med"/>
-                      <a:tailEnd type="none" w="med" len="med"/>
-                    </a:lnT>
-                    <a:lnB w="12700" cap="flat" cmpd="sng" algn="ctr">
-                      <a:solidFill>
-                        <a:srgbClr val="D0D5DD"/>
-                      </a:solidFill>
-                      <a:prstDash val="solid"/>
-                      <a:round/>
-                      <a:headEnd type="none" w="med" len="med"/>
-                      <a:tailEnd type="none" w="med" len="med"/>
-                    </a:lnB>
-                    <a:solidFill>
-                      <a:srgbClr val="EEF2F7"/>
-                    </a:solidFill>
-                  </a:tcPr>
-                </a:tc>
-                <a:tc>
-                  <a:txBody>
-                    <a:bodyPr/>
-                    <a:lstStyle/>
-                    <a:p>
-                      <a:r>
-                        <a:rPr sz="900" dirty="0">
-                          <a:solidFill>
-                            <a:srgbClr val="003366"/>
-                          </a:solidFill>
-                        </a:rPr>
-                        <a:t>Solar</a:t>
-                      </a:r>
-                    </a:p>
-                  </a:txBody>
-                  <a:tcPr marL="125786" marR="125786" marT="62893" marB="62893">
-                    <a:lnT w="12700" cap="flat" cmpd="sng" algn="ctr">
-                      <a:solidFill>
-                        <a:srgbClr val="D0D5DD"/>
-                      </a:solidFill>
-                      <a:prstDash val="solid"/>
-                      <a:round/>
-                      <a:headEnd type="none" w="med" len="med"/>
-                      <a:tailEnd type="none" w="med" len="med"/>
-                    </a:lnT>
-                    <a:lnB w="12700" cap="flat" cmpd="sng" algn="ctr">
-                      <a:solidFill>
-                        <a:srgbClr val="D0D5DD"/>
-                      </a:solidFill>
-                      <a:prstDash val="solid"/>
-                      <a:round/>
-                      <a:headEnd type="none" w="med" len="med"/>
-                      <a:tailEnd type="none" w="med" len="med"/>
-                    </a:lnB>
-                    <a:solidFill>
-                      <a:srgbClr val="EEF2F7"/>
-                    </a:solidFill>
-                  </a:tcPr>
-                </a:tc>
-                <a:tc>
-                  <a:txBody>
-                    <a:bodyPr/>
-                    <a:lstStyle/>
-                    <a:p>
-                      <a:r>
-                        <a:rPr sz="900" dirty="0">
-                          <a:solidFill>
-                            <a:srgbClr val="003366"/>
-                          </a:solidFill>
-                        </a:rPr>
-                        <a:t>170.691</a:t>
-                      </a:r>
-                    </a:p>
-                  </a:txBody>
-                  <a:tcPr marL="125786" marR="125786" marT="62893" marB="62893">
-                    <a:lnT w="12700" cap="flat" cmpd="sng" algn="ctr">
-                      <a:solidFill>
-                        <a:srgbClr val="D0D5DD"/>
-                      </a:solidFill>
-                      <a:prstDash val="solid"/>
-                      <a:round/>
-                      <a:headEnd type="none" w="med" len="med"/>
-                      <a:tailEnd type="none" w="med" len="med"/>
-                    </a:lnT>
-                    <a:lnB w="12700" cap="flat" cmpd="sng" algn="ctr">
-                      <a:solidFill>
-                        <a:srgbClr val="D0D5DD"/>
-                      </a:solidFill>
-                      <a:prstDash val="solid"/>
-                      <a:round/>
-                      <a:headEnd type="none" w="med" len="med"/>
-                      <a:tailEnd type="none" w="med" len="med"/>
-                    </a:lnB>
-                    <a:solidFill>
-                      <a:srgbClr val="EEF2F7"/>
-                    </a:solidFill>
-                  </a:tcPr>
-                </a:tc>
-                <a:extLst>
-                  <a:ext uri="{0D108BD9-81ED-4DB2-BD59-A6C34878D82A}">
-                    <a16:rowId xmlns:a16="http://schemas.microsoft.com/office/drawing/2014/main" val="4138562261"/>
-                  </a:ext>
-                </a:extLst>
-              </a:tr>
-              <a:tr h="305636">
-                <a:tc>
-                  <a:txBody>
-                    <a:bodyPr/>
-                    <a:lstStyle/>
-                    <a:p>
-                      <a:r>
-                        <a:rPr sz="900" dirty="0" err="1">
-                          <a:solidFill>
-                            <a:srgbClr val="003366"/>
-                          </a:solidFill>
-                        </a:rPr>
-                        <a:t>Pfv</a:t>
-                      </a:r>
-                      <a:r>
-                        <a:rPr sz="900" dirty="0">
-                          <a:solidFill>
-                            <a:srgbClr val="003366"/>
-                          </a:solidFill>
-                        </a:rPr>
-                        <a:t> El Romero</a:t>
-                      </a:r>
-                    </a:p>
-                  </a:txBody>
-                  <a:tcPr marL="125786" marR="125786" marT="62893" marB="62893">
-                    <a:lnT w="12700" cap="flat" cmpd="sng" algn="ctr">
-                      <a:solidFill>
-                        <a:srgbClr val="D0D5DD"/>
-                      </a:solidFill>
-                      <a:prstDash val="solid"/>
-                      <a:round/>
-                      <a:headEnd type="none" w="med" len="med"/>
-                      <a:tailEnd type="none" w="med" len="med"/>
-                    </a:lnT>
-                    <a:lnB w="12700" cap="flat" cmpd="sng" algn="ctr">
-                      <a:solidFill>
-                        <a:srgbClr val="D0D5DD"/>
-                      </a:solidFill>
-                      <a:prstDash val="solid"/>
-                      <a:round/>
-                      <a:headEnd type="none" w="med" len="med"/>
-                      <a:tailEnd type="none" w="med" len="med"/>
-                    </a:lnB>
-                    <a:solidFill>
-                      <a:srgbClr val="EEF2F7"/>
-                    </a:solidFill>
-                  </a:tcPr>
-                </a:tc>
-                <a:tc>
-                  <a:txBody>
-                    <a:bodyPr/>
-                    <a:lstStyle/>
-                    <a:p>
-                      <a:r>
-                        <a:rPr sz="900" dirty="0">
-                          <a:solidFill>
-                            <a:srgbClr val="003366"/>
-                          </a:solidFill>
-                        </a:rPr>
-                        <a:t>Solar</a:t>
-                      </a:r>
-                    </a:p>
-                  </a:txBody>
-                  <a:tcPr marL="125786" marR="125786" marT="62893" marB="62893">
-                    <a:lnT w="12700" cap="flat" cmpd="sng" algn="ctr">
-                      <a:solidFill>
-                        <a:srgbClr val="D0D5DD"/>
-                      </a:solidFill>
-                      <a:prstDash val="solid"/>
-                      <a:round/>
-                      <a:headEnd type="none" w="med" len="med"/>
-                      <a:tailEnd type="none" w="med" len="med"/>
-                    </a:lnT>
-                    <a:lnB w="12700" cap="flat" cmpd="sng" algn="ctr">
-                      <a:solidFill>
-                        <a:srgbClr val="D0D5DD"/>
-                      </a:solidFill>
-                      <a:prstDash val="solid"/>
-                      <a:round/>
-                      <a:headEnd type="none" w="med" len="med"/>
-                      <a:tailEnd type="none" w="med" len="med"/>
-                    </a:lnB>
-                    <a:solidFill>
-                      <a:srgbClr val="EEF2F7"/>
-                    </a:solidFill>
-                  </a:tcPr>
-                </a:tc>
-                <a:tc>
-                  <a:txBody>
-                    <a:bodyPr/>
-                    <a:lstStyle/>
-                    <a:p>
-                      <a:r>
-                        <a:rPr sz="900" dirty="0">
-                          <a:solidFill>
-                            <a:srgbClr val="003366"/>
-                          </a:solidFill>
-                        </a:rPr>
-                        <a:t>161.724</a:t>
-                      </a:r>
-                    </a:p>
-                  </a:txBody>
-                  <a:tcPr marL="125786" marR="125786" marT="62893" marB="62893">
-                    <a:lnT w="12700" cap="flat" cmpd="sng" algn="ctr">
-                      <a:solidFill>
-                        <a:srgbClr val="D0D5DD"/>
-                      </a:solidFill>
-                      <a:prstDash val="solid"/>
-                      <a:round/>
-                      <a:headEnd type="none" w="med" len="med"/>
-                      <a:tailEnd type="none" w="med" len="med"/>
-                    </a:lnT>
-                    <a:lnB w="12700" cap="flat" cmpd="sng" algn="ctr">
-                      <a:solidFill>
-                        <a:srgbClr val="D0D5DD"/>
-                      </a:solidFill>
-                      <a:prstDash val="solid"/>
-                      <a:round/>
-                      <a:headEnd type="none" w="med" len="med"/>
-                      <a:tailEnd type="none" w="med" len="med"/>
-                    </a:lnB>
-                    <a:solidFill>
-                      <a:srgbClr val="EEF2F7"/>
-                    </a:solidFill>
-                  </a:tcPr>
-                </a:tc>
-                <a:extLst>
-                  <a:ext uri="{0D108BD9-81ED-4DB2-BD59-A6C34878D82A}">
-                    <a16:rowId xmlns:a16="http://schemas.microsoft.com/office/drawing/2014/main" val="3260222927"/>
-                  </a:ext>
-                </a:extLst>
-              </a:tr>
-              <a:tr h="305636">
-                <a:tc>
-                  <a:txBody>
-                    <a:bodyPr/>
-                    <a:lstStyle/>
-                    <a:p>
-                      <a:r>
-                        <a:rPr sz="900" dirty="0" err="1">
-                          <a:solidFill>
-                            <a:srgbClr val="003366"/>
-                          </a:solidFill>
-                        </a:rPr>
-                        <a:t>Pfv</a:t>
-                      </a:r>
-                      <a:r>
-                        <a:rPr sz="900" dirty="0">
-                          <a:solidFill>
-                            <a:srgbClr val="003366"/>
-                          </a:solidFill>
-                        </a:rPr>
-                        <a:t> Luz Del Norte</a:t>
-                      </a:r>
-                    </a:p>
-                  </a:txBody>
-                  <a:tcPr marL="125786" marR="125786" marT="62893" marB="62893">
-                    <a:lnT w="12700" cap="flat" cmpd="sng" algn="ctr">
-                      <a:solidFill>
-                        <a:srgbClr val="D0D5DD"/>
-                      </a:solidFill>
-                      <a:prstDash val="solid"/>
-                      <a:round/>
-                      <a:headEnd type="none" w="med" len="med"/>
-                      <a:tailEnd type="none" w="med" len="med"/>
-                    </a:lnT>
-                    <a:lnB w="12700" cap="flat" cmpd="sng" algn="ctr">
-                      <a:solidFill>
-                        <a:srgbClr val="D0D5DD"/>
-                      </a:solidFill>
-                      <a:prstDash val="solid"/>
-                      <a:round/>
-                      <a:headEnd type="none" w="med" len="med"/>
-                      <a:tailEnd type="none" w="med" len="med"/>
-                    </a:lnB>
-                    <a:solidFill>
-                      <a:srgbClr val="EEF2F7"/>
-                    </a:solidFill>
-                  </a:tcPr>
-                </a:tc>
-                <a:tc>
-                  <a:txBody>
-                    <a:bodyPr/>
-                    <a:lstStyle/>
-                    <a:p>
-                      <a:r>
-                        <a:rPr sz="900" dirty="0">
-                          <a:solidFill>
-                            <a:srgbClr val="003366"/>
-                          </a:solidFill>
-                        </a:rPr>
-                        <a:t>Solar</a:t>
-                      </a:r>
-                    </a:p>
-                  </a:txBody>
-                  <a:tcPr marL="125786" marR="125786" marT="62893" marB="62893">
-                    <a:lnT w="12700" cap="flat" cmpd="sng" algn="ctr">
-                      <a:solidFill>
-                        <a:srgbClr val="D0D5DD"/>
-                      </a:solidFill>
-                      <a:prstDash val="solid"/>
-                      <a:round/>
-                      <a:headEnd type="none" w="med" len="med"/>
-                      <a:tailEnd type="none" w="med" len="med"/>
-                    </a:lnT>
-                    <a:lnB w="12700" cap="flat" cmpd="sng" algn="ctr">
-                      <a:solidFill>
-                        <a:srgbClr val="D0D5DD"/>
-                      </a:solidFill>
-                      <a:prstDash val="solid"/>
-                      <a:round/>
-                      <a:headEnd type="none" w="med" len="med"/>
-                      <a:tailEnd type="none" w="med" len="med"/>
-                    </a:lnB>
-                    <a:solidFill>
-                      <a:srgbClr val="EEF2F7"/>
-                    </a:solidFill>
-                  </a:tcPr>
-                </a:tc>
-                <a:tc>
-                  <a:txBody>
-                    <a:bodyPr/>
-                    <a:lstStyle/>
-                    <a:p>
-                      <a:r>
-                        <a:rPr sz="900" dirty="0">
-                          <a:solidFill>
-                            <a:srgbClr val="003366"/>
-                          </a:solidFill>
-                        </a:rPr>
-                        <a:t>158.951</a:t>
-                      </a:r>
-                    </a:p>
-                  </a:txBody>
-                  <a:tcPr marL="125786" marR="125786" marT="62893" marB="62893">
-                    <a:lnT w="12700" cap="flat" cmpd="sng" algn="ctr">
-                      <a:solidFill>
-                        <a:srgbClr val="D0D5DD"/>
-                      </a:solidFill>
-                      <a:prstDash val="solid"/>
-                      <a:round/>
-                      <a:headEnd type="none" w="med" len="med"/>
-                      <a:tailEnd type="none" w="med" len="med"/>
-                    </a:lnT>
-                    <a:lnB w="12700" cap="flat" cmpd="sng" algn="ctr">
-                      <a:solidFill>
-                        <a:srgbClr val="D0D5DD"/>
-                      </a:solidFill>
-                      <a:prstDash val="solid"/>
-                      <a:round/>
-                      <a:headEnd type="none" w="med" len="med"/>
-                      <a:tailEnd type="none" w="med" len="med"/>
-                    </a:lnB>
-                    <a:solidFill>
-                      <a:srgbClr val="EEF2F7"/>
-                    </a:solidFill>
-                  </a:tcPr>
-                </a:tc>
-                <a:extLst>
-                  <a:ext uri="{0D108BD9-81ED-4DB2-BD59-A6C34878D82A}">
-                    <a16:rowId xmlns:a16="http://schemas.microsoft.com/office/drawing/2014/main" val="4261204553"/>
-                  </a:ext>
-                </a:extLst>
-              </a:tr>
-              <a:tr h="305636">
-                <a:tc>
-                  <a:txBody>
-                    <a:bodyPr/>
-                    <a:lstStyle/>
-                    <a:p>
-                      <a:r>
-                        <a:rPr sz="900">
-                          <a:solidFill>
-                            <a:srgbClr val="003366"/>
-                          </a:solidFill>
-                        </a:rPr>
-                        <a:t>Pfv Diego De Almagro Sur</a:t>
-                      </a:r>
-                    </a:p>
-                  </a:txBody>
-                  <a:tcPr marL="125786" marR="125786" marT="62893" marB="62893">
-                    <a:lnT w="12700" cap="flat" cmpd="sng" algn="ctr">
-                      <a:solidFill>
-                        <a:srgbClr val="D0D5DD"/>
-                      </a:solidFill>
-                      <a:prstDash val="solid"/>
-                      <a:round/>
-                      <a:headEnd type="none" w="med" len="med"/>
-                      <a:tailEnd type="none" w="med" len="med"/>
-                    </a:lnT>
-                    <a:solidFill>
-                      <a:srgbClr val="EEF2F7"/>
-                    </a:solidFill>
-                  </a:tcPr>
-                </a:tc>
-                <a:tc>
-                  <a:txBody>
-                    <a:bodyPr/>
-                    <a:lstStyle/>
-                    <a:p>
-                      <a:r>
-                        <a:rPr sz="900">
-                          <a:solidFill>
-                            <a:srgbClr val="003366"/>
-                          </a:solidFill>
-                        </a:rPr>
-                        <a:t>Solar</a:t>
-                      </a:r>
-                    </a:p>
-                  </a:txBody>
-                  <a:tcPr marL="125786" marR="125786" marT="62893" marB="62893">
-                    <a:lnT w="12700" cap="flat" cmpd="sng" algn="ctr">
-                      <a:solidFill>
-                        <a:srgbClr val="D0D5DD"/>
-                      </a:solidFill>
-                      <a:prstDash val="solid"/>
-                      <a:round/>
-                      <a:headEnd type="none" w="med" len="med"/>
-                      <a:tailEnd type="none" w="med" len="med"/>
-                    </a:lnT>
-                    <a:solidFill>
-                      <a:srgbClr val="EEF2F7"/>
-                    </a:solidFill>
-                  </a:tcPr>
-                </a:tc>
-                <a:tc>
-                  <a:txBody>
-                    <a:bodyPr/>
-                    <a:lstStyle/>
-                    <a:p>
-                      <a:r>
-                        <a:rPr sz="900" dirty="0">
-                          <a:solidFill>
-                            <a:srgbClr val="003366"/>
-                          </a:solidFill>
-                        </a:rPr>
-                        <a:t>151.403</a:t>
-                      </a:r>
-                    </a:p>
-                  </a:txBody>
-                  <a:tcPr marL="125786" marR="125786" marT="62893" marB="62893">
-                    <a:lnT w="12700" cap="flat" cmpd="sng" algn="ctr">
-                      <a:solidFill>
-                        <a:srgbClr val="D0D5DD"/>
-                      </a:solidFill>
-                      <a:prstDash val="solid"/>
-                      <a:round/>
-                      <a:headEnd type="none" w="med" len="med"/>
-                      <a:tailEnd type="none" w="med" len="med"/>
-                    </a:lnT>
-                    <a:solidFill>
-                      <a:srgbClr val="EEF2F7"/>
-                    </a:solidFill>
-                  </a:tcPr>
-                </a:tc>
-                <a:extLst>
-                  <a:ext uri="{0D108BD9-81ED-4DB2-BD59-A6C34878D82A}">
-                    <a16:rowId xmlns:a16="http://schemas.microsoft.com/office/drawing/2014/main" val="249983495"/>
-                  </a:ext>
-                </a:extLst>
-              </a:tr>
-            </a:tbl>
-          </a:graphicData>
-        </a:graphic>
-      </p:graphicFrame>
-      <p:sp>
-        <p:nvSpPr>
-          <p:cNvPr id="11" name="CuadroTexto 10">
-            <a:extLst>
-              <a:ext uri="{FF2B5EF4-FFF2-40B4-BE49-F238E27FC236}">
-                <a16:creationId xmlns:a16="http://schemas.microsoft.com/office/drawing/2014/main" id="{68D11F1E-FE9C-E06C-390F-E17E74F08DE2}"/>
-              </a:ext>
-            </a:extLst>
-          </p:cNvPr>
-          <p:cNvSpPr txBox="1"/>
-          <p:nvPr/>
-        </p:nvSpPr>
-        <p:spPr>
-          <a:xfrm>
-            <a:off x="5782126" y="10593114"/>
-            <a:ext cx="4411824" cy="282834"/>
-          </a:xfrm>
-          <a:prstGeom prst="rect">
-            <a:avLst/>
-          </a:prstGeom>
-          <a:noFill/>
-        </p:spPr>
-        <p:txBody>
-          <a:bodyPr wrap="square" rtlCol="0">
-            <a:spAutoFit/>
-          </a:bodyPr>
-          <a:lstStyle/>
-          <a:p>
-            <a:pPr algn="l"/>
-            <a:r>
-              <a:rPr lang="es-CL" sz="1238" b="1" dirty="0">
-                <a:solidFill>
-                  <a:srgbClr val="002060"/>
-                </a:solidFill>
-                <a:latin typeface="Abadi" panose="020B0604020104020204" pitchFamily="34" charset="0"/>
-                <a:ea typeface="Calibri" panose="020F0502020204030204" pitchFamily="34" charset="0"/>
-                <a:cs typeface="Calibri" panose="020F0502020204030204" pitchFamily="34" charset="0"/>
-              </a:rPr>
-              <a:t>Empresas con mayores vertimientos de energía renovable</a:t>
-            </a:r>
-            <a:endParaRPr lang="es-CL" sz="3654" b="1" dirty="0"/>
-          </a:p>
-        </p:txBody>
-      </p:sp>
       <p:sp>
         <p:nvSpPr>
           <p:cNvPr id="4" name="img_dia_tipico">

--- a/data/raw/templates/template_reporte.pptx
+++ b/data/raw/templates/template_reporte.pptx
@@ -123,7 +123,7 @@
 <file path=ppt/revisionInfo.xml><?xml version="1.0" encoding="utf-8"?>
 <p1510:revInfo xmlns:a="http://schemas.openxmlformats.org/drawingml/2006/main" xmlns:r="http://schemas.openxmlformats.org/officeDocument/2006/relationships" xmlns:p1510="http://schemas.microsoft.com/office/powerpoint/2015/10/main">
   <p1510:revLst>
-    <p1510:client id="{CFE8A0F9-2A71-4110-8F79-685406B35A53}" v="66" dt="2026-03-18T01:18:00.597"/>
+    <p1510:client id="{8F002BE3-E1D1-4905-BABD-748245A0EC0D}" v="86" dt="2026-03-22T01:57:01.275"/>
   </p1510:revLst>
 </p1510:revInfo>
 </file>
@@ -132,27 +132,35 @@
 <pc:chgInfo xmlns:a="http://schemas.openxmlformats.org/drawingml/2006/main" xmlns:r="http://schemas.openxmlformats.org/officeDocument/2006/relationships" xmlns:ac="http://schemas.microsoft.com/office/drawing/2013/main/command" xmlns:pc="http://schemas.microsoft.com/office/powerpoint/2013/main/command">
   <pc:docChgLst>
     <pc:chgData name="Pablo Inzunza" userId="be16ff5b34c21876" providerId="LiveId" clId="{CC6937A5-FA4E-485C-A7D4-0E92CAEDBC02}"/>
-    <pc:docChg chg="custSel modSld">
-      <pc:chgData name="Pablo Inzunza" userId="be16ff5b34c21876" providerId="LiveId" clId="{CC6937A5-FA4E-485C-A7D4-0E92CAEDBC02}" dt="2026-03-18T01:18:06.596" v="148" actId="108"/>
+    <pc:docChg chg="undo custSel modSld">
+      <pc:chgData name="Pablo Inzunza" userId="be16ff5b34c21876" providerId="LiveId" clId="{CC6937A5-FA4E-485C-A7D4-0E92CAEDBC02}" dt="2026-03-22T02:46:25.307" v="1518" actId="20577"/>
       <pc:docMkLst>
         <pc:docMk/>
       </pc:docMkLst>
       <pc:sldChg chg="addSp delSp modSp mod">
-        <pc:chgData name="Pablo Inzunza" userId="be16ff5b34c21876" providerId="LiveId" clId="{CC6937A5-FA4E-485C-A7D4-0E92CAEDBC02}" dt="2026-03-18T00:37:23.512" v="110"/>
+        <pc:chgData name="Pablo Inzunza" userId="be16ff5b34c21876" providerId="LiveId" clId="{CC6937A5-FA4E-485C-A7D4-0E92CAEDBC02}" dt="2026-03-22T01:57:01.275" v="1510"/>
         <pc:sldMkLst>
           <pc:docMk/>
           <pc:sldMk cId="1567814596" sldId="256"/>
         </pc:sldMkLst>
-        <pc:spChg chg="del">
-          <ac:chgData name="Pablo Inzunza" userId="be16ff5b34c21876" providerId="LiveId" clId="{CC6937A5-FA4E-485C-A7D4-0E92CAEDBC02}" dt="2026-03-18T00:15:53.060" v="47" actId="478"/>
+        <pc:spChg chg="mod">
+          <ac:chgData name="Pablo Inzunza" userId="be16ff5b34c21876" providerId="LiveId" clId="{CC6937A5-FA4E-485C-A7D4-0E92CAEDBC02}" dt="2026-03-21T14:00:58.804" v="472" actId="20577"/>
           <ac:spMkLst>
             <pc:docMk/>
             <pc:sldMk cId="1567814596" sldId="256"/>
-            <ac:spMk id="3" creationId="{30AB6713-F6C4-5175-DC00-FD5E6058B152}"/>
+            <ac:spMk id="2" creationId="{B10D898F-3E4B-EC6C-BEC3-588F529EB856}"/>
           </ac:spMkLst>
         </pc:spChg>
         <pc:spChg chg="add mod">
-          <ac:chgData name="Pablo Inzunza" userId="be16ff5b34c21876" providerId="LiveId" clId="{CC6937A5-FA4E-485C-A7D4-0E92CAEDBC02}" dt="2026-03-18T00:19:03.946" v="71" actId="962"/>
+          <ac:chgData name="Pablo Inzunza" userId="be16ff5b34c21876" providerId="LiveId" clId="{CC6937A5-FA4E-485C-A7D4-0E92CAEDBC02}" dt="2026-03-21T14:28:06.399" v="790" actId="207"/>
+          <ac:spMkLst>
+            <pc:docMk/>
+            <pc:sldMk cId="1567814596" sldId="256"/>
+            <ac:spMk id="3" creationId="{90593913-2DFB-99D7-A7FF-E08423EBC5CB}"/>
+          </ac:spMkLst>
+        </pc:spChg>
+        <pc:spChg chg="add mod">
+          <ac:chgData name="Pablo Inzunza" userId="be16ff5b34c21876" providerId="LiveId" clId="{CC6937A5-FA4E-485C-A7D4-0E92CAEDBC02}" dt="2026-03-21T14:39:24.731" v="825" actId="207"/>
           <ac:spMkLst>
             <pc:docMk/>
             <pc:sldMk cId="1567814596" sldId="256"/>
@@ -160,126 +168,350 @@
           </ac:spMkLst>
         </pc:spChg>
         <pc:spChg chg="add mod">
-          <ac:chgData name="Pablo Inzunza" userId="be16ff5b34c21876" providerId="LiveId" clId="{CC6937A5-FA4E-485C-A7D4-0E92CAEDBC02}" dt="2026-03-18T00:22:25.761" v="73" actId="962"/>
+          <ac:chgData name="Pablo Inzunza" userId="be16ff5b34c21876" providerId="LiveId" clId="{CC6937A5-FA4E-485C-A7D4-0E92CAEDBC02}" dt="2026-03-21T14:39:24.731" v="825" actId="207"/>
           <ac:spMkLst>
             <pc:docMk/>
             <pc:sldMk cId="1567814596" sldId="256"/>
             <ac:spMk id="5" creationId="{232859DC-475F-8E12-199B-038048B4887F}"/>
           </ac:spMkLst>
         </pc:spChg>
-        <pc:spChg chg="mod">
-          <ac:chgData name="Pablo Inzunza" userId="be16ff5b34c21876" providerId="LiveId" clId="{CC6937A5-FA4E-485C-A7D4-0E92CAEDBC02}" dt="2026-03-18T00:18:15.941" v="65" actId="1076"/>
+        <pc:spChg chg="mod ord">
+          <ac:chgData name="Pablo Inzunza" userId="be16ff5b34c21876" providerId="LiveId" clId="{CC6937A5-FA4E-485C-A7D4-0E92CAEDBC02}" dt="2026-03-21T14:39:24.731" v="825" actId="207"/>
           <ac:spMkLst>
             <pc:docMk/>
             <pc:sldMk cId="1567814596" sldId="256"/>
             <ac:spMk id="7" creationId="{C9573602-0474-D172-31A6-26B9F532907B}"/>
           </ac:spMkLst>
         </pc:spChg>
-        <pc:spChg chg="del">
-          <ac:chgData name="Pablo Inzunza" userId="be16ff5b34c21876" providerId="LiveId" clId="{CC6937A5-FA4E-485C-A7D4-0E92CAEDBC02}" dt="2026-03-18T00:15:51.601" v="46" actId="478"/>
+        <pc:spChg chg="add mod">
+          <ac:chgData name="Pablo Inzunza" userId="be16ff5b34c21876" providerId="LiveId" clId="{CC6937A5-FA4E-485C-A7D4-0E92CAEDBC02}" dt="2026-03-21T13:55:56.770" v="358"/>
           <ac:spMkLst>
             <pc:docMk/>
             <pc:sldMk cId="1567814596" sldId="256"/>
-            <ac:spMk id="8" creationId="{7837CB31-5F08-AB37-78CB-1434D7F2BC5F}"/>
-          </ac:spMkLst>
-        </pc:spChg>
-        <pc:spChg chg="del">
-          <ac:chgData name="Pablo Inzunza" userId="be16ff5b34c21876" providerId="LiveId" clId="{CC6937A5-FA4E-485C-A7D4-0E92CAEDBC02}" dt="2026-03-18T00:15:54.636" v="48" actId="478"/>
+            <ac:spMk id="8" creationId="{435FB966-568C-37EE-1014-F8E3AB1EC1AA}"/>
+          </ac:spMkLst>
+        </pc:spChg>
+        <pc:spChg chg="add mod">
+          <ac:chgData name="Pablo Inzunza" userId="be16ff5b34c21876" providerId="LiveId" clId="{CC6937A5-FA4E-485C-A7D4-0E92CAEDBC02}" dt="2026-03-21T14:49:52.134" v="850"/>
           <ac:spMkLst>
             <pc:docMk/>
             <pc:sldMk cId="1567814596" sldId="256"/>
-            <ac:spMk id="9" creationId="{389DA5AC-A243-245E-F5FA-E96CDBDF16BB}"/>
-          </ac:spMkLst>
-        </pc:spChg>
-        <pc:spChg chg="del">
-          <ac:chgData name="Pablo Inzunza" userId="be16ff5b34c21876" providerId="LiveId" clId="{CC6937A5-FA4E-485C-A7D4-0E92CAEDBC02}" dt="2026-03-18T00:15:55.371" v="49" actId="478"/>
+            <ac:spMk id="9" creationId="{77EAED91-E52D-A80E-3B34-EF3FA0018E9F}"/>
+          </ac:spMkLst>
+        </pc:spChg>
+        <pc:spChg chg="add mod ord">
+          <ac:chgData name="Pablo Inzunza" userId="be16ff5b34c21876" providerId="LiveId" clId="{CC6937A5-FA4E-485C-A7D4-0E92CAEDBC02}" dt="2026-03-21T14:31:02.311" v="807" actId="34135"/>
           <ac:spMkLst>
             <pc:docMk/>
             <pc:sldMk cId="1567814596" sldId="256"/>
-            <ac:spMk id="10" creationId="{C43B683A-0C1D-C363-4A2E-6A2CFBB0D998}"/>
+            <ac:spMk id="10" creationId="{1EE6DA1A-A93E-016D-1059-6B77A4223C42}"/>
+          </ac:spMkLst>
+        </pc:spChg>
+        <pc:spChg chg="add mod">
+          <ac:chgData name="Pablo Inzunza" userId="be16ff5b34c21876" providerId="LiveId" clId="{CC6937A5-FA4E-485C-A7D4-0E92CAEDBC02}" dt="2026-03-21T16:51:14.128" v="1453" actId="1076"/>
+          <ac:spMkLst>
+            <pc:docMk/>
+            <pc:sldMk cId="1567814596" sldId="256"/>
+            <ac:spMk id="11" creationId="{CA6A285F-1D96-3B77-E95B-45B0D5AD6B4C}"/>
+          </ac:spMkLst>
+        </pc:spChg>
+        <pc:spChg chg="add mod">
+          <ac:chgData name="Pablo Inzunza" userId="be16ff5b34c21876" providerId="LiveId" clId="{CC6937A5-FA4E-485C-A7D4-0E92CAEDBC02}" dt="2026-03-21T16:51:16.553" v="1454" actId="1076"/>
+          <ac:spMkLst>
+            <pc:docMk/>
+            <pc:sldMk cId="1567814596" sldId="256"/>
+            <ac:spMk id="12" creationId="{C20A4FE8-703A-B4F6-E958-8947D382BD2C}"/>
+          </ac:spMkLst>
+        </pc:spChg>
+        <pc:spChg chg="add mod">
+          <ac:chgData name="Pablo Inzunza" userId="be16ff5b34c21876" providerId="LiveId" clId="{CC6937A5-FA4E-485C-A7D4-0E92CAEDBC02}" dt="2026-03-21T16:51:19.829" v="1455" actId="1076"/>
+          <ac:spMkLst>
+            <pc:docMk/>
+            <pc:sldMk cId="1567814596" sldId="256"/>
+            <ac:spMk id="13" creationId="{B8807974-35D6-F383-1333-9C3290498B58}"/>
           </ac:spMkLst>
         </pc:spChg>
         <pc:spChg chg="mod">
-          <ac:chgData name="Pablo Inzunza" userId="be16ff5b34c21876" providerId="LiveId" clId="{CC6937A5-FA4E-485C-A7D4-0E92CAEDBC02}" dt="2026-03-18T00:16:17.203" v="58" actId="1076"/>
-          <ac:spMkLst>
-            <pc:docMk/>
-            <pc:sldMk cId="1567814596" sldId="256"/>
-            <ac:spMk id="11" creationId="{68D11F1E-FE9C-E06C-390F-E17E74F08DE2}"/>
-          </ac:spMkLst>
-        </pc:spChg>
-        <pc:spChg chg="mod">
-          <ac:chgData name="Pablo Inzunza" userId="be16ff5b34c21876" providerId="LiveId" clId="{CC6937A5-FA4E-485C-A7D4-0E92CAEDBC02}" dt="2026-03-18T00:16:07.009" v="54" actId="14100"/>
+          <ac:chgData name="Pablo Inzunza" userId="be16ff5b34c21876" providerId="LiveId" clId="{CC6937A5-FA4E-485C-A7D4-0E92CAEDBC02}" dt="2026-03-21T14:39:24.731" v="825" actId="207"/>
           <ac:spMkLst>
             <pc:docMk/>
             <pc:sldMk cId="1567814596" sldId="256"/>
             <ac:spMk id="14" creationId="{BC640CFB-D442-9CAF-05C2-333332C40FD7}"/>
           </ac:spMkLst>
         </pc:spChg>
+        <pc:spChg chg="add del mod">
+          <ac:chgData name="Pablo Inzunza" userId="be16ff5b34c21876" providerId="LiveId" clId="{CC6937A5-FA4E-485C-A7D4-0E92CAEDBC02}" dt="2026-03-21T16:38:20.728" v="1417" actId="478"/>
+          <ac:spMkLst>
+            <pc:docMk/>
+            <pc:sldMk cId="1567814596" sldId="256"/>
+            <ac:spMk id="15" creationId="{113C2EAD-B857-ADBF-753C-4CF369BB8BEE}"/>
+          </ac:spMkLst>
+        </pc:spChg>
+        <pc:spChg chg="add mod">
+          <ac:chgData name="Pablo Inzunza" userId="be16ff5b34c21876" providerId="LiveId" clId="{CC6937A5-FA4E-485C-A7D4-0E92CAEDBC02}" dt="2026-03-22T01:57:01.275" v="1510"/>
+          <ac:spMkLst>
+            <pc:docMk/>
+            <pc:sldMk cId="1567814596" sldId="256"/>
+            <ac:spMk id="15" creationId="{B4B0F660-3CC5-7C43-FBBB-E5E307ED2E66}"/>
+          </ac:spMkLst>
+        </pc:spChg>
+        <pc:spChg chg="add del mod">
+          <ac:chgData name="Pablo Inzunza" userId="be16ff5b34c21876" providerId="LiveId" clId="{CC6937A5-FA4E-485C-A7D4-0E92CAEDBC02}" dt="2026-03-21T16:38:20.728" v="1417" actId="478"/>
+          <ac:spMkLst>
+            <pc:docMk/>
+            <pc:sldMk cId="1567814596" sldId="256"/>
+            <ac:spMk id="16" creationId="{FC279485-E6B2-75B4-5A6D-7B330DA8EC68}"/>
+          </ac:spMkLst>
+        </pc:spChg>
+        <pc:spChg chg="add del mod">
+          <ac:chgData name="Pablo Inzunza" userId="be16ff5b34c21876" providerId="LiveId" clId="{CC6937A5-FA4E-485C-A7D4-0E92CAEDBC02}" dt="2026-03-21T16:38:20.728" v="1417" actId="478"/>
+          <ac:spMkLst>
+            <pc:docMk/>
+            <pc:sldMk cId="1567814596" sldId="256"/>
+            <ac:spMk id="17" creationId="{A5098A2E-E0DD-C51B-3171-F7D4BDB66FBA}"/>
+          </ac:spMkLst>
+        </pc:spChg>
+        <pc:spChg chg="add mod">
+          <ac:chgData name="Pablo Inzunza" userId="be16ff5b34c21876" providerId="LiveId" clId="{CC6937A5-FA4E-485C-A7D4-0E92CAEDBC02}" dt="2026-03-21T15:49:00.616" v="1203"/>
+          <ac:spMkLst>
+            <pc:docMk/>
+            <pc:sldMk cId="1567814596" sldId="256"/>
+            <ac:spMk id="18" creationId="{20BA1ECC-2922-A935-2D00-AF0F3548C179}"/>
+          </ac:spMkLst>
+        </pc:spChg>
+        <pc:spChg chg="add mod">
+          <ac:chgData name="Pablo Inzunza" userId="be16ff5b34c21876" providerId="LiveId" clId="{CC6937A5-FA4E-485C-A7D4-0E92CAEDBC02}" dt="2026-03-21T16:38:33.637" v="1418"/>
+          <ac:spMkLst>
+            <pc:docMk/>
+            <pc:sldMk cId="1567814596" sldId="256"/>
+            <ac:spMk id="18" creationId="{2375222D-2F78-AD62-BF92-27130F75C1C1}"/>
+          </ac:spMkLst>
+        </pc:spChg>
+        <pc:spChg chg="add del mod">
+          <ac:chgData name="Pablo Inzunza" userId="be16ff5b34c21876" providerId="LiveId" clId="{CC6937A5-FA4E-485C-A7D4-0E92CAEDBC02}" dt="2026-03-21T16:38:20.728" v="1417" actId="478"/>
+          <ac:spMkLst>
+            <pc:docMk/>
+            <pc:sldMk cId="1567814596" sldId="256"/>
+            <ac:spMk id="19" creationId="{781DABF3-EE42-FCAC-3BC4-B31846C56CDE}"/>
+          </ac:spMkLst>
+        </pc:spChg>
+        <pc:spChg chg="add del mod">
+          <ac:chgData name="Pablo Inzunza" userId="be16ff5b34c21876" providerId="LiveId" clId="{CC6937A5-FA4E-485C-A7D4-0E92CAEDBC02}" dt="2026-03-21T16:38:20.728" v="1417" actId="478"/>
+          <ac:spMkLst>
+            <pc:docMk/>
+            <pc:sldMk cId="1567814596" sldId="256"/>
+            <ac:spMk id="20" creationId="{A81CAB28-1D72-B48B-6595-23A6B2E712AE}"/>
+          </ac:spMkLst>
+        </pc:spChg>
+        <pc:spChg chg="add del mod">
+          <ac:chgData name="Pablo Inzunza" userId="be16ff5b34c21876" providerId="LiveId" clId="{CC6937A5-FA4E-485C-A7D4-0E92CAEDBC02}" dt="2026-03-21T16:38:20.728" v="1417" actId="478"/>
+          <ac:spMkLst>
+            <pc:docMk/>
+            <pc:sldMk cId="1567814596" sldId="256"/>
+            <ac:spMk id="21" creationId="{B296EC70-EE89-AB8A-BBA4-BB1470366BA6}"/>
+          </ac:spMkLst>
+        </pc:spChg>
+        <pc:spChg chg="add del mod">
+          <ac:chgData name="Pablo Inzunza" userId="be16ff5b34c21876" providerId="LiveId" clId="{CC6937A5-FA4E-485C-A7D4-0E92CAEDBC02}" dt="2026-03-21T16:38:20.728" v="1417" actId="478"/>
+          <ac:spMkLst>
+            <pc:docMk/>
+            <pc:sldMk cId="1567814596" sldId="256"/>
+            <ac:spMk id="22" creationId="{4A9A5098-92E2-35DC-B79F-D8C12E491AD2}"/>
+          </ac:spMkLst>
+        </pc:spChg>
         <pc:spChg chg="mod">
-          <ac:chgData name="Pablo Inzunza" userId="be16ff5b34c21876" providerId="LiveId" clId="{CC6937A5-FA4E-485C-A7D4-0E92CAEDBC02}" dt="2026-03-18T00:18:19.493" v="66" actId="1076"/>
+          <ac:chgData name="Pablo Inzunza" userId="be16ff5b34c21876" providerId="LiveId" clId="{CC6937A5-FA4E-485C-A7D4-0E92CAEDBC02}" dt="2026-03-21T14:46:45.849" v="838" actId="207"/>
           <ac:spMkLst>
             <pc:docMk/>
             <pc:sldMk cId="1567814596" sldId="256"/>
             <ac:spMk id="23" creationId="{470618BE-80E3-6578-FCC8-D12F7C467F04}"/>
           </ac:spMkLst>
         </pc:spChg>
-        <pc:spChg chg="del mod">
-          <ac:chgData name="Pablo Inzunza" userId="be16ff5b34c21876" providerId="LiveId" clId="{CC6937A5-FA4E-485C-A7D4-0E92CAEDBC02}" dt="2026-03-18T00:15:38.619" v="40" actId="478"/>
+        <pc:spChg chg="add del mod">
+          <ac:chgData name="Pablo Inzunza" userId="be16ff5b34c21876" providerId="LiveId" clId="{CC6937A5-FA4E-485C-A7D4-0E92CAEDBC02}" dt="2026-03-21T16:38:20.728" v="1417" actId="478"/>
           <ac:spMkLst>
             <pc:docMk/>
             <pc:sldMk cId="1567814596" sldId="256"/>
-            <ac:spMk id="28" creationId="{4D4C8723-68F9-D4E9-34A1-4298D3188A43}"/>
-          </ac:spMkLst>
-        </pc:spChg>
-        <pc:spChg chg="del">
-          <ac:chgData name="Pablo Inzunza" userId="be16ff5b34c21876" providerId="LiveId" clId="{CC6937A5-FA4E-485C-A7D4-0E92CAEDBC02}" dt="2026-03-18T00:15:39.084" v="41" actId="478"/>
+            <ac:spMk id="24" creationId="{A100D73A-7C35-29B0-790A-39A09D8CE5DE}"/>
+          </ac:spMkLst>
+        </pc:spChg>
+        <pc:spChg chg="mod">
+          <ac:chgData name="Pablo Inzunza" userId="be16ff5b34c21876" providerId="LiveId" clId="{CC6937A5-FA4E-485C-A7D4-0E92CAEDBC02}" dt="2026-03-21T13:55:53.310" v="356" actId="34136"/>
           <ac:spMkLst>
             <pc:docMk/>
             <pc:sldMk cId="1567814596" sldId="256"/>
-            <ac:spMk id="29" creationId="{7491D3B6-F4CC-B4E0-5A5B-36BF1035940B}"/>
-          </ac:spMkLst>
-        </pc:spChg>
-        <pc:graphicFrameChg chg="mod modGraphic">
-          <ac:chgData name="Pablo Inzunza" userId="be16ff5b34c21876" providerId="LiveId" clId="{CC6937A5-FA4E-485C-A7D4-0E92CAEDBC02}" dt="2026-03-18T00:37:23.512" v="110"/>
-          <ac:graphicFrameMkLst>
+            <ac:spMk id="25" creationId="{4EA10392-2533-5083-3D42-B270BFF2008E}"/>
+          </ac:spMkLst>
+        </pc:spChg>
+        <pc:spChg chg="add del mod">
+          <ac:chgData name="Pablo Inzunza" userId="be16ff5b34c21876" providerId="LiveId" clId="{CC6937A5-FA4E-485C-A7D4-0E92CAEDBC02}" dt="2026-03-21T16:38:20.728" v="1417" actId="478"/>
+          <ac:spMkLst>
             <pc:docMk/>
             <pc:sldMk cId="1567814596" sldId="256"/>
-            <ac:graphicFrameMk id="17" creationId="{B963FD58-34D3-2CB0-FFF7-3C93D19EE26E}"/>
-          </ac:graphicFrameMkLst>
-        </pc:graphicFrameChg>
-        <pc:picChg chg="del">
-          <ac:chgData name="Pablo Inzunza" userId="be16ff5b34c21876" providerId="LiveId" clId="{CC6937A5-FA4E-485C-A7D4-0E92CAEDBC02}" dt="2026-03-17T23:59:37.285" v="4" actId="478"/>
+            <ac:spMk id="25" creationId="{8B615CDB-9907-5FDA-643E-F9723531D462}"/>
+          </ac:spMkLst>
+        </pc:spChg>
+        <pc:spChg chg="add del mod">
+          <ac:chgData name="Pablo Inzunza" userId="be16ff5b34c21876" providerId="LiveId" clId="{CC6937A5-FA4E-485C-A7D4-0E92CAEDBC02}" dt="2026-03-21T16:38:20.728" v="1417" actId="478"/>
+          <ac:spMkLst>
+            <pc:docMk/>
+            <pc:sldMk cId="1567814596" sldId="256"/>
+            <ac:spMk id="27" creationId="{70B7A1B5-EDE9-FD1C-682C-DDDDE0DC3A61}"/>
+          </ac:spMkLst>
+        </pc:spChg>
+        <pc:spChg chg="add mod">
+          <ac:chgData name="Pablo Inzunza" userId="be16ff5b34c21876" providerId="LiveId" clId="{CC6937A5-FA4E-485C-A7D4-0E92CAEDBC02}" dt="2026-03-21T16:38:33.637" v="1418"/>
+          <ac:spMkLst>
+            <pc:docMk/>
+            <pc:sldMk cId="1567814596" sldId="256"/>
+            <ac:spMk id="28" creationId="{86786845-CC56-E1E3-4964-D181189A233E}"/>
+          </ac:spMkLst>
+        </pc:spChg>
+        <pc:spChg chg="add mod">
+          <ac:chgData name="Pablo Inzunza" userId="be16ff5b34c21876" providerId="LiveId" clId="{CC6937A5-FA4E-485C-A7D4-0E92CAEDBC02}" dt="2026-03-21T16:38:33.637" v="1418"/>
+          <ac:spMkLst>
+            <pc:docMk/>
+            <pc:sldMk cId="1567814596" sldId="256"/>
+            <ac:spMk id="29" creationId="{58622CEC-E5AD-5E18-C243-D14B72FA5C93}"/>
+          </ac:spMkLst>
+        </pc:spChg>
+        <pc:spChg chg="add mod">
+          <ac:chgData name="Pablo Inzunza" userId="be16ff5b34c21876" providerId="LiveId" clId="{CC6937A5-FA4E-485C-A7D4-0E92CAEDBC02}" dt="2026-03-21T16:38:33.637" v="1418"/>
+          <ac:spMkLst>
+            <pc:docMk/>
+            <pc:sldMk cId="1567814596" sldId="256"/>
+            <ac:spMk id="30" creationId="{532544CC-1C67-18AE-B59E-F19E5A86667F}"/>
+          </ac:spMkLst>
+        </pc:spChg>
+        <pc:spChg chg="mod">
+          <ac:chgData name="Pablo Inzunza" userId="be16ff5b34c21876" providerId="LiveId" clId="{CC6937A5-FA4E-485C-A7D4-0E92CAEDBC02}" dt="2026-03-21T13:55:53.310" v="356" actId="34136"/>
+          <ac:spMkLst>
+            <pc:docMk/>
+            <pc:sldMk cId="1567814596" sldId="256"/>
+            <ac:spMk id="30" creationId="{A38A1DF2-4121-CCA3-05E7-F4DE4ED06DAC}"/>
+          </ac:spMkLst>
+        </pc:spChg>
+        <pc:spChg chg="add mod">
+          <ac:chgData name="Pablo Inzunza" userId="be16ff5b34c21876" providerId="LiveId" clId="{CC6937A5-FA4E-485C-A7D4-0E92CAEDBC02}" dt="2026-03-21T16:38:33.637" v="1418"/>
+          <ac:spMkLst>
+            <pc:docMk/>
+            <pc:sldMk cId="1567814596" sldId="256"/>
+            <ac:spMk id="31" creationId="{2CAE3186-5C44-57B4-43B9-63A2689E8B9D}"/>
+          </ac:spMkLst>
+        </pc:spChg>
+        <pc:spChg chg="mod">
+          <ac:chgData name="Pablo Inzunza" userId="be16ff5b34c21876" providerId="LiveId" clId="{CC6937A5-FA4E-485C-A7D4-0E92CAEDBC02}" dt="2026-03-21T13:55:53.310" v="356" actId="34136"/>
+          <ac:spMkLst>
+            <pc:docMk/>
+            <pc:sldMk cId="1567814596" sldId="256"/>
+            <ac:spMk id="31" creationId="{BDDFB370-EBF1-6CD6-5123-23F2F1D3937F}"/>
+          </ac:spMkLst>
+        </pc:spChg>
+        <pc:spChg chg="mod">
+          <ac:chgData name="Pablo Inzunza" userId="be16ff5b34c21876" providerId="LiveId" clId="{CC6937A5-FA4E-485C-A7D4-0E92CAEDBC02}" dt="2026-03-21T13:55:53.310" v="356" actId="34136"/>
+          <ac:spMkLst>
+            <pc:docMk/>
+            <pc:sldMk cId="1567814596" sldId="256"/>
+            <ac:spMk id="32" creationId="{4D4417FE-7CFB-581B-329C-DC62FDB4DC8A}"/>
+          </ac:spMkLst>
+        </pc:spChg>
+        <pc:spChg chg="add mod">
+          <ac:chgData name="Pablo Inzunza" userId="be16ff5b34c21876" providerId="LiveId" clId="{CC6937A5-FA4E-485C-A7D4-0E92CAEDBC02}" dt="2026-03-21T16:38:33.637" v="1418"/>
+          <ac:spMkLst>
+            <pc:docMk/>
+            <pc:sldMk cId="1567814596" sldId="256"/>
+            <ac:spMk id="32" creationId="{D683ACCB-ABC1-00AB-7206-B504E2159DB3}"/>
+          </ac:spMkLst>
+        </pc:spChg>
+        <pc:spChg chg="add del mod">
+          <ac:chgData name="Pablo Inzunza" userId="be16ff5b34c21876" providerId="LiveId" clId="{CC6937A5-FA4E-485C-A7D4-0E92CAEDBC02}" dt="2026-03-22T01:56:58.159" v="1509" actId="478"/>
+          <ac:spMkLst>
+            <pc:docMk/>
+            <pc:sldMk cId="1567814596" sldId="256"/>
+            <ac:spMk id="33" creationId="{E3080204-BBF6-84B4-8294-33217DD052E2}"/>
+          </ac:spMkLst>
+        </pc:spChg>
+        <pc:grpChg chg="del mod">
+          <ac:chgData name="Pablo Inzunza" userId="be16ff5b34c21876" providerId="LiveId" clId="{CC6937A5-FA4E-485C-A7D4-0E92CAEDBC02}" dt="2026-03-21T13:55:55.485" v="357" actId="478"/>
+          <ac:grpSpMkLst>
+            <pc:docMk/>
+            <pc:sldMk cId="1567814596" sldId="256"/>
+            <ac:grpSpMk id="19" creationId="{81922438-34E2-11A8-043B-60AE569049FD}"/>
+          </ac:grpSpMkLst>
+        </pc:grpChg>
+        <pc:picChg chg="add mod">
+          <ac:chgData name="Pablo Inzunza" userId="be16ff5b34c21876" providerId="LiveId" clId="{CC6937A5-FA4E-485C-A7D4-0E92CAEDBC02}" dt="2026-03-21T13:55:56.770" v="358"/>
           <ac:picMkLst>
             <pc:docMk/>
             <pc:sldMk cId="1567814596" sldId="256"/>
-            <ac:picMk id="33" creationId="{00000000-0000-0000-0000-000000000000}"/>
+            <ac:picMk id="6" creationId="{1FAE8E5D-1E43-A4B1-9A2A-6D098BE746BC}"/>
           </ac:picMkLst>
         </pc:picChg>
-        <pc:picChg chg="del">
-          <ac:chgData name="Pablo Inzunza" userId="be16ff5b34c21876" providerId="LiveId" clId="{CC6937A5-FA4E-485C-A7D4-0E92CAEDBC02}" dt="2026-03-17T23:59:37.837" v="5" actId="478"/>
+        <pc:picChg chg="add del mod">
+          <ac:chgData name="Pablo Inzunza" userId="be16ff5b34c21876" providerId="LiveId" clId="{CC6937A5-FA4E-485C-A7D4-0E92CAEDBC02}" dt="2026-03-21T16:31:16.293" v="1388" actId="478"/>
           <ac:picMkLst>
             <pc:docMk/>
             <pc:sldMk cId="1567814596" sldId="256"/>
-            <ac:picMk id="34" creationId="{00000000-0000-0000-0000-000000000000}"/>
+            <ac:picMk id="11" creationId="{8D34B8F5-0BA1-802C-5F84-F39075FD973C}"/>
           </ac:picMkLst>
         </pc:picChg>
+        <pc:picChg chg="add del mod">
+          <ac:chgData name="Pablo Inzunza" userId="be16ff5b34c21876" providerId="LiveId" clId="{CC6937A5-FA4E-485C-A7D4-0E92CAEDBC02}" dt="2026-03-21T16:31:16.878" v="1389" actId="478"/>
+          <ac:picMkLst>
+            <pc:docMk/>
+            <pc:sldMk cId="1567814596" sldId="256"/>
+            <ac:picMk id="12" creationId="{8C1EC1A2-8BEE-4DBB-4178-848AA8E8B0DC}"/>
+          </ac:picMkLst>
+        </pc:picChg>
+        <pc:picChg chg="add del mod">
+          <ac:chgData name="Pablo Inzunza" userId="be16ff5b34c21876" providerId="LiveId" clId="{CC6937A5-FA4E-485C-A7D4-0E92CAEDBC02}" dt="2026-03-21T16:31:17.582" v="1390" actId="478"/>
+          <ac:picMkLst>
+            <pc:docMk/>
+            <pc:sldMk cId="1567814596" sldId="256"/>
+            <ac:picMk id="13" creationId="{47C1491B-3E0E-25F6-4AD2-DE2A140E7620}"/>
+          </ac:picMkLst>
+        </pc:picChg>
+        <pc:picChg chg="mod">
+          <ac:chgData name="Pablo Inzunza" userId="be16ff5b34c21876" providerId="LiveId" clId="{CC6937A5-FA4E-485C-A7D4-0E92CAEDBC02}" dt="2026-03-21T13:55:53.310" v="356" actId="34136"/>
+          <ac:picMkLst>
+            <pc:docMk/>
+            <pc:sldMk cId="1567814596" sldId="256"/>
+            <ac:picMk id="21" creationId="{C66DD272-C03B-441D-A760-5B89541BBE36}"/>
+          </ac:picMkLst>
+        </pc:picChg>
+        <pc:picChg chg="mod">
+          <ac:chgData name="Pablo Inzunza" userId="be16ff5b34c21876" providerId="LiveId" clId="{CC6937A5-FA4E-485C-A7D4-0E92CAEDBC02}" dt="2026-03-21T13:55:53.310" v="356" actId="34136"/>
+          <ac:picMkLst>
+            <pc:docMk/>
+            <pc:sldMk cId="1567814596" sldId="256"/>
+            <ac:picMk id="27" creationId="{5A6D1A26-5E2D-9017-4712-063F40C474D4}"/>
+          </ac:picMkLst>
+        </pc:picChg>
+        <pc:cxnChg chg="mod">
+          <ac:chgData name="Pablo Inzunza" userId="be16ff5b34c21876" providerId="LiveId" clId="{CC6937A5-FA4E-485C-A7D4-0E92CAEDBC02}" dt="2026-03-21T13:59:26.844" v="396" actId="1076"/>
+          <ac:cxnSpMkLst>
+            <pc:docMk/>
+            <pc:sldMk cId="1567814596" sldId="256"/>
+            <ac:cxnSpMk id="26" creationId="{DE6F00E0-8998-842B-7D15-55976617D1F5}"/>
+          </ac:cxnSpMkLst>
+        </pc:cxnChg>
       </pc:sldChg>
       <pc:sldChg chg="addSp delSp modSp mod">
-        <pc:chgData name="Pablo Inzunza" userId="be16ff5b34c21876" providerId="LiveId" clId="{CC6937A5-FA4E-485C-A7D4-0E92CAEDBC02}" dt="2026-03-18T00:18:06.441" v="64" actId="962"/>
+        <pc:chgData name="Pablo Inzunza" userId="be16ff5b34c21876" providerId="LiveId" clId="{CC6937A5-FA4E-485C-A7D4-0E92CAEDBC02}" dt="2026-03-22T02:46:25.307" v="1518" actId="20577"/>
         <pc:sldMkLst>
           <pc:docMk/>
           <pc:sldMk cId="1318690124" sldId="257"/>
         </pc:sldMkLst>
-        <pc:spChg chg="add mod">
-          <ac:chgData name="Pablo Inzunza" userId="be16ff5b34c21876" providerId="LiveId" clId="{CC6937A5-FA4E-485C-A7D4-0E92CAEDBC02}" dt="2026-03-18T00:17:21.938" v="62" actId="962"/>
+        <pc:spChg chg="add del mod">
+          <ac:chgData name="Pablo Inzunza" userId="be16ff5b34c21876" providerId="LiveId" clId="{CC6937A5-FA4E-485C-A7D4-0E92CAEDBC02}" dt="2026-03-21T16:36:14.990" v="1404" actId="478"/>
           <ac:spMkLst>
             <pc:docMk/>
             <pc:sldMk cId="1318690124" sldId="257"/>
             <ac:spMk id="2" creationId="{7B52FB86-6556-31C1-1F58-84B9831E7D77}"/>
           </ac:spMkLst>
         </pc:spChg>
-        <pc:spChg chg="add mod">
-          <ac:chgData name="Pablo Inzunza" userId="be16ff5b34c21876" providerId="LiveId" clId="{CC6937A5-FA4E-485C-A7D4-0E92CAEDBC02}" dt="2026-03-18T00:17:42.690" v="63" actId="962"/>
+        <pc:spChg chg="add del mod">
+          <ac:chgData name="Pablo Inzunza" userId="be16ff5b34c21876" providerId="LiveId" clId="{CC6937A5-FA4E-485C-A7D4-0E92CAEDBC02}" dt="2026-03-21T16:36:20.430" v="1408" actId="478"/>
           <ac:spMkLst>
             <pc:docMk/>
             <pc:sldMk cId="1318690124" sldId="257"/>
@@ -287,86 +519,430 @@
           </ac:spMkLst>
         </pc:spChg>
         <pc:spChg chg="add mod">
-          <ac:chgData name="Pablo Inzunza" userId="be16ff5b34c21876" providerId="LiveId" clId="{CC6937A5-FA4E-485C-A7D4-0E92CAEDBC02}" dt="2026-03-18T00:18:06.441" v="64" actId="962"/>
+          <ac:chgData name="Pablo Inzunza" userId="be16ff5b34c21876" providerId="LiveId" clId="{CC6937A5-FA4E-485C-A7D4-0E92CAEDBC02}" dt="2026-03-21T14:39:11.731" v="824" actId="207"/>
           <ac:spMkLst>
             <pc:docMk/>
             <pc:sldMk cId="1318690124" sldId="257"/>
             <ac:spMk id="4" creationId="{EDE2C345-46AF-7BD6-498D-F7D2F8B95787}"/>
           </ac:spMkLst>
         </pc:spChg>
+        <pc:spChg chg="add mod">
+          <ac:chgData name="Pablo Inzunza" userId="be16ff5b34c21876" providerId="LiveId" clId="{CC6937A5-FA4E-485C-A7D4-0E92CAEDBC02}" dt="2026-03-21T14:27:57.122" v="789" actId="207"/>
+          <ac:spMkLst>
+            <pc:docMk/>
+            <pc:sldMk cId="1318690124" sldId="257"/>
+            <ac:spMk id="5" creationId="{2D7C80BE-0584-A939-1D91-2B67482C041E}"/>
+          </ac:spMkLst>
+        </pc:spChg>
         <pc:spChg chg="mod">
-          <ac:chgData name="Pablo Inzunza" userId="be16ff5b34c21876" providerId="LiveId" clId="{CC6937A5-FA4E-485C-A7D4-0E92CAEDBC02}" dt="2026-03-18T00:15:23.472" v="36" actId="14100"/>
+          <ac:chgData name="Pablo Inzunza" userId="be16ff5b34c21876" providerId="LiveId" clId="{CC6937A5-FA4E-485C-A7D4-0E92CAEDBC02}" dt="2026-03-21T14:39:11.731" v="824" actId="207"/>
+          <ac:spMkLst>
+            <pc:docMk/>
+            <pc:sldMk cId="1318690124" sldId="257"/>
+            <ac:spMk id="7" creationId="{F3A3603B-79AF-D417-5658-66BE40CC0194}"/>
+          </ac:spMkLst>
+        </pc:spChg>
+        <pc:spChg chg="add mod">
+          <ac:chgData name="Pablo Inzunza" userId="be16ff5b34c21876" providerId="LiveId" clId="{CC6937A5-FA4E-485C-A7D4-0E92CAEDBC02}" dt="2026-03-21T13:55:47.147" v="355"/>
+          <ac:spMkLst>
+            <pc:docMk/>
+            <pc:sldMk cId="1318690124" sldId="257"/>
+            <ac:spMk id="8" creationId="{C85CDD13-1620-F823-19CC-1252C64340FF}"/>
+          </ac:spMkLst>
+        </pc:spChg>
+        <pc:spChg chg="add mod">
+          <ac:chgData name="Pablo Inzunza" userId="be16ff5b34c21876" providerId="LiveId" clId="{CC6937A5-FA4E-485C-A7D4-0E92CAEDBC02}" dt="2026-03-21T14:49:49.576" v="849"/>
+          <ac:spMkLst>
+            <pc:docMk/>
+            <pc:sldMk cId="1318690124" sldId="257"/>
+            <ac:spMk id="9" creationId="{5EF819F9-2531-FE82-BC7C-46CBEF108FA6}"/>
+          </ac:spMkLst>
+        </pc:spChg>
+        <pc:spChg chg="add mod ord">
+          <ac:chgData name="Pablo Inzunza" userId="be16ff5b34c21876" providerId="LiveId" clId="{CC6937A5-FA4E-485C-A7D4-0E92CAEDBC02}" dt="2026-03-21T14:31:05.652" v="808" actId="34135"/>
+          <ac:spMkLst>
+            <pc:docMk/>
+            <pc:sldMk cId="1318690124" sldId="257"/>
+            <ac:spMk id="10" creationId="{878D7C1B-CA19-AEF8-F740-5CCAE3A54C2B}"/>
+          </ac:spMkLst>
+        </pc:spChg>
+        <pc:spChg chg="add mod">
+          <ac:chgData name="Pablo Inzunza" userId="be16ff5b34c21876" providerId="LiveId" clId="{CC6937A5-FA4E-485C-A7D4-0E92CAEDBC02}" dt="2026-03-21T16:36:50.106" v="1416"/>
+          <ac:spMkLst>
+            <pc:docMk/>
+            <pc:sldMk cId="1318690124" sldId="257"/>
+            <ac:spMk id="11" creationId="{D03CF166-63B5-8ADB-26EC-432458BCACEC}"/>
+          </ac:spMkLst>
+        </pc:spChg>
+        <pc:spChg chg="add mod">
+          <ac:chgData name="Pablo Inzunza" userId="be16ff5b34c21876" providerId="LiveId" clId="{CC6937A5-FA4E-485C-A7D4-0E92CAEDBC02}" dt="2026-03-21T16:36:50.106" v="1416"/>
+          <ac:spMkLst>
+            <pc:docMk/>
+            <pc:sldMk cId="1318690124" sldId="257"/>
+            <ac:spMk id="12" creationId="{8B5B6252-38CB-E86F-7778-CCCB047C9F0E}"/>
+          </ac:spMkLst>
+        </pc:spChg>
+        <pc:spChg chg="add del mod">
+          <ac:chgData name="Pablo Inzunza" userId="be16ff5b34c21876" providerId="LiveId" clId="{CC6937A5-FA4E-485C-A7D4-0E92CAEDBC02}" dt="2026-03-22T01:56:24.078" v="1505" actId="478"/>
+          <ac:spMkLst>
+            <pc:docMk/>
+            <pc:sldMk cId="1318690124" sldId="257"/>
+            <ac:spMk id="13" creationId="{7A9E681C-D0F8-E8B4-43B3-4985CE13B5F2}"/>
+          </ac:spMkLst>
+        </pc:spChg>
+        <pc:spChg chg="add del mod">
+          <ac:chgData name="Pablo Inzunza" userId="be16ff5b34c21876" providerId="LiveId" clId="{CC6937A5-FA4E-485C-A7D4-0E92CAEDBC02}" dt="2026-03-21T16:36:16.653" v="1405" actId="478"/>
+          <ac:spMkLst>
+            <pc:docMk/>
+            <pc:sldMk cId="1318690124" sldId="257"/>
+            <ac:spMk id="14" creationId="{38D99553-A305-9C67-A5B6-39AA8AEF663F}"/>
+          </ac:spMkLst>
+        </pc:spChg>
+        <pc:spChg chg="add mod">
+          <ac:chgData name="Pablo Inzunza" userId="be16ff5b34c21876" providerId="LiveId" clId="{CC6937A5-FA4E-485C-A7D4-0E92CAEDBC02}" dt="2026-03-22T01:44:34.786" v="1504" actId="962"/>
+          <ac:spMkLst>
+            <pc:docMk/>
+            <pc:sldMk cId="1318690124" sldId="257"/>
+            <ac:spMk id="14" creationId="{5D447AE2-B61D-D1DC-05BC-F34B831CD16A}"/>
+          </ac:spMkLst>
+        </pc:spChg>
+        <pc:spChg chg="add mod">
+          <ac:chgData name="Pablo Inzunza" userId="be16ff5b34c21876" providerId="LiveId" clId="{CC6937A5-FA4E-485C-A7D4-0E92CAEDBC02}" dt="2026-03-22T01:56:41.340" v="1508"/>
+          <ac:spMkLst>
+            <pc:docMk/>
+            <pc:sldMk cId="1318690124" sldId="257"/>
+            <ac:spMk id="15" creationId="{32AD3C9E-DDDF-4D9D-B63D-2A470824C62E}"/>
+          </ac:spMkLst>
+        </pc:spChg>
+        <pc:spChg chg="add del mod">
+          <ac:chgData name="Pablo Inzunza" userId="be16ff5b34c21876" providerId="LiveId" clId="{CC6937A5-FA4E-485C-A7D4-0E92CAEDBC02}" dt="2026-03-21T16:36:11.069" v="1402" actId="478"/>
+          <ac:spMkLst>
+            <pc:docMk/>
+            <pc:sldMk cId="1318690124" sldId="257"/>
+            <ac:spMk id="15" creationId="{AA70AF45-8965-7CAA-3FFD-A59B27FEBEB0}"/>
+          </ac:spMkLst>
+        </pc:spChg>
+        <pc:spChg chg="mod">
+          <ac:chgData name="Pablo Inzunza" userId="be16ff5b34c21876" providerId="LiveId" clId="{CC6937A5-FA4E-485C-A7D4-0E92CAEDBC02}" dt="2026-03-21T14:41:31.139" v="833" actId="207"/>
+          <ac:spMkLst>
+            <pc:docMk/>
+            <pc:sldMk cId="1318690124" sldId="257"/>
+            <ac:spMk id="16" creationId="{1F5A1DAC-70BD-AB65-CE9F-DA8CB602BEC9}"/>
+          </ac:spMkLst>
+        </pc:spChg>
+        <pc:spChg chg="mod">
+          <ac:chgData name="Pablo Inzunza" userId="be16ff5b34c21876" providerId="LiveId" clId="{CC6937A5-FA4E-485C-A7D4-0E92CAEDBC02}" dt="2026-03-21T14:39:11.731" v="824" actId="207"/>
+          <ac:spMkLst>
+            <pc:docMk/>
+            <pc:sldMk cId="1318690124" sldId="257"/>
+            <ac:spMk id="17" creationId="{DA89A897-AD8F-98D1-EAB1-BEE6E9B3B5B5}"/>
+          </ac:spMkLst>
+        </pc:spChg>
+        <pc:spChg chg="mod">
+          <ac:chgData name="Pablo Inzunza" userId="be16ff5b34c21876" providerId="LiveId" clId="{CC6937A5-FA4E-485C-A7D4-0E92CAEDBC02}" dt="2026-03-21T14:39:11.731" v="824" actId="207"/>
           <ac:spMkLst>
             <pc:docMk/>
             <pc:sldMk cId="1318690124" sldId="257"/>
             <ac:spMk id="18" creationId="{F5D78837-6B1C-4F9A-CAC4-873FD71F2E32}"/>
           </ac:spMkLst>
         </pc:spChg>
-        <pc:spChg chg="del">
-          <ac:chgData name="Pablo Inzunza" userId="be16ff5b34c21876" providerId="LiveId" clId="{CC6937A5-FA4E-485C-A7D4-0E92CAEDBC02}" dt="2026-03-18T00:14:30.276" v="20" actId="478"/>
+        <pc:spChg chg="add mod">
+          <ac:chgData name="Pablo Inzunza" userId="be16ff5b34c21876" providerId="LiveId" clId="{CC6937A5-FA4E-485C-A7D4-0E92CAEDBC02}" dt="2026-03-22T01:56:41.340" v="1508"/>
           <ac:spMkLst>
             <pc:docMk/>
             <pc:sldMk cId="1318690124" sldId="257"/>
-            <ac:spMk id="30" creationId="{4C03329B-26F2-3251-53D1-3B820896E74B}"/>
-          </ac:spMkLst>
-        </pc:spChg>
-        <pc:spChg chg="del mod">
-          <ac:chgData name="Pablo Inzunza" userId="be16ff5b34c21876" providerId="LiveId" clId="{CC6937A5-FA4E-485C-A7D4-0E92CAEDBC02}" dt="2026-03-18T00:14:29.642" v="19" actId="478"/>
+            <ac:spMk id="19" creationId="{6959F0E8-D105-D742-C106-E9C86706510C}"/>
+          </ac:spMkLst>
+        </pc:spChg>
+        <pc:spChg chg="add del mod">
+          <ac:chgData name="Pablo Inzunza" userId="be16ff5b34c21876" providerId="LiveId" clId="{CC6937A5-FA4E-485C-A7D4-0E92CAEDBC02}" dt="2026-03-21T16:36:17.607" v="1406" actId="478"/>
           <ac:spMkLst>
             <pc:docMk/>
             <pc:sldMk cId="1318690124" sldId="257"/>
-            <ac:spMk id="32" creationId="{A5896BAD-0EBE-0A4E-E6DC-3114595A4119}"/>
-          </ac:spMkLst>
-        </pc:spChg>
-        <pc:spChg chg="del">
-          <ac:chgData name="Pablo Inzunza" userId="be16ff5b34c21876" providerId="LiveId" clId="{CC6937A5-FA4E-485C-A7D4-0E92CAEDBC02}" dt="2026-03-18T00:14:26.980" v="17" actId="478"/>
+            <ac:spMk id="19" creationId="{D82E4024-2D91-B596-049E-3E01E350EEBF}"/>
+          </ac:spMkLst>
+        </pc:spChg>
+        <pc:spChg chg="add mod">
+          <ac:chgData name="Pablo Inzunza" userId="be16ff5b34c21876" providerId="LiveId" clId="{CC6937A5-FA4E-485C-A7D4-0E92CAEDBC02}" dt="2026-03-22T01:56:41.340" v="1508"/>
           <ac:spMkLst>
             <pc:docMk/>
             <pc:sldMk cId="1318690124" sldId="257"/>
-            <ac:spMk id="38" creationId="{E65CBB7F-5B68-2E50-5BC6-F066D1D6C28D}"/>
-          </ac:spMkLst>
-        </pc:spChg>
-        <pc:spChg chg="del">
-          <ac:chgData name="Pablo Inzunza" userId="be16ff5b34c21876" providerId="LiveId" clId="{CC6937A5-FA4E-485C-A7D4-0E92CAEDBC02}" dt="2026-03-18T00:14:31.132" v="21" actId="478"/>
+            <ac:spMk id="20" creationId="{B1B55D47-CF28-DB6B-E628-594A6C1F6DB8}"/>
+          </ac:spMkLst>
+        </pc:spChg>
+        <pc:spChg chg="add del mod">
+          <ac:chgData name="Pablo Inzunza" userId="be16ff5b34c21876" providerId="LiveId" clId="{CC6937A5-FA4E-485C-A7D4-0E92CAEDBC02}" dt="2026-03-21T16:36:24.316" v="1411" actId="478"/>
           <ac:spMkLst>
             <pc:docMk/>
             <pc:sldMk cId="1318690124" sldId="257"/>
-            <ac:spMk id="39" creationId="{A2AC6E09-2657-C537-9778-28B300262FE9}"/>
-          </ac:spMkLst>
-        </pc:spChg>
-        <pc:picChg chg="del">
-          <ac:chgData name="Pablo Inzunza" userId="be16ff5b34c21876" providerId="LiveId" clId="{CC6937A5-FA4E-485C-A7D4-0E92CAEDBC02}" dt="2026-03-17T23:59:33.942" v="1" actId="478"/>
+            <ac:spMk id="20" creationId="{D3D23205-E1C0-A772-4E9E-71D85BB59216}"/>
+          </ac:spMkLst>
+        </pc:spChg>
+        <pc:spChg chg="add del mod">
+          <ac:chgData name="Pablo Inzunza" userId="be16ff5b34c21876" providerId="LiveId" clId="{CC6937A5-FA4E-485C-A7D4-0E92CAEDBC02}" dt="2026-03-21T16:36:22.781" v="1410" actId="478"/>
+          <ac:spMkLst>
+            <pc:docMk/>
+            <pc:sldMk cId="1318690124" sldId="257"/>
+            <ac:spMk id="21" creationId="{CE678B47-E779-0794-2C39-4C5C5DA205DC}"/>
+          </ac:spMkLst>
+        </pc:spChg>
+        <pc:spChg chg="mod">
+          <ac:chgData name="Pablo Inzunza" userId="be16ff5b34c21876" providerId="LiveId" clId="{CC6937A5-FA4E-485C-A7D4-0E92CAEDBC02}" dt="2026-03-21T14:18:38.997" v="767" actId="1076"/>
+          <ac:spMkLst>
+            <pc:docMk/>
+            <pc:sldMk cId="1318690124" sldId="257"/>
+            <ac:spMk id="22" creationId="{C3DE91E4-B638-A3E9-761B-B57DC14FC8AD}"/>
+          </ac:spMkLst>
+        </pc:spChg>
+        <pc:spChg chg="add del mod">
+          <ac:chgData name="Pablo Inzunza" userId="be16ff5b34c21876" providerId="LiveId" clId="{CC6937A5-FA4E-485C-A7D4-0E92CAEDBC02}" dt="2026-03-21T16:36:26.116" v="1412" actId="478"/>
+          <ac:spMkLst>
+            <pc:docMk/>
+            <pc:sldMk cId="1318690124" sldId="257"/>
+            <ac:spMk id="23" creationId="{B4DF88B3-4C8F-7B26-A3EF-6238A3000DE5}"/>
+          </ac:spMkLst>
+        </pc:spChg>
+        <pc:spChg chg="mod">
+          <ac:chgData name="Pablo Inzunza" userId="be16ff5b34c21876" providerId="LiveId" clId="{CC6937A5-FA4E-485C-A7D4-0E92CAEDBC02}" dt="2026-03-21T14:41:34.155" v="834" actId="207"/>
+          <ac:spMkLst>
+            <pc:docMk/>
+            <pc:sldMk cId="1318690124" sldId="257"/>
+            <ac:spMk id="24" creationId="{1DDD93A7-DCBA-B230-6C8C-0C1A8BD925B2}"/>
+          </ac:spMkLst>
+        </pc:spChg>
+        <pc:spChg chg="add del mod">
+          <ac:chgData name="Pablo Inzunza" userId="be16ff5b34c21876" providerId="LiveId" clId="{CC6937A5-FA4E-485C-A7D4-0E92CAEDBC02}" dt="2026-03-21T16:36:30.058" v="1414" actId="478"/>
+          <ac:spMkLst>
+            <pc:docMk/>
+            <pc:sldMk cId="1318690124" sldId="257"/>
+            <ac:spMk id="25" creationId="{6D9609C8-082F-B66E-CFEB-09324E0521E9}"/>
+          </ac:spMkLst>
+        </pc:spChg>
+        <pc:spChg chg="mod">
+          <ac:chgData name="Pablo Inzunza" userId="be16ff5b34c21876" providerId="LiveId" clId="{CC6937A5-FA4E-485C-A7D4-0E92CAEDBC02}" dt="2026-03-21T14:41:38.010" v="835" actId="207"/>
+          <ac:spMkLst>
+            <pc:docMk/>
+            <pc:sldMk cId="1318690124" sldId="257"/>
+            <ac:spMk id="26" creationId="{635183C3-63D2-1F5C-1885-FB3EB55E9821}"/>
+          </ac:spMkLst>
+        </pc:spChg>
+        <pc:spChg chg="add del mod">
+          <ac:chgData name="Pablo Inzunza" userId="be16ff5b34c21876" providerId="LiveId" clId="{CC6937A5-FA4E-485C-A7D4-0E92CAEDBC02}" dt="2026-03-21T16:36:31.549" v="1415" actId="478"/>
+          <ac:spMkLst>
+            <pc:docMk/>
+            <pc:sldMk cId="1318690124" sldId="257"/>
+            <ac:spMk id="28" creationId="{9CCA45EC-A42E-4F24-5130-A517797F3710}"/>
+          </ac:spMkLst>
+        </pc:spChg>
+        <pc:spChg chg="add del mod">
+          <ac:chgData name="Pablo Inzunza" userId="be16ff5b34c21876" providerId="LiveId" clId="{CC6937A5-FA4E-485C-A7D4-0E92CAEDBC02}" dt="2026-03-22T01:56:26.518" v="1506" actId="478"/>
+          <ac:spMkLst>
+            <pc:docMk/>
+            <pc:sldMk cId="1318690124" sldId="257"/>
+            <ac:spMk id="29" creationId="{43B29D3E-5659-4384-1BB7-0B4D00B64EC9}"/>
+          </ac:spMkLst>
+        </pc:spChg>
+        <pc:spChg chg="add mod">
+          <ac:chgData name="Pablo Inzunza" userId="be16ff5b34c21876" providerId="LiveId" clId="{CC6937A5-FA4E-485C-A7D4-0E92CAEDBC02}" dt="2026-03-21T16:36:50.106" v="1416"/>
+          <ac:spMkLst>
+            <pc:docMk/>
+            <pc:sldMk cId="1318690124" sldId="257"/>
+            <ac:spMk id="30" creationId="{20CA8919-6D7E-E05E-F338-1DFDCF723379}"/>
+          </ac:spMkLst>
+        </pc:spChg>
+        <pc:spChg chg="add del mod">
+          <ac:chgData name="Pablo Inzunza" userId="be16ff5b34c21876" providerId="LiveId" clId="{CC6937A5-FA4E-485C-A7D4-0E92CAEDBC02}" dt="2026-03-21T16:36:27.733" v="1413" actId="478"/>
+          <ac:spMkLst>
+            <pc:docMk/>
+            <pc:sldMk cId="1318690124" sldId="257"/>
+            <ac:spMk id="31" creationId="{85D1EDEC-ACA5-B3D4-28C4-3EE04B79291C}"/>
+          </ac:spMkLst>
+        </pc:spChg>
+        <pc:spChg chg="mod">
+          <ac:chgData name="Pablo Inzunza" userId="be16ff5b34c21876" providerId="LiveId" clId="{CC6937A5-FA4E-485C-A7D4-0E92CAEDBC02}" dt="2026-03-21T13:55:37.804" v="351" actId="34136"/>
+          <ac:spMkLst>
+            <pc:docMk/>
+            <pc:sldMk cId="1318690124" sldId="257"/>
+            <ac:spMk id="31" creationId="{B3EDA84E-48AF-BB5F-C13E-A83AB448BAA8}"/>
+          </ac:spMkLst>
+        </pc:spChg>
+        <pc:spChg chg="add mod">
+          <ac:chgData name="Pablo Inzunza" userId="be16ff5b34c21876" providerId="LiveId" clId="{CC6937A5-FA4E-485C-A7D4-0E92CAEDBC02}" dt="2026-03-22T02:46:20.915" v="1515" actId="20577"/>
+          <ac:spMkLst>
+            <pc:docMk/>
+            <pc:sldMk cId="1318690124" sldId="257"/>
+            <ac:spMk id="32" creationId="{5FE8F156-B54D-6D2C-0641-4BEAF32F4A22}"/>
+          </ac:spMkLst>
+        </pc:spChg>
+        <pc:spChg chg="add mod">
+          <ac:chgData name="Pablo Inzunza" userId="be16ff5b34c21876" providerId="LiveId" clId="{CC6937A5-FA4E-485C-A7D4-0E92CAEDBC02}" dt="2026-03-22T02:46:25.307" v="1518" actId="20577"/>
+          <ac:spMkLst>
+            <pc:docMk/>
+            <pc:sldMk cId="1318690124" sldId="257"/>
+            <ac:spMk id="33" creationId="{6D3157EE-83C7-6C4A-D1A1-F3C3E2D99E0D}"/>
+          </ac:spMkLst>
+        </pc:spChg>
+        <pc:spChg chg="mod">
+          <ac:chgData name="Pablo Inzunza" userId="be16ff5b34c21876" providerId="LiveId" clId="{CC6937A5-FA4E-485C-A7D4-0E92CAEDBC02}" dt="2026-03-21T13:55:37.804" v="351" actId="34136"/>
+          <ac:spMkLst>
+            <pc:docMk/>
+            <pc:sldMk cId="1318690124" sldId="257"/>
+            <ac:spMk id="34" creationId="{B367FA57-8CF5-1C10-2208-7BCEA99B0481}"/>
+          </ac:spMkLst>
+        </pc:spChg>
+        <pc:spChg chg="add del mod">
+          <ac:chgData name="Pablo Inzunza" userId="be16ff5b34c21876" providerId="LiveId" clId="{CC6937A5-FA4E-485C-A7D4-0E92CAEDBC02}" dt="2026-03-22T01:56:28.646" v="1507" actId="478"/>
+          <ac:spMkLst>
+            <pc:docMk/>
+            <pc:sldMk cId="1318690124" sldId="257"/>
+            <ac:spMk id="34" creationId="{F9C5307C-DC4A-5263-57EA-E008049C85DA}"/>
+          </ac:spMkLst>
+        </pc:spChg>
+        <pc:spChg chg="mod">
+          <ac:chgData name="Pablo Inzunza" userId="be16ff5b34c21876" providerId="LiveId" clId="{CC6937A5-FA4E-485C-A7D4-0E92CAEDBC02}" dt="2026-03-21T13:55:41.125" v="352" actId="6549"/>
+          <ac:spMkLst>
+            <pc:docMk/>
+            <pc:sldMk cId="1318690124" sldId="257"/>
+            <ac:spMk id="35" creationId="{72F6A78F-813D-56B6-1ECD-BBA5581EEAAE}"/>
+          </ac:spMkLst>
+        </pc:spChg>
+        <pc:spChg chg="mod">
+          <ac:chgData name="Pablo Inzunza" userId="be16ff5b34c21876" providerId="LiveId" clId="{CC6937A5-FA4E-485C-A7D4-0E92CAEDBC02}" dt="2026-03-21T13:55:37.804" v="351" actId="34136"/>
+          <ac:spMkLst>
+            <pc:docMk/>
+            <pc:sldMk cId="1318690124" sldId="257"/>
+            <ac:spMk id="36" creationId="{89381C84-F153-3CF7-46C9-E4B16A0B4DAB}"/>
+          </ac:spMkLst>
+        </pc:spChg>
+        <pc:grpChg chg="del mod">
+          <ac:chgData name="Pablo Inzunza" userId="be16ff5b34c21876" providerId="LiveId" clId="{CC6937A5-FA4E-485C-A7D4-0E92CAEDBC02}" dt="2026-03-21T13:55:45.428" v="354" actId="478"/>
+          <ac:grpSpMkLst>
+            <pc:docMk/>
+            <pc:sldMk cId="1318690124" sldId="257"/>
+            <ac:grpSpMk id="28" creationId="{0D21D9B5-8A82-AA14-5E21-0805250645F7}"/>
+          </ac:grpSpMkLst>
+        </pc:grpChg>
+        <pc:picChg chg="add mod">
+          <ac:chgData name="Pablo Inzunza" userId="be16ff5b34c21876" providerId="LiveId" clId="{CC6937A5-FA4E-485C-A7D4-0E92CAEDBC02}" dt="2026-03-21T13:55:47.147" v="355"/>
           <ac:picMkLst>
             <pc:docMk/>
             <pc:sldMk cId="1318690124" sldId="257"/>
-            <ac:picMk id="40" creationId="{00000000-0000-0000-0000-000000000000}"/>
+            <ac:picMk id="6" creationId="{E408347F-49F3-A2DF-DB85-792C5FC4E46D}"/>
           </ac:picMkLst>
         </pc:picChg>
-        <pc:picChg chg="del">
-          <ac:chgData name="Pablo Inzunza" userId="be16ff5b34c21876" providerId="LiveId" clId="{CC6937A5-FA4E-485C-A7D4-0E92CAEDBC02}" dt="2026-03-17T23:59:34.454" v="2" actId="478"/>
+        <pc:picChg chg="add del mod">
+          <ac:chgData name="Pablo Inzunza" userId="be16ff5b34c21876" providerId="LiveId" clId="{CC6937A5-FA4E-485C-A7D4-0E92CAEDBC02}" dt="2026-03-21T16:31:13.654" v="1385" actId="478"/>
           <ac:picMkLst>
             <pc:docMk/>
             <pc:sldMk cId="1318690124" sldId="257"/>
-            <ac:picMk id="41" creationId="{00000000-0000-0000-0000-000000000000}"/>
+            <ac:picMk id="11" creationId="{0179022E-0D0F-8C5B-7DF1-44C50E375BBA}"/>
           </ac:picMkLst>
         </pc:picChg>
-        <pc:picChg chg="del">
-          <ac:chgData name="Pablo Inzunza" userId="be16ff5b34c21876" providerId="LiveId" clId="{CC6937A5-FA4E-485C-A7D4-0E92CAEDBC02}" dt="2026-03-17T23:59:34.989" v="3" actId="478"/>
+        <pc:picChg chg="add del mod">
+          <ac:chgData name="Pablo Inzunza" userId="be16ff5b34c21876" providerId="LiveId" clId="{CC6937A5-FA4E-485C-A7D4-0E92CAEDBC02}" dt="2026-03-21T16:31:14.213" v="1386" actId="478"/>
           <ac:picMkLst>
             <pc:docMk/>
             <pc:sldMk cId="1318690124" sldId="257"/>
-            <ac:picMk id="42" creationId="{00000000-0000-0000-0000-000000000000}"/>
+            <ac:picMk id="12" creationId="{743BE4D1-BF71-6B65-6C8F-CDFA4A75A119}"/>
           </ac:picMkLst>
         </pc:picChg>
+        <pc:picChg chg="add del mod">
+          <ac:chgData name="Pablo Inzunza" userId="be16ff5b34c21876" providerId="LiveId" clId="{CC6937A5-FA4E-485C-A7D4-0E92CAEDBC02}" dt="2026-03-21T16:31:14.830" v="1387" actId="478"/>
+          <ac:picMkLst>
+            <pc:docMk/>
+            <pc:sldMk cId="1318690124" sldId="257"/>
+            <ac:picMk id="13" creationId="{2B7F81B7-A14C-DE33-12E5-BE5889C22DC4}"/>
+          </ac:picMkLst>
+        </pc:picChg>
+        <pc:picChg chg="mod">
+          <ac:chgData name="Pablo Inzunza" userId="be16ff5b34c21876" providerId="LiveId" clId="{CC6937A5-FA4E-485C-A7D4-0E92CAEDBC02}" dt="2026-03-21T13:55:37.804" v="351" actId="34136"/>
+          <ac:picMkLst>
+            <pc:docMk/>
+            <pc:sldMk cId="1318690124" sldId="257"/>
+            <ac:picMk id="29" creationId="{7AB97237-D587-2A7A-D147-042B3877270D}"/>
+          </ac:picMkLst>
+        </pc:picChg>
+        <pc:picChg chg="add mod">
+          <ac:chgData name="Pablo Inzunza" userId="be16ff5b34c21876" providerId="LiveId" clId="{CC6937A5-FA4E-485C-A7D4-0E92CAEDBC02}" dt="2026-03-21T15:44:45.347" v="1063"/>
+          <ac:picMkLst>
+            <pc:docMk/>
+            <pc:sldMk cId="1318690124" sldId="257"/>
+            <ac:picMk id="29" creationId="{B876E20D-0B8F-E49A-3F6C-A5817A606CBD}"/>
+          </ac:picMkLst>
+        </pc:picChg>
+        <pc:picChg chg="add mod">
+          <ac:chgData name="Pablo Inzunza" userId="be16ff5b34c21876" providerId="LiveId" clId="{CC6937A5-FA4E-485C-A7D4-0E92CAEDBC02}" dt="2026-03-21T15:44:48.347" v="1064"/>
+          <ac:picMkLst>
+            <pc:docMk/>
+            <pc:sldMk cId="1318690124" sldId="257"/>
+            <ac:picMk id="30" creationId="{1F363C94-84CD-58CF-45AB-EF504045AE74}"/>
+          </ac:picMkLst>
+        </pc:picChg>
+        <pc:picChg chg="del mod">
+          <ac:chgData name="Pablo Inzunza" userId="be16ff5b34c21876" providerId="LiveId" clId="{CC6937A5-FA4E-485C-A7D4-0E92CAEDBC02}" dt="2026-03-21T13:55:44.804" v="353" actId="478"/>
+          <ac:picMkLst>
+            <pc:docMk/>
+            <pc:sldMk cId="1318690124" sldId="257"/>
+            <ac:picMk id="33" creationId="{1BDD774F-6A13-76E7-BCD0-34D1968DF825}"/>
+          </ac:picMkLst>
+        </pc:picChg>
+        <pc:cxnChg chg="mod">
+          <ac:chgData name="Pablo Inzunza" userId="be16ff5b34c21876" providerId="LiveId" clId="{CC6937A5-FA4E-485C-A7D4-0E92CAEDBC02}" dt="2026-03-21T13:56:19.253" v="361" actId="1076"/>
+          <ac:cxnSpMkLst>
+            <pc:docMk/>
+            <pc:sldMk cId="1318690124" sldId="257"/>
+            <ac:cxnSpMk id="27" creationId="{20205C4A-24C2-7B12-EAEB-6D3C34DB67D7}"/>
+          </ac:cxnSpMkLst>
+        </pc:cxnChg>
       </pc:sldChg>
       <pc:sldChg chg="addSp delSp modSp mod">
-        <pc:chgData name="Pablo Inzunza" userId="be16ff5b34c21876" providerId="LiveId" clId="{CC6937A5-FA4E-485C-A7D4-0E92CAEDBC02}" dt="2026-03-18T01:18:06.596" v="148" actId="108"/>
+        <pc:chgData name="Pablo Inzunza" userId="be16ff5b34c21876" providerId="LiveId" clId="{CC6937A5-FA4E-485C-A7D4-0E92CAEDBC02}" dt="2026-03-22T01:26:28.694" v="1457"/>
         <pc:sldMkLst>
           <pc:docMk/>
           <pc:sldMk cId="315006707" sldId="259"/>
         </pc:sldMkLst>
+        <pc:spChg chg="mod">
+          <ac:chgData name="Pablo Inzunza" userId="be16ff5b34c21876" providerId="LiveId" clId="{CC6937A5-FA4E-485C-A7D4-0E92CAEDBC02}" dt="2026-03-21T14:40:49.869" v="826" actId="207"/>
+          <ac:spMkLst>
+            <pc:docMk/>
+            <pc:sldMk cId="315006707" sldId="259"/>
+            <ac:spMk id="2" creationId="{805E9EFF-9DE1-C7E9-5893-DD7195680F49}"/>
+          </ac:spMkLst>
+        </pc:spChg>
+        <pc:spChg chg="mod topLvl">
+          <ac:chgData name="Pablo Inzunza" userId="be16ff5b34c21876" providerId="LiveId" clId="{CC6937A5-FA4E-485C-A7D4-0E92CAEDBC02}" dt="2026-03-21T14:32:19.214" v="810" actId="207"/>
+          <ac:spMkLst>
+            <pc:docMk/>
+            <pc:sldMk cId="315006707" sldId="259"/>
+            <ac:spMk id="3" creationId="{243C684E-FD74-28C1-9592-4A6D44CB6F7C}"/>
+          </ac:spMkLst>
+        </pc:spChg>
+        <pc:spChg chg="mod topLvl">
+          <ac:chgData name="Pablo Inzunza" userId="be16ff5b34c21876" providerId="LiveId" clId="{CC6937A5-FA4E-485C-A7D4-0E92CAEDBC02}" dt="2026-03-21T14:27:47.018" v="787" actId="34135"/>
+          <ac:spMkLst>
+            <pc:docMk/>
+            <pc:sldMk cId="315006707" sldId="259"/>
+            <ac:spMk id="5" creationId="{45037354-7B54-BB32-594B-E67E22EE4E67}"/>
+          </ac:spMkLst>
+        </pc:spChg>
         <pc:spChg chg="add mod ord">
-          <ac:chgData name="Pablo Inzunza" userId="be16ff5b34c21876" providerId="LiveId" clId="{CC6937A5-FA4E-485C-A7D4-0E92CAEDBC02}" dt="2026-03-18T00:17:03.254" v="61" actId="962"/>
+          <ac:chgData name="Pablo Inzunza" userId="be16ff5b34c21876" providerId="LiveId" clId="{CC6937A5-FA4E-485C-A7D4-0E92CAEDBC02}" dt="2026-03-21T14:31:09.501" v="809" actId="34135"/>
+          <ac:spMkLst>
+            <pc:docMk/>
+            <pc:sldMk cId="315006707" sldId="259"/>
+            <ac:spMk id="6" creationId="{000A578B-A20E-7908-578D-E18B24957BF2}"/>
+          </ac:spMkLst>
+        </pc:spChg>
+        <pc:spChg chg="add del mod">
+          <ac:chgData name="Pablo Inzunza" userId="be16ff5b34c21876" providerId="LiveId" clId="{CC6937A5-FA4E-485C-A7D4-0E92CAEDBC02}" dt="2026-03-21T14:02:30.862" v="495" actId="478"/>
+          <ac:spMkLst>
+            <pc:docMk/>
+            <pc:sldMk cId="315006707" sldId="259"/>
+            <ac:spMk id="6" creationId="{84F53689-A4EC-76C3-4E1D-B4696037308C}"/>
+          </ac:spMkLst>
+        </pc:spChg>
+        <pc:spChg chg="add mod ord">
+          <ac:chgData name="Pablo Inzunza" userId="be16ff5b34c21876" providerId="LiveId" clId="{CC6937A5-FA4E-485C-A7D4-0E92CAEDBC02}" dt="2026-03-21T14:49:40.286" v="848" actId="14100"/>
           <ac:spMkLst>
             <pc:docMk/>
             <pc:sldMk cId="315006707" sldId="259"/>
@@ -374,7 +950,7 @@
           </ac:spMkLst>
         </pc:spChg>
         <pc:spChg chg="mod">
-          <ac:chgData name="Pablo Inzunza" userId="be16ff5b34c21876" providerId="LiveId" clId="{CC6937A5-FA4E-485C-A7D4-0E92CAEDBC02}" dt="2026-03-18T01:15:53.805" v="121"/>
+          <ac:chgData name="Pablo Inzunza" userId="be16ff5b34c21876" providerId="LiveId" clId="{CC6937A5-FA4E-485C-A7D4-0E92CAEDBC02}" dt="2026-03-21T14:37:37.912" v="817" actId="207"/>
           <ac:spMkLst>
             <pc:docMk/>
             <pc:sldMk cId="315006707" sldId="259"/>
@@ -382,31 +958,55 @@
           </ac:spMkLst>
         </pc:spChg>
         <pc:spChg chg="add mod">
-          <ac:chgData name="Pablo Inzunza" userId="be16ff5b34c21876" providerId="LiveId" clId="{CC6937A5-FA4E-485C-A7D4-0E92CAEDBC02}" dt="2026-03-18T01:16:37.695" v="130" actId="1076"/>
+          <ac:chgData name="Pablo Inzunza" userId="be16ff5b34c21876" providerId="LiveId" clId="{CC6937A5-FA4E-485C-A7D4-0E92CAEDBC02}" dt="2026-03-21T14:41:24.164" v="832" actId="207"/>
           <ac:spMkLst>
             <pc:docMk/>
             <pc:sldMk cId="315006707" sldId="259"/>
             <ac:spMk id="9" creationId="{E7FA502B-8543-4932-9794-80F2C68C9D82}"/>
           </ac:spMkLst>
         </pc:spChg>
-        <pc:spChg chg="mod">
-          <ac:chgData name="Pablo Inzunza" userId="be16ff5b34c21876" providerId="LiveId" clId="{CC6937A5-FA4E-485C-A7D4-0E92CAEDBC02}" dt="2026-03-18T01:17:16.935" v="136"/>
+        <pc:spChg chg="add mod">
+          <ac:chgData name="Pablo Inzunza" userId="be16ff5b34c21876" providerId="LiveId" clId="{CC6937A5-FA4E-485C-A7D4-0E92CAEDBC02}" dt="2026-03-21T16:35:26.057" v="1401"/>
+          <ac:spMkLst>
+            <pc:docMk/>
+            <pc:sldMk cId="315006707" sldId="259"/>
+            <ac:spMk id="10" creationId="{70D2677A-770C-318F-6217-1E531D1F3702}"/>
+          </ac:spMkLst>
+        </pc:spChg>
+        <pc:spChg chg="del mod">
+          <ac:chgData name="Pablo Inzunza" userId="be16ff5b34c21876" providerId="LiveId" clId="{CC6937A5-FA4E-485C-A7D4-0E92CAEDBC02}" dt="2026-03-21T14:01:52.102" v="484" actId="478"/>
           <ac:spMkLst>
             <pc:docMk/>
             <pc:sldMk cId="315006707" sldId="259"/>
             <ac:spMk id="10" creationId="{B94141C6-AF0A-5EEE-E06A-C7ADAD832418}"/>
           </ac:spMkLst>
         </pc:spChg>
-        <pc:spChg chg="mod">
-          <ac:chgData name="Pablo Inzunza" userId="be16ff5b34c21876" providerId="LiveId" clId="{CC6937A5-FA4E-485C-A7D4-0E92CAEDBC02}" dt="2026-03-18T01:01:37.247" v="115" actId="962"/>
+        <pc:spChg chg="del mod">
+          <ac:chgData name="Pablo Inzunza" userId="be16ff5b34c21876" providerId="LiveId" clId="{CC6937A5-FA4E-485C-A7D4-0E92CAEDBC02}" dt="2026-03-21T14:01:51.461" v="483" actId="478"/>
           <ac:spMkLst>
             <pc:docMk/>
             <pc:sldMk cId="315006707" sldId="259"/>
             <ac:spMk id="11" creationId="{3DB16137-132D-DC43-4F47-12244820A1BC}"/>
           </ac:spMkLst>
         </pc:spChg>
+        <pc:spChg chg="add mod">
+          <ac:chgData name="Pablo Inzunza" userId="be16ff5b34c21876" providerId="LiveId" clId="{CC6937A5-FA4E-485C-A7D4-0E92CAEDBC02}" dt="2026-03-22T01:26:28.694" v="1457"/>
+          <ac:spMkLst>
+            <pc:docMk/>
+            <pc:sldMk cId="315006707" sldId="259"/>
+            <ac:spMk id="11" creationId="{A2DC9657-1264-A813-03DC-3FDF24159EB4}"/>
+          </ac:spMkLst>
+        </pc:spChg>
+        <pc:spChg chg="add del mod">
+          <ac:chgData name="Pablo Inzunza" userId="be16ff5b34c21876" providerId="LiveId" clId="{CC6937A5-FA4E-485C-A7D4-0E92CAEDBC02}" dt="2026-03-21T16:35:21.051" v="1397" actId="478"/>
+          <ac:spMkLst>
+            <pc:docMk/>
+            <pc:sldMk cId="315006707" sldId="259"/>
+            <ac:spMk id="11" creationId="{D2DB5A9E-F939-2361-8CFE-BD3A92346D66}"/>
+          </ac:spMkLst>
+        </pc:spChg>
         <pc:spChg chg="mod">
-          <ac:chgData name="Pablo Inzunza" userId="be16ff5b34c21876" providerId="LiveId" clId="{CC6937A5-FA4E-485C-A7D4-0E92CAEDBC02}" dt="2026-03-18T01:03:18.606" v="117" actId="962"/>
+          <ac:chgData name="Pablo Inzunza" userId="be16ff5b34c21876" providerId="LiveId" clId="{CC6937A5-FA4E-485C-A7D4-0E92CAEDBC02}" dt="2026-03-21T14:37:50.947" v="818" actId="207"/>
           <ac:spMkLst>
             <pc:docMk/>
             <pc:sldMk cId="315006707" sldId="259"/>
@@ -414,23 +1014,119 @@
           </ac:spMkLst>
         </pc:spChg>
         <pc:spChg chg="add mod">
-          <ac:chgData name="Pablo Inzunza" userId="be16ff5b34c21876" providerId="LiveId" clId="{CC6937A5-FA4E-485C-A7D4-0E92CAEDBC02}" dt="2026-03-18T01:17:44.357" v="144" actId="14100"/>
+          <ac:chgData name="Pablo Inzunza" userId="be16ff5b34c21876" providerId="LiveId" clId="{CC6937A5-FA4E-485C-A7D4-0E92CAEDBC02}" dt="2026-03-21T14:41:20.141" v="831" actId="207"/>
           <ac:spMkLst>
             <pc:docMk/>
             <pc:sldMk cId="315006707" sldId="259"/>
             <ac:spMk id="13" creationId="{2BED03D5-C8B5-D234-BF38-36DAB19265BF}"/>
           </ac:spMkLst>
         </pc:spChg>
+        <pc:spChg chg="add del mod">
+          <ac:chgData name="Pablo Inzunza" userId="be16ff5b34c21876" providerId="LiveId" clId="{CC6937A5-FA4E-485C-A7D4-0E92CAEDBC02}" dt="2026-03-21T16:35:23.380" v="1399" actId="478"/>
+          <ac:spMkLst>
+            <pc:docMk/>
+            <pc:sldMk cId="315006707" sldId="259"/>
+            <ac:spMk id="14" creationId="{705DE155-DA8B-EDDC-696D-5D89C4FCD2B4}"/>
+          </ac:spMkLst>
+        </pc:spChg>
+        <pc:spChg chg="add del mod">
+          <ac:chgData name="Pablo Inzunza" userId="be16ff5b34c21876" providerId="LiveId" clId="{CC6937A5-FA4E-485C-A7D4-0E92CAEDBC02}" dt="2026-03-21T14:02:30.862" v="495" actId="478"/>
+          <ac:spMkLst>
+            <pc:docMk/>
+            <pc:sldMk cId="315006707" sldId="259"/>
+            <ac:spMk id="14" creationId="{EF23481B-AFFE-1DF7-1DD4-7A4C02C62173}"/>
+          </ac:spMkLst>
+        </pc:spChg>
+        <pc:spChg chg="del mod">
+          <ac:chgData name="Pablo Inzunza" userId="be16ff5b34c21876" providerId="LiveId" clId="{CC6937A5-FA4E-485C-A7D4-0E92CAEDBC02}" dt="2026-03-21T13:47:43.594" v="297" actId="478"/>
+          <ac:spMkLst>
+            <pc:docMk/>
+            <pc:sldMk cId="315006707" sldId="259"/>
+            <ac:spMk id="14" creationId="{FF7C722F-9063-9D48-1EC4-C1E295146C78}"/>
+          </ac:spMkLst>
+        </pc:spChg>
         <pc:spChg chg="mod">
-          <ac:chgData name="Pablo Inzunza" userId="be16ff5b34c21876" providerId="LiveId" clId="{CC6937A5-FA4E-485C-A7D4-0E92CAEDBC02}" dt="2026-03-18T01:04:53.194" v="119" actId="962"/>
+          <ac:chgData name="Pablo Inzunza" userId="be16ff5b34c21876" providerId="LiveId" clId="{CC6937A5-FA4E-485C-A7D4-0E92CAEDBC02}" dt="2026-03-21T14:38:29.539" v="821" actId="207"/>
           <ac:spMkLst>
             <pc:docMk/>
             <pc:sldMk cId="315006707" sldId="259"/>
             <ac:spMk id="15" creationId="{30B24A05-B4F3-EB92-8A27-285D6078E0F7}"/>
           </ac:spMkLst>
         </pc:spChg>
+        <pc:spChg chg="mod">
+          <ac:chgData name="Pablo Inzunza" userId="be16ff5b34c21876" providerId="LiveId" clId="{CC6937A5-FA4E-485C-A7D4-0E92CAEDBC02}" dt="2026-03-21T15:38:28.216" v="906" actId="2711"/>
+          <ac:spMkLst>
+            <pc:docMk/>
+            <pc:sldMk cId="315006707" sldId="259"/>
+            <ac:spMk id="16" creationId="{FE9F8B30-3004-637F-B0D5-3044FF8E32B0}"/>
+          </ac:spMkLst>
+        </pc:spChg>
+        <pc:spChg chg="add mod ord">
+          <ac:chgData name="Pablo Inzunza" userId="be16ff5b34c21876" providerId="LiveId" clId="{CC6937A5-FA4E-485C-A7D4-0E92CAEDBC02}" dt="2026-03-21T15:59:04.432" v="1371" actId="962"/>
+          <ac:spMkLst>
+            <pc:docMk/>
+            <pc:sldMk cId="315006707" sldId="259"/>
+            <ac:spMk id="17" creationId="{05F5D0CB-D0AA-EE82-E3D5-42C67015D445}"/>
+          </ac:spMkLst>
+        </pc:spChg>
+        <pc:spChg chg="del mod">
+          <ac:chgData name="Pablo Inzunza" userId="be16ff5b34c21876" providerId="LiveId" clId="{CC6937A5-FA4E-485C-A7D4-0E92CAEDBC02}" dt="2026-03-21T13:47:43.066" v="296" actId="478"/>
+          <ac:spMkLst>
+            <pc:docMk/>
+            <pc:sldMk cId="315006707" sldId="259"/>
+            <ac:spMk id="17" creationId="{D6E6AF4A-1DB9-6D06-B5C9-2FDA3F2E6904}"/>
+          </ac:spMkLst>
+        </pc:spChg>
+        <pc:spChg chg="add mod ord">
+          <ac:chgData name="Pablo Inzunza" userId="be16ff5b34c21876" providerId="LiveId" clId="{CC6937A5-FA4E-485C-A7D4-0E92CAEDBC02}" dt="2026-03-21T15:59:21.184" v="1372" actId="962"/>
+          <ac:spMkLst>
+            <pc:docMk/>
+            <pc:sldMk cId="315006707" sldId="259"/>
+            <ac:spMk id="18" creationId="{AD49E93F-20D6-93CA-4D73-14434617D6A4}"/>
+          </ac:spMkLst>
+        </pc:spChg>
+        <pc:spChg chg="mod">
+          <ac:chgData name="Pablo Inzunza" userId="be16ff5b34c21876" providerId="LiveId" clId="{CC6937A5-FA4E-485C-A7D4-0E92CAEDBC02}" dt="2026-03-21T14:57:30.055" v="851" actId="113"/>
+          <ac:spMkLst>
+            <pc:docMk/>
+            <pc:sldMk cId="315006707" sldId="259"/>
+            <ac:spMk id="19" creationId="{18DDBA4C-C080-4242-A14C-134A62C8959F}"/>
+          </ac:spMkLst>
+        </pc:spChg>
+        <pc:spChg chg="mod topLvl">
+          <ac:chgData name="Pablo Inzunza" userId="be16ff5b34c21876" providerId="LiveId" clId="{CC6937A5-FA4E-485C-A7D4-0E92CAEDBC02}" dt="2026-03-21T13:50:32.518" v="322" actId="2711"/>
+          <ac:spMkLst>
+            <pc:docMk/>
+            <pc:sldMk cId="315006707" sldId="259"/>
+            <ac:spMk id="20" creationId="{D074A6F0-4B53-95B0-A880-60470F1EA1FC}"/>
+          </ac:spMkLst>
+        </pc:spChg>
+        <pc:spChg chg="del">
+          <ac:chgData name="Pablo Inzunza" userId="be16ff5b34c21876" providerId="LiveId" clId="{CC6937A5-FA4E-485C-A7D4-0E92CAEDBC02}" dt="2026-03-21T13:34:29.881" v="177" actId="478"/>
+          <ac:spMkLst>
+            <pc:docMk/>
+            <pc:sldMk cId="315006707" sldId="259"/>
+            <ac:spMk id="21" creationId="{4C24B7D0-229A-B8F3-DAA3-3D947D0AC2C7}"/>
+          </ac:spMkLst>
+        </pc:spChg>
+        <pc:spChg chg="add del mod">
+          <ac:chgData name="Pablo Inzunza" userId="be16ff5b34c21876" providerId="LiveId" clId="{CC6937A5-FA4E-485C-A7D4-0E92CAEDBC02}" dt="2026-03-21T16:35:24.924" v="1400" actId="478"/>
+          <ac:spMkLst>
+            <pc:docMk/>
+            <pc:sldMk cId="315006707" sldId="259"/>
+            <ac:spMk id="21" creationId="{692F6F5D-AC26-DD5B-54A2-FBC96E770072}"/>
+          </ac:spMkLst>
+        </pc:spChg>
+        <pc:spChg chg="mod">
+          <ac:chgData name="Pablo Inzunza" userId="be16ff5b34c21876" providerId="LiveId" clId="{CC6937A5-FA4E-485C-A7D4-0E92CAEDBC02}" dt="2026-03-21T15:38:19.966" v="905" actId="255"/>
+          <ac:spMkLst>
+            <pc:docMk/>
+            <pc:sldMk cId="315006707" sldId="259"/>
+            <ac:spMk id="22" creationId="{C3DE91E4-B638-A3E9-761B-B57DC14FC8AD}"/>
+          </ac:spMkLst>
+        </pc:spChg>
         <pc:spChg chg="add mod">
-          <ac:chgData name="Pablo Inzunza" userId="be16ff5b34c21876" providerId="LiveId" clId="{CC6937A5-FA4E-485C-A7D4-0E92CAEDBC02}" dt="2026-03-18T01:17:39.594" v="143" actId="1076"/>
+          <ac:chgData name="Pablo Inzunza" userId="be16ff5b34c21876" providerId="LiveId" clId="{CC6937A5-FA4E-485C-A7D4-0E92CAEDBC02}" dt="2026-03-21T14:41:15.628" v="830" actId="207"/>
           <ac:spMkLst>
             <pc:docMk/>
             <pc:sldMk cId="315006707" sldId="259"/>
@@ -438,45 +1134,117 @@
           </ac:spMkLst>
         </pc:spChg>
         <pc:spChg chg="mod">
-          <ac:chgData name="Pablo Inzunza" userId="be16ff5b34c21876" providerId="LiveId" clId="{CC6937A5-FA4E-485C-A7D4-0E92CAEDBC02}" dt="2026-03-18T01:04:58.994" v="120" actId="962"/>
+          <ac:chgData name="Pablo Inzunza" userId="be16ff5b34c21876" providerId="LiveId" clId="{CC6937A5-FA4E-485C-A7D4-0E92CAEDBC02}" dt="2026-03-21T14:49:19.062" v="840" actId="14100"/>
           <ac:spMkLst>
             <pc:docMk/>
             <pc:sldMk cId="315006707" sldId="259"/>
             <ac:spMk id="25" creationId="{0FB669B4-B760-BB69-D0D5-AA6753B614A2}"/>
           </ac:spMkLst>
         </pc:spChg>
-        <pc:spChg chg="del">
-          <ac:chgData name="Pablo Inzunza" userId="be16ff5b34c21876" providerId="LiveId" clId="{CC6937A5-FA4E-485C-A7D4-0E92CAEDBC02}" dt="2026-03-18T00:14:15.198" v="14" actId="478"/>
-          <ac:spMkLst>
-            <pc:docMk/>
-            <pc:sldMk cId="315006707" sldId="259"/>
-            <ac:spMk id="26" creationId="{673E6091-A867-1725-D9D9-D83467018601}"/>
-          </ac:spMkLst>
-        </pc:spChg>
         <pc:spChg chg="add mod">
-          <ac:chgData name="Pablo Inzunza" userId="be16ff5b34c21876" providerId="LiveId" clId="{CC6937A5-FA4E-485C-A7D4-0E92CAEDBC02}" dt="2026-03-18T01:18:06.596" v="148" actId="108"/>
+          <ac:chgData name="Pablo Inzunza" userId="be16ff5b34c21876" providerId="LiveId" clId="{CC6937A5-FA4E-485C-A7D4-0E92CAEDBC02}" dt="2026-03-21T14:41:11.309" v="829" actId="207"/>
           <ac:spMkLst>
             <pc:docMk/>
             <pc:sldMk cId="315006707" sldId="259"/>
             <ac:spMk id="26" creationId="{7CCC135C-342B-8570-61EB-50BA11EDA2BF}"/>
           </ac:spMkLst>
         </pc:spChg>
-        <pc:spChg chg="del mod">
-          <ac:chgData name="Pablo Inzunza" userId="be16ff5b34c21876" providerId="LiveId" clId="{CC6937A5-FA4E-485C-A7D4-0E92CAEDBC02}" dt="2026-03-18T00:14:13.630" v="12" actId="478"/>
+        <pc:spChg chg="mod ord">
+          <ac:chgData name="Pablo Inzunza" userId="be16ff5b34c21876" providerId="LiveId" clId="{CC6937A5-FA4E-485C-A7D4-0E92CAEDBC02}" dt="2026-03-21T15:58:37.628" v="1370" actId="962"/>
           <ac:spMkLst>
             <pc:docMk/>
             <pc:sldMk cId="315006707" sldId="259"/>
-            <ac:spMk id="27" creationId="{0BD4439F-E635-CA8F-E581-44DC0A409722}"/>
-          </ac:spMkLst>
-        </pc:spChg>
-        <pc:picChg chg="del">
-          <ac:chgData name="Pablo Inzunza" userId="be16ff5b34c21876" providerId="LiveId" clId="{CC6937A5-FA4E-485C-A7D4-0E92CAEDBC02}" dt="2026-03-17T23:59:32.401" v="0" actId="478"/>
+            <ac:spMk id="27" creationId="{26A0902A-00E0-EEB0-2D42-69F3B12DDBF7}"/>
+          </ac:spMkLst>
+        </pc:spChg>
+        <pc:spChg chg="mod">
+          <ac:chgData name="Pablo Inzunza" userId="be16ff5b34c21876" providerId="LiveId" clId="{CC6937A5-FA4E-485C-A7D4-0E92CAEDBC02}" dt="2026-03-21T14:29:26.056" v="795" actId="108"/>
+          <ac:spMkLst>
+            <pc:docMk/>
+            <pc:sldMk cId="315006707" sldId="259"/>
+            <ac:spMk id="28" creationId="{18871C0F-DB0D-D0A8-A267-0F687A3A2885}"/>
+          </ac:spMkLst>
+        </pc:spChg>
+        <pc:spChg chg="mod">
+          <ac:chgData name="Pablo Inzunza" userId="be16ff5b34c21876" providerId="LiveId" clId="{CC6937A5-FA4E-485C-A7D4-0E92CAEDBC02}" dt="2026-03-21T15:38:32.225" v="907" actId="2711"/>
+          <ac:spMkLst>
+            <pc:docMk/>
+            <pc:sldMk cId="315006707" sldId="259"/>
+            <ac:spMk id="29" creationId="{795856EF-806B-3B55-0326-1D3FA97C27F4}"/>
+          </ac:spMkLst>
+        </pc:spChg>
+        <pc:spChg chg="mod">
+          <ac:chgData name="Pablo Inzunza" userId="be16ff5b34c21876" providerId="LiveId" clId="{CC6937A5-FA4E-485C-A7D4-0E92CAEDBC02}" dt="2026-03-21T15:38:35.488" v="908" actId="2711"/>
+          <ac:spMkLst>
+            <pc:docMk/>
+            <pc:sldMk cId="315006707" sldId="259"/>
+            <ac:spMk id="30" creationId="{A7ED3D17-E67B-320D-8326-C0F4BF606E80}"/>
+          </ac:spMkLst>
+        </pc:spChg>
+        <pc:spChg chg="mod">
+          <ac:chgData name="Pablo Inzunza" userId="be16ff5b34c21876" providerId="LiveId" clId="{CC6937A5-FA4E-485C-A7D4-0E92CAEDBC02}" dt="2026-03-21T15:38:39.046" v="909" actId="2711"/>
+          <ac:spMkLst>
+            <pc:docMk/>
+            <pc:sldMk cId="315006707" sldId="259"/>
+            <ac:spMk id="31" creationId="{88096BFF-5B98-4AD5-E1C1-E106F9897406}"/>
+          </ac:spMkLst>
+        </pc:spChg>
+        <pc:spChg chg="add mod">
+          <ac:chgData name="Pablo Inzunza" userId="be16ff5b34c21876" providerId="LiveId" clId="{CC6937A5-FA4E-485C-A7D4-0E92CAEDBC02}" dt="2026-03-21T16:35:26.057" v="1401"/>
+          <ac:spMkLst>
+            <pc:docMk/>
+            <pc:sldMk cId="315006707" sldId="259"/>
+            <ac:spMk id="32" creationId="{EACB6DFB-AB94-626B-15C5-C99FA0818214}"/>
+          </ac:spMkLst>
+        </pc:spChg>
+        <pc:spChg chg="add del mod">
+          <ac:chgData name="Pablo Inzunza" userId="be16ff5b34c21876" providerId="LiveId" clId="{CC6937A5-FA4E-485C-A7D4-0E92CAEDBC02}" dt="2026-03-22T01:26:24.453" v="1456" actId="478"/>
+          <ac:spMkLst>
+            <pc:docMk/>
+            <pc:sldMk cId="315006707" sldId="259"/>
+            <ac:spMk id="33" creationId="{D58C5EEC-0092-BC58-C508-239CA6A9A84F}"/>
+          </ac:spMkLst>
+        </pc:spChg>
+        <pc:grpChg chg="add del">
+          <ac:chgData name="Pablo Inzunza" userId="be16ff5b34c21876" providerId="LiveId" clId="{CC6937A5-FA4E-485C-A7D4-0E92CAEDBC02}" dt="2026-03-21T13:49:48.864" v="319" actId="165"/>
+          <ac:grpSpMkLst>
+            <pc:docMk/>
+            <pc:sldMk cId="315006707" sldId="259"/>
+            <ac:grpSpMk id="18" creationId="{15293861-804D-4902-202A-4F059A7981FD}"/>
+          </ac:grpSpMkLst>
+        </pc:grpChg>
+        <pc:picChg chg="mod topLvl">
+          <ac:chgData name="Pablo Inzunza" userId="be16ff5b34c21876" providerId="LiveId" clId="{CC6937A5-FA4E-485C-A7D4-0E92CAEDBC02}" dt="2026-03-21T13:49:48.864" v="319" actId="165"/>
           <ac:picMkLst>
             <pc:docMk/>
             <pc:sldMk cId="315006707" sldId="259"/>
-            <ac:picMk id="28" creationId="{00000000-0000-0000-0000-000000000000}"/>
+            <ac:picMk id="4" creationId="{C989712D-2BB9-0543-3F3C-C500BEA7BFB9}"/>
           </ac:picMkLst>
         </pc:picChg>
+        <pc:picChg chg="del mod topLvl">
+          <ac:chgData name="Pablo Inzunza" userId="be16ff5b34c21876" providerId="LiveId" clId="{CC6937A5-FA4E-485C-A7D4-0E92CAEDBC02}" dt="2026-03-21T13:49:51.020" v="320" actId="478"/>
+          <ac:picMkLst>
+            <pc:docMk/>
+            <pc:sldMk cId="315006707" sldId="259"/>
+            <ac:picMk id="6" creationId="{8C91C574-6856-B273-0044-0652910EB494}"/>
+          </ac:picMkLst>
+        </pc:picChg>
+        <pc:picChg chg="add del mod">
+          <ac:chgData name="Pablo Inzunza" userId="be16ff5b34c21876" providerId="LiveId" clId="{CC6937A5-FA4E-485C-A7D4-0E92CAEDBC02}" dt="2026-03-21T16:31:11.599" v="1384" actId="478"/>
+          <ac:picMkLst>
+            <pc:docMk/>
+            <pc:sldMk cId="315006707" sldId="259"/>
+            <ac:picMk id="10" creationId="{FF956C1C-99F6-7F14-5F32-673D4674CA73}"/>
+          </ac:picMkLst>
+        </pc:picChg>
+        <pc:cxnChg chg="mod">
+          <ac:chgData name="Pablo Inzunza" userId="be16ff5b34c21876" providerId="LiveId" clId="{CC6937A5-FA4E-485C-A7D4-0E92CAEDBC02}" dt="2026-03-21T13:47:40.931" v="295" actId="1076"/>
+          <ac:cxnSpMkLst>
+            <pc:docMk/>
+            <pc:sldMk cId="315006707" sldId="259"/>
+            <ac:cxnSpMk id="24" creationId="{10E37143-0C8A-6B1F-AC4F-14B7C834734B}"/>
+          </ac:cxnSpMkLst>
+        </pc:cxnChg>
       </pc:sldChg>
     </pc:docChg>
   </pc:docChgLst>
@@ -614,7 +1382,7 @@
           <a:p>
             <a:fld id="{C1175F80-2F39-40DD-909D-7A02119CCA88}" type="datetimeFigureOut">
               <a:rPr lang="es-CL" smtClean="0"/>
-              <a:t>20-03-2026</a:t>
+              <a:t>21-03-2026</a:t>
             </a:fld>
             <a:endParaRPr lang="es-CL"/>
           </a:p>
@@ -784,7 +1552,7 @@
           <a:p>
             <a:fld id="{C1175F80-2F39-40DD-909D-7A02119CCA88}" type="datetimeFigureOut">
               <a:rPr lang="es-CL" smtClean="0"/>
-              <a:t>20-03-2026</a:t>
+              <a:t>21-03-2026</a:t>
             </a:fld>
             <a:endParaRPr lang="es-CL"/>
           </a:p>
@@ -964,7 +1732,7 @@
           <a:p>
             <a:fld id="{C1175F80-2F39-40DD-909D-7A02119CCA88}" type="datetimeFigureOut">
               <a:rPr lang="es-CL" smtClean="0"/>
-              <a:t>20-03-2026</a:t>
+              <a:t>21-03-2026</a:t>
             </a:fld>
             <a:endParaRPr lang="es-CL"/>
           </a:p>
@@ -1134,7 +1902,7 @@
           <a:p>
             <a:fld id="{C1175F80-2F39-40DD-909D-7A02119CCA88}" type="datetimeFigureOut">
               <a:rPr lang="es-CL" smtClean="0"/>
-              <a:t>20-03-2026</a:t>
+              <a:t>21-03-2026</a:t>
             </a:fld>
             <a:endParaRPr lang="es-CL"/>
           </a:p>
@@ -1380,7 +2148,7 @@
           <a:p>
             <a:fld id="{C1175F80-2F39-40DD-909D-7A02119CCA88}" type="datetimeFigureOut">
               <a:rPr lang="es-CL" smtClean="0"/>
-              <a:t>20-03-2026</a:t>
+              <a:t>21-03-2026</a:t>
             </a:fld>
             <a:endParaRPr lang="es-CL"/>
           </a:p>
@@ -1612,7 +2380,7 @@
           <a:p>
             <a:fld id="{C1175F80-2F39-40DD-909D-7A02119CCA88}" type="datetimeFigureOut">
               <a:rPr lang="es-CL" smtClean="0"/>
-              <a:t>20-03-2026</a:t>
+              <a:t>21-03-2026</a:t>
             </a:fld>
             <a:endParaRPr lang="es-CL"/>
           </a:p>
@@ -1979,7 +2747,7 @@
           <a:p>
             <a:fld id="{C1175F80-2F39-40DD-909D-7A02119CCA88}" type="datetimeFigureOut">
               <a:rPr lang="es-CL" smtClean="0"/>
-              <a:t>20-03-2026</a:t>
+              <a:t>21-03-2026</a:t>
             </a:fld>
             <a:endParaRPr lang="es-CL"/>
           </a:p>
@@ -2097,7 +2865,7 @@
           <a:p>
             <a:fld id="{C1175F80-2F39-40DD-909D-7A02119CCA88}" type="datetimeFigureOut">
               <a:rPr lang="es-CL" smtClean="0"/>
-              <a:t>20-03-2026</a:t>
+              <a:t>21-03-2026</a:t>
             </a:fld>
             <a:endParaRPr lang="es-CL"/>
           </a:p>
@@ -2192,7 +2960,7 @@
           <a:p>
             <a:fld id="{C1175F80-2F39-40DD-909D-7A02119CCA88}" type="datetimeFigureOut">
               <a:rPr lang="es-CL" smtClean="0"/>
-              <a:t>20-03-2026</a:t>
+              <a:t>21-03-2026</a:t>
             </a:fld>
             <a:endParaRPr lang="es-CL"/>
           </a:p>
@@ -2469,7 +3237,7 @@
           <a:p>
             <a:fld id="{C1175F80-2F39-40DD-909D-7A02119CCA88}" type="datetimeFigureOut">
               <a:rPr lang="es-CL" smtClean="0"/>
-              <a:t>20-03-2026</a:t>
+              <a:t>21-03-2026</a:t>
             </a:fld>
             <a:endParaRPr lang="es-CL"/>
           </a:p>
@@ -2726,7 +3494,7 @@
           <a:p>
             <a:fld id="{C1175F80-2F39-40DD-909D-7A02119CCA88}" type="datetimeFigureOut">
               <a:rPr lang="es-CL" smtClean="0"/>
-              <a:t>20-03-2026</a:t>
+              <a:t>21-03-2026</a:t>
             </a:fld>
             <a:endParaRPr lang="es-CL"/>
           </a:p>
@@ -2939,7 +3707,7 @@
           <a:p>
             <a:fld id="{C1175F80-2F39-40DD-909D-7A02119CCA88}" type="datetimeFigureOut">
               <a:rPr lang="es-CL" smtClean="0"/>
-              <a:t>20-03-2026</a:t>
+              <a:t>21-03-2026</a:t>
             </a:fld>
             <a:endParaRPr lang="es-CL"/>
           </a:p>
@@ -3344,456 +4112,516 @@
           <a:chExt cx="0" cy="0"/>
         </a:xfrm>
       </p:grpSpPr>
-      <p:grpSp>
-        <p:nvGrpSpPr>
-          <p:cNvPr id="18" name="Grupo 17">
+      <p:sp>
+        <p:nvSpPr>
+          <p:cNvPr id="6" name="Rectángulo 5">
             <a:extLst>
               <a:ext uri="{FF2B5EF4-FFF2-40B4-BE49-F238E27FC236}">
-                <a16:creationId xmlns:a16="http://schemas.microsoft.com/office/drawing/2014/main" id="{15293861-804D-4902-202A-4F059A7981FD}"/>
+                <a16:creationId xmlns:a16="http://schemas.microsoft.com/office/drawing/2014/main" id="{000A578B-A20E-7908-578D-E18B24957BF2}"/>
               </a:ext>
             </a:extLst>
           </p:cNvPr>
-          <p:cNvGrpSpPr>
-            <a:grpSpLocks/>
-          </p:cNvGrpSpPr>
+          <p:cNvSpPr>
+            <a:spLocks noGrp="1" noRot="1" noMove="1" noResize="1" noEditPoints="1" noAdjustHandles="1" noChangeArrowheads="1" noChangeShapeType="1"/>
+          </p:cNvSpPr>
           <p:nvPr/>
-        </p:nvGrpSpPr>
-        <p:grpSpPr>
+        </p:nvSpPr>
+        <p:spPr>
           <a:xfrm>
-            <a:off x="-652770" y="-15097"/>
-            <a:ext cx="11366231" cy="15134447"/>
-            <a:chOff x="-652770" y="-15097"/>
-            <a:chExt cx="11366231" cy="15134447"/>
+            <a:off x="1" y="1206418"/>
+            <a:ext cx="10691812" cy="13912932"/>
           </a:xfrm>
-        </p:grpSpPr>
-        <p:pic>
-          <p:nvPicPr>
-            <p:cNvPr id="6" name="Imagen 5">
-              <a:extLst>
-                <a:ext uri="{FF2B5EF4-FFF2-40B4-BE49-F238E27FC236}">
-                  <a16:creationId xmlns:a16="http://schemas.microsoft.com/office/drawing/2014/main" id="{8C91C574-6856-B273-0044-0652910EB494}"/>
-                </a:ext>
-              </a:extLst>
-            </p:cNvPr>
-            <p:cNvPicPr>
-              <a:picLocks noGrp="1" noRot="1" noChangeAspect="1" noMove="1" noResize="1" noEditPoints="1" noAdjustHandles="1" noChangeArrowheads="1" noChangeShapeType="1" noCrop="1"/>
-            </p:cNvPicPr>
-            <p:nvPr/>
-          </p:nvPicPr>
-          <p:blipFill rotWithShape="1">
-            <a:blip r:embed="rId2" cstate="print">
-              <a:extLst>
-                <a:ext uri="{28A0092B-C50C-407E-A947-70E740481C1C}">
-                  <a14:useLocalDpi xmlns:a14="http://schemas.microsoft.com/office/drawing/2010/main" val="0"/>
-                </a:ext>
-              </a:extLst>
-            </a:blip>
-            <a:srcRect l="25875" t="-3385" r="25875" b="6771"/>
-            <a:stretch/>
-          </p:blipFill>
-          <p:spPr>
-            <a:xfrm>
-              <a:off x="21648" y="388565"/>
-              <a:ext cx="10691813" cy="14730785"/>
-            </a:xfrm>
-            <a:prstGeom prst="rect">
+          <a:prstGeom prst="rect">
+            <a:avLst/>
+          </a:prstGeom>
+          <a:solidFill>
+            <a:srgbClr val="F5F4F0"/>
+          </a:solidFill>
+          <a:ln>
+            <a:solidFill>
+              <a:srgbClr val="F5F4F0"/>
+            </a:solidFill>
+          </a:ln>
+        </p:spPr>
+        <p:style>
+          <a:lnRef idx="2">
+            <a:schemeClr val="accent1">
+              <a:shade val="15000"/>
+            </a:schemeClr>
+          </a:lnRef>
+          <a:fillRef idx="1">
+            <a:schemeClr val="accent1"/>
+          </a:fillRef>
+          <a:effectRef idx="0">
+            <a:schemeClr val="accent1"/>
+          </a:effectRef>
+          <a:fontRef idx="minor">
+            <a:schemeClr val="lt1"/>
+          </a:fontRef>
+        </p:style>
+        <p:txBody>
+          <a:bodyPr rtlCol="0" anchor="ctr"/>
+          <a:lstStyle/>
+          <a:p>
+            <a:pPr algn="ctr"/>
+            <a:endParaRPr lang="es-CL"/>
+          </a:p>
+        </p:txBody>
+      </p:sp>
+      <p:sp>
+        <p:nvSpPr>
+          <p:cNvPr id="18" name="reduccion_max">
+            <a:extLst>
+              <a:ext uri="{FF2B5EF4-FFF2-40B4-BE49-F238E27FC236}">
+                <a16:creationId xmlns:a16="http://schemas.microsoft.com/office/drawing/2014/main" id="{AD49E93F-20D6-93CA-4D73-14434617D6A4}"/>
+              </a:ext>
+            </a:extLst>
+          </p:cNvPr>
+          <p:cNvSpPr>
+            <a:spLocks/>
+          </p:cNvSpPr>
+          <p:nvPr/>
+        </p:nvSpPr>
+        <p:spPr>
+          <a:xfrm>
+            <a:off x="8050444" y="3437709"/>
+            <a:ext cx="2250597" cy="1229705"/>
+          </a:xfrm>
+          <a:prstGeom prst="roundRect">
+            <a:avLst/>
+          </a:prstGeom>
+          <a:solidFill>
+            <a:srgbClr val="EDF4FB"/>
+          </a:solidFill>
+          <a:ln>
+            <a:solidFill>
+              <a:srgbClr val="EEF2F6"/>
+            </a:solidFill>
+          </a:ln>
+        </p:spPr>
+        <p:style>
+          <a:lnRef idx="2">
+            <a:schemeClr val="accent1">
+              <a:shade val="15000"/>
+            </a:schemeClr>
+          </a:lnRef>
+          <a:fillRef idx="1">
+            <a:schemeClr val="accent1"/>
+          </a:fillRef>
+          <a:effectRef idx="0">
+            <a:schemeClr val="accent1"/>
+          </a:effectRef>
+          <a:fontRef idx="minor">
+            <a:schemeClr val="lt1"/>
+          </a:fontRef>
+        </p:style>
+        <p:txBody>
+          <a:bodyPr rot="0" spcFirstLastPara="0" vert="horz" wrap="square" lIns="125786" tIns="62893" rIns="125786" bIns="62893" numCol="1" spcCol="0" rtlCol="0" fromWordArt="0" anchor="ctr" anchorCtr="0" forceAA="0" compatLnSpc="1">
+            <a:prstTxWarp prst="textNoShape">
               <a:avLst/>
-            </a:prstGeom>
-          </p:spPr>
-        </p:pic>
-        <p:sp>
-          <p:nvSpPr>
-            <p:cNvPr id="5" name="Rectángulo 4">
-              <a:extLst>
-                <a:ext uri="{FF2B5EF4-FFF2-40B4-BE49-F238E27FC236}">
-                  <a16:creationId xmlns:a16="http://schemas.microsoft.com/office/drawing/2014/main" id="{45037354-7B54-BB32-594B-E67E22EE4E67}"/>
-                </a:ext>
-              </a:extLst>
-            </p:cNvPr>
-            <p:cNvSpPr>
-              <a:spLocks/>
-            </p:cNvSpPr>
-            <p:nvPr/>
-          </p:nvSpPr>
-          <p:spPr>
-            <a:xfrm>
-              <a:off x="-21649" y="-15097"/>
-              <a:ext cx="10735109" cy="1931887"/>
-            </a:xfrm>
-            <a:prstGeom prst="rect">
+            </a:prstTxWarp>
+            <a:noAutofit/>
+          </a:bodyPr>
+          <a:lstStyle/>
+          <a:p>
+            <a:endParaRPr lang="es-CL" sz="3654"/>
+          </a:p>
+        </p:txBody>
+      </p:sp>
+      <p:sp>
+        <p:nvSpPr>
+          <p:cNvPr id="17" name="reduccion">
+            <a:extLst>
+              <a:ext uri="{FF2B5EF4-FFF2-40B4-BE49-F238E27FC236}">
+                <a16:creationId xmlns:a16="http://schemas.microsoft.com/office/drawing/2014/main" id="{05F5D0CB-D0AA-EE82-E3D5-42C67015D445}"/>
+              </a:ext>
+            </a:extLst>
+          </p:cNvPr>
+          <p:cNvSpPr>
+            <a:spLocks/>
+          </p:cNvSpPr>
+          <p:nvPr/>
+        </p:nvSpPr>
+        <p:spPr>
+          <a:xfrm>
+            <a:off x="5496336" y="3437710"/>
+            <a:ext cx="2451432" cy="1236696"/>
+          </a:xfrm>
+          <a:prstGeom prst="roundRect">
+            <a:avLst/>
+          </a:prstGeom>
+          <a:solidFill>
+            <a:srgbClr val="EDF4FB"/>
+          </a:solidFill>
+          <a:ln>
+            <a:solidFill>
+              <a:srgbClr val="EEF2F6"/>
+            </a:solidFill>
+          </a:ln>
+        </p:spPr>
+        <p:style>
+          <a:lnRef idx="2">
+            <a:schemeClr val="accent1">
+              <a:shade val="15000"/>
+            </a:schemeClr>
+          </a:lnRef>
+          <a:fillRef idx="1">
+            <a:schemeClr val="accent1"/>
+          </a:fillRef>
+          <a:effectRef idx="0">
+            <a:schemeClr val="accent1"/>
+          </a:effectRef>
+          <a:fontRef idx="minor">
+            <a:schemeClr val="lt1"/>
+          </a:fontRef>
+        </p:style>
+        <p:txBody>
+          <a:bodyPr rot="0" spcFirstLastPara="0" vert="horz" wrap="square" lIns="125786" tIns="62893" rIns="125786" bIns="62893" numCol="1" spcCol="0" rtlCol="0" fromWordArt="0" anchor="ctr" anchorCtr="0" forceAA="0" compatLnSpc="1">
+            <a:prstTxWarp prst="textNoShape">
               <a:avLst/>
-            </a:prstGeom>
-            <a:solidFill>
-              <a:srgbClr val="1F3B73"/>
-            </a:solidFill>
-          </p:spPr>
-          <p:style>
-            <a:lnRef idx="2">
-              <a:schemeClr val="accent1">
-                <a:shade val="15000"/>
-              </a:schemeClr>
-            </a:lnRef>
-            <a:fillRef idx="1">
-              <a:schemeClr val="accent1"/>
-            </a:fillRef>
-            <a:effectRef idx="0">
-              <a:schemeClr val="accent1"/>
-            </a:effectRef>
-            <a:fontRef idx="minor">
-              <a:schemeClr val="lt1"/>
-            </a:fontRef>
-          </p:style>
-          <p:txBody>
-            <a:bodyPr rot="0" spcFirstLastPara="0" vert="horz" wrap="square" lIns="125786" tIns="62893" rIns="125786" bIns="62893" numCol="1" spcCol="0" rtlCol="0" fromWordArt="0" anchor="ctr" anchorCtr="0" forceAA="0" compatLnSpc="1">
-              <a:prstTxWarp prst="textNoShape">
-                <a:avLst/>
-              </a:prstTxWarp>
-              <a:noAutofit/>
-            </a:bodyPr>
-            <a:lstStyle/>
-            <a:p>
-              <a:pPr marL="867437">
-                <a:lnSpc>
-                  <a:spcPct val="115000"/>
-                </a:lnSpc>
-                <a:spcAft>
-                  <a:spcPts val="1100"/>
-                </a:spcAft>
-              </a:pPr>
-              <a:r>
-                <a:rPr lang="es-CL" sz="2201" b="1" kern="100" dirty="0">
-                  <a:latin typeface="Segoe UI" panose="020B0502040204020203" pitchFamily="34" charset="0"/>
-                  <a:ea typeface="Aptos" panose="020B0004020202020204" pitchFamily="34" charset="0"/>
-                  <a:cs typeface="Times New Roman" panose="02020603050405020304" pitchFamily="18" charset="0"/>
-                </a:rPr>
-                <a:t> </a:t>
-              </a:r>
-              <a:endParaRPr lang="es-CL" sz="1651" kern="100" dirty="0">
-                <a:ea typeface="Aptos" panose="020B0004020202020204" pitchFamily="34" charset="0"/>
-                <a:cs typeface="Times New Roman" panose="02020603050405020304" pitchFamily="18" charset="0"/>
-              </a:endParaRPr>
-            </a:p>
-            <a:p>
-              <a:pPr marL="867437">
-                <a:lnSpc>
-                  <a:spcPct val="115000"/>
-                </a:lnSpc>
-                <a:spcAft>
-                  <a:spcPts val="1100"/>
-                </a:spcAft>
-              </a:pPr>
-              <a:endParaRPr lang="es-CL" sz="3654" b="1" kern="100" dirty="0">
+            </a:prstTxWarp>
+            <a:noAutofit/>
+          </a:bodyPr>
+          <a:lstStyle/>
+          <a:p>
+            <a:endParaRPr lang="es-CL" sz="3654" dirty="0"/>
+          </a:p>
+        </p:txBody>
+      </p:sp>
+      <p:sp>
+        <p:nvSpPr>
+          <p:cNvPr id="5" name="Rectángulo 4">
+            <a:extLst>
+              <a:ext uri="{FF2B5EF4-FFF2-40B4-BE49-F238E27FC236}">
+                <a16:creationId xmlns:a16="http://schemas.microsoft.com/office/drawing/2014/main" id="{45037354-7B54-BB32-594B-E67E22EE4E67}"/>
+              </a:ext>
+            </a:extLst>
+          </p:cNvPr>
+          <p:cNvSpPr>
+            <a:spLocks noGrp="1" noRot="1" noMove="1" noResize="1" noEditPoints="1" noAdjustHandles="1" noChangeArrowheads="1" noChangeShapeType="1"/>
+          </p:cNvSpPr>
+          <p:nvPr/>
+        </p:nvSpPr>
+        <p:spPr>
+          <a:xfrm>
+            <a:off x="-21649" y="-15096"/>
+            <a:ext cx="10735109" cy="1183703"/>
+          </a:xfrm>
+          <a:prstGeom prst="rect">
+            <a:avLst/>
+          </a:prstGeom>
+          <a:solidFill>
+            <a:srgbClr val="0F2B4E"/>
+          </a:solidFill>
+        </p:spPr>
+        <p:style>
+          <a:lnRef idx="2">
+            <a:schemeClr val="accent1">
+              <a:shade val="15000"/>
+            </a:schemeClr>
+          </a:lnRef>
+          <a:fillRef idx="1">
+            <a:schemeClr val="accent1"/>
+          </a:fillRef>
+          <a:effectRef idx="0">
+            <a:schemeClr val="accent1"/>
+          </a:effectRef>
+          <a:fontRef idx="minor">
+            <a:schemeClr val="lt1"/>
+          </a:fontRef>
+        </p:style>
+        <p:txBody>
+          <a:bodyPr rot="0" spcFirstLastPara="0" vert="horz" wrap="square" lIns="125786" tIns="62893" rIns="125786" bIns="62893" numCol="1" spcCol="0" rtlCol="0" fromWordArt="0" anchor="ctr" anchorCtr="0" forceAA="0" compatLnSpc="1">
+            <a:prstTxWarp prst="textNoShape">
+              <a:avLst/>
+            </a:prstTxWarp>
+            <a:noAutofit/>
+          </a:bodyPr>
+          <a:lstStyle/>
+          <a:p>
+            <a:pPr marL="867437">
+              <a:lnSpc>
+                <a:spcPct val="115000"/>
+              </a:lnSpc>
+              <a:spcAft>
+                <a:spcPts val="1100"/>
+              </a:spcAft>
+            </a:pPr>
+            <a:r>
+              <a:rPr lang="es-CL" sz="2201" b="1" kern="100" dirty="0">
                 <a:latin typeface="Segoe UI" panose="020B0502040204020203" pitchFamily="34" charset="0"/>
                 <a:ea typeface="Aptos" panose="020B0004020202020204" pitchFamily="34" charset="0"/>
                 <a:cs typeface="Times New Roman" panose="02020603050405020304" pitchFamily="18" charset="0"/>
-              </a:endParaRPr>
-            </a:p>
-            <a:p>
-              <a:pPr marL="867437">
-                <a:lnSpc>
-                  <a:spcPct val="115000"/>
-                </a:lnSpc>
-                <a:spcAft>
-                  <a:spcPts val="1100"/>
-                </a:spcAft>
-              </a:pPr>
-              <a:r>
-                <a:rPr lang="es-CL" sz="1376" b="1" kern="100" dirty="0">
-                  <a:latin typeface="Segoe UI" panose="020B0502040204020203" pitchFamily="34" charset="0"/>
-                  <a:ea typeface="Aptos" panose="020B0004020202020204" pitchFamily="34" charset="0"/>
-                  <a:cs typeface="Times New Roman" panose="02020603050405020304" pitchFamily="18" charset="0"/>
-                </a:rPr>
-                <a:t> </a:t>
-              </a:r>
-              <a:endParaRPr lang="es-CL" sz="1651" kern="100" dirty="0">
+              </a:rPr>
+              <a:t> </a:t>
+            </a:r>
+            <a:endParaRPr lang="es-CL" sz="1651" kern="100" dirty="0">
+              <a:ea typeface="Aptos" panose="020B0004020202020204" pitchFamily="34" charset="0"/>
+              <a:cs typeface="Times New Roman" panose="02020603050405020304" pitchFamily="18" charset="0"/>
+            </a:endParaRPr>
+          </a:p>
+          <a:p>
+            <a:pPr marL="867437">
+              <a:lnSpc>
+                <a:spcPct val="115000"/>
+              </a:lnSpc>
+              <a:spcAft>
+                <a:spcPts val="1100"/>
+              </a:spcAft>
+            </a:pPr>
+            <a:endParaRPr lang="es-CL" sz="3654" b="1" kern="100" dirty="0">
+              <a:latin typeface="Segoe UI" panose="020B0502040204020203" pitchFamily="34" charset="0"/>
+              <a:ea typeface="Aptos" panose="020B0004020202020204" pitchFamily="34" charset="0"/>
+              <a:cs typeface="Times New Roman" panose="02020603050405020304" pitchFamily="18" charset="0"/>
+            </a:endParaRPr>
+          </a:p>
+          <a:p>
+            <a:pPr marL="867437">
+              <a:lnSpc>
+                <a:spcPct val="115000"/>
+              </a:lnSpc>
+              <a:spcAft>
+                <a:spcPts val="1100"/>
+              </a:spcAft>
+            </a:pPr>
+            <a:r>
+              <a:rPr lang="es-CL" sz="1376" b="1" kern="100" dirty="0">
+                <a:latin typeface="Segoe UI" panose="020B0502040204020203" pitchFamily="34" charset="0"/>
                 <a:ea typeface="Aptos" panose="020B0004020202020204" pitchFamily="34" charset="0"/>
                 <a:cs typeface="Times New Roman" panose="02020603050405020304" pitchFamily="18" charset="0"/>
-              </a:endParaRPr>
-            </a:p>
-            <a:p>
-              <a:pPr marL="867437">
-                <a:lnSpc>
-                  <a:spcPct val="115000"/>
-                </a:lnSpc>
-                <a:spcAft>
-                  <a:spcPts val="1100"/>
-                </a:spcAft>
-              </a:pPr>
-              <a:r>
-                <a:rPr lang="es-CL" sz="1376" b="1" kern="100" dirty="0">
-                  <a:latin typeface="Segoe UI" panose="020B0502040204020203" pitchFamily="34" charset="0"/>
-                  <a:ea typeface="Aptos" panose="020B0004020202020204" pitchFamily="34" charset="0"/>
-                  <a:cs typeface="Times New Roman" panose="02020603050405020304" pitchFamily="18" charset="0"/>
-                </a:rPr>
-                <a:t> </a:t>
-              </a:r>
-              <a:endParaRPr lang="es-CL" sz="1651" kern="100" dirty="0">
+              </a:rPr>
+              <a:t> </a:t>
+            </a:r>
+            <a:endParaRPr lang="es-CL" sz="1651" kern="100" dirty="0">
+              <a:ea typeface="Aptos" panose="020B0004020202020204" pitchFamily="34" charset="0"/>
+              <a:cs typeface="Times New Roman" panose="02020603050405020304" pitchFamily="18" charset="0"/>
+            </a:endParaRPr>
+          </a:p>
+          <a:p>
+            <a:pPr marL="867437">
+              <a:lnSpc>
+                <a:spcPct val="115000"/>
+              </a:lnSpc>
+              <a:spcAft>
+                <a:spcPts val="1100"/>
+              </a:spcAft>
+            </a:pPr>
+            <a:r>
+              <a:rPr lang="es-CL" sz="1376" b="1" kern="100" dirty="0">
+                <a:latin typeface="Segoe UI" panose="020B0502040204020203" pitchFamily="34" charset="0"/>
                 <a:ea typeface="Aptos" panose="020B0004020202020204" pitchFamily="34" charset="0"/>
                 <a:cs typeface="Times New Roman" panose="02020603050405020304" pitchFamily="18" charset="0"/>
-              </a:endParaRPr>
-            </a:p>
-            <a:p>
-              <a:pPr marL="867437">
-                <a:lnSpc>
-                  <a:spcPct val="115000"/>
-                </a:lnSpc>
-                <a:spcAft>
-                  <a:spcPts val="1100"/>
-                </a:spcAft>
-              </a:pPr>
-              <a:r>
-                <a:rPr lang="es-CL" sz="1376" b="1" kern="100" dirty="0">
-                  <a:latin typeface="Segoe UI" panose="020B0502040204020203" pitchFamily="34" charset="0"/>
-                  <a:ea typeface="Aptos" panose="020B0004020202020204" pitchFamily="34" charset="0"/>
-                  <a:cs typeface="Times New Roman" panose="02020603050405020304" pitchFamily="18" charset="0"/>
-                </a:rPr>
-                <a:t> </a:t>
-              </a:r>
-              <a:endParaRPr lang="es-CL" sz="1651" kern="100" dirty="0">
+              </a:rPr>
+              <a:t> </a:t>
+            </a:r>
+            <a:endParaRPr lang="es-CL" sz="1651" kern="100" dirty="0">
+              <a:ea typeface="Aptos" panose="020B0004020202020204" pitchFamily="34" charset="0"/>
+              <a:cs typeface="Times New Roman" panose="02020603050405020304" pitchFamily="18" charset="0"/>
+            </a:endParaRPr>
+          </a:p>
+          <a:p>
+            <a:pPr marL="867437">
+              <a:lnSpc>
+                <a:spcPct val="115000"/>
+              </a:lnSpc>
+              <a:spcAft>
+                <a:spcPts val="1100"/>
+              </a:spcAft>
+            </a:pPr>
+            <a:r>
+              <a:rPr lang="es-CL" sz="1376" b="1" kern="100" dirty="0">
+                <a:latin typeface="Segoe UI" panose="020B0502040204020203" pitchFamily="34" charset="0"/>
                 <a:ea typeface="Aptos" panose="020B0004020202020204" pitchFamily="34" charset="0"/>
                 <a:cs typeface="Times New Roman" panose="02020603050405020304" pitchFamily="18" charset="0"/>
-              </a:endParaRPr>
-            </a:p>
-            <a:p>
-              <a:pPr marL="867437">
-                <a:lnSpc>
-                  <a:spcPct val="115000"/>
-                </a:lnSpc>
-                <a:spcAft>
-                  <a:spcPts val="1100"/>
-                </a:spcAft>
-              </a:pPr>
-              <a:r>
-                <a:rPr lang="es-CL" sz="2201" b="1" kern="100" dirty="0">
-                  <a:latin typeface="Segoe UI" panose="020B0502040204020203" pitchFamily="34" charset="0"/>
-                  <a:ea typeface="Aptos" panose="020B0004020202020204" pitchFamily="34" charset="0"/>
-                  <a:cs typeface="Times New Roman" panose="02020603050405020304" pitchFamily="18" charset="0"/>
-                </a:rPr>
-                <a:t> </a:t>
-              </a:r>
-              <a:endParaRPr lang="es-CL" sz="1651" kern="100" dirty="0">
+              </a:rPr>
+              <a:t> </a:t>
+            </a:r>
+            <a:endParaRPr lang="es-CL" sz="1651" kern="100" dirty="0">
+              <a:ea typeface="Aptos" panose="020B0004020202020204" pitchFamily="34" charset="0"/>
+              <a:cs typeface="Times New Roman" panose="02020603050405020304" pitchFamily="18" charset="0"/>
+            </a:endParaRPr>
+          </a:p>
+          <a:p>
+            <a:pPr marL="867437">
+              <a:lnSpc>
+                <a:spcPct val="115000"/>
+              </a:lnSpc>
+              <a:spcAft>
+                <a:spcPts val="1100"/>
+              </a:spcAft>
+            </a:pPr>
+            <a:r>
+              <a:rPr lang="es-CL" sz="2201" b="1" kern="100" dirty="0">
+                <a:latin typeface="Segoe UI" panose="020B0502040204020203" pitchFamily="34" charset="0"/>
                 <a:ea typeface="Aptos" panose="020B0004020202020204" pitchFamily="34" charset="0"/>
                 <a:cs typeface="Times New Roman" panose="02020603050405020304" pitchFamily="18" charset="0"/>
-              </a:endParaRPr>
-            </a:p>
-          </p:txBody>
-        </p:sp>
-        <p:pic>
-          <p:nvPicPr>
-            <p:cNvPr id="4" name="Imagen 3">
-              <a:extLst>
-                <a:ext uri="{FF2B5EF4-FFF2-40B4-BE49-F238E27FC236}">
-                  <a16:creationId xmlns:a16="http://schemas.microsoft.com/office/drawing/2014/main" id="{C989712D-2BB9-0543-3F3C-C500BEA7BFB9}"/>
-                </a:ext>
-              </a:extLst>
-            </p:cNvPr>
-            <p:cNvPicPr>
-              <a:picLocks noChangeAspect="1"/>
-            </p:cNvPicPr>
-            <p:nvPr/>
-          </p:nvPicPr>
-          <p:blipFill>
-            <a:blip r:embed="rId3" cstate="print">
-              <a:extLst>
-                <a:ext uri="{28A0092B-C50C-407E-A947-70E740481C1C}">
-                  <a14:useLocalDpi xmlns:a14="http://schemas.microsoft.com/office/drawing/2010/main" val="0"/>
-                </a:ext>
-              </a:extLst>
-            </a:blip>
-            <a:stretch>
-              <a:fillRect/>
-            </a:stretch>
-          </p:blipFill>
-          <p:spPr>
-            <a:xfrm>
-              <a:off x="8767282" y="215986"/>
-              <a:ext cx="1600278" cy="1453527"/>
-            </a:xfrm>
-            <a:prstGeom prst="rect">
-              <a:avLst/>
-            </a:prstGeom>
-          </p:spPr>
-        </p:pic>
-        <p:sp>
-          <p:nvSpPr>
-            <p:cNvPr id="20" name="CuadroTexto 19">
-              <a:extLst>
-                <a:ext uri="{FF2B5EF4-FFF2-40B4-BE49-F238E27FC236}">
-                  <a16:creationId xmlns:a16="http://schemas.microsoft.com/office/drawing/2014/main" id="{D074A6F0-4B53-95B0-A880-60470F1EA1FC}"/>
-                </a:ext>
-              </a:extLst>
-            </p:cNvPr>
-            <p:cNvSpPr txBox="1">
-              <a:spLocks/>
-            </p:cNvSpPr>
-            <p:nvPr/>
-          </p:nvSpPr>
-          <p:spPr>
-            <a:xfrm>
-              <a:off x="-652770" y="46814"/>
-              <a:ext cx="7720320" cy="559384"/>
-            </a:xfrm>
-            <a:prstGeom prst="rect">
-              <a:avLst/>
-            </a:prstGeom>
-            <a:noFill/>
-          </p:spPr>
-          <p:txBody>
-            <a:bodyPr wrap="square" rtlCol="0">
-              <a:spAutoFit/>
-            </a:bodyPr>
-            <a:lstStyle/>
-            <a:p>
-              <a:pPr marL="867437">
-                <a:lnSpc>
-                  <a:spcPct val="115000"/>
-                </a:lnSpc>
-                <a:spcAft>
-                  <a:spcPts val="1100"/>
-                </a:spcAft>
-              </a:pPr>
-              <a:r>
-                <a:rPr lang="es-CL" sz="2800" b="1" kern="100" dirty="0">
-                  <a:solidFill>
-                    <a:schemeClr val="bg1"/>
-                  </a:solidFill>
-                  <a:latin typeface="Segoe UI" panose="020B0502040204020203" pitchFamily="34" charset="0"/>
-                  <a:ea typeface="Aptos" panose="020B0004020202020204" pitchFamily="34" charset="0"/>
-                  <a:cs typeface="Times New Roman" panose="02020603050405020304" pitchFamily="18" charset="0"/>
-                </a:rPr>
-                <a:t>Mercados Mayoristas de generación</a:t>
-              </a:r>
-              <a:endParaRPr lang="es-CL" sz="1200" kern="100" dirty="0">
+              </a:rPr>
+              <a:t> </a:t>
+            </a:r>
+            <a:endParaRPr lang="es-CL" sz="1651" kern="100" dirty="0">
+              <a:ea typeface="Aptos" panose="020B0004020202020204" pitchFamily="34" charset="0"/>
+              <a:cs typeface="Times New Roman" panose="02020603050405020304" pitchFamily="18" charset="0"/>
+            </a:endParaRPr>
+          </a:p>
+        </p:txBody>
+      </p:sp>
+      <p:pic>
+        <p:nvPicPr>
+          <p:cNvPr id="4" name="Imagen 3">
+            <a:extLst>
+              <a:ext uri="{FF2B5EF4-FFF2-40B4-BE49-F238E27FC236}">
+                <a16:creationId xmlns:a16="http://schemas.microsoft.com/office/drawing/2014/main" id="{C989712D-2BB9-0543-3F3C-C500BEA7BFB9}"/>
+              </a:ext>
+            </a:extLst>
+          </p:cNvPr>
+          <p:cNvPicPr>
+            <a:picLocks noGrp="1" noRot="1" noChangeAspect="1" noMove="1" noResize="1" noEditPoints="1" noAdjustHandles="1" noChangeArrowheads="1" noChangeShapeType="1" noCrop="1"/>
+          </p:cNvPicPr>
+          <p:nvPr/>
+        </p:nvPicPr>
+        <p:blipFill>
+          <a:blip r:embed="rId2" cstate="print">
+            <a:extLst>
+              <a:ext uri="{28A0092B-C50C-407E-A947-70E740481C1C}">
+                <a14:useLocalDpi xmlns:a14="http://schemas.microsoft.com/office/drawing/2010/main" val="0"/>
+              </a:ext>
+            </a:extLst>
+          </a:blip>
+          <a:stretch>
+            <a:fillRect/>
+          </a:stretch>
+        </p:blipFill>
+        <p:spPr>
+          <a:xfrm>
+            <a:off x="9245849" y="150947"/>
+            <a:ext cx="1010737" cy="918049"/>
+          </a:xfrm>
+          <a:prstGeom prst="rect">
+            <a:avLst/>
+          </a:prstGeom>
+        </p:spPr>
+      </p:pic>
+      <p:sp>
+        <p:nvSpPr>
+          <p:cNvPr id="20" name="CuadroTexto 19">
+            <a:extLst>
+              <a:ext uri="{FF2B5EF4-FFF2-40B4-BE49-F238E27FC236}">
+                <a16:creationId xmlns:a16="http://schemas.microsoft.com/office/drawing/2014/main" id="{D074A6F0-4B53-95B0-A880-60470F1EA1FC}"/>
+              </a:ext>
+            </a:extLst>
+          </p:cNvPr>
+          <p:cNvSpPr txBox="1">
+            <a:spLocks noGrp="1" noRot="1" noMove="1" noResize="1" noEditPoints="1" noAdjustHandles="1" noChangeArrowheads="1" noChangeShapeType="1"/>
+          </p:cNvSpPr>
+          <p:nvPr/>
+        </p:nvSpPr>
+        <p:spPr>
+          <a:xfrm>
+            <a:off x="-652770" y="46814"/>
+            <a:ext cx="7720320" cy="566565"/>
+          </a:xfrm>
+          <a:prstGeom prst="rect">
+            <a:avLst/>
+          </a:prstGeom>
+          <a:noFill/>
+        </p:spPr>
+        <p:txBody>
+          <a:bodyPr wrap="square" rtlCol="0">
+            <a:spAutoFit/>
+          </a:bodyPr>
+          <a:lstStyle/>
+          <a:p>
+            <a:pPr marL="867437">
+              <a:lnSpc>
+                <a:spcPct val="115000"/>
+              </a:lnSpc>
+              <a:spcAft>
+                <a:spcPts val="1100"/>
+              </a:spcAft>
+            </a:pPr>
+            <a:r>
+              <a:rPr lang="es-CL" sz="2800" b="1" kern="100" dirty="0">
                 <a:solidFill>
                   <a:schemeClr val="bg1"/>
                 </a:solidFill>
+                <a:latin typeface="DM Sans" pitchFamily="2" charset="0"/>
                 <a:ea typeface="Aptos" panose="020B0004020202020204" pitchFamily="34" charset="0"/>
                 <a:cs typeface="Times New Roman" panose="02020603050405020304" pitchFamily="18" charset="0"/>
-              </a:endParaRPr>
-            </a:p>
-          </p:txBody>
-        </p:sp>
-        <p:sp>
-          <p:nvSpPr>
-            <p:cNvPr id="21" name="CuadroTexto 20">
-              <a:extLst>
-                <a:ext uri="{FF2B5EF4-FFF2-40B4-BE49-F238E27FC236}">
-                  <a16:creationId xmlns:a16="http://schemas.microsoft.com/office/drawing/2014/main" id="{4C24B7D0-229A-B8F3-DAA3-3D947D0AC2C7}"/>
-                </a:ext>
-              </a:extLst>
-            </p:cNvPr>
-            <p:cNvSpPr txBox="1">
-              <a:spLocks/>
-            </p:cNvSpPr>
-            <p:nvPr/>
-          </p:nvSpPr>
-          <p:spPr>
-            <a:xfrm>
-              <a:off x="-652770" y="616124"/>
-              <a:ext cx="5329424" cy="403893"/>
-            </a:xfrm>
-            <a:prstGeom prst="rect">
-              <a:avLst/>
-            </a:prstGeom>
-            <a:noFill/>
-          </p:spPr>
-          <p:txBody>
-            <a:bodyPr wrap="square" rtlCol="0">
-              <a:spAutoFit/>
-            </a:bodyPr>
-            <a:lstStyle/>
-            <a:p>
-              <a:pPr marL="867437">
-                <a:lnSpc>
-                  <a:spcPct val="115000"/>
-                </a:lnSpc>
-                <a:spcAft>
-                  <a:spcPts val="1100"/>
-                </a:spcAft>
-              </a:pPr>
-              <a:r>
-                <a:rPr lang="es-CL" sz="1926" b="1" kern="100" dirty="0">
-                  <a:solidFill>
-                    <a:schemeClr val="bg1"/>
-                  </a:solidFill>
-                  <a:latin typeface="Segoe UI" panose="020B0502040204020203" pitchFamily="34" charset="0"/>
-                  <a:cs typeface="Times New Roman" panose="02020603050405020304" pitchFamily="18" charset="0"/>
-                </a:rPr>
-                <a:t>Periodo</a:t>
-              </a:r>
-              <a:r>
-                <a:rPr lang="es-CL" sz="1926" b="1" kern="100" dirty="0">
-                  <a:latin typeface="Segoe UI" panose="020B0502040204020203" pitchFamily="34" charset="0"/>
-                  <a:ea typeface="Aptos" panose="020B0004020202020204" pitchFamily="34" charset="0"/>
-                  <a:cs typeface="Times New Roman" panose="02020603050405020304" pitchFamily="18" charset="0"/>
-                </a:rPr>
-                <a:t> </a:t>
-              </a:r>
-              <a:r>
-                <a:rPr lang="es-CL" sz="1926" b="1" kern="100" dirty="0">
-                  <a:solidFill>
-                    <a:schemeClr val="bg1"/>
-                  </a:solidFill>
-                  <a:latin typeface="Segoe UI" panose="020B0502040204020203" pitchFamily="34" charset="0"/>
-                  <a:cs typeface="Times New Roman" panose="02020603050405020304" pitchFamily="18" charset="0"/>
-                </a:rPr>
-                <a:t>de estudio                                           </a:t>
-              </a:r>
-            </a:p>
-          </p:txBody>
-        </p:sp>
-        <p:sp>
-          <p:nvSpPr>
-            <p:cNvPr id="3" name="periodo_estudio">
-              <a:extLst>
-                <a:ext uri="{FF2B5EF4-FFF2-40B4-BE49-F238E27FC236}">
-                  <a16:creationId xmlns:a16="http://schemas.microsoft.com/office/drawing/2014/main" id="{243C684E-FD74-28C1-9592-4A6D44CB6F7C}"/>
-                </a:ext>
-              </a:extLst>
-            </p:cNvPr>
-            <p:cNvSpPr txBox="1">
-              <a:spLocks/>
-            </p:cNvSpPr>
-            <p:nvPr/>
-          </p:nvSpPr>
-          <p:spPr>
-            <a:xfrm>
-              <a:off x="-652770" y="1094598"/>
-              <a:ext cx="5329424" cy="403893"/>
-            </a:xfrm>
-            <a:prstGeom prst="rect">
-              <a:avLst/>
-            </a:prstGeom>
-            <a:noFill/>
-          </p:spPr>
-          <p:txBody>
-            <a:bodyPr wrap="square" rtlCol="0">
-              <a:spAutoFit/>
-            </a:bodyPr>
-            <a:lstStyle/>
-            <a:p>
-              <a:pPr marL="867437">
-                <a:lnSpc>
-                  <a:spcPct val="115000"/>
-                </a:lnSpc>
-                <a:spcAft>
-                  <a:spcPts val="1100"/>
-                </a:spcAft>
-              </a:pPr>
-              <a:r>
-                <a:rPr lang="es-CL" sz="1926" b="1" kern="100" dirty="0">
-                  <a:solidFill>
-                    <a:schemeClr val="bg1"/>
-                  </a:solidFill>
-                  <a:latin typeface="Segoe UI" panose="020B0502040204020203" pitchFamily="34" charset="0"/>
-                  <a:cs typeface="Times New Roman" panose="02020603050405020304" pitchFamily="18" charset="0"/>
-                </a:rPr>
-                <a:t>2025-01 → 2025-12</a:t>
-              </a:r>
-            </a:p>
-          </p:txBody>
-        </p:sp>
-      </p:grpSp>
+              </a:rPr>
+              <a:t>Mercados Mayoristas de generación</a:t>
+            </a:r>
+            <a:endParaRPr lang="es-CL" sz="1200" kern="100" dirty="0">
+              <a:solidFill>
+                <a:schemeClr val="bg1"/>
+              </a:solidFill>
+              <a:latin typeface="DM Sans" pitchFamily="2" charset="0"/>
+              <a:ea typeface="Aptos" panose="020B0004020202020204" pitchFamily="34" charset="0"/>
+              <a:cs typeface="Times New Roman" panose="02020603050405020304" pitchFamily="18" charset="0"/>
+            </a:endParaRPr>
+          </a:p>
+        </p:txBody>
+      </p:sp>
+      <p:sp>
+        <p:nvSpPr>
+          <p:cNvPr id="3" name="periodo_estudio">
+            <a:extLst>
+              <a:ext uri="{FF2B5EF4-FFF2-40B4-BE49-F238E27FC236}">
+                <a16:creationId xmlns:a16="http://schemas.microsoft.com/office/drawing/2014/main" id="{243C684E-FD74-28C1-9592-4A6D44CB6F7C}"/>
+              </a:ext>
+            </a:extLst>
+          </p:cNvPr>
+          <p:cNvSpPr txBox="1">
+            <a:spLocks noGrp="1" noRot="1" noMove="1" noResize="1" noEditPoints="1" noAdjustHandles="1" noChangeArrowheads="1" noChangeShapeType="1"/>
+          </p:cNvSpPr>
+          <p:nvPr/>
+        </p:nvSpPr>
+        <p:spPr>
+          <a:xfrm>
+            <a:off x="-652771" y="609146"/>
+            <a:ext cx="5887207" cy="422039"/>
+          </a:xfrm>
+          <a:prstGeom prst="rect">
+            <a:avLst/>
+          </a:prstGeom>
+          <a:noFill/>
+        </p:spPr>
+        <p:txBody>
+          <a:bodyPr wrap="square" rtlCol="0">
+            <a:spAutoFit/>
+          </a:bodyPr>
+          <a:lstStyle/>
+          <a:p>
+            <a:pPr marL="867437">
+              <a:lnSpc>
+                <a:spcPct val="115000"/>
+              </a:lnSpc>
+              <a:spcAft>
+                <a:spcPts val="1100"/>
+              </a:spcAft>
+            </a:pPr>
+            <a:r>
+              <a:rPr lang="es-CL" sz="1926" b="1" kern="100" dirty="0">
+                <a:solidFill>
+                  <a:srgbClr val="6FA3CC"/>
+                </a:solidFill>
+                <a:latin typeface="DM Sans" pitchFamily="2" charset="0"/>
+                <a:cs typeface="Times New Roman" panose="02020603050405020304" pitchFamily="18" charset="0"/>
+              </a:rPr>
+              <a:t>Periodo de estudio: </a:t>
+            </a:r>
+            <a:r>
+              <a:rPr lang="es-CL" sz="1600" b="1" kern="100" dirty="0">
+                <a:solidFill>
+                  <a:srgbClr val="6FA3CC"/>
+                </a:solidFill>
+                <a:latin typeface="DM Mono" panose="020B0509040201040103" pitchFamily="49" charset="0"/>
+                <a:cs typeface="Times New Roman" panose="02020603050405020304" pitchFamily="18" charset="0"/>
+              </a:rPr>
+              <a:t>2025-01 → 2025-12</a:t>
+            </a:r>
+          </a:p>
+        </p:txBody>
+      </p:sp>
       <p:sp>
         <p:nvSpPr>
           <p:cNvPr id="15" name="resumen_parrafo_2">
@@ -3810,14 +4638,14 @@
         </p:nvSpPr>
         <p:spPr>
           <a:xfrm>
-            <a:off x="5443150" y="4804986"/>
-            <a:ext cx="4884994" cy="4449416"/>
+            <a:off x="5496944" y="4757001"/>
+            <a:ext cx="4884994" cy="4394393"/>
           </a:xfrm>
           <a:prstGeom prst="roundRect">
             <a:avLst/>
           </a:prstGeom>
           <a:solidFill>
-            <a:srgbClr val="FFFFFF"/>
+            <a:srgbClr val="EDF4FB"/>
           </a:solidFill>
           <a:ln>
             <a:solidFill>
@@ -3877,14 +4705,14 @@
         </p:nvSpPr>
         <p:spPr>
           <a:xfrm>
-            <a:off x="256077" y="4804985"/>
-            <a:ext cx="4913754" cy="4449417"/>
+            <a:off x="401110" y="4757003"/>
+            <a:ext cx="4913754" cy="4404826"/>
           </a:xfrm>
           <a:prstGeom prst="roundRect">
             <a:avLst/>
           </a:prstGeom>
           <a:solidFill>
-            <a:srgbClr val="FFFFFF"/>
+            <a:srgbClr val="EDF4FB"/>
           </a:solidFill>
           <a:ln>
             <a:solidFill>
@@ -3937,19 +4765,21 @@
               </a:ext>
             </a:extLst>
           </p:cNvPr>
-          <p:cNvSpPr/>
+          <p:cNvSpPr>
+            <a:spLocks/>
+          </p:cNvSpPr>
           <p:nvPr/>
         </p:nvSpPr>
         <p:spPr>
           <a:xfrm>
-            <a:off x="848973" y="4979728"/>
-            <a:ext cx="1820403" cy="442872"/>
+            <a:off x="504052" y="3430733"/>
+            <a:ext cx="2451432" cy="1236696"/>
           </a:xfrm>
           <a:prstGeom prst="roundRect">
             <a:avLst/>
           </a:prstGeom>
           <a:solidFill>
-            <a:srgbClr val="FBFDFF"/>
+            <a:srgbClr val="EDF4FB"/>
           </a:solidFill>
           <a:ln>
             <a:solidFill>
@@ -3988,26 +4818,28 @@
       </p:sp>
       <p:sp>
         <p:nvSpPr>
-          <p:cNvPr id="10" name="vert_total">
+          <p:cNvPr id="12" name="cmg_spread_max_crucero">
             <a:extLst>
               <a:ext uri="{FF2B5EF4-FFF2-40B4-BE49-F238E27FC236}">
-                <a16:creationId xmlns:a16="http://schemas.microsoft.com/office/drawing/2014/main" id="{B94141C6-AF0A-5EEE-E06A-C7ADAD832418}"/>
+                <a16:creationId xmlns:a16="http://schemas.microsoft.com/office/drawing/2014/main" id="{6DF63626-AF1A-9CCF-D0D4-40D356371807}"/>
               </a:ext>
             </a:extLst>
           </p:cNvPr>
-          <p:cNvSpPr/>
+          <p:cNvSpPr>
+            <a:spLocks/>
+          </p:cNvSpPr>
           <p:nvPr/>
         </p:nvSpPr>
         <p:spPr>
           <a:xfrm>
-            <a:off x="5747907" y="4956104"/>
-            <a:ext cx="1820403" cy="442872"/>
+            <a:off x="3058160" y="3462291"/>
+            <a:ext cx="2250597" cy="1205124"/>
           </a:xfrm>
           <a:prstGeom prst="roundRect">
             <a:avLst/>
           </a:prstGeom>
           <a:solidFill>
-            <a:srgbClr val="FBFDFF"/>
+            <a:srgbClr val="EDF4FB"/>
           </a:solidFill>
           <a:ln>
             <a:solidFill>
@@ -4040,122 +4872,6 @@
           </a:bodyPr>
           <a:lstStyle/>
           <a:p>
-            <a:endParaRPr lang="es-CL" sz="3654" dirty="0"/>
-          </a:p>
-        </p:txBody>
-      </p:sp>
-      <p:sp>
-        <p:nvSpPr>
-          <p:cNvPr id="11" name="empresa_vert_max">
-            <a:extLst>
-              <a:ext uri="{FF2B5EF4-FFF2-40B4-BE49-F238E27FC236}">
-                <a16:creationId xmlns:a16="http://schemas.microsoft.com/office/drawing/2014/main" id="{3DB16137-132D-DC43-4F47-12244820A1BC}"/>
-              </a:ext>
-            </a:extLst>
-          </p:cNvPr>
-          <p:cNvSpPr/>
-          <p:nvPr/>
-        </p:nvSpPr>
-        <p:spPr>
-          <a:xfrm>
-            <a:off x="8101430" y="4956104"/>
-            <a:ext cx="1726064" cy="442872"/>
-          </a:xfrm>
-          <a:prstGeom prst="roundRect">
-            <a:avLst/>
-          </a:prstGeom>
-          <a:solidFill>
-            <a:srgbClr val="FBFDFF"/>
-          </a:solidFill>
-          <a:ln>
-            <a:solidFill>
-              <a:srgbClr val="EEF2F6"/>
-            </a:solidFill>
-          </a:ln>
-        </p:spPr>
-        <p:style>
-          <a:lnRef idx="2">
-            <a:schemeClr val="accent1">
-              <a:shade val="15000"/>
-            </a:schemeClr>
-          </a:lnRef>
-          <a:fillRef idx="1">
-            <a:schemeClr val="accent1"/>
-          </a:fillRef>
-          <a:effectRef idx="0">
-            <a:schemeClr val="accent1"/>
-          </a:effectRef>
-          <a:fontRef idx="minor">
-            <a:schemeClr val="lt1"/>
-          </a:fontRef>
-        </p:style>
-        <p:txBody>
-          <a:bodyPr rot="0" spcFirstLastPara="0" vert="horz" wrap="square" lIns="125786" tIns="62893" rIns="125786" bIns="62893" numCol="1" spcCol="0" rtlCol="0" fromWordArt="0" anchor="ctr" anchorCtr="0" forceAA="0" compatLnSpc="1">
-            <a:prstTxWarp prst="textNoShape">
-              <a:avLst/>
-            </a:prstTxWarp>
-            <a:noAutofit/>
-          </a:bodyPr>
-          <a:lstStyle/>
-          <a:p>
-            <a:endParaRPr lang="es-CL" sz="3654"/>
-          </a:p>
-        </p:txBody>
-      </p:sp>
-      <p:sp>
-        <p:nvSpPr>
-          <p:cNvPr id="12" name="cmg_spread_max_crucero">
-            <a:extLst>
-              <a:ext uri="{FF2B5EF4-FFF2-40B4-BE49-F238E27FC236}">
-                <a16:creationId xmlns:a16="http://schemas.microsoft.com/office/drawing/2014/main" id="{6DF63626-AF1A-9CCF-D0D4-40D356371807}"/>
-              </a:ext>
-            </a:extLst>
-          </p:cNvPr>
-          <p:cNvSpPr/>
-          <p:nvPr/>
-        </p:nvSpPr>
-        <p:spPr>
-          <a:xfrm>
-            <a:off x="3103786" y="4994909"/>
-            <a:ext cx="1726064" cy="442872"/>
-          </a:xfrm>
-          <a:prstGeom prst="roundRect">
-            <a:avLst/>
-          </a:prstGeom>
-          <a:solidFill>
-            <a:srgbClr val="FBFDFF"/>
-          </a:solidFill>
-          <a:ln>
-            <a:solidFill>
-              <a:srgbClr val="EEF2F6"/>
-            </a:solidFill>
-          </a:ln>
-        </p:spPr>
-        <p:style>
-          <a:lnRef idx="2">
-            <a:schemeClr val="accent1">
-              <a:shade val="15000"/>
-            </a:schemeClr>
-          </a:lnRef>
-          <a:fillRef idx="1">
-            <a:schemeClr val="accent1"/>
-          </a:fillRef>
-          <a:effectRef idx="0">
-            <a:schemeClr val="accent1"/>
-          </a:effectRef>
-          <a:fontRef idx="minor">
-            <a:schemeClr val="lt1"/>
-          </a:fontRef>
-        </p:style>
-        <p:txBody>
-          <a:bodyPr rot="0" spcFirstLastPara="0" vert="horz" wrap="square" lIns="125786" tIns="62893" rIns="125786" bIns="62893" numCol="1" spcCol="0" rtlCol="0" fromWordArt="0" anchor="ctr" anchorCtr="0" forceAA="0" compatLnSpc="1">
-            <a:prstTxWarp prst="textNoShape">
-              <a:avLst/>
-            </a:prstTxWarp>
-            <a:noAutofit/>
-          </a:bodyPr>
-          <a:lstStyle/>
-          <a:p>
             <a:endParaRPr lang="es-CL" sz="3654"/>
           </a:p>
         </p:txBody>
@@ -4174,8 +4890,8 @@
         </p:nvSpPr>
         <p:spPr>
           <a:xfrm>
-            <a:off x="307005" y="5452962"/>
-            <a:ext cx="4788135" cy="4671407"/>
+            <a:off x="463919" y="4948946"/>
+            <a:ext cx="4788135" cy="5318059"/>
           </a:xfrm>
           <a:prstGeom prst="rect">
             <a:avLst/>
@@ -4188,109 +4904,190 @@
           </a:bodyPr>
           <a:lstStyle/>
           <a:p>
-            <a:pPr algn="just"/>
-            <a:endParaRPr lang="es-CL" sz="1238" dirty="0">
-              <a:latin typeface="Calibri" panose="020F0502020204030204" pitchFamily="34" charset="0"/>
+            <a:pPr algn="just">
+              <a:lnSpc>
+                <a:spcPct val="150000"/>
+              </a:lnSpc>
+            </a:pPr>
+            <a:endParaRPr lang="es-CL" sz="1200" dirty="0">
+              <a:latin typeface="DM Sans" pitchFamily="2" charset="0"/>
               <a:ea typeface="Calibri" panose="020F0502020204030204" pitchFamily="34" charset="0"/>
               <a:cs typeface="Calibri" panose="020F0502020204030204" pitchFamily="34" charset="0"/>
             </a:endParaRPr>
           </a:p>
           <a:p>
-            <a:pPr algn="just">
+            <a:pPr>
               <a:lnSpc>
-                <a:spcPct val="110000"/>
+                <a:spcPct val="150000"/>
               </a:lnSpc>
             </a:pPr>
             <a:r>
-              <a:rPr lang="es-CL" sz="1400" b="1" dirty="0">
-                <a:solidFill>
-                  <a:srgbClr val="002060"/>
-                </a:solidFill>
-                <a:latin typeface="Candara" panose="020E0502030303020204" pitchFamily="34" charset="0"/>
+              <a:rPr lang="es-CL" sz="1200" dirty="0">
+                <a:solidFill>
+                  <a:srgbClr val="2C2E38"/>
+                </a:solidFill>
+                <a:latin typeface="DM Sans" pitchFamily="2" charset="0"/>
                 <a:ea typeface="Calibri" panose="020F0502020204030204" pitchFamily="34" charset="0"/>
                 <a:cs typeface="Calibri" panose="020F0502020204030204" pitchFamily="34" charset="0"/>
               </a:rPr>
-              <a:t>El costo marginal promedio durante este período fue de {{</a:t>
-            </a:r>
-            <a:r>
-              <a:rPr lang="es-CL" sz="1400" b="1" dirty="0" err="1">
-                <a:solidFill>
-                  <a:srgbClr val="002060"/>
-                </a:solidFill>
-                <a:latin typeface="Candara" panose="020E0502030303020204" pitchFamily="34" charset="0"/>
+              <a:t>El </a:t>
+            </a:r>
+            <a:r>
+              <a:rPr lang="es-CL" sz="1200" b="1" dirty="0">
+                <a:solidFill>
+                  <a:srgbClr val="2C2E38"/>
+                </a:solidFill>
+                <a:latin typeface="DM Sans" pitchFamily="2" charset="0"/>
                 <a:ea typeface="Calibri" panose="020F0502020204030204" pitchFamily="34" charset="0"/>
                 <a:cs typeface="Calibri" panose="020F0502020204030204" pitchFamily="34" charset="0"/>
               </a:rPr>
-              <a:t>kpis.cmg_promedio</a:t>
-            </a:r>
-            <a:r>
-              <a:rPr lang="es-CL" sz="1400" b="1" dirty="0">
-                <a:solidFill>
-                  <a:srgbClr val="002060"/>
-                </a:solidFill>
-                <a:latin typeface="Candara" panose="020E0502030303020204" pitchFamily="34" charset="0"/>
+              <a:t>costo marginal promedio </a:t>
+            </a:r>
+            <a:r>
+              <a:rPr lang="es-CL" sz="1200" dirty="0">
+                <a:solidFill>
+                  <a:srgbClr val="2C2E38"/>
+                </a:solidFill>
+                <a:latin typeface="DM Sans" pitchFamily="2" charset="0"/>
                 <a:ea typeface="Calibri" panose="020F0502020204030204" pitchFamily="34" charset="0"/>
                 <a:cs typeface="Calibri" panose="020F0502020204030204" pitchFamily="34" charset="0"/>
               </a:rPr>
-              <a:t>}} $/kWh, alcanzando su máximo de {{</a:t>
-            </a:r>
-            <a:r>
-              <a:rPr lang="es-CL" sz="1400" b="1" dirty="0" err="1">
-                <a:solidFill>
-                  <a:srgbClr val="002060"/>
-                </a:solidFill>
-                <a:latin typeface="Candara" panose="020E0502030303020204" pitchFamily="34" charset="0"/>
+              <a:t>durante este período fue de </a:t>
+            </a:r>
+            <a:r>
+              <a:rPr lang="es-CL" sz="1200" dirty="0">
+                <a:solidFill>
+                  <a:srgbClr val="2C2E38"/>
+                </a:solidFill>
+                <a:latin typeface="DM Mono" panose="020B0509040201040103" pitchFamily="49" charset="0"/>
                 <a:ea typeface="Calibri" panose="020F0502020204030204" pitchFamily="34" charset="0"/>
                 <a:cs typeface="Calibri" panose="020F0502020204030204" pitchFamily="34" charset="0"/>
               </a:rPr>
-              <a:t>kpis.cmg_max</a:t>
-            </a:r>
-            <a:r>
-              <a:rPr lang="es-CL" sz="1400" b="1" dirty="0">
-                <a:solidFill>
-                  <a:srgbClr val="002060"/>
-                </a:solidFill>
-                <a:latin typeface="Candara" panose="020E0502030303020204" pitchFamily="34" charset="0"/>
+              <a:t>{{</a:t>
+            </a:r>
+            <a:r>
+              <a:rPr lang="es-CL" sz="1200" dirty="0" err="1">
+                <a:solidFill>
+                  <a:srgbClr val="2C2E38"/>
+                </a:solidFill>
+                <a:latin typeface="DM Mono" panose="020B0509040201040103" pitchFamily="49" charset="0"/>
                 <a:ea typeface="Calibri" panose="020F0502020204030204" pitchFamily="34" charset="0"/>
                 <a:cs typeface="Calibri" panose="020F0502020204030204" pitchFamily="34" charset="0"/>
               </a:rPr>
-              <a:t>}} $/kWh en {{</a:t>
-            </a:r>
-            <a:r>
-              <a:rPr lang="es-CL" sz="1400" b="1" dirty="0" err="1">
-                <a:solidFill>
-                  <a:srgbClr val="002060"/>
-                </a:solidFill>
-                <a:latin typeface="Candara" panose="020E0502030303020204" pitchFamily="34" charset="0"/>
+              <a:t>kpis.cmg_promedio</a:t>
+            </a:r>
+            <a:r>
+              <a:rPr lang="es-CL" sz="1200" dirty="0">
+                <a:solidFill>
+                  <a:srgbClr val="2C2E38"/>
+                </a:solidFill>
+                <a:latin typeface="DM Mono" panose="020B0509040201040103" pitchFamily="49" charset="0"/>
                 <a:ea typeface="Calibri" panose="020F0502020204030204" pitchFamily="34" charset="0"/>
                 <a:cs typeface="Calibri" panose="020F0502020204030204" pitchFamily="34" charset="0"/>
               </a:rPr>
-              <a:t>kpis.cmg_max_mensual_periodo</a:t>
-            </a:r>
-            <a:r>
-              <a:rPr lang="es-CL" sz="1400" b="1" dirty="0">
-                <a:solidFill>
-                  <a:srgbClr val="002060"/>
-                </a:solidFill>
-                <a:latin typeface="Candara" panose="020E0502030303020204" pitchFamily="34" charset="0"/>
+              <a:t>}} </a:t>
+            </a:r>
+            <a:r>
+              <a:rPr lang="es-CL" sz="1200" dirty="0">
+                <a:solidFill>
+                  <a:srgbClr val="2C2E38"/>
+                </a:solidFill>
+                <a:latin typeface="DM Sans" pitchFamily="2" charset="0"/>
                 <a:ea typeface="Calibri" panose="020F0502020204030204" pitchFamily="34" charset="0"/>
                 <a:cs typeface="Calibri" panose="020F0502020204030204" pitchFamily="34" charset="0"/>
               </a:rPr>
+              <a:t>$/kWh, alcanzando su máximo de </a:t>
+            </a:r>
+            <a:r>
+              <a:rPr lang="es-CL" sz="1200" dirty="0">
+                <a:solidFill>
+                  <a:srgbClr val="2C2E38"/>
+                </a:solidFill>
+                <a:latin typeface="DM Mono" panose="020B0509040201040103" pitchFamily="49" charset="0"/>
+                <a:ea typeface="Calibri" panose="020F0502020204030204" pitchFamily="34" charset="0"/>
+                <a:cs typeface="Calibri" panose="020F0502020204030204" pitchFamily="34" charset="0"/>
+              </a:rPr>
+              <a:t>{{</a:t>
+            </a:r>
+            <a:r>
+              <a:rPr lang="es-CL" sz="1200" dirty="0" err="1">
+                <a:solidFill>
+                  <a:srgbClr val="2C2E38"/>
+                </a:solidFill>
+                <a:latin typeface="DM Mono" panose="020B0509040201040103" pitchFamily="49" charset="0"/>
+                <a:ea typeface="Calibri" panose="020F0502020204030204" pitchFamily="34" charset="0"/>
+                <a:cs typeface="Calibri" panose="020F0502020204030204" pitchFamily="34" charset="0"/>
+              </a:rPr>
+              <a:t>kpis.cmg_max</a:t>
+            </a:r>
+            <a:r>
+              <a:rPr lang="es-CL" sz="1200" dirty="0">
+                <a:solidFill>
+                  <a:srgbClr val="2C2E38"/>
+                </a:solidFill>
+                <a:latin typeface="DM Mono" panose="020B0509040201040103" pitchFamily="49" charset="0"/>
+                <a:ea typeface="Calibri" panose="020F0502020204030204" pitchFamily="34" charset="0"/>
+                <a:cs typeface="Calibri" panose="020F0502020204030204" pitchFamily="34" charset="0"/>
+              </a:rPr>
+              <a:t>}} </a:t>
+            </a:r>
+            <a:r>
+              <a:rPr lang="es-CL" sz="1200" dirty="0">
+                <a:solidFill>
+                  <a:srgbClr val="2C2E38"/>
+                </a:solidFill>
+                <a:latin typeface="DM Sans" pitchFamily="2" charset="0"/>
+                <a:ea typeface="Calibri" panose="020F0502020204030204" pitchFamily="34" charset="0"/>
+                <a:cs typeface="Calibri" panose="020F0502020204030204" pitchFamily="34" charset="0"/>
+              </a:rPr>
+              <a:t>$/kWh en </a:t>
+            </a:r>
+            <a:r>
+              <a:rPr lang="es-CL" sz="1200" dirty="0">
+                <a:solidFill>
+                  <a:srgbClr val="2C2E38"/>
+                </a:solidFill>
+                <a:latin typeface="DM Mono" panose="020B0509040201040103" pitchFamily="49" charset="0"/>
+                <a:ea typeface="Calibri" panose="020F0502020204030204" pitchFamily="34" charset="0"/>
+                <a:cs typeface="Calibri" panose="020F0502020204030204" pitchFamily="34" charset="0"/>
+              </a:rPr>
+              <a:t>{{</a:t>
+            </a:r>
+            <a:r>
+              <a:rPr lang="es-CL" sz="1200" dirty="0" err="1">
+                <a:solidFill>
+                  <a:srgbClr val="2C2E38"/>
+                </a:solidFill>
+                <a:latin typeface="DM Mono" panose="020B0509040201040103" pitchFamily="49" charset="0"/>
+                <a:ea typeface="Calibri" panose="020F0502020204030204" pitchFamily="34" charset="0"/>
+                <a:cs typeface="Calibri" panose="020F0502020204030204" pitchFamily="34" charset="0"/>
+              </a:rPr>
+              <a:t>kpis.cmg_max_mensual_periodo</a:t>
+            </a:r>
+            <a:r>
+              <a:rPr lang="es-CL" sz="1200" dirty="0">
+                <a:solidFill>
+                  <a:srgbClr val="2C2E38"/>
+                </a:solidFill>
+                <a:latin typeface="DM Mono" panose="020B0509040201040103" pitchFamily="49" charset="0"/>
+                <a:ea typeface="Calibri" panose="020F0502020204030204" pitchFamily="34" charset="0"/>
+                <a:cs typeface="Calibri" panose="020F0502020204030204" pitchFamily="34" charset="0"/>
+              </a:rPr>
               <a:t>}}.</a:t>
             </a:r>
           </a:p>
           <a:p>
-            <a:pPr algn="just">
+            <a:pPr>
               <a:lnSpc>
-                <a:spcPct val="110000"/>
+                <a:spcPct val="150000"/>
               </a:lnSpc>
             </a:pPr>
             <a:r>
-              <a:rPr lang="es-CL" sz="1400" b="1" dirty="0">
-                <a:solidFill>
-                  <a:srgbClr val="002060"/>
-                </a:solidFill>
-                <a:latin typeface="Candara" panose="020E0502030303020204" pitchFamily="34" charset="0"/>
+              <a:rPr lang="es-CL" sz="1200" dirty="0">
+                <a:solidFill>
+                  <a:srgbClr val="2C2E38"/>
+                </a:solidFill>
+                <a:latin typeface="DM Sans" pitchFamily="2" charset="0"/>
                 <a:ea typeface="Calibri" panose="020F0502020204030204" pitchFamily="34" charset="0"/>
                 <a:cs typeface="Calibri" panose="020F0502020204030204" pitchFamily="34" charset="0"/>
               </a:rPr>
@@ -4298,65 +5095,153 @@
             </a:r>
           </a:p>
           <a:p>
-            <a:pPr algn="just">
+            <a:pPr>
               <a:lnSpc>
-                <a:spcPct val="110000"/>
+                <a:spcPct val="150000"/>
               </a:lnSpc>
             </a:pPr>
             <a:r>
-              <a:rPr lang="es-CL" sz="1400" b="1" dirty="0">
-                <a:solidFill>
-                  <a:srgbClr val="002060"/>
-                </a:solidFill>
-                <a:latin typeface="Candara" panose="020E0502030303020204" pitchFamily="34" charset="0"/>
+              <a:rPr lang="es-CL" sz="1200" dirty="0">
+                <a:solidFill>
+                  <a:srgbClr val="2C2E38"/>
+                </a:solidFill>
+                <a:latin typeface="DM Sans" pitchFamily="2" charset="0"/>
                 <a:ea typeface="Calibri" panose="020F0502020204030204" pitchFamily="34" charset="0"/>
                 <a:cs typeface="Calibri" panose="020F0502020204030204" pitchFamily="34" charset="0"/>
               </a:rPr>
-              <a:t>El spread de CMG entre horas solares y no solares registró un máximo de {{</a:t>
-            </a:r>
-            <a:r>
-              <a:rPr lang="es-CL" sz="1400" b="1" dirty="0" err="1">
-                <a:solidFill>
-                  <a:srgbClr val="002060"/>
-                </a:solidFill>
-                <a:latin typeface="Candara" panose="020E0502030303020204" pitchFamily="34" charset="0"/>
+              <a:t>El </a:t>
+            </a:r>
+            <a:r>
+              <a:rPr lang="es-CL" sz="1200" b="1" dirty="0">
+                <a:solidFill>
+                  <a:srgbClr val="2C2E38"/>
+                </a:solidFill>
+                <a:latin typeface="DM Sans" pitchFamily="2" charset="0"/>
                 <a:ea typeface="Calibri" panose="020F0502020204030204" pitchFamily="34" charset="0"/>
                 <a:cs typeface="Calibri" panose="020F0502020204030204" pitchFamily="34" charset="0"/>
               </a:rPr>
-              <a:t>kpis.cmg_spread_max_crucero</a:t>
-            </a:r>
-            <a:r>
-              <a:rPr lang="es-CL" sz="1400" b="1" dirty="0">
-                <a:solidFill>
-                  <a:srgbClr val="002060"/>
-                </a:solidFill>
-                <a:latin typeface="Candara" panose="020E0502030303020204" pitchFamily="34" charset="0"/>
+              <a:t>promedio de spread </a:t>
+            </a:r>
+            <a:r>
+              <a:rPr lang="es-CL" sz="1200" b="1" dirty="0" err="1">
+                <a:solidFill>
+                  <a:srgbClr val="2C2E38"/>
+                </a:solidFill>
+                <a:latin typeface="DM Sans" pitchFamily="2" charset="0"/>
                 <a:ea typeface="Calibri" panose="020F0502020204030204" pitchFamily="34" charset="0"/>
                 <a:cs typeface="Calibri" panose="020F0502020204030204" pitchFamily="34" charset="0"/>
               </a:rPr>
-              <a:t>}} en la barra Crucero 220kV , mientras que en la barra Puerto Montt 220kV el valor ascendió a {{</a:t>
-            </a:r>
-            <a:r>
-              <a:rPr lang="es-CL" sz="1400" b="1" dirty="0" err="1">
-                <a:solidFill>
-                  <a:srgbClr val="002060"/>
-                </a:solidFill>
-                <a:latin typeface="Candara" panose="020E0502030303020204" pitchFamily="34" charset="0"/>
+              <a:t>CMg</a:t>
+            </a:r>
+            <a:r>
+              <a:rPr lang="es-CL" sz="1200" b="1" dirty="0">
+                <a:solidFill>
+                  <a:srgbClr val="2C2E38"/>
+                </a:solidFill>
+                <a:latin typeface="DM Sans" pitchFamily="2" charset="0"/>
                 <a:ea typeface="Calibri" panose="020F0502020204030204" pitchFamily="34" charset="0"/>
                 <a:cs typeface="Calibri" panose="020F0502020204030204" pitchFamily="34" charset="0"/>
               </a:rPr>
-              <a:t>kpis.cmg_spread_max_p_montt</a:t>
-            </a:r>
-            <a:r>
-              <a:rPr lang="es-CL" sz="1400" b="1" dirty="0">
-                <a:solidFill>
-                  <a:srgbClr val="002060"/>
-                </a:solidFill>
-                <a:latin typeface="Candara" panose="020E0502030303020204" pitchFamily="34" charset="0"/>
+              <a:t> </a:t>
+            </a:r>
+            <a:r>
+              <a:rPr lang="es-CL" sz="1200" dirty="0">
+                <a:solidFill>
+                  <a:srgbClr val="2C2E38"/>
+                </a:solidFill>
+                <a:latin typeface="DM Sans" pitchFamily="2" charset="0"/>
                 <a:ea typeface="Calibri" panose="020F0502020204030204" pitchFamily="34" charset="0"/>
                 <a:cs typeface="Calibri" panose="020F0502020204030204" pitchFamily="34" charset="0"/>
               </a:rPr>
-              <a:t>}} $/kWh. Esta última barra presenta la mayor variabilidad estacional de costos marginales, donde meses con baja disponibilidad de recurso hídrico presentan desacoples económicos y costos mayores respecto de otras zonas del país. </a:t>
+              <a:t>entre horas solares y no solares registró un máximo de </a:t>
+            </a:r>
+            <a:r>
+              <a:rPr lang="es-CL" sz="1200" dirty="0">
+                <a:solidFill>
+                  <a:srgbClr val="2C2E38"/>
+                </a:solidFill>
+                <a:latin typeface="DM Mono" panose="020B0509040201040103" pitchFamily="49" charset="0"/>
+                <a:ea typeface="Calibri" panose="020F0502020204030204" pitchFamily="34" charset="0"/>
+                <a:cs typeface="Calibri" panose="020F0502020204030204" pitchFamily="34" charset="0"/>
+              </a:rPr>
+              <a:t>{{</a:t>
+            </a:r>
+            <a:r>
+              <a:rPr lang="es-CL" sz="1200" dirty="0" err="1">
+                <a:solidFill>
+                  <a:srgbClr val="2C2E38"/>
+                </a:solidFill>
+                <a:latin typeface="DM Mono" panose="020B0509040201040103" pitchFamily="49" charset="0"/>
+                <a:ea typeface="Calibri" panose="020F0502020204030204" pitchFamily="34" charset="0"/>
+                <a:cs typeface="Calibri" panose="020F0502020204030204" pitchFamily="34" charset="0"/>
+              </a:rPr>
+              <a:t>kpis.cmg_spread_max_crucero</a:t>
+            </a:r>
+            <a:r>
+              <a:rPr lang="es-CL" sz="1200" dirty="0">
+                <a:solidFill>
+                  <a:srgbClr val="2C2E38"/>
+                </a:solidFill>
+                <a:latin typeface="DM Mono" panose="020B0509040201040103" pitchFamily="49" charset="0"/>
+                <a:ea typeface="Calibri" panose="020F0502020204030204" pitchFamily="34" charset="0"/>
+                <a:cs typeface="Calibri" panose="020F0502020204030204" pitchFamily="34" charset="0"/>
+              </a:rPr>
+              <a:t>}} </a:t>
+            </a:r>
+            <a:r>
+              <a:rPr lang="es-CL" sz="1200" dirty="0">
+                <a:solidFill>
+                  <a:srgbClr val="2C2E38"/>
+                </a:solidFill>
+                <a:latin typeface="DM Sans" pitchFamily="2" charset="0"/>
+                <a:ea typeface="Calibri" panose="020F0502020204030204" pitchFamily="34" charset="0"/>
+                <a:cs typeface="Calibri" panose="020F0502020204030204" pitchFamily="34" charset="0"/>
+              </a:rPr>
+              <a:t>en la barra Crucero 220kV , mientras que en la barra Puerto Montt 220kV el valor ascendió a </a:t>
+            </a:r>
+            <a:r>
+              <a:rPr lang="es-CL" sz="1200" dirty="0">
+                <a:solidFill>
+                  <a:srgbClr val="2C2E38"/>
+                </a:solidFill>
+                <a:latin typeface="DM Mono" panose="020B0509040201040103" pitchFamily="49" charset="0"/>
+                <a:ea typeface="Calibri" panose="020F0502020204030204" pitchFamily="34" charset="0"/>
+                <a:cs typeface="Calibri" panose="020F0502020204030204" pitchFamily="34" charset="0"/>
+              </a:rPr>
+              <a:t>{{</a:t>
+            </a:r>
+            <a:r>
+              <a:rPr lang="es-CL" sz="1200" dirty="0" err="1">
+                <a:solidFill>
+                  <a:srgbClr val="2C2E38"/>
+                </a:solidFill>
+                <a:latin typeface="DM Mono" panose="020B0509040201040103" pitchFamily="49" charset="0"/>
+                <a:ea typeface="Calibri" panose="020F0502020204030204" pitchFamily="34" charset="0"/>
+                <a:cs typeface="Calibri" panose="020F0502020204030204" pitchFamily="34" charset="0"/>
+              </a:rPr>
+              <a:t>kpis.cmg_spread_max_p_montt</a:t>
+            </a:r>
+            <a:r>
+              <a:rPr lang="es-CL" sz="1200" dirty="0">
+                <a:solidFill>
+                  <a:srgbClr val="2C2E38"/>
+                </a:solidFill>
+                <a:latin typeface="DM Mono" panose="020B0509040201040103" pitchFamily="49" charset="0"/>
+                <a:ea typeface="Calibri" panose="020F0502020204030204" pitchFamily="34" charset="0"/>
+                <a:cs typeface="Calibri" panose="020F0502020204030204" pitchFamily="34" charset="0"/>
+              </a:rPr>
+              <a:t>}}. </a:t>
+            </a:r>
+            <a:r>
+              <a:rPr lang="es-CL" sz="1200" dirty="0">
+                <a:solidFill>
+                  <a:srgbClr val="2C2E38"/>
+                </a:solidFill>
+                <a:latin typeface="DM Sans" pitchFamily="2" charset="0"/>
+                <a:ea typeface="Calibri" panose="020F0502020204030204" pitchFamily="34" charset="0"/>
+                <a:cs typeface="Calibri" panose="020F0502020204030204" pitchFamily="34" charset="0"/>
+              </a:rPr>
+              <a:t>Esta última barra presenta la mayor variabilidad estacional de costos marginales, donde meses con baja disponibilidad de recurso hídrico presentan desacoples económicos y costos mayores respecto de otras zonas del país. </a:t>
             </a:r>
           </a:p>
           <a:p>
@@ -4445,14 +5330,14 @@
             </a:extLst>
           </p:cNvPr>
           <p:cNvSpPr txBox="1">
-            <a:spLocks noGrp="1" noRot="1" noMove="1" noResize="1" noEditPoints="1" noAdjustHandles="1" noChangeArrowheads="1" noChangeShapeType="1"/>
+            <a:spLocks/>
           </p:cNvSpPr>
           <p:nvPr/>
         </p:nvSpPr>
         <p:spPr>
           <a:xfrm>
-            <a:off x="157992" y="2075128"/>
-            <a:ext cx="2504819" cy="654666"/>
+            <a:off x="401111" y="2820880"/>
+            <a:ext cx="3566898" cy="388696"/>
           </a:xfrm>
           <a:prstGeom prst="rect">
             <a:avLst/>
@@ -4466,29 +5351,22 @@
           <a:lstStyle/>
           <a:p>
             <a:r>
-              <a:rPr lang="es-CL" sz="1926" b="1" kern="100" dirty="0">
+              <a:rPr lang="es-ES" sz="1900" b="1" kern="100" dirty="0">
                 <a:solidFill>
                   <a:srgbClr val="002060"/>
                 </a:solidFill>
-                <a:latin typeface="Segoe UI" panose="020B0502040204020203" pitchFamily="34" charset="0"/>
+                <a:latin typeface="DM Sans" pitchFamily="2" charset="0"/>
                 <a:cs typeface="Times New Roman" panose="02020603050405020304" pitchFamily="18" charset="0"/>
               </a:rPr>
-              <a:t>Resumen</a:t>
-            </a:r>
-            <a:r>
-              <a:rPr lang="es-CL" sz="3654" dirty="0"/>
-              <a:t> </a:t>
-            </a:r>
-            <a:r>
-              <a:rPr lang="es-CL" sz="1926" b="1" kern="100" dirty="0">
-                <a:solidFill>
-                  <a:srgbClr val="002060"/>
-                </a:solidFill>
-                <a:latin typeface="Segoe UI" panose="020B0502040204020203" pitchFamily="34" charset="0"/>
-                <a:cs typeface="Times New Roman" panose="02020603050405020304" pitchFamily="18" charset="0"/>
-              </a:rPr>
-              <a:t>ejecutivo</a:t>
-            </a:r>
+              <a:t>INDICADORES CLAVE</a:t>
+            </a:r>
+            <a:endParaRPr lang="es-CL" sz="1900" b="1" kern="100" dirty="0">
+              <a:solidFill>
+                <a:srgbClr val="002060"/>
+              </a:solidFill>
+              <a:latin typeface="DM Sans" pitchFamily="2" charset="0"/>
+              <a:cs typeface="Times New Roman" panose="02020603050405020304" pitchFamily="18" charset="0"/>
+            </a:endParaRPr>
           </a:p>
         </p:txBody>
       </p:sp>
@@ -4502,13 +5380,13 @@
             </a:extLst>
           </p:cNvPr>
           <p:cNvCxnSpPr>
-            <a:cxnSpLocks noGrp="1" noRot="1" noMove="1" noResize="1" noEditPoints="1" noAdjustHandles="1" noChangeArrowheads="1" noChangeShapeType="1"/>
+            <a:cxnSpLocks/>
           </p:cNvCxnSpPr>
           <p:nvPr/>
         </p:nvCxnSpPr>
         <p:spPr>
           <a:xfrm>
-            <a:off x="157992" y="2653594"/>
+            <a:off x="401111" y="3294615"/>
             <a:ext cx="10209568" cy="0"/>
           </a:xfrm>
           <a:prstGeom prst="line">
@@ -4544,13 +5422,15 @@
               </a:ext>
             </a:extLst>
           </p:cNvPr>
-          <p:cNvSpPr txBox="1"/>
+          <p:cNvSpPr txBox="1">
+            <a:spLocks/>
+          </p:cNvSpPr>
           <p:nvPr/>
         </p:nvSpPr>
         <p:spPr>
           <a:xfrm>
-            <a:off x="5639126" y="5587582"/>
-            <a:ext cx="4427082" cy="3089757"/>
+            <a:off x="5610453" y="4948946"/>
+            <a:ext cx="4427082" cy="3801041"/>
           </a:xfrm>
           <a:prstGeom prst="rect">
             <a:avLst/>
@@ -4563,157 +5443,222 @@
           </a:bodyPr>
           <a:lstStyle/>
           <a:p>
-            <a:pPr algn="just"/>
-            <a:endParaRPr lang="es-CL" sz="1238" dirty="0">
-              <a:latin typeface="Calibri" panose="020F0502020204030204" pitchFamily="34" charset="0"/>
+            <a:endParaRPr lang="es-CL" sz="1200" dirty="0">
+              <a:latin typeface="DM Sans" pitchFamily="2" charset="0"/>
               <a:ea typeface="Calibri" panose="020F0502020204030204" pitchFamily="34" charset="0"/>
               <a:cs typeface="Calibri" panose="020F0502020204030204" pitchFamily="34" charset="0"/>
             </a:endParaRPr>
           </a:p>
           <a:p>
-            <a:pPr algn="just">
+            <a:pPr>
               <a:lnSpc>
-                <a:spcPct val="110000"/>
+                <a:spcPct val="150000"/>
               </a:lnSpc>
             </a:pPr>
             <a:r>
-              <a:rPr lang="es-CL" sz="1400" b="1" dirty="0">
-                <a:solidFill>
-                  <a:srgbClr val="002060"/>
-                </a:solidFill>
-                <a:latin typeface="Candara" panose="020E0502030303020204" pitchFamily="34" charset="0"/>
+              <a:rPr lang="es-CL" sz="1200" dirty="0">
+                <a:solidFill>
+                  <a:srgbClr val="2C2E38"/>
+                </a:solidFill>
+                <a:latin typeface="DM Sans" pitchFamily="2" charset="0"/>
                 <a:ea typeface="Calibri" panose="020F0502020204030204" pitchFamily="34" charset="0"/>
                 <a:cs typeface="Calibri" panose="020F0502020204030204" pitchFamily="34" charset="0"/>
               </a:rPr>
-              <a:t>Entre enero y diciembre de 2025, la energía total vertida asciende a {{</a:t>
-            </a:r>
-            <a:r>
-              <a:rPr lang="es-CL" sz="1400" b="1" dirty="0" err="1">
-                <a:solidFill>
-                  <a:srgbClr val="002060"/>
-                </a:solidFill>
-                <a:latin typeface="Candara" panose="020E0502030303020204" pitchFamily="34" charset="0"/>
+              <a:t>Entre enero y diciembre de 2025, la </a:t>
+            </a:r>
+            <a:r>
+              <a:rPr lang="es-CL" sz="1200" b="1" dirty="0">
+                <a:solidFill>
+                  <a:srgbClr val="2C2E38"/>
+                </a:solidFill>
+                <a:latin typeface="DM Sans" pitchFamily="2" charset="0"/>
                 <a:ea typeface="Calibri" panose="020F0502020204030204" pitchFamily="34" charset="0"/>
                 <a:cs typeface="Calibri" panose="020F0502020204030204" pitchFamily="34" charset="0"/>
               </a:rPr>
-              <a:t>kpis.vert_total_mwh</a:t>
-            </a:r>
-            <a:r>
-              <a:rPr lang="es-CL" sz="1400" b="1" dirty="0">
-                <a:solidFill>
-                  <a:srgbClr val="002060"/>
-                </a:solidFill>
-                <a:latin typeface="Candara" panose="020E0502030303020204" pitchFamily="34" charset="0"/>
+              <a:t>energía renovable total reducida</a:t>
+            </a:r>
+            <a:r>
+              <a:rPr lang="es-CL" sz="1200" dirty="0">
+                <a:solidFill>
+                  <a:srgbClr val="2C2E38"/>
+                </a:solidFill>
+                <a:latin typeface="DM Sans" pitchFamily="2" charset="0"/>
                 <a:ea typeface="Calibri" panose="020F0502020204030204" pitchFamily="34" charset="0"/>
                 <a:cs typeface="Calibri" panose="020F0502020204030204" pitchFamily="34" charset="0"/>
               </a:rPr>
-              <a:t>}} </a:t>
-            </a:r>
-            <a:r>
-              <a:rPr lang="es-CL" sz="1400" b="1" dirty="0" err="1">
-                <a:solidFill>
-                  <a:srgbClr val="002060"/>
-                </a:solidFill>
-                <a:latin typeface="Candara" panose="020E0502030303020204" pitchFamily="34" charset="0"/>
+              <a:t> asciende a </a:t>
+            </a:r>
+            <a:r>
+              <a:rPr lang="es-CL" sz="1200" dirty="0">
+                <a:solidFill>
+                  <a:srgbClr val="2C2E38"/>
+                </a:solidFill>
+                <a:latin typeface="DM Mono" panose="020B0509040201040103" pitchFamily="49" charset="0"/>
                 <a:ea typeface="Calibri" panose="020F0502020204030204" pitchFamily="34" charset="0"/>
                 <a:cs typeface="Calibri" panose="020F0502020204030204" pitchFamily="34" charset="0"/>
               </a:rPr>
-              <a:t>MWh</a:t>
-            </a:r>
-            <a:r>
-              <a:rPr lang="es-CL" sz="1400" b="1" dirty="0">
-                <a:solidFill>
-                  <a:srgbClr val="002060"/>
-                </a:solidFill>
-                <a:latin typeface="Candara" panose="020E0502030303020204" pitchFamily="34" charset="0"/>
+              <a:t>{{</a:t>
+            </a:r>
+            <a:r>
+              <a:rPr lang="es-CL" sz="1200" dirty="0" err="1">
+                <a:solidFill>
+                  <a:srgbClr val="2C2E38"/>
+                </a:solidFill>
+                <a:latin typeface="DM Mono" panose="020B0509040201040103" pitchFamily="49" charset="0"/>
                 <a:ea typeface="Calibri" panose="020F0502020204030204" pitchFamily="34" charset="0"/>
                 <a:cs typeface="Calibri" panose="020F0502020204030204" pitchFamily="34" charset="0"/>
               </a:rPr>
-              <a:t>, destacando el caso de la central solar {{</a:t>
-            </a:r>
-            <a:r>
-              <a:rPr lang="es-CL" sz="1400" b="1" dirty="0" err="1">
-                <a:solidFill>
-                  <a:srgbClr val="002060"/>
-                </a:solidFill>
-                <a:latin typeface="Candara" panose="020E0502030303020204" pitchFamily="34" charset="0"/>
+              <a:t>kpis.vert_total_mwh</a:t>
+            </a:r>
+            <a:r>
+              <a:rPr lang="es-CL" sz="1200" dirty="0">
+                <a:solidFill>
+                  <a:srgbClr val="2C2E38"/>
+                </a:solidFill>
+                <a:latin typeface="DM Mono" panose="020B0509040201040103" pitchFamily="49" charset="0"/>
                 <a:ea typeface="Calibri" panose="020F0502020204030204" pitchFamily="34" charset="0"/>
                 <a:cs typeface="Calibri" panose="020F0502020204030204" pitchFamily="34" charset="0"/>
               </a:rPr>
-              <a:t>kpis.empresa_vert_max</a:t>
-            </a:r>
-            <a:r>
-              <a:rPr lang="es-CL" sz="1400" b="1" dirty="0">
-                <a:solidFill>
-                  <a:srgbClr val="002060"/>
-                </a:solidFill>
-                <a:latin typeface="Candara" panose="020E0502030303020204" pitchFamily="34" charset="0"/>
+              <a:t>}} </a:t>
+            </a:r>
+            <a:r>
+              <a:rPr lang="es-CL" sz="1200" dirty="0" err="1">
+                <a:solidFill>
+                  <a:srgbClr val="2C2E38"/>
+                </a:solidFill>
+                <a:latin typeface="DM Sans" pitchFamily="2" charset="0"/>
                 <a:ea typeface="Calibri" panose="020F0502020204030204" pitchFamily="34" charset="0"/>
                 <a:cs typeface="Calibri" panose="020F0502020204030204" pitchFamily="34" charset="0"/>
               </a:rPr>
-              <a:t>}}, que redujo sus inyecciones en un total de {{</a:t>
-            </a:r>
-            <a:r>
-              <a:rPr lang="es-CL" sz="1400" b="1" dirty="0" err="1">
-                <a:solidFill>
-                  <a:srgbClr val="002060"/>
-                </a:solidFill>
-                <a:latin typeface="Candara" panose="020E0502030303020204" pitchFamily="34" charset="0"/>
+              <a:t>MWh</a:t>
+            </a:r>
+            <a:r>
+              <a:rPr lang="es-CL" sz="1200" dirty="0">
+                <a:solidFill>
+                  <a:srgbClr val="2C2E38"/>
+                </a:solidFill>
+                <a:latin typeface="DM Sans" pitchFamily="2" charset="0"/>
                 <a:ea typeface="Calibri" panose="020F0502020204030204" pitchFamily="34" charset="0"/>
                 <a:cs typeface="Calibri" panose="020F0502020204030204" pitchFamily="34" charset="0"/>
               </a:rPr>
-              <a:t>kpis.vert_empresa_vert_max</a:t>
-            </a:r>
-            <a:r>
-              <a:rPr lang="es-CL" sz="1400" b="1">
-                <a:solidFill>
-                  <a:srgbClr val="002060"/>
-                </a:solidFill>
-                <a:latin typeface="Candara" panose="020E0502030303020204" pitchFamily="34" charset="0"/>
+              <a:t>, destacando el caso de la central solar </a:t>
+            </a:r>
+            <a:r>
+              <a:rPr lang="es-CL" sz="1200" dirty="0">
+                <a:solidFill>
+                  <a:srgbClr val="2C2E38"/>
+                </a:solidFill>
+                <a:latin typeface="DM Mono" panose="020B0509040201040103" pitchFamily="49" charset="0"/>
                 <a:ea typeface="Calibri" panose="020F0502020204030204" pitchFamily="34" charset="0"/>
                 <a:cs typeface="Calibri" panose="020F0502020204030204" pitchFamily="34" charset="0"/>
               </a:rPr>
-              <a:t>}} durante </a:t>
-            </a:r>
-            <a:r>
-              <a:rPr lang="es-CL" sz="1400" b="1" dirty="0">
-                <a:solidFill>
-                  <a:srgbClr val="002060"/>
-                </a:solidFill>
-                <a:latin typeface="Candara" panose="020E0502030303020204" pitchFamily="34" charset="0"/>
+              <a:t>{{</a:t>
+            </a:r>
+            <a:r>
+              <a:rPr lang="es-CL" sz="1200" dirty="0" err="1">
+                <a:solidFill>
+                  <a:srgbClr val="2C2E38"/>
+                </a:solidFill>
+                <a:latin typeface="DM Mono" panose="020B0509040201040103" pitchFamily="49" charset="0"/>
                 <a:ea typeface="Calibri" panose="020F0502020204030204" pitchFamily="34" charset="0"/>
                 <a:cs typeface="Calibri" panose="020F0502020204030204" pitchFamily="34" charset="0"/>
               </a:rPr>
-              <a:t>el periodo de estudio. </a:t>
-            </a:r>
-          </a:p>
-          <a:p>
-            <a:pPr algn="just">
+              <a:t>kpis.empresa_vert_max</a:t>
+            </a:r>
+            <a:r>
+              <a:rPr lang="es-CL" sz="1200" dirty="0">
+                <a:solidFill>
+                  <a:srgbClr val="2C2E38"/>
+                </a:solidFill>
+                <a:latin typeface="DM Mono" panose="020B0509040201040103" pitchFamily="49" charset="0"/>
+                <a:ea typeface="Calibri" panose="020F0502020204030204" pitchFamily="34" charset="0"/>
+                <a:cs typeface="Calibri" panose="020F0502020204030204" pitchFamily="34" charset="0"/>
+              </a:rPr>
+              <a:t>}}, </a:t>
+            </a:r>
+            <a:r>
+              <a:rPr lang="es-CL" sz="1200" dirty="0">
+                <a:solidFill>
+                  <a:srgbClr val="2C2E38"/>
+                </a:solidFill>
+                <a:latin typeface="DM Sans" pitchFamily="2" charset="0"/>
+                <a:ea typeface="Calibri" panose="020F0502020204030204" pitchFamily="34" charset="0"/>
+                <a:cs typeface="Calibri" panose="020F0502020204030204" pitchFamily="34" charset="0"/>
+              </a:rPr>
+              <a:t>que redujo sus inyecciones en un total de </a:t>
+            </a:r>
+            <a:r>
+              <a:rPr lang="es-CL" sz="1200" dirty="0">
+                <a:solidFill>
+                  <a:srgbClr val="2C2E38"/>
+                </a:solidFill>
+                <a:latin typeface="DM Mono" panose="020B0509040201040103" pitchFamily="49" charset="0"/>
+                <a:ea typeface="Calibri" panose="020F0502020204030204" pitchFamily="34" charset="0"/>
+                <a:cs typeface="Calibri" panose="020F0502020204030204" pitchFamily="34" charset="0"/>
+              </a:rPr>
+              <a:t>{{</a:t>
+            </a:r>
+            <a:r>
+              <a:rPr lang="es-CL" sz="1200" dirty="0" err="1">
+                <a:solidFill>
+                  <a:srgbClr val="2C2E38"/>
+                </a:solidFill>
+                <a:latin typeface="DM Mono" panose="020B0509040201040103" pitchFamily="49" charset="0"/>
+                <a:ea typeface="Calibri" panose="020F0502020204030204" pitchFamily="34" charset="0"/>
+                <a:cs typeface="Calibri" panose="020F0502020204030204" pitchFamily="34" charset="0"/>
+              </a:rPr>
+              <a:t>kpis.vert_empresa_vert_max</a:t>
+            </a:r>
+            <a:r>
+              <a:rPr lang="es-CL" sz="1200" dirty="0">
+                <a:solidFill>
+                  <a:srgbClr val="2C2E38"/>
+                </a:solidFill>
+                <a:latin typeface="DM Mono" panose="020B0509040201040103" pitchFamily="49" charset="0"/>
+                <a:ea typeface="Calibri" panose="020F0502020204030204" pitchFamily="34" charset="0"/>
+                <a:cs typeface="Calibri" panose="020F0502020204030204" pitchFamily="34" charset="0"/>
+              </a:rPr>
+              <a:t>}} </a:t>
+            </a:r>
+            <a:r>
+              <a:rPr lang="es-CL" sz="1200" dirty="0">
+                <a:solidFill>
+                  <a:srgbClr val="2C2E38"/>
+                </a:solidFill>
+                <a:latin typeface="DM Sans" pitchFamily="2" charset="0"/>
+                <a:ea typeface="Calibri" panose="020F0502020204030204" pitchFamily="34" charset="0"/>
+                <a:cs typeface="Calibri" panose="020F0502020204030204" pitchFamily="34" charset="0"/>
+              </a:rPr>
+              <a:t>durante el periodo de estudio. </a:t>
+            </a:r>
+          </a:p>
+          <a:p>
+            <a:pPr>
               <a:lnSpc>
-                <a:spcPct val="110000"/>
+                <a:spcPct val="150000"/>
               </a:lnSpc>
             </a:pPr>
-            <a:endParaRPr lang="es-CL" sz="1400" b="1" dirty="0">
+            <a:endParaRPr lang="es-CL" sz="1200" dirty="0">
               <a:solidFill>
-                <a:srgbClr val="002060"/>
+                <a:srgbClr val="2C2E38"/>
               </a:solidFill>
-              <a:latin typeface="Candara" panose="020E0502030303020204" pitchFamily="34" charset="0"/>
+              <a:latin typeface="DM Sans" pitchFamily="2" charset="0"/>
               <a:ea typeface="Calibri" panose="020F0502020204030204" pitchFamily="34" charset="0"/>
               <a:cs typeface="Calibri" panose="020F0502020204030204" pitchFamily="34" charset="0"/>
             </a:endParaRPr>
           </a:p>
           <a:p>
-            <a:pPr algn="just">
+            <a:pPr>
               <a:lnSpc>
-                <a:spcPct val="110000"/>
+                <a:spcPct val="150000"/>
               </a:lnSpc>
             </a:pPr>
             <a:r>
-              <a:rPr lang="es-CL" sz="1400" b="1" dirty="0">
-                <a:solidFill>
-                  <a:srgbClr val="002060"/>
-                </a:solidFill>
-                <a:latin typeface="Candara" panose="020E0502030303020204" pitchFamily="34" charset="0"/>
+              <a:rPr lang="es-CL" sz="1200" dirty="0">
+                <a:solidFill>
+                  <a:srgbClr val="2C2E38"/>
+                </a:solidFill>
+                <a:latin typeface="DM Sans" pitchFamily="2" charset="0"/>
                 <a:ea typeface="Calibri" panose="020F0502020204030204" pitchFamily="34" charset="0"/>
                 <a:cs typeface="Calibri" panose="020F0502020204030204" pitchFamily="34" charset="0"/>
               </a:rPr>
@@ -4723,123 +5668,6 @@
           <a:p>
             <a:pPr algn="just"/>
             <a:endParaRPr lang="es-CL" sz="1300" dirty="0"/>
-          </a:p>
-        </p:txBody>
-      </p:sp>
-      <p:sp>
-        <p:nvSpPr>
-          <p:cNvPr id="14" name="Rectángulo: esquinas redondeadas 13">
-            <a:extLst>
-              <a:ext uri="{FF2B5EF4-FFF2-40B4-BE49-F238E27FC236}">
-                <a16:creationId xmlns:a16="http://schemas.microsoft.com/office/drawing/2014/main" id="{FF7C722F-9063-9D48-1EC4-C1E295146C78}"/>
-              </a:ext>
-            </a:extLst>
-          </p:cNvPr>
-          <p:cNvSpPr/>
-          <p:nvPr/>
-        </p:nvSpPr>
-        <p:spPr>
-          <a:xfrm>
-            <a:off x="8719898" y="4425153"/>
-            <a:ext cx="1458564" cy="263808"/>
-          </a:xfrm>
-          <a:prstGeom prst="roundRect">
-            <a:avLst/>
-          </a:prstGeom>
-          <a:solidFill>
-            <a:srgbClr val="EEF2FF"/>
-          </a:solidFill>
-          <a:ln>
-            <a:solidFill>
-              <a:srgbClr val="E0E7FF"/>
-            </a:solidFill>
-          </a:ln>
-        </p:spPr>
-        <p:style>
-          <a:lnRef idx="2">
-            <a:schemeClr val="accent1">
-              <a:shade val="15000"/>
-            </a:schemeClr>
-          </a:lnRef>
-          <a:fillRef idx="1">
-            <a:schemeClr val="accent1"/>
-          </a:fillRef>
-          <a:effectRef idx="0">
-            <a:schemeClr val="accent1"/>
-          </a:effectRef>
-          <a:fontRef idx="minor">
-            <a:schemeClr val="lt1"/>
-          </a:fontRef>
-        </p:style>
-        <p:txBody>
-          <a:bodyPr rot="0" spcFirstLastPara="0" vert="horz" wrap="square" lIns="125786" tIns="62893" rIns="125786" bIns="62893" numCol="1" spcCol="0" rtlCol="0" fromWordArt="0" anchor="ctr" anchorCtr="0" forceAA="0" compatLnSpc="1">
-            <a:prstTxWarp prst="textNoShape">
-              <a:avLst/>
-            </a:prstTxWarp>
-            <a:noAutofit/>
-          </a:bodyPr>
-          <a:lstStyle/>
-          <a:p>
-            <a:endParaRPr lang="es-CL" sz="3654"/>
-          </a:p>
-        </p:txBody>
-      </p:sp>
-      <p:sp>
-        <p:nvSpPr>
-          <p:cNvPr id="17" name="CuadroTexto 16">
-            <a:extLst>
-              <a:ext uri="{FF2B5EF4-FFF2-40B4-BE49-F238E27FC236}">
-                <a16:creationId xmlns:a16="http://schemas.microsoft.com/office/drawing/2014/main" id="{D6E6AF4A-1DB9-6D06-B5C9-2FDA3F2E6904}"/>
-              </a:ext>
-            </a:extLst>
-          </p:cNvPr>
-          <p:cNvSpPr txBox="1"/>
-          <p:nvPr/>
-        </p:nvSpPr>
-        <p:spPr>
-          <a:xfrm>
-            <a:off x="8752803" y="4414698"/>
-            <a:ext cx="1749211" cy="282834"/>
-          </a:xfrm>
-          <a:prstGeom prst="rect">
-            <a:avLst/>
-          </a:prstGeom>
-          <a:noFill/>
-        </p:spPr>
-        <p:txBody>
-          <a:bodyPr wrap="square" rtlCol="0">
-            <a:spAutoFit/>
-          </a:bodyPr>
-          <a:lstStyle/>
-          <a:p>
-            <a:r>
-              <a:rPr lang="es-CL" sz="1238" b="1" dirty="0">
-                <a:solidFill>
-                  <a:srgbClr val="002060"/>
-                </a:solidFill>
-                <a:latin typeface="Candara" panose="020E0502030303020204" pitchFamily="34" charset="0"/>
-                <a:ea typeface="Calibri" panose="020F0502020204030204" pitchFamily="34" charset="0"/>
-                <a:cs typeface="Calibri" panose="020F0502020204030204" pitchFamily="34" charset="0"/>
-              </a:rPr>
-              <a:t>Indicadores</a:t>
-            </a:r>
-            <a:r>
-              <a:rPr lang="es-CL" sz="1238" b="1" dirty="0">
-                <a:latin typeface="Candara" panose="020E0502030303020204" pitchFamily="34" charset="0"/>
-              </a:rPr>
-              <a:t> </a:t>
-            </a:r>
-            <a:r>
-              <a:rPr lang="es-CL" sz="1238" b="1" dirty="0">
-                <a:solidFill>
-                  <a:srgbClr val="002060"/>
-                </a:solidFill>
-                <a:latin typeface="Candara" panose="020E0502030303020204" pitchFamily="34" charset="0"/>
-                <a:ea typeface="Calibri" panose="020F0502020204030204" pitchFamily="34" charset="0"/>
-                <a:cs typeface="Calibri" panose="020F0502020204030204" pitchFamily="34" charset="0"/>
-              </a:rPr>
-              <a:t>clave</a:t>
-            </a:r>
           </a:p>
         </p:txBody>
       </p:sp>
@@ -4859,14 +5687,14 @@
         </p:nvSpPr>
         <p:spPr>
           <a:xfrm>
-            <a:off x="187137" y="9330601"/>
-            <a:ext cx="10208797" cy="5078123"/>
+            <a:off x="511707" y="9258282"/>
+            <a:ext cx="9789333" cy="5318057"/>
           </a:xfrm>
           <a:prstGeom prst="roundRect">
             <a:avLst/>
           </a:prstGeom>
           <a:solidFill>
-            <a:srgbClr val="FFFFFF"/>
+            <a:srgbClr val="EDF4FB"/>
           </a:solidFill>
           <a:ln>
             <a:solidFill>
@@ -4919,13 +5747,15 @@
               </a:ext>
             </a:extLst>
           </p:cNvPr>
-          <p:cNvSpPr txBox="1"/>
+          <p:cNvSpPr txBox="1">
+            <a:spLocks/>
+          </p:cNvSpPr>
           <p:nvPr/>
         </p:nvSpPr>
         <p:spPr>
           <a:xfrm>
-            <a:off x="837640" y="4944820"/>
-            <a:ext cx="1820402" cy="663836"/>
+            <a:off x="580049" y="3780577"/>
+            <a:ext cx="2524258" cy="646331"/>
           </a:xfrm>
           <a:prstGeom prst="rect">
             <a:avLst/>
@@ -4938,43 +5768,34 @@
           </a:bodyPr>
           <a:lstStyle/>
           <a:p>
-            <a:pPr algn="just"/>
-            <a:endParaRPr lang="es-CL" sz="1238" dirty="0">
-              <a:latin typeface="Calibri" panose="020F0502020204030204" pitchFamily="34" charset="0"/>
-              <a:ea typeface="Calibri" panose="020F0502020204030204" pitchFamily="34" charset="0"/>
-              <a:cs typeface="Calibri" panose="020F0502020204030204" pitchFamily="34" charset="0"/>
-            </a:endParaRPr>
-          </a:p>
-          <a:p>
-            <a:pPr algn="ctr"/>
-            <a:r>
-              <a:rPr lang="es-CL" sz="1200" b="1" dirty="0">
-                <a:solidFill>
-                  <a:srgbClr val="002060"/>
-                </a:solidFill>
-                <a:latin typeface="Candara" panose="020E0502030303020204" pitchFamily="34" charset="0"/>
+            <a:r>
+              <a:rPr lang="es-CL" b="1" dirty="0">
+                <a:solidFill>
+                  <a:srgbClr val="2C2E38"/>
+                </a:solidFill>
+                <a:latin typeface="DM Mono" panose="020B0509040201040103" pitchFamily="49" charset="0"/>
                 <a:ea typeface="Calibri" panose="020F0502020204030204" pitchFamily="34" charset="0"/>
                 <a:cs typeface="Calibri" panose="020F0502020204030204" pitchFamily="34" charset="0"/>
               </a:rPr>
               <a:t>{{</a:t>
             </a:r>
             <a:r>
-              <a:rPr lang="es-CL" sz="1200" b="1" dirty="0" err="1">
-                <a:solidFill>
-                  <a:srgbClr val="002060"/>
-                </a:solidFill>
-                <a:latin typeface="Candara" panose="020E0502030303020204" pitchFamily="34" charset="0"/>
+              <a:rPr lang="es-CL" b="1" dirty="0" err="1">
+                <a:solidFill>
+                  <a:srgbClr val="2C2E38"/>
+                </a:solidFill>
+                <a:latin typeface="DM Mono" panose="020B0509040201040103" pitchFamily="49" charset="0"/>
                 <a:ea typeface="Calibri" panose="020F0502020204030204" pitchFamily="34" charset="0"/>
                 <a:cs typeface="Calibri" panose="020F0502020204030204" pitchFamily="34" charset="0"/>
               </a:rPr>
               <a:t>kpis.cmg_promedio_clave</a:t>
             </a:r>
             <a:r>
-              <a:rPr lang="es-CL" sz="1200" b="1" dirty="0">
-                <a:solidFill>
-                  <a:srgbClr val="002060"/>
-                </a:solidFill>
-                <a:latin typeface="Candara" panose="020E0502030303020204" pitchFamily="34" charset="0"/>
+              <a:rPr lang="es-CL" b="1" dirty="0">
+                <a:solidFill>
+                  <a:srgbClr val="2C2E38"/>
+                </a:solidFill>
+                <a:latin typeface="DM Mono" panose="020B0509040201040103" pitchFamily="49" charset="0"/>
                 <a:ea typeface="Calibri" panose="020F0502020204030204" pitchFamily="34" charset="0"/>
                 <a:cs typeface="Calibri" panose="020F0502020204030204" pitchFamily="34" charset="0"/>
               </a:rPr>
@@ -4992,13 +5813,15 @@
               </a:ext>
             </a:extLst>
           </p:cNvPr>
-          <p:cNvSpPr txBox="1"/>
+          <p:cNvSpPr txBox="1">
+            <a:spLocks/>
+          </p:cNvSpPr>
           <p:nvPr/>
         </p:nvSpPr>
         <p:spPr>
           <a:xfrm>
-            <a:off x="2885946" y="4934987"/>
-            <a:ext cx="2161743" cy="663836"/>
+            <a:off x="3104307" y="3793619"/>
+            <a:ext cx="2161743" cy="923330"/>
           </a:xfrm>
           <a:prstGeom prst="rect">
             <a:avLst/>
@@ -5011,43 +5834,34 @@
           </a:bodyPr>
           <a:lstStyle/>
           <a:p>
-            <a:pPr algn="ctr"/>
-            <a:endParaRPr lang="es-CL" sz="1238" dirty="0">
-              <a:latin typeface="Calibri" panose="020F0502020204030204" pitchFamily="34" charset="0"/>
-              <a:ea typeface="Calibri" panose="020F0502020204030204" pitchFamily="34" charset="0"/>
-              <a:cs typeface="Calibri" panose="020F0502020204030204" pitchFamily="34" charset="0"/>
-            </a:endParaRPr>
-          </a:p>
-          <a:p>
-            <a:pPr algn="ctr"/>
-            <a:r>
-              <a:rPr lang="es-CL" sz="1200" b="1" dirty="0">
-                <a:solidFill>
-                  <a:srgbClr val="002060"/>
-                </a:solidFill>
-                <a:latin typeface="Candara" panose="020E0502030303020204" pitchFamily="34" charset="0"/>
+            <a:r>
+              <a:rPr lang="es-CL" b="1" dirty="0">
+                <a:solidFill>
+                  <a:srgbClr val="2C2E38"/>
+                </a:solidFill>
+                <a:latin typeface="DM Mono" panose="020B0509040201040103" pitchFamily="49" charset="0"/>
                 <a:ea typeface="Calibri" panose="020F0502020204030204" pitchFamily="34" charset="0"/>
                 <a:cs typeface="Calibri" panose="020F0502020204030204" pitchFamily="34" charset="0"/>
               </a:rPr>
               <a:t>{{</a:t>
             </a:r>
             <a:r>
-              <a:rPr lang="es-CL" sz="1200" b="1" dirty="0" err="1">
-                <a:solidFill>
-                  <a:srgbClr val="002060"/>
-                </a:solidFill>
-                <a:latin typeface="Candara" panose="020E0502030303020204" pitchFamily="34" charset="0"/>
+              <a:rPr lang="es-CL" b="1" dirty="0" err="1">
+                <a:solidFill>
+                  <a:srgbClr val="2C2E38"/>
+                </a:solidFill>
+                <a:latin typeface="DM Mono" panose="020B0509040201040103" pitchFamily="49" charset="0"/>
                 <a:ea typeface="Calibri" panose="020F0502020204030204" pitchFamily="34" charset="0"/>
                 <a:cs typeface="Calibri" panose="020F0502020204030204" pitchFamily="34" charset="0"/>
               </a:rPr>
               <a:t>kpis.cmg_spread_max_crucero</a:t>
             </a:r>
             <a:r>
-              <a:rPr lang="es-CL" sz="1200" b="1" dirty="0">
-                <a:solidFill>
-                  <a:srgbClr val="002060"/>
-                </a:solidFill>
-                <a:latin typeface="Candara" panose="020E0502030303020204" pitchFamily="34" charset="0"/>
+              <a:rPr lang="es-CL" b="1" dirty="0">
+                <a:solidFill>
+                  <a:srgbClr val="2C2E38"/>
+                </a:solidFill>
+                <a:latin typeface="DM Mono" panose="020B0509040201040103" pitchFamily="49" charset="0"/>
                 <a:ea typeface="Calibri" panose="020F0502020204030204" pitchFamily="34" charset="0"/>
                 <a:cs typeface="Calibri" panose="020F0502020204030204" pitchFamily="34" charset="0"/>
               </a:rPr>
@@ -5065,13 +5879,15 @@
               </a:ext>
             </a:extLst>
           </p:cNvPr>
-          <p:cNvSpPr txBox="1"/>
+          <p:cNvSpPr txBox="1">
+            <a:spLocks/>
+          </p:cNvSpPr>
           <p:nvPr/>
         </p:nvSpPr>
         <p:spPr>
           <a:xfrm>
-            <a:off x="5714946" y="4919779"/>
-            <a:ext cx="1820402" cy="663836"/>
+            <a:off x="5539043" y="3773901"/>
+            <a:ext cx="1820402" cy="923330"/>
           </a:xfrm>
           <a:prstGeom prst="rect">
             <a:avLst/>
@@ -5084,43 +5900,34 @@
           </a:bodyPr>
           <a:lstStyle/>
           <a:p>
-            <a:pPr algn="just"/>
-            <a:endParaRPr lang="es-CL" sz="1238" dirty="0">
-              <a:latin typeface="Calibri" panose="020F0502020204030204" pitchFamily="34" charset="0"/>
-              <a:ea typeface="Calibri" panose="020F0502020204030204" pitchFamily="34" charset="0"/>
-              <a:cs typeface="Calibri" panose="020F0502020204030204" pitchFamily="34" charset="0"/>
-            </a:endParaRPr>
-          </a:p>
-          <a:p>
-            <a:pPr algn="ctr"/>
-            <a:r>
-              <a:rPr lang="es-CL" sz="1200" b="1" dirty="0">
-                <a:solidFill>
-                  <a:srgbClr val="002060"/>
-                </a:solidFill>
-                <a:latin typeface="Candara" panose="020E0502030303020204" pitchFamily="34" charset="0"/>
+            <a:r>
+              <a:rPr lang="es-CL" b="1" dirty="0">
+                <a:solidFill>
+                  <a:srgbClr val="2C2E38"/>
+                </a:solidFill>
+                <a:latin typeface="DM Mono" panose="020B0509040201040103" pitchFamily="49" charset="0"/>
                 <a:ea typeface="Calibri" panose="020F0502020204030204" pitchFamily="34" charset="0"/>
                 <a:cs typeface="Calibri" panose="020F0502020204030204" pitchFamily="34" charset="0"/>
               </a:rPr>
               <a:t>{{</a:t>
             </a:r>
             <a:r>
-              <a:rPr lang="es-CL" sz="1200" b="1" dirty="0" err="1">
-                <a:solidFill>
-                  <a:srgbClr val="002060"/>
-                </a:solidFill>
-                <a:latin typeface="Candara" panose="020E0502030303020204" pitchFamily="34" charset="0"/>
+              <a:rPr lang="es-CL" b="1" dirty="0" err="1">
+                <a:solidFill>
+                  <a:srgbClr val="2C2E38"/>
+                </a:solidFill>
+                <a:latin typeface="DM Mono" panose="020B0509040201040103" pitchFamily="49" charset="0"/>
                 <a:ea typeface="Calibri" panose="020F0502020204030204" pitchFamily="34" charset="0"/>
                 <a:cs typeface="Calibri" panose="020F0502020204030204" pitchFamily="34" charset="0"/>
               </a:rPr>
               <a:t>kpis.vert_total_mwh_clave</a:t>
             </a:r>
             <a:r>
-              <a:rPr lang="es-CL" sz="1200" b="1" dirty="0">
-                <a:solidFill>
-                  <a:srgbClr val="002060"/>
-                </a:solidFill>
-                <a:latin typeface="Candara" panose="020E0502030303020204" pitchFamily="34" charset="0"/>
+              <a:rPr lang="es-CL" b="1" dirty="0">
+                <a:solidFill>
+                  <a:srgbClr val="2C2E38"/>
+                </a:solidFill>
+                <a:latin typeface="DM Mono" panose="020B0509040201040103" pitchFamily="49" charset="0"/>
                 <a:ea typeface="Calibri" panose="020F0502020204030204" pitchFamily="34" charset="0"/>
                 <a:cs typeface="Calibri" panose="020F0502020204030204" pitchFamily="34" charset="0"/>
               </a:rPr>
@@ -5138,13 +5945,15 @@
               </a:ext>
             </a:extLst>
           </p:cNvPr>
-          <p:cNvSpPr txBox="1"/>
+          <p:cNvSpPr txBox="1">
+            <a:spLocks/>
+          </p:cNvSpPr>
           <p:nvPr/>
         </p:nvSpPr>
         <p:spPr>
           <a:xfrm>
-            <a:off x="8016719" y="4919615"/>
-            <a:ext cx="2161743" cy="663836"/>
+            <a:off x="8050444" y="3726784"/>
+            <a:ext cx="2161743" cy="923330"/>
           </a:xfrm>
           <a:prstGeom prst="rect">
             <a:avLst/>
@@ -5157,43 +5966,34 @@
           </a:bodyPr>
           <a:lstStyle/>
           <a:p>
-            <a:pPr algn="just"/>
-            <a:endParaRPr lang="es-CL" sz="1238" dirty="0">
-              <a:latin typeface="Calibri" panose="020F0502020204030204" pitchFamily="34" charset="0"/>
-              <a:ea typeface="Calibri" panose="020F0502020204030204" pitchFamily="34" charset="0"/>
-              <a:cs typeface="Calibri" panose="020F0502020204030204" pitchFamily="34" charset="0"/>
-            </a:endParaRPr>
-          </a:p>
-          <a:p>
-            <a:pPr algn="ctr"/>
-            <a:r>
-              <a:rPr lang="es-CL" sz="1200" b="1" dirty="0">
-                <a:solidFill>
-                  <a:srgbClr val="002060"/>
-                </a:solidFill>
-                <a:latin typeface="Candara" panose="020E0502030303020204" pitchFamily="34" charset="0"/>
+            <a:r>
+              <a:rPr lang="es-CL" b="1" dirty="0">
+                <a:solidFill>
+                  <a:srgbClr val="2C2E38"/>
+                </a:solidFill>
+                <a:latin typeface="DM Mono" panose="020B0509040201040103" pitchFamily="49" charset="0"/>
                 <a:ea typeface="Calibri" panose="020F0502020204030204" pitchFamily="34" charset="0"/>
                 <a:cs typeface="Calibri" panose="020F0502020204030204" pitchFamily="34" charset="0"/>
               </a:rPr>
               <a:t>{{</a:t>
             </a:r>
             <a:r>
-              <a:rPr lang="es-CL" sz="1200" b="1" dirty="0" err="1">
-                <a:solidFill>
-                  <a:srgbClr val="002060"/>
-                </a:solidFill>
-                <a:latin typeface="Candara" panose="020E0502030303020204" pitchFamily="34" charset="0"/>
+              <a:rPr lang="es-CL" b="1" dirty="0" err="1">
+                <a:solidFill>
+                  <a:srgbClr val="2C2E38"/>
+                </a:solidFill>
+                <a:latin typeface="DM Mono" panose="020B0509040201040103" pitchFamily="49" charset="0"/>
                 <a:ea typeface="Calibri" panose="020F0502020204030204" pitchFamily="34" charset="0"/>
                 <a:cs typeface="Calibri" panose="020F0502020204030204" pitchFamily="34" charset="0"/>
               </a:rPr>
               <a:t>kpis.vert_empresa_vert_max</a:t>
             </a:r>
             <a:r>
-              <a:rPr lang="es-CL" sz="1200" b="1" dirty="0">
-                <a:solidFill>
-                  <a:srgbClr val="002060"/>
-                </a:solidFill>
-                <a:latin typeface="Candara" panose="020E0502030303020204" pitchFamily="34" charset="0"/>
+              <a:rPr lang="es-CL" b="1" dirty="0">
+                <a:solidFill>
+                  <a:srgbClr val="2C2E38"/>
+                </a:solidFill>
+                <a:latin typeface="DM Mono" panose="020B0509040201040103" pitchFamily="49" charset="0"/>
                 <a:ea typeface="Calibri" panose="020F0502020204030204" pitchFamily="34" charset="0"/>
                 <a:cs typeface="Calibri" panose="020F0502020204030204" pitchFamily="34" charset="0"/>
               </a:rPr>
@@ -5204,7 +6004,7 @@
       </p:sp>
       <p:sp>
         <p:nvSpPr>
-          <p:cNvPr id="27" name="img_cmg">
+          <p:cNvPr id="27" name="tecto_resaltado">
             <a:extLst>
               <a:ext uri="{FF2B5EF4-FFF2-40B4-BE49-F238E27FC236}">
                 <a16:creationId xmlns:a16="http://schemas.microsoft.com/office/drawing/2014/main" id="{26A0902A-00E0-EEB0-2D42-69F3B12DDBF7}"/>
@@ -5218,14 +6018,14 @@
         </p:nvSpPr>
         <p:spPr>
           <a:xfrm>
-            <a:off x="295493" y="2990631"/>
+            <a:off x="309871" y="1372259"/>
             <a:ext cx="10072067" cy="1309604"/>
           </a:xfrm>
           <a:prstGeom prst="roundRect">
             <a:avLst/>
           </a:prstGeom>
           <a:solidFill>
-            <a:srgbClr val="FFFFFF"/>
+            <a:srgbClr val="FDF3E3"/>
           </a:solidFill>
           <a:ln>
             <a:solidFill>
@@ -5278,13 +6078,15 @@
               </a:ext>
             </a:extLst>
           </p:cNvPr>
-          <p:cNvSpPr txBox="1"/>
+          <p:cNvSpPr txBox="1">
+            <a:spLocks noGrp="1" noRot="1" noMove="1" noResize="1" noEditPoints="1" noAdjustHandles="1" noChangeArrowheads="1" noChangeShapeType="1"/>
+          </p:cNvSpPr>
           <p:nvPr/>
         </p:nvSpPr>
         <p:spPr>
           <a:xfrm>
-            <a:off x="450145" y="2872249"/>
-            <a:ext cx="9518204" cy="1235338"/>
+            <a:off x="586802" y="1321902"/>
+            <a:ext cx="9518204" cy="1425840"/>
           </a:xfrm>
           <a:prstGeom prst="rect">
             <a:avLst/>
@@ -5299,24 +6101,75 @@
           <a:p>
             <a:pPr algn="just"/>
             <a:endParaRPr lang="es-CL" sz="1238" dirty="0">
-              <a:latin typeface="Calibri" panose="020F0502020204030204" pitchFamily="34" charset="0"/>
+              <a:solidFill>
+                <a:srgbClr val="E67E22"/>
+              </a:solidFill>
+              <a:latin typeface="DM Sans" pitchFamily="2" charset="0"/>
               <a:ea typeface="Calibri" panose="020F0502020204030204" pitchFamily="34" charset="0"/>
               <a:cs typeface="Calibri" panose="020F0502020204030204" pitchFamily="34" charset="0"/>
             </a:endParaRPr>
           </a:p>
           <a:p>
-            <a:pPr algn="just"/>
-            <a:r>
-              <a:rPr lang="es-CL" sz="1238" b="1" dirty="0">
-                <a:solidFill>
-                  <a:srgbClr val="002060"/>
-                </a:solidFill>
-                <a:latin typeface="Candara" panose="020E0502030303020204" pitchFamily="34" charset="0"/>
+            <a:r>
+              <a:rPr lang="es-CL" sz="1200" b="1" dirty="0">
+                <a:solidFill>
+                  <a:srgbClr val="E67E22"/>
+                </a:solidFill>
+                <a:latin typeface="DM Sans" pitchFamily="2" charset="0"/>
                 <a:ea typeface="Calibri" panose="020F0502020204030204" pitchFamily="34" charset="0"/>
                 <a:cs typeface="Calibri" panose="020F0502020204030204" pitchFamily="34" charset="0"/>
               </a:rPr>
               <a:t>El presente reporte analiza una ventana móvil de 12 meses y los compara con los 12 meses inmediatamente anteriores. Además, en el caso particular de la generación típica compara con una fecha fija previa al ingreso masivo de sistemas de almacenamiento (BESS).</a:t>
             </a:r>
+          </a:p>
+          <a:p>
+            <a:endParaRPr lang="es-CL" sz="1200" b="1" dirty="0">
+              <a:solidFill>
+                <a:srgbClr val="E67E22"/>
+              </a:solidFill>
+              <a:latin typeface="DM Sans" pitchFamily="2" charset="0"/>
+              <a:ea typeface="Calibri" panose="020F0502020204030204" pitchFamily="34" charset="0"/>
+              <a:cs typeface="Calibri" panose="020F0502020204030204" pitchFamily="34" charset="0"/>
+            </a:endParaRPr>
+          </a:p>
+          <a:p>
+            <a:r>
+              <a:rPr lang="es-CL" sz="1200" b="1" dirty="0">
+                <a:solidFill>
+                  <a:srgbClr val="E67E22"/>
+                </a:solidFill>
+                <a:latin typeface="DM Sans" pitchFamily="2" charset="0"/>
+                <a:ea typeface="Calibri" panose="020F0502020204030204" pitchFamily="34" charset="0"/>
+                <a:cs typeface="Calibri" panose="020F0502020204030204" pitchFamily="34" charset="0"/>
+              </a:rPr>
+              <a:t>Es posible encontrar otros reportes de la División de Mercados Eléctricos en la siguiente página web:  </a:t>
+            </a:r>
+            <a:r>
+              <a:rPr lang="es-CL" sz="1200" b="1" dirty="0">
+                <a:solidFill>
+                  <a:srgbClr val="E67E22"/>
+                </a:solidFill>
+                <a:latin typeface="DM Sans" pitchFamily="2" charset="0"/>
+                <a:ea typeface="Calibri" panose="020F0502020204030204" pitchFamily="34" charset="0"/>
+                <a:cs typeface="Calibri" panose="020F0502020204030204" pitchFamily="34" charset="0"/>
+                <a:hlinkClick r:id="rId3">
+                  <a:extLst>
+                    <a:ext uri="{A12FA001-AC4F-418D-AE19-62706E023703}">
+                      <ahyp:hlinkClr xmlns:ahyp="http://schemas.microsoft.com/office/drawing/2018/hyperlinkcolor" val="tx"/>
+                    </a:ext>
+                  </a:extLst>
+                </a:hlinkClick>
+              </a:rPr>
+              <a:t>Reportes Mercados</a:t>
+            </a:r>
+            <a:endParaRPr lang="es-CL" sz="1200" b="1" dirty="0">
+              <a:solidFill>
+                <a:srgbClr val="E67E22"/>
+              </a:solidFill>
+              <a:latin typeface="DM Sans" pitchFamily="2" charset="0"/>
+              <a:ea typeface="Calibri" panose="020F0502020204030204" pitchFamily="34" charset="0"/>
+              <a:cs typeface="Calibri" panose="020F0502020204030204" pitchFamily="34" charset="0"/>
+            </a:endParaRPr>
           </a:p>
           <a:p>
             <a:pPr algn="just"/>
@@ -5329,51 +6182,6 @@
               <a:cs typeface="Calibri" panose="020F0502020204030204" pitchFamily="34" charset="0"/>
             </a:endParaRPr>
           </a:p>
-          <a:p>
-            <a:pPr algn="just"/>
-            <a:r>
-              <a:rPr lang="es-CL" sz="1238" b="1" dirty="0">
-                <a:solidFill>
-                  <a:srgbClr val="002060"/>
-                </a:solidFill>
-                <a:latin typeface="Candara" panose="020E0502030303020204" pitchFamily="34" charset="0"/>
-                <a:ea typeface="Calibri" panose="020F0502020204030204" pitchFamily="34" charset="0"/>
-                <a:cs typeface="Calibri" panose="020F0502020204030204" pitchFamily="34" charset="0"/>
-              </a:rPr>
-              <a:t>Es posible encontrar otros reportes de la División de Mercados Eléctricos en la siguiente página web:  </a:t>
-            </a:r>
-            <a:r>
-              <a:rPr lang="es-CL" sz="1238" b="1" dirty="0">
-                <a:solidFill>
-                  <a:srgbClr val="002060"/>
-                </a:solidFill>
-                <a:latin typeface="Candara" panose="020E0502030303020204" pitchFamily="34" charset="0"/>
-                <a:ea typeface="Calibri" panose="020F0502020204030204" pitchFamily="34" charset="0"/>
-                <a:cs typeface="Calibri" panose="020F0502020204030204" pitchFamily="34" charset="0"/>
-                <a:hlinkClick r:id="rId4"/>
-              </a:rPr>
-              <a:t>Reportes Mercados</a:t>
-            </a:r>
-            <a:endParaRPr lang="es-CL" sz="1238" b="1" dirty="0">
-              <a:solidFill>
-                <a:srgbClr val="002060"/>
-              </a:solidFill>
-              <a:latin typeface="Candara" panose="020E0502030303020204" pitchFamily="34" charset="0"/>
-              <a:ea typeface="Calibri" panose="020F0502020204030204" pitchFamily="34" charset="0"/>
-              <a:cs typeface="Calibri" panose="020F0502020204030204" pitchFamily="34" charset="0"/>
-            </a:endParaRPr>
-          </a:p>
-          <a:p>
-            <a:pPr algn="just"/>
-            <a:endParaRPr lang="es-CL" sz="1238" b="1" dirty="0">
-              <a:solidFill>
-                <a:srgbClr val="002060"/>
-              </a:solidFill>
-              <a:latin typeface="Candara" panose="020E0502030303020204" pitchFamily="34" charset="0"/>
-              <a:ea typeface="Calibri" panose="020F0502020204030204" pitchFamily="34" charset="0"/>
-              <a:cs typeface="Calibri" panose="020F0502020204030204" pitchFamily="34" charset="0"/>
-            </a:endParaRPr>
-          </a:p>
         </p:txBody>
       </p:sp>
       <p:sp>
@@ -5385,13 +6193,15 @@
               </a:ext>
             </a:extLst>
           </p:cNvPr>
-          <p:cNvSpPr txBox="1"/>
+          <p:cNvSpPr txBox="1">
+            <a:spLocks/>
+          </p:cNvSpPr>
           <p:nvPr/>
         </p:nvSpPr>
         <p:spPr>
           <a:xfrm>
-            <a:off x="820856" y="4964671"/>
-            <a:ext cx="943163" cy="215444"/>
+            <a:off x="621460" y="3525080"/>
+            <a:ext cx="1232552" cy="246221"/>
           </a:xfrm>
           <a:prstGeom prst="rect">
             <a:avLst/>
@@ -5405,15 +6215,35 @@
           <a:lstStyle/>
           <a:p>
             <a:r>
-              <a:rPr lang="es-CL" sz="800" b="1" dirty="0">
+              <a:rPr lang="es-CL" sz="1000" b="1" kern="100" dirty="0">
+                <a:solidFill>
+                  <a:srgbClr val="002060"/>
+                </a:solidFill>
+                <a:latin typeface="DM Sans" pitchFamily="2" charset="0"/>
+                <a:cs typeface="Times New Roman" panose="02020603050405020304" pitchFamily="18" charset="0"/>
+              </a:rPr>
+              <a:t>CMG</a:t>
+            </a:r>
+            <a:r>
+              <a:rPr lang="es-CL" sz="1000" b="1" dirty="0">
                 <a:solidFill>
                   <a:srgbClr val="8EC5FF"/>
                 </a:solidFill>
-                <a:latin typeface="Candara" panose="020E0502030303020204" pitchFamily="34" charset="0"/>
+                <a:latin typeface="DM Sans" pitchFamily="2" charset="0"/>
                 <a:ea typeface="Calibri" panose="020F0502020204030204" pitchFamily="34" charset="0"/>
                 <a:cs typeface="Calibri" panose="020F0502020204030204" pitchFamily="34" charset="0"/>
               </a:rPr>
-              <a:t>CMG promedio</a:t>
+              <a:t> </a:t>
+            </a:r>
+            <a:r>
+              <a:rPr lang="es-CL" sz="1000" b="1" kern="100" dirty="0">
+                <a:solidFill>
+                  <a:srgbClr val="002060"/>
+                </a:solidFill>
+                <a:latin typeface="DM Sans" pitchFamily="2" charset="0"/>
+                <a:cs typeface="Times New Roman" panose="02020603050405020304" pitchFamily="18" charset="0"/>
+              </a:rPr>
+              <a:t>PROMEDIO</a:t>
             </a:r>
           </a:p>
         </p:txBody>
@@ -5427,13 +6257,15 @@
               </a:ext>
             </a:extLst>
           </p:cNvPr>
-          <p:cNvSpPr txBox="1"/>
+          <p:cNvSpPr txBox="1">
+            <a:spLocks/>
+          </p:cNvSpPr>
           <p:nvPr/>
         </p:nvSpPr>
         <p:spPr>
           <a:xfrm>
-            <a:off x="3067471" y="4979728"/>
-            <a:ext cx="943163" cy="215444"/>
+            <a:off x="3174094" y="3517425"/>
+            <a:ext cx="1355042" cy="246221"/>
           </a:xfrm>
           <a:prstGeom prst="rect">
             <a:avLst/>
@@ -5447,16 +6279,43 @@
           <a:lstStyle/>
           <a:p>
             <a:r>
-              <a:rPr lang="es-CL" sz="800" b="1" dirty="0">
+              <a:rPr lang="es-ES" sz="1000" b="1" kern="100" dirty="0">
+                <a:solidFill>
+                  <a:srgbClr val="002060"/>
+                </a:solidFill>
+                <a:latin typeface="DM Sans" pitchFamily="2" charset="0"/>
+                <a:cs typeface="Times New Roman" panose="02020603050405020304" pitchFamily="18" charset="0"/>
+              </a:rPr>
+              <a:t>SPREAD</a:t>
+            </a:r>
+            <a:r>
+              <a:rPr lang="es-ES" sz="1000" b="1" dirty="0">
                 <a:solidFill>
                   <a:srgbClr val="8EC5FF"/>
                 </a:solidFill>
-                <a:latin typeface="Candara" panose="020E0502030303020204" pitchFamily="34" charset="0"/>
+                <a:latin typeface="DM Sans" pitchFamily="2" charset="0"/>
                 <a:ea typeface="Calibri" panose="020F0502020204030204" pitchFamily="34" charset="0"/>
                 <a:cs typeface="Calibri" panose="020F0502020204030204" pitchFamily="34" charset="0"/>
               </a:rPr>
-              <a:t>Spread máximo</a:t>
-            </a:r>
+              <a:t> </a:t>
+            </a:r>
+            <a:r>
+              <a:rPr lang="es-ES" sz="1000" b="1" kern="100" dirty="0">
+                <a:solidFill>
+                  <a:srgbClr val="002060"/>
+                </a:solidFill>
+                <a:latin typeface="DM Sans" pitchFamily="2" charset="0"/>
+                <a:cs typeface="Times New Roman" panose="02020603050405020304" pitchFamily="18" charset="0"/>
+              </a:rPr>
+              <a:t>MÁXIMO</a:t>
+            </a:r>
+            <a:endParaRPr lang="es-CL" sz="1000" b="1" kern="100" dirty="0">
+              <a:solidFill>
+                <a:srgbClr val="002060"/>
+              </a:solidFill>
+              <a:latin typeface="DM Sans" pitchFamily="2" charset="0"/>
+              <a:cs typeface="Times New Roman" panose="02020603050405020304" pitchFamily="18" charset="0"/>
+            </a:endParaRPr>
           </a:p>
         </p:txBody>
       </p:sp>
@@ -5469,13 +6328,15 @@
               </a:ext>
             </a:extLst>
           </p:cNvPr>
-          <p:cNvSpPr txBox="1"/>
+          <p:cNvSpPr txBox="1">
+            <a:spLocks/>
+          </p:cNvSpPr>
           <p:nvPr/>
         </p:nvSpPr>
         <p:spPr>
           <a:xfrm>
-            <a:off x="5699062" y="4944820"/>
-            <a:ext cx="943163" cy="215444"/>
+            <a:off x="5623588" y="3511340"/>
+            <a:ext cx="2183314" cy="246221"/>
           </a:xfrm>
           <a:prstGeom prst="rect">
             <a:avLst/>
@@ -5489,15 +6350,14 @@
           <a:lstStyle/>
           <a:p>
             <a:r>
-              <a:rPr lang="es-CL" sz="800" b="1" dirty="0">
-                <a:solidFill>
-                  <a:srgbClr val="8EC5FF"/>
-                </a:solidFill>
-                <a:latin typeface="Candara" panose="020E0502030303020204" pitchFamily="34" charset="0"/>
-                <a:ea typeface="Calibri" panose="020F0502020204030204" pitchFamily="34" charset="0"/>
-                <a:cs typeface="Calibri" panose="020F0502020204030204" pitchFamily="34" charset="0"/>
-              </a:rPr>
-              <a:t>Vertimiento total</a:t>
+              <a:rPr lang="es-CL" sz="1000" b="1" kern="100" dirty="0">
+                <a:solidFill>
+                  <a:srgbClr val="002060"/>
+                </a:solidFill>
+                <a:latin typeface="DM Sans" pitchFamily="2" charset="0"/>
+                <a:cs typeface="Times New Roman" panose="02020603050405020304" pitchFamily="18" charset="0"/>
+              </a:rPr>
+              <a:t>REDUCCIÓN RENOVABLE TOTAL</a:t>
             </a:r>
           </a:p>
         </p:txBody>
@@ -5511,13 +6371,15 @@
               </a:ext>
             </a:extLst>
           </p:cNvPr>
-          <p:cNvSpPr txBox="1"/>
+          <p:cNvSpPr txBox="1">
+            <a:spLocks/>
+          </p:cNvSpPr>
           <p:nvPr/>
         </p:nvSpPr>
         <p:spPr>
           <a:xfrm>
-            <a:off x="8054055" y="4944820"/>
-            <a:ext cx="1105804" cy="215444"/>
+            <a:off x="8129204" y="3503988"/>
+            <a:ext cx="2359416" cy="246221"/>
           </a:xfrm>
           <a:prstGeom prst="rect">
             <a:avLst/>
@@ -5531,16 +6393,178 @@
           <a:lstStyle/>
           <a:p>
             <a:r>
-              <a:rPr lang="es-CL" sz="800" b="1" dirty="0">
-                <a:solidFill>
-                  <a:srgbClr val="8EC5FF"/>
-                </a:solidFill>
-                <a:latin typeface="Candara" panose="020E0502030303020204" pitchFamily="34" charset="0"/>
-                <a:ea typeface="Calibri" panose="020F0502020204030204" pitchFamily="34" charset="0"/>
-                <a:cs typeface="Calibri" panose="020F0502020204030204" pitchFamily="34" charset="0"/>
-              </a:rPr>
-              <a:t>Vertimiento máximo</a:t>
-            </a:r>
+              <a:rPr lang="es-CL" sz="1000" b="1" kern="100" dirty="0">
+                <a:solidFill>
+                  <a:srgbClr val="002060"/>
+                </a:solidFill>
+                <a:latin typeface="DM Sans" pitchFamily="2" charset="0"/>
+                <a:cs typeface="Times New Roman" panose="02020603050405020304" pitchFamily="18" charset="0"/>
+              </a:rPr>
+              <a:t>REDUCCIÓN RENOVABLE MAX.</a:t>
+            </a:r>
+          </a:p>
+        </p:txBody>
+      </p:sp>
+      <p:sp>
+        <p:nvSpPr>
+          <p:cNvPr id="10" name="titulo_cmg">
+            <a:extLst>
+              <a:ext uri="{FF2B5EF4-FFF2-40B4-BE49-F238E27FC236}">
+                <a16:creationId xmlns:a16="http://schemas.microsoft.com/office/drawing/2014/main" id="{70D2677A-770C-318F-6217-1E531D1F3702}"/>
+              </a:ext>
+            </a:extLst>
+          </p:cNvPr>
+          <p:cNvSpPr txBox="1">
+            <a:spLocks/>
+          </p:cNvSpPr>
+          <p:nvPr/>
+        </p:nvSpPr>
+        <p:spPr>
+          <a:xfrm>
+            <a:off x="3320250" y="9470739"/>
+            <a:ext cx="4051308" cy="338554"/>
+          </a:xfrm>
+          <a:prstGeom prst="rect">
+            <a:avLst/>
+          </a:prstGeom>
+          <a:noFill/>
+        </p:spPr>
+        <p:txBody>
+          <a:bodyPr wrap="square" rtlCol="0">
+            <a:spAutoFit/>
+          </a:bodyPr>
+          <a:lstStyle/>
+          <a:p>
+            <a:pPr algn="ctr"/>
+            <a:r>
+              <a:rPr lang="es-ES" sz="1600" b="1" kern="100" dirty="0" err="1">
+                <a:solidFill>
+                  <a:srgbClr val="002060"/>
+                </a:solidFill>
+                <a:latin typeface="DM Sans" pitchFamily="2" charset="0"/>
+                <a:cs typeface="Times New Roman" panose="02020603050405020304" pitchFamily="18" charset="0"/>
+              </a:rPr>
+              <a:t>CMg</a:t>
+            </a:r>
+            <a:r>
+              <a:rPr lang="es-ES" sz="1600" b="1" kern="100" dirty="0">
+                <a:solidFill>
+                  <a:srgbClr val="002060"/>
+                </a:solidFill>
+                <a:latin typeface="DM Sans" pitchFamily="2" charset="0"/>
+                <a:cs typeface="Times New Roman" panose="02020603050405020304" pitchFamily="18" charset="0"/>
+              </a:rPr>
+              <a:t> promedio por mes</a:t>
+            </a:r>
+            <a:endParaRPr lang="es-CL" sz="1600" b="1" kern="100" dirty="0">
+              <a:solidFill>
+                <a:srgbClr val="002060"/>
+              </a:solidFill>
+              <a:latin typeface="DM Sans" pitchFamily="2" charset="0"/>
+              <a:cs typeface="Times New Roman" panose="02020603050405020304" pitchFamily="18" charset="0"/>
+            </a:endParaRPr>
+          </a:p>
+        </p:txBody>
+      </p:sp>
+      <p:sp>
+        <p:nvSpPr>
+          <p:cNvPr id="32" name="y_cmg">
+            <a:extLst>
+              <a:ext uri="{FF2B5EF4-FFF2-40B4-BE49-F238E27FC236}">
+                <a16:creationId xmlns:a16="http://schemas.microsoft.com/office/drawing/2014/main" id="{EACB6DFB-AB94-626B-15C5-C99FA0818214}"/>
+              </a:ext>
+            </a:extLst>
+          </p:cNvPr>
+          <p:cNvSpPr txBox="1">
+            <a:spLocks/>
+          </p:cNvSpPr>
+          <p:nvPr/>
+        </p:nvSpPr>
+        <p:spPr>
+          <a:xfrm rot="16200000">
+            <a:off x="383566" y="11778810"/>
+            <a:ext cx="928814" cy="276999"/>
+          </a:xfrm>
+          <a:prstGeom prst="rect">
+            <a:avLst/>
+          </a:prstGeom>
+          <a:noFill/>
+        </p:spPr>
+        <p:txBody>
+          <a:bodyPr wrap="square" rtlCol="0">
+            <a:spAutoFit/>
+          </a:bodyPr>
+          <a:lstStyle/>
+          <a:p>
+            <a:pPr algn="ctr"/>
+            <a:r>
+              <a:rPr lang="es-ES" sz="1200" b="1" kern="100" dirty="0">
+                <a:solidFill>
+                  <a:srgbClr val="002060"/>
+                </a:solidFill>
+                <a:latin typeface="DM Sans" pitchFamily="2" charset="0"/>
+                <a:cs typeface="Times New Roman" panose="02020603050405020304" pitchFamily="18" charset="0"/>
+              </a:rPr>
+              <a:t>$/kWh</a:t>
+            </a:r>
+            <a:endParaRPr lang="es-CL" sz="1200" b="1" kern="100" dirty="0">
+              <a:solidFill>
+                <a:srgbClr val="002060"/>
+              </a:solidFill>
+              <a:latin typeface="DM Sans" pitchFamily="2" charset="0"/>
+              <a:cs typeface="Times New Roman" panose="02020603050405020304" pitchFamily="18" charset="0"/>
+            </a:endParaRPr>
+          </a:p>
+        </p:txBody>
+      </p:sp>
+      <p:sp>
+        <p:nvSpPr>
+          <p:cNvPr id="11" name="x_cmg">
+            <a:extLst>
+              <a:ext uri="{FF2B5EF4-FFF2-40B4-BE49-F238E27FC236}">
+                <a16:creationId xmlns:a16="http://schemas.microsoft.com/office/drawing/2014/main" id="{A2DC9657-1264-A813-03DC-3FDF24159EB4}"/>
+              </a:ext>
+            </a:extLst>
+          </p:cNvPr>
+          <p:cNvSpPr txBox="1">
+            <a:spLocks/>
+          </p:cNvSpPr>
+          <p:nvPr/>
+        </p:nvSpPr>
+        <p:spPr>
+          <a:xfrm>
+            <a:off x="4417090" y="12986809"/>
+            <a:ext cx="928814" cy="276999"/>
+          </a:xfrm>
+          <a:prstGeom prst="rect">
+            <a:avLst/>
+          </a:prstGeom>
+          <a:noFill/>
+        </p:spPr>
+        <p:txBody>
+          <a:bodyPr wrap="square" rtlCol="0">
+            <a:spAutoFit/>
+          </a:bodyPr>
+          <a:lstStyle/>
+          <a:p>
+            <a:pPr algn="ctr"/>
+            <a:r>
+              <a:rPr lang="es-ES" sz="1200" b="1" kern="100" dirty="0">
+                <a:solidFill>
+                  <a:srgbClr val="002060"/>
+                </a:solidFill>
+                <a:latin typeface="DM Sans" pitchFamily="2" charset="0"/>
+                <a:cs typeface="Times New Roman" panose="02020603050405020304" pitchFamily="18" charset="0"/>
+              </a:rPr>
+              <a:t>Mes</a:t>
+            </a:r>
+            <a:endParaRPr lang="es-CL" sz="1200" b="1" kern="100" dirty="0">
+              <a:solidFill>
+                <a:srgbClr val="002060"/>
+              </a:solidFill>
+              <a:latin typeface="DM Sans" pitchFamily="2" charset="0"/>
+              <a:cs typeface="Times New Roman" panose="02020603050405020304" pitchFamily="18" charset="0"/>
+            </a:endParaRPr>
           </a:p>
         </p:txBody>
       </p:sp>
@@ -5574,456 +6598,62 @@
           <a:chExt cx="0" cy="0"/>
         </a:xfrm>
       </p:grpSpPr>
-      <p:grpSp>
-        <p:nvGrpSpPr>
-          <p:cNvPr id="28" name="Grupo 27">
+      <p:sp>
+        <p:nvSpPr>
+          <p:cNvPr id="10" name="Rectángulo 9">
             <a:extLst>
               <a:ext uri="{FF2B5EF4-FFF2-40B4-BE49-F238E27FC236}">
-                <a16:creationId xmlns:a16="http://schemas.microsoft.com/office/drawing/2014/main" id="{0D21D9B5-8A82-AA14-5E21-0805250645F7}"/>
+                <a16:creationId xmlns:a16="http://schemas.microsoft.com/office/drawing/2014/main" id="{878D7C1B-CA19-AEF8-F740-5CCAE3A54C2B}"/>
               </a:ext>
             </a:extLst>
           </p:cNvPr>
-          <p:cNvGrpSpPr>
-            <a:grpSpLocks noGrp="1" noUngrp="1" noRot="1" noMove="1" noResize="1"/>
-          </p:cNvGrpSpPr>
+          <p:cNvSpPr>
+            <a:spLocks noGrp="1" noRot="1" noMove="1" noResize="1" noEditPoints="1" noAdjustHandles="1" noChangeArrowheads="1" noChangeShapeType="1"/>
+          </p:cNvSpPr>
           <p:nvPr/>
-        </p:nvGrpSpPr>
-        <p:grpSpPr>
+        </p:nvSpPr>
+        <p:spPr>
           <a:xfrm>
-            <a:off x="-652770" y="-15097"/>
-            <a:ext cx="11366231" cy="15134447"/>
-            <a:chOff x="-652770" y="-15097"/>
-            <a:chExt cx="11366231" cy="15134447"/>
+            <a:off x="1" y="1206418"/>
+            <a:ext cx="10691812" cy="13912932"/>
           </a:xfrm>
-        </p:grpSpPr>
-        <p:pic>
-          <p:nvPicPr>
-            <p:cNvPr id="29" name="Imagen 28">
-              <a:extLst>
-                <a:ext uri="{FF2B5EF4-FFF2-40B4-BE49-F238E27FC236}">
-                  <a16:creationId xmlns:a16="http://schemas.microsoft.com/office/drawing/2014/main" id="{7AB97237-D587-2A7A-D147-042B3877270D}"/>
-                </a:ext>
-              </a:extLst>
-            </p:cNvPr>
-            <p:cNvPicPr>
-              <a:picLocks noGrp="1" noRot="1" noChangeAspect="1" noMove="1" noResize="1" noEditPoints="1" noAdjustHandles="1" noChangeArrowheads="1" noChangeShapeType="1" noCrop="1"/>
-            </p:cNvPicPr>
-            <p:nvPr/>
-          </p:nvPicPr>
-          <p:blipFill rotWithShape="1">
-            <a:blip r:embed="rId2" cstate="print">
-              <a:extLst>
-                <a:ext uri="{28A0092B-C50C-407E-A947-70E740481C1C}">
-                  <a14:useLocalDpi xmlns:a14="http://schemas.microsoft.com/office/drawing/2010/main" val="0"/>
-                </a:ext>
-              </a:extLst>
-            </a:blip>
-            <a:srcRect l="25875" t="-3385" r="25875" b="6771"/>
-            <a:stretch/>
-          </p:blipFill>
-          <p:spPr>
-            <a:xfrm>
-              <a:off x="21648" y="388565"/>
-              <a:ext cx="10691813" cy="14730785"/>
-            </a:xfrm>
-            <a:prstGeom prst="rect">
-              <a:avLst/>
-            </a:prstGeom>
-          </p:spPr>
-        </p:pic>
-        <p:sp>
-          <p:nvSpPr>
-            <p:cNvPr id="31" name="Rectángulo 30">
-              <a:extLst>
-                <a:ext uri="{FF2B5EF4-FFF2-40B4-BE49-F238E27FC236}">
-                  <a16:creationId xmlns:a16="http://schemas.microsoft.com/office/drawing/2014/main" id="{B3EDA84E-48AF-BB5F-C13E-A83AB448BAA8}"/>
-                </a:ext>
-              </a:extLst>
-            </p:cNvPr>
-            <p:cNvSpPr>
-              <a:spLocks noGrp="1" noRot="1" noMove="1" noResize="1" noEditPoints="1" noAdjustHandles="1" noChangeArrowheads="1" noChangeShapeType="1"/>
-            </p:cNvSpPr>
-            <p:nvPr/>
-          </p:nvSpPr>
-          <p:spPr>
-            <a:xfrm>
-              <a:off x="-21649" y="-15097"/>
-              <a:ext cx="10735109" cy="1931887"/>
-            </a:xfrm>
-            <a:prstGeom prst="rect">
-              <a:avLst/>
-            </a:prstGeom>
+          <a:prstGeom prst="rect">
+            <a:avLst/>
+          </a:prstGeom>
+          <a:solidFill>
+            <a:srgbClr val="F5F4F0"/>
+          </a:solidFill>
+          <a:ln>
             <a:solidFill>
-              <a:srgbClr val="1F3B73"/>
+              <a:srgbClr val="F5F4F0"/>
             </a:solidFill>
-          </p:spPr>
-          <p:style>
-            <a:lnRef idx="2">
-              <a:schemeClr val="accent1">
-                <a:shade val="15000"/>
-              </a:schemeClr>
-            </a:lnRef>
-            <a:fillRef idx="1">
-              <a:schemeClr val="accent1"/>
-            </a:fillRef>
-            <a:effectRef idx="0">
-              <a:schemeClr val="accent1"/>
-            </a:effectRef>
-            <a:fontRef idx="minor">
-              <a:schemeClr val="lt1"/>
-            </a:fontRef>
-          </p:style>
-          <p:txBody>
-            <a:bodyPr rot="0" spcFirstLastPara="0" vert="horz" wrap="square" lIns="125786" tIns="62893" rIns="125786" bIns="62893" numCol="1" spcCol="0" rtlCol="0" fromWordArt="0" anchor="ctr" anchorCtr="0" forceAA="0" compatLnSpc="1">
-              <a:prstTxWarp prst="textNoShape">
-                <a:avLst/>
-              </a:prstTxWarp>
-              <a:noAutofit/>
-            </a:bodyPr>
-            <a:lstStyle/>
-            <a:p>
-              <a:pPr marL="867437">
-                <a:lnSpc>
-                  <a:spcPct val="115000"/>
-                </a:lnSpc>
-                <a:spcAft>
-                  <a:spcPts val="1100"/>
-                </a:spcAft>
-              </a:pPr>
-              <a:r>
-                <a:rPr lang="es-CL" sz="2201" b="1" kern="100" dirty="0">
-                  <a:latin typeface="Segoe UI" panose="020B0502040204020203" pitchFamily="34" charset="0"/>
-                  <a:ea typeface="Aptos" panose="020B0004020202020204" pitchFamily="34" charset="0"/>
-                  <a:cs typeface="Times New Roman" panose="02020603050405020304" pitchFamily="18" charset="0"/>
-                </a:rPr>
-                <a:t> </a:t>
-              </a:r>
-              <a:endParaRPr lang="es-CL" sz="1651" kern="100" dirty="0">
-                <a:ea typeface="Aptos" panose="020B0004020202020204" pitchFamily="34" charset="0"/>
-                <a:cs typeface="Times New Roman" panose="02020603050405020304" pitchFamily="18" charset="0"/>
-              </a:endParaRPr>
-            </a:p>
-            <a:p>
-              <a:pPr marL="867437">
-                <a:lnSpc>
-                  <a:spcPct val="115000"/>
-                </a:lnSpc>
-                <a:spcAft>
-                  <a:spcPts val="1100"/>
-                </a:spcAft>
-              </a:pPr>
-              <a:endParaRPr lang="es-CL" sz="3654" b="1" kern="100" dirty="0">
-                <a:latin typeface="Segoe UI" panose="020B0502040204020203" pitchFamily="34" charset="0"/>
-                <a:ea typeface="Aptos" panose="020B0004020202020204" pitchFamily="34" charset="0"/>
-                <a:cs typeface="Times New Roman" panose="02020603050405020304" pitchFamily="18" charset="0"/>
-              </a:endParaRPr>
-            </a:p>
-            <a:p>
-              <a:pPr marL="867437">
-                <a:lnSpc>
-                  <a:spcPct val="115000"/>
-                </a:lnSpc>
-                <a:spcAft>
-                  <a:spcPts val="1100"/>
-                </a:spcAft>
-              </a:pPr>
-              <a:r>
-                <a:rPr lang="es-CL" sz="1376" b="1" kern="100" dirty="0">
-                  <a:latin typeface="Segoe UI" panose="020B0502040204020203" pitchFamily="34" charset="0"/>
-                  <a:ea typeface="Aptos" panose="020B0004020202020204" pitchFamily="34" charset="0"/>
-                  <a:cs typeface="Times New Roman" panose="02020603050405020304" pitchFamily="18" charset="0"/>
-                </a:rPr>
-                <a:t> </a:t>
-              </a:r>
-              <a:endParaRPr lang="es-CL" sz="1651" kern="100" dirty="0">
-                <a:ea typeface="Aptos" panose="020B0004020202020204" pitchFamily="34" charset="0"/>
-                <a:cs typeface="Times New Roman" panose="02020603050405020304" pitchFamily="18" charset="0"/>
-              </a:endParaRPr>
-            </a:p>
-            <a:p>
-              <a:pPr marL="867437">
-                <a:lnSpc>
-                  <a:spcPct val="115000"/>
-                </a:lnSpc>
-                <a:spcAft>
-                  <a:spcPts val="1100"/>
-                </a:spcAft>
-              </a:pPr>
-              <a:r>
-                <a:rPr lang="es-CL" sz="1376" b="1" kern="100" dirty="0">
-                  <a:latin typeface="Segoe UI" panose="020B0502040204020203" pitchFamily="34" charset="0"/>
-                  <a:ea typeface="Aptos" panose="020B0004020202020204" pitchFamily="34" charset="0"/>
-                  <a:cs typeface="Times New Roman" panose="02020603050405020304" pitchFamily="18" charset="0"/>
-                </a:rPr>
-                <a:t> </a:t>
-              </a:r>
-              <a:endParaRPr lang="es-CL" sz="1651" kern="100" dirty="0">
-                <a:ea typeface="Aptos" panose="020B0004020202020204" pitchFamily="34" charset="0"/>
-                <a:cs typeface="Times New Roman" panose="02020603050405020304" pitchFamily="18" charset="0"/>
-              </a:endParaRPr>
-            </a:p>
-            <a:p>
-              <a:pPr marL="867437">
-                <a:lnSpc>
-                  <a:spcPct val="115000"/>
-                </a:lnSpc>
-                <a:spcAft>
-                  <a:spcPts val="1100"/>
-                </a:spcAft>
-              </a:pPr>
-              <a:r>
-                <a:rPr lang="es-CL" sz="1376" b="1" kern="100" dirty="0">
-                  <a:latin typeface="Segoe UI" panose="020B0502040204020203" pitchFamily="34" charset="0"/>
-                  <a:ea typeface="Aptos" panose="020B0004020202020204" pitchFamily="34" charset="0"/>
-                  <a:cs typeface="Times New Roman" panose="02020603050405020304" pitchFamily="18" charset="0"/>
-                </a:rPr>
-                <a:t> </a:t>
-              </a:r>
-              <a:endParaRPr lang="es-CL" sz="1651" kern="100" dirty="0">
-                <a:ea typeface="Aptos" panose="020B0004020202020204" pitchFamily="34" charset="0"/>
-                <a:cs typeface="Times New Roman" panose="02020603050405020304" pitchFamily="18" charset="0"/>
-              </a:endParaRPr>
-            </a:p>
-            <a:p>
-              <a:pPr marL="867437">
-                <a:lnSpc>
-                  <a:spcPct val="115000"/>
-                </a:lnSpc>
-                <a:spcAft>
-                  <a:spcPts val="1100"/>
-                </a:spcAft>
-              </a:pPr>
-              <a:r>
-                <a:rPr lang="es-CL" sz="2201" b="1" kern="100" dirty="0">
-                  <a:latin typeface="Segoe UI" panose="020B0502040204020203" pitchFamily="34" charset="0"/>
-                  <a:ea typeface="Aptos" panose="020B0004020202020204" pitchFamily="34" charset="0"/>
-                  <a:cs typeface="Times New Roman" panose="02020603050405020304" pitchFamily="18" charset="0"/>
-                </a:rPr>
-                <a:t> </a:t>
-              </a:r>
-              <a:endParaRPr lang="es-CL" sz="1651" kern="100" dirty="0">
-                <a:ea typeface="Aptos" panose="020B0004020202020204" pitchFamily="34" charset="0"/>
-                <a:cs typeface="Times New Roman" panose="02020603050405020304" pitchFamily="18" charset="0"/>
-              </a:endParaRPr>
-            </a:p>
-          </p:txBody>
-        </p:sp>
-        <p:pic>
-          <p:nvPicPr>
-            <p:cNvPr id="33" name="Imagen 32">
-              <a:extLst>
-                <a:ext uri="{FF2B5EF4-FFF2-40B4-BE49-F238E27FC236}">
-                  <a16:creationId xmlns:a16="http://schemas.microsoft.com/office/drawing/2014/main" id="{1BDD774F-6A13-76E7-BCD0-34D1968DF825}"/>
-                </a:ext>
-              </a:extLst>
-            </p:cNvPr>
-            <p:cNvPicPr>
-              <a:picLocks noGrp="1" noRot="1" noChangeAspect="1" noMove="1" noResize="1" noEditPoints="1" noAdjustHandles="1" noChangeArrowheads="1" noChangeShapeType="1" noCrop="1"/>
-            </p:cNvPicPr>
-            <p:nvPr/>
-          </p:nvPicPr>
-          <p:blipFill>
-            <a:blip r:embed="rId3" cstate="print">
-              <a:extLst>
-                <a:ext uri="{28A0092B-C50C-407E-A947-70E740481C1C}">
-                  <a14:useLocalDpi xmlns:a14="http://schemas.microsoft.com/office/drawing/2010/main" val="0"/>
-                </a:ext>
-              </a:extLst>
-            </a:blip>
-            <a:stretch>
-              <a:fillRect/>
-            </a:stretch>
-          </p:blipFill>
-          <p:spPr>
-            <a:xfrm>
-              <a:off x="8767282" y="215986"/>
-              <a:ext cx="1600278" cy="1453527"/>
-            </a:xfrm>
-            <a:prstGeom prst="rect">
-              <a:avLst/>
-            </a:prstGeom>
-          </p:spPr>
-        </p:pic>
-        <p:sp>
-          <p:nvSpPr>
-            <p:cNvPr id="34" name="CuadroTexto 33">
-              <a:extLst>
-                <a:ext uri="{FF2B5EF4-FFF2-40B4-BE49-F238E27FC236}">
-                  <a16:creationId xmlns:a16="http://schemas.microsoft.com/office/drawing/2014/main" id="{B367FA57-8CF5-1C10-2208-7BCEA99B0481}"/>
-                </a:ext>
-              </a:extLst>
-            </p:cNvPr>
-            <p:cNvSpPr txBox="1">
-              <a:spLocks noGrp="1" noRot="1" noMove="1" noResize="1" noEditPoints="1" noAdjustHandles="1" noChangeArrowheads="1" noChangeShapeType="1"/>
-            </p:cNvSpPr>
-            <p:nvPr/>
-          </p:nvSpPr>
-          <p:spPr>
-            <a:xfrm>
-              <a:off x="-652770" y="46814"/>
-              <a:ext cx="7720320" cy="559384"/>
-            </a:xfrm>
-            <a:prstGeom prst="rect">
-              <a:avLst/>
-            </a:prstGeom>
-            <a:noFill/>
-          </p:spPr>
-          <p:txBody>
-            <a:bodyPr wrap="square" rtlCol="0">
-              <a:spAutoFit/>
-            </a:bodyPr>
-            <a:lstStyle/>
-            <a:p>
-              <a:pPr marL="867437">
-                <a:lnSpc>
-                  <a:spcPct val="115000"/>
-                </a:lnSpc>
-                <a:spcAft>
-                  <a:spcPts val="1100"/>
-                </a:spcAft>
-              </a:pPr>
-              <a:r>
-                <a:rPr lang="es-CL" sz="2800" b="1" kern="100" dirty="0">
-                  <a:solidFill>
-                    <a:schemeClr val="bg1"/>
-                  </a:solidFill>
-                  <a:latin typeface="Segoe UI" panose="020B0502040204020203" pitchFamily="34" charset="0"/>
-                  <a:ea typeface="Aptos" panose="020B0004020202020204" pitchFamily="34" charset="0"/>
-                  <a:cs typeface="Times New Roman" panose="02020603050405020304" pitchFamily="18" charset="0"/>
-                </a:rPr>
-                <a:t>Mercados Mayoristas de generación</a:t>
-              </a:r>
-              <a:endParaRPr lang="es-CL" sz="1200" kern="100" dirty="0">
-                <a:solidFill>
-                  <a:schemeClr val="bg1"/>
-                </a:solidFill>
-                <a:ea typeface="Aptos" panose="020B0004020202020204" pitchFamily="34" charset="0"/>
-                <a:cs typeface="Times New Roman" panose="02020603050405020304" pitchFamily="18" charset="0"/>
-              </a:endParaRPr>
-            </a:p>
-          </p:txBody>
-        </p:sp>
-        <p:sp>
-          <p:nvSpPr>
-            <p:cNvPr id="35" name="CuadroTexto 34">
-              <a:extLst>
-                <a:ext uri="{FF2B5EF4-FFF2-40B4-BE49-F238E27FC236}">
-                  <a16:creationId xmlns:a16="http://schemas.microsoft.com/office/drawing/2014/main" id="{72F6A78F-813D-56B6-1ECD-BBA5581EEAAE}"/>
-                </a:ext>
-              </a:extLst>
-            </p:cNvPr>
-            <p:cNvSpPr txBox="1">
-              <a:spLocks noGrp="1" noRot="1" noMove="1" noResize="1" noEditPoints="1" noAdjustHandles="1" noChangeArrowheads="1" noChangeShapeType="1"/>
-            </p:cNvSpPr>
-            <p:nvPr/>
-          </p:nvSpPr>
-          <p:spPr>
-            <a:xfrm>
-              <a:off x="-652770" y="616124"/>
-              <a:ext cx="5329424" cy="403893"/>
-            </a:xfrm>
-            <a:prstGeom prst="rect">
-              <a:avLst/>
-            </a:prstGeom>
-            <a:noFill/>
-          </p:spPr>
-          <p:txBody>
-            <a:bodyPr wrap="square" rtlCol="0">
-              <a:spAutoFit/>
-            </a:bodyPr>
-            <a:lstStyle/>
-            <a:p>
-              <a:pPr marL="867437">
-                <a:lnSpc>
-                  <a:spcPct val="115000"/>
-                </a:lnSpc>
-                <a:spcAft>
-                  <a:spcPts val="1100"/>
-                </a:spcAft>
-              </a:pPr>
-              <a:r>
-                <a:rPr lang="es-CL" sz="1926" b="1" kern="100" dirty="0">
-                  <a:solidFill>
-                    <a:schemeClr val="bg1"/>
-                  </a:solidFill>
-                  <a:latin typeface="Segoe UI" panose="020B0502040204020203" pitchFamily="34" charset="0"/>
-                  <a:cs typeface="Times New Roman" panose="02020603050405020304" pitchFamily="18" charset="0"/>
-                </a:rPr>
-                <a:t>Periodo</a:t>
-              </a:r>
-              <a:r>
-                <a:rPr lang="es-CL" sz="1926" b="1" kern="100" dirty="0">
-                  <a:latin typeface="Segoe UI" panose="020B0502040204020203" pitchFamily="34" charset="0"/>
-                  <a:ea typeface="Aptos" panose="020B0004020202020204" pitchFamily="34" charset="0"/>
-                  <a:cs typeface="Times New Roman" panose="02020603050405020304" pitchFamily="18" charset="0"/>
-                </a:rPr>
-                <a:t> </a:t>
-              </a:r>
-              <a:r>
-                <a:rPr lang="es-CL" sz="1926" b="1" kern="100" dirty="0">
-                  <a:solidFill>
-                    <a:schemeClr val="bg1"/>
-                  </a:solidFill>
-                  <a:latin typeface="Segoe UI" panose="020B0502040204020203" pitchFamily="34" charset="0"/>
-                  <a:cs typeface="Times New Roman" panose="02020603050405020304" pitchFamily="18" charset="0"/>
-                </a:rPr>
-                <a:t>de estudio                                           </a:t>
-              </a:r>
-            </a:p>
-          </p:txBody>
-        </p:sp>
-        <p:sp>
-          <p:nvSpPr>
-            <p:cNvPr id="36" name="periodo_estudio">
-              <a:extLst>
-                <a:ext uri="{FF2B5EF4-FFF2-40B4-BE49-F238E27FC236}">
-                  <a16:creationId xmlns:a16="http://schemas.microsoft.com/office/drawing/2014/main" id="{89381C84-F153-3CF7-46C9-E4B16A0B4DAB}"/>
-                </a:ext>
-              </a:extLst>
-            </p:cNvPr>
-            <p:cNvSpPr txBox="1">
-              <a:spLocks noGrp="1" noRot="1" noMove="1" noResize="1" noEditPoints="1" noAdjustHandles="1" noChangeArrowheads="1" noChangeShapeType="1"/>
-            </p:cNvSpPr>
-            <p:nvPr/>
-          </p:nvSpPr>
-          <p:spPr>
-            <a:xfrm>
-              <a:off x="-652770" y="1094598"/>
-              <a:ext cx="5329424" cy="403893"/>
-            </a:xfrm>
-            <a:prstGeom prst="rect">
-              <a:avLst/>
-            </a:prstGeom>
-            <a:noFill/>
-          </p:spPr>
-          <p:txBody>
-            <a:bodyPr wrap="square" rtlCol="0">
-              <a:spAutoFit/>
-            </a:bodyPr>
-            <a:lstStyle/>
-            <a:p>
-              <a:pPr marL="867437">
-                <a:lnSpc>
-                  <a:spcPct val="115000"/>
-                </a:lnSpc>
-                <a:spcAft>
-                  <a:spcPts val="1100"/>
-                </a:spcAft>
-              </a:pPr>
-              <a:r>
-                <a:rPr lang="es-CL" sz="1926" b="1" kern="100" dirty="0">
-                  <a:solidFill>
-                    <a:schemeClr val="bg1"/>
-                  </a:solidFill>
-                  <a:latin typeface="Segoe UI" panose="020B0502040204020203" pitchFamily="34" charset="0"/>
-                  <a:cs typeface="Times New Roman" panose="02020603050405020304" pitchFamily="18" charset="0"/>
-                </a:rPr>
-                <a:t>2025-01 → 2025-12</a:t>
-              </a:r>
-            </a:p>
-          </p:txBody>
-        </p:sp>
-      </p:grpSp>
+          </a:ln>
+        </p:spPr>
+        <p:style>
+          <a:lnRef idx="2">
+            <a:schemeClr val="accent1">
+              <a:shade val="15000"/>
+            </a:schemeClr>
+          </a:lnRef>
+          <a:fillRef idx="1">
+            <a:schemeClr val="accent1"/>
+          </a:fillRef>
+          <a:effectRef idx="0">
+            <a:schemeClr val="accent1"/>
+          </a:effectRef>
+          <a:fontRef idx="minor">
+            <a:schemeClr val="lt1"/>
+          </a:fontRef>
+        </p:style>
+        <p:txBody>
+          <a:bodyPr rtlCol="0" anchor="ctr"/>
+          <a:lstStyle/>
+          <a:p>
+            <a:pPr algn="ctr"/>
+            <a:endParaRPr lang="es-CL"/>
+          </a:p>
+        </p:txBody>
+      </p:sp>
       <p:sp>
         <p:nvSpPr>
           <p:cNvPr id="22" name="CuadroTexto 21">
@@ -6034,14 +6664,14 @@
             </a:extLst>
           </p:cNvPr>
           <p:cNvSpPr txBox="1">
-            <a:spLocks noGrp="1" noRot="1" noMove="1" noResize="1" noEditPoints="1" noAdjustHandles="1" noChangeArrowheads="1" noChangeShapeType="1"/>
+            <a:spLocks/>
           </p:cNvSpPr>
           <p:nvPr/>
         </p:nvSpPr>
         <p:spPr>
           <a:xfrm>
-            <a:off x="220153" y="2227394"/>
-            <a:ext cx="5108767" cy="388696"/>
+            <a:off x="171854" y="1334650"/>
+            <a:ext cx="6071928" cy="384721"/>
           </a:xfrm>
           <a:prstGeom prst="rect">
             <a:avLst/>
@@ -6055,14 +6685,14 @@
           <a:lstStyle/>
           <a:p>
             <a:r>
-              <a:rPr lang="es-CL" sz="1926" b="1" kern="100" dirty="0">
+              <a:rPr lang="es-CL" sz="1900" b="1" kern="100" dirty="0">
                 <a:solidFill>
                   <a:srgbClr val="002060"/>
                 </a:solidFill>
-                <a:latin typeface="Segoe UI" panose="020B0502040204020203" pitchFamily="34" charset="0"/>
+                <a:latin typeface="DM Sans" pitchFamily="2" charset="0"/>
                 <a:cs typeface="Times New Roman" panose="02020603050405020304" pitchFamily="18" charset="0"/>
               </a:rPr>
-              <a:t>Señales de mercado para el inversionista</a:t>
+              <a:t>SEÑALES DE MERCADO PARA EL INVERSIONISTA</a:t>
             </a:r>
           </a:p>
         </p:txBody>
@@ -6077,13 +6707,13 @@
             </a:extLst>
           </p:cNvPr>
           <p:cNvCxnSpPr>
-            <a:cxnSpLocks noGrp="1" noRot="1" noMove="1" noResize="1" noEditPoints="1" noAdjustHandles="1" noChangeArrowheads="1" noChangeShapeType="1"/>
+            <a:cxnSpLocks/>
           </p:cNvCxnSpPr>
           <p:nvPr/>
         </p:nvCxnSpPr>
         <p:spPr>
           <a:xfrm flipV="1">
-            <a:off x="273297" y="2616090"/>
+            <a:off x="224998" y="1723346"/>
             <a:ext cx="10094263" cy="6559"/>
           </a:xfrm>
           <a:prstGeom prst="line">
@@ -6120,20 +6750,20 @@
             </a:extLst>
           </p:cNvPr>
           <p:cNvSpPr>
-            <a:spLocks noGrp="1" noRot="1" noMove="1" noResize="1" noEditPoints="1" noAdjustHandles="1" noChangeArrowheads="1" noChangeShapeType="1"/>
+            <a:spLocks/>
           </p:cNvSpPr>
           <p:nvPr/>
         </p:nvSpPr>
         <p:spPr>
           <a:xfrm>
-            <a:off x="5947925" y="2918642"/>
-            <a:ext cx="4419635" cy="3926721"/>
+            <a:off x="5899626" y="2025899"/>
+            <a:ext cx="4419635" cy="4357777"/>
           </a:xfrm>
           <a:prstGeom prst="roundRect">
             <a:avLst/>
           </a:prstGeom>
           <a:solidFill>
-            <a:srgbClr val="FFFFFF"/>
+            <a:srgbClr val="EDF4FB"/>
           </a:solidFill>
           <a:ln>
             <a:solidFill>
@@ -6186,13 +6816,15 @@
               </a:ext>
             </a:extLst>
           </p:cNvPr>
-          <p:cNvSpPr txBox="1"/>
+          <p:cNvSpPr txBox="1">
+            <a:spLocks/>
+          </p:cNvSpPr>
           <p:nvPr/>
         </p:nvSpPr>
         <p:spPr>
           <a:xfrm>
-            <a:off x="6134512" y="2964400"/>
-            <a:ext cx="3967659" cy="3825791"/>
+            <a:off x="6168345" y="1759393"/>
+            <a:ext cx="3967659" cy="4249753"/>
           </a:xfrm>
           <a:prstGeom prst="rect">
             <a:avLst/>
@@ -6205,62 +6837,113 @@
           </a:bodyPr>
           <a:lstStyle/>
           <a:p>
-            <a:pPr algn="just"/>
-            <a:endParaRPr lang="es-CL" sz="1238" dirty="0">
-              <a:latin typeface="Calibri" panose="020F0502020204030204" pitchFamily="34" charset="0"/>
+            <a:pPr algn="just">
+              <a:lnSpc>
+                <a:spcPct val="165000"/>
+              </a:lnSpc>
+            </a:pPr>
+            <a:endParaRPr lang="es-CL" sz="1200" b="1" dirty="0">
+              <a:solidFill>
+                <a:srgbClr val="002060"/>
+              </a:solidFill>
+              <a:latin typeface="DM Sans" pitchFamily="2" charset="0"/>
               <a:ea typeface="Calibri" panose="020F0502020204030204" pitchFamily="34" charset="0"/>
               <a:cs typeface="Calibri" panose="020F0502020204030204" pitchFamily="34" charset="0"/>
             </a:endParaRPr>
           </a:p>
           <a:p>
-            <a:pPr algn="just">
+            <a:pPr>
               <a:lnSpc>
-                <a:spcPct val="110000"/>
+                <a:spcPct val="150000"/>
               </a:lnSpc>
             </a:pPr>
             <a:r>
-              <a:rPr lang="es-CL" sz="1400" b="1" dirty="0">
-                <a:solidFill>
-                  <a:srgbClr val="002060"/>
-                </a:solidFill>
-                <a:latin typeface="Candara" panose="020E0502030303020204" pitchFamily="34" charset="0"/>
+              <a:rPr lang="es-CL" sz="1200" dirty="0">
+                <a:solidFill>
+                  <a:srgbClr val="2C2E38"/>
+                </a:solidFill>
+                <a:latin typeface="DM Sans" pitchFamily="2" charset="0"/>
                 <a:ea typeface="Calibri" panose="020F0502020204030204" pitchFamily="34" charset="0"/>
                 <a:cs typeface="Calibri" panose="020F0502020204030204" pitchFamily="34" charset="0"/>
               </a:rPr>
-              <a:t>El spread entre el costo marginal en horas solares y no solares constituye la señal de precio más relevante para evaluar la rentabilidad de activos de almacenamiento. Durante 2025 esta diferencia se mantuvo estructuralmente elevada en las barras del norte y centro del sistema, respecto de la zona sur, donde el spread es significativamente menor. </a:t>
-            </a:r>
-          </a:p>
-          <a:p>
-            <a:pPr algn="just">
+              <a:t>El </a:t>
+            </a:r>
+            <a:r>
+              <a:rPr lang="es-CL" sz="1200" b="1" dirty="0">
+                <a:solidFill>
+                  <a:srgbClr val="2C2E38"/>
+                </a:solidFill>
+                <a:latin typeface="DM Sans" pitchFamily="2" charset="0"/>
+                <a:ea typeface="Calibri" panose="020F0502020204030204" pitchFamily="34" charset="0"/>
+                <a:cs typeface="Calibri" panose="020F0502020204030204" pitchFamily="34" charset="0"/>
+              </a:rPr>
+              <a:t>spread entre el costo marginal en horas solares y no solares </a:t>
+            </a:r>
+            <a:r>
+              <a:rPr lang="es-CL" sz="1200" dirty="0">
+                <a:solidFill>
+                  <a:srgbClr val="2C2E38"/>
+                </a:solidFill>
+                <a:latin typeface="DM Sans" pitchFamily="2" charset="0"/>
+                <a:ea typeface="Calibri" panose="020F0502020204030204" pitchFamily="34" charset="0"/>
+                <a:cs typeface="Calibri" panose="020F0502020204030204" pitchFamily="34" charset="0"/>
+              </a:rPr>
+              <a:t>constituye la señal de precio más relevante para evaluar la rentabilidad de activos de almacenamiento. Durante 2025 esta diferencia se mantuvo estructuralmente elevada en las barras del norte y centro del sistema, respecto de la zona sur, donde el spread es significativamente menor. </a:t>
+            </a:r>
+          </a:p>
+          <a:p>
+            <a:pPr>
               <a:lnSpc>
-                <a:spcPct val="110000"/>
+                <a:spcPct val="150000"/>
               </a:lnSpc>
             </a:pPr>
-            <a:endParaRPr lang="es-CL" sz="1400" b="1" dirty="0">
+            <a:endParaRPr lang="es-CL" sz="1200" dirty="0">
               <a:solidFill>
-                <a:srgbClr val="002060"/>
+                <a:srgbClr val="2C2E38"/>
               </a:solidFill>
-              <a:latin typeface="Candara" panose="020E0502030303020204" pitchFamily="34" charset="0"/>
+              <a:latin typeface="DM Sans" pitchFamily="2" charset="0"/>
               <a:ea typeface="Calibri" panose="020F0502020204030204" pitchFamily="34" charset="0"/>
               <a:cs typeface="Calibri" panose="020F0502020204030204" pitchFamily="34" charset="0"/>
             </a:endParaRPr>
           </a:p>
           <a:p>
-            <a:pPr algn="just">
+            <a:pPr>
               <a:lnSpc>
-                <a:spcPct val="110000"/>
+                <a:spcPct val="150000"/>
               </a:lnSpc>
             </a:pPr>
             <a:r>
-              <a:rPr lang="es-CL" sz="1400" b="1" dirty="0">
-                <a:solidFill>
-                  <a:srgbClr val="002060"/>
-                </a:solidFill>
-                <a:latin typeface="Candara" panose="020E0502030303020204" pitchFamily="34" charset="0"/>
+              <a:rPr lang="es-CL" sz="1200" dirty="0">
+                <a:solidFill>
+                  <a:srgbClr val="2C2E38"/>
+                </a:solidFill>
+                <a:latin typeface="DM Sans" pitchFamily="2" charset="0"/>
                 <a:ea typeface="Calibri" panose="020F0502020204030204" pitchFamily="34" charset="0"/>
                 <a:cs typeface="Calibri" panose="020F0502020204030204" pitchFamily="34" charset="0"/>
               </a:rPr>
-              <a:t>Lo anterior es reflejo de la mayor concentración de generación solar en la zona norte del país y su efecto depresor sobre el precio diurno. Este diferencial sostenido confirma el atractivo económico del almacenamiento en barras con alta penetración renovable, especialmente solar.</a:t>
+              <a:t>Lo anterior es reflejo de la mayor concentración de generación solar en la zona norte del país y su </a:t>
+            </a:r>
+            <a:r>
+              <a:rPr lang="es-CL" sz="1200" b="1" dirty="0">
+                <a:solidFill>
+                  <a:srgbClr val="2C2E38"/>
+                </a:solidFill>
+                <a:latin typeface="DM Sans" pitchFamily="2" charset="0"/>
+                <a:ea typeface="Calibri" panose="020F0502020204030204" pitchFamily="34" charset="0"/>
+                <a:cs typeface="Calibri" panose="020F0502020204030204" pitchFamily="34" charset="0"/>
+              </a:rPr>
+              <a:t>efecto depresor sobre el precio diurno</a:t>
+            </a:r>
+            <a:r>
+              <a:rPr lang="es-CL" sz="1200" dirty="0">
+                <a:solidFill>
+                  <a:srgbClr val="2C2E38"/>
+                </a:solidFill>
+                <a:latin typeface="DM Sans" pitchFamily="2" charset="0"/>
+                <a:ea typeface="Calibri" panose="020F0502020204030204" pitchFamily="34" charset="0"/>
+                <a:cs typeface="Calibri" panose="020F0502020204030204" pitchFamily="34" charset="0"/>
+              </a:rPr>
+              <a:t>. Este diferencial sostenido confirma el atractivo económico del almacenamiento en barras con alta penetración renovable, especialmente solar.</a:t>
             </a:r>
           </a:p>
         </p:txBody>
@@ -6275,20 +6958,20 @@
             </a:extLst>
           </p:cNvPr>
           <p:cNvSpPr>
-            <a:spLocks noGrp="1" noRot="1" noMove="1" noResize="1" noEditPoints="1" noAdjustHandles="1" noChangeArrowheads="1" noChangeShapeType="1"/>
+            <a:spLocks/>
           </p:cNvSpPr>
           <p:nvPr/>
         </p:nvSpPr>
         <p:spPr>
           <a:xfrm>
-            <a:off x="5947925" y="7053992"/>
-            <a:ext cx="4371336" cy="3790200"/>
+            <a:off x="5947925" y="6650182"/>
+            <a:ext cx="4371336" cy="4194010"/>
           </a:xfrm>
           <a:prstGeom prst="roundRect">
             <a:avLst/>
           </a:prstGeom>
           <a:solidFill>
-            <a:srgbClr val="FFFFFF"/>
+            <a:srgbClr val="EDF4FB"/>
           </a:solidFill>
           <a:ln>
             <a:solidFill>
@@ -6355,7 +7038,7 @@
             <a:avLst/>
           </a:prstGeom>
           <a:solidFill>
-            <a:srgbClr val="FFFFFF"/>
+            <a:srgbClr val="EDF4FB"/>
           </a:solidFill>
           <a:ln>
             <a:solidFill>
@@ -6413,8 +7096,8 @@
         </p:nvSpPr>
         <p:spPr>
           <a:xfrm>
-            <a:off x="6145917" y="7249025"/>
-            <a:ext cx="4012517" cy="2877839"/>
+            <a:off x="6168345" y="6552651"/>
+            <a:ext cx="4012517" cy="3350725"/>
           </a:xfrm>
           <a:prstGeom prst="rect">
             <a:avLst/>
@@ -6435,76 +7118,120 @@
             </a:endParaRPr>
           </a:p>
           <a:p>
-            <a:pPr algn="just">
+            <a:pPr>
               <a:lnSpc>
-                <a:spcPct val="110000"/>
+                <a:spcPct val="150000"/>
               </a:lnSpc>
             </a:pPr>
             <a:r>
-              <a:rPr lang="es-CL" sz="1400" b="1" dirty="0">
-                <a:solidFill>
-                  <a:srgbClr val="002060"/>
-                </a:solidFill>
-                <a:latin typeface="Candara" panose="020E0502030303020204" pitchFamily="34" charset="0"/>
+              <a:rPr lang="es-CL" sz="1200" dirty="0">
+                <a:solidFill>
+                  <a:srgbClr val="2C2E38"/>
+                </a:solidFill>
+                <a:latin typeface="DM Sans" pitchFamily="2" charset="0"/>
                 <a:ea typeface="Calibri" panose="020F0502020204030204" pitchFamily="34" charset="0"/>
                 <a:cs typeface="Calibri" panose="020F0502020204030204" pitchFamily="34" charset="0"/>
               </a:rPr>
-              <a:t>La inyección de energía por parte de sistemas BESS muestra un crecimiento sostenido a lo largo del período, llegando a un acumulado de 275.124 </a:t>
-            </a:r>
-            <a:r>
-              <a:rPr lang="es-CL" sz="1400" b="1" dirty="0" err="1">
-                <a:solidFill>
-                  <a:srgbClr val="002060"/>
-                </a:solidFill>
-                <a:latin typeface="Candara" panose="020E0502030303020204" pitchFamily="34" charset="0"/>
+              <a:t>La inyección de energía por parte de sistemas BESS muestra un crecimiento sostenido a lo largo del período, llegando a un acumulado de </a:t>
+            </a:r>
+            <a:r>
+              <a:rPr lang="es-CL" sz="1200" dirty="0">
+                <a:solidFill>
+                  <a:srgbClr val="2C2E38"/>
+                </a:solidFill>
+                <a:latin typeface="DM Mono" panose="020B0509040201040103" pitchFamily="49" charset="0"/>
                 <a:ea typeface="Calibri" panose="020F0502020204030204" pitchFamily="34" charset="0"/>
                 <a:cs typeface="Calibri" panose="020F0502020204030204" pitchFamily="34" charset="0"/>
               </a:rPr>
-              <a:t>MWh</a:t>
-            </a:r>
-            <a:r>
-              <a:rPr lang="es-CL" sz="1400" b="1" dirty="0">
-                <a:solidFill>
-                  <a:srgbClr val="002060"/>
-                </a:solidFill>
-                <a:latin typeface="Candara" panose="020E0502030303020204" pitchFamily="34" charset="0"/>
+              <a:t>275.124 </a:t>
+            </a:r>
+            <a:r>
+              <a:rPr lang="es-CL" sz="1200" dirty="0" err="1">
+                <a:solidFill>
+                  <a:srgbClr val="2C2E38"/>
+                </a:solidFill>
+                <a:latin typeface="DM Mono" panose="020B0509040201040103" pitchFamily="49" charset="0"/>
                 <a:ea typeface="Calibri" panose="020F0502020204030204" pitchFamily="34" charset="0"/>
                 <a:cs typeface="Calibri" panose="020F0502020204030204" pitchFamily="34" charset="0"/>
               </a:rPr>
-              <a:t> al fin del cuatro trimestre.</a:t>
-            </a:r>
-          </a:p>
-          <a:p>
-            <a:pPr algn="just">
+              <a:t>MWh</a:t>
+            </a:r>
+            <a:r>
+              <a:rPr lang="es-CL" sz="1200" dirty="0">
+                <a:solidFill>
+                  <a:srgbClr val="2C2E38"/>
+                </a:solidFill>
+                <a:latin typeface="DM Mono" panose="020B0509040201040103" pitchFamily="49" charset="0"/>
+                <a:ea typeface="Calibri" panose="020F0502020204030204" pitchFamily="34" charset="0"/>
+                <a:cs typeface="Calibri" panose="020F0502020204030204" pitchFamily="34" charset="0"/>
+              </a:rPr>
+              <a:t> </a:t>
+            </a:r>
+            <a:r>
+              <a:rPr lang="es-CL" sz="1200" dirty="0">
+                <a:solidFill>
+                  <a:srgbClr val="2C2E38"/>
+                </a:solidFill>
+                <a:latin typeface="DM Sans" pitchFamily="2" charset="0"/>
+                <a:ea typeface="Calibri" panose="020F0502020204030204" pitchFamily="34" charset="0"/>
+                <a:cs typeface="Calibri" panose="020F0502020204030204" pitchFamily="34" charset="0"/>
+              </a:rPr>
+              <a:t>al fin del cuatro trimestre.</a:t>
+            </a:r>
+          </a:p>
+          <a:p>
+            <a:pPr>
               <a:lnSpc>
-                <a:spcPct val="110000"/>
+                <a:spcPct val="150000"/>
               </a:lnSpc>
             </a:pPr>
-            <a:endParaRPr lang="es-CL" sz="1400" b="1" dirty="0">
+            <a:endParaRPr lang="es-CL" sz="1200" dirty="0">
               <a:solidFill>
-                <a:srgbClr val="002060"/>
+                <a:srgbClr val="2C2E38"/>
               </a:solidFill>
-              <a:latin typeface="Candara" panose="020E0502030303020204" pitchFamily="34" charset="0"/>
+              <a:latin typeface="DM Sans" pitchFamily="2" charset="0"/>
               <a:ea typeface="Calibri" panose="020F0502020204030204" pitchFamily="34" charset="0"/>
               <a:cs typeface="Calibri" panose="020F0502020204030204" pitchFamily="34" charset="0"/>
             </a:endParaRPr>
           </a:p>
           <a:p>
-            <a:pPr algn="just">
+            <a:pPr>
               <a:lnSpc>
-                <a:spcPct val="110000"/>
+                <a:spcPct val="150000"/>
               </a:lnSpc>
             </a:pPr>
             <a:r>
-              <a:rPr lang="es-CL" sz="1400" b="1" dirty="0">
-                <a:solidFill>
-                  <a:srgbClr val="002060"/>
-                </a:solidFill>
-                <a:latin typeface="Candara" panose="020E0502030303020204" pitchFamily="34" charset="0"/>
+              <a:rPr lang="es-CL" sz="1200" dirty="0">
+                <a:solidFill>
+                  <a:srgbClr val="2C2E38"/>
+                </a:solidFill>
+                <a:latin typeface="DM Sans" pitchFamily="2" charset="0"/>
                 <a:ea typeface="Calibri" panose="020F0502020204030204" pitchFamily="34" charset="0"/>
                 <a:cs typeface="Calibri" panose="020F0502020204030204" pitchFamily="34" charset="0"/>
               </a:rPr>
-              <a:t> Al comparar con 2024, la expansión es evidente en todos los trimestres. Esta trayectoria es consistente con la señal de spread que entrega el mercado: a mayor diferencial de precio día/noche, mayor el incentivo para cargar en horas solares y descargar en horarios no solares.</a:t>
+              <a:t> Al comparar con </a:t>
+            </a:r>
+            <a:r>
+              <a:rPr lang="es-CL" sz="1200" dirty="0">
+                <a:solidFill>
+                  <a:srgbClr val="2C2E38"/>
+                </a:solidFill>
+                <a:latin typeface="DM Mono" panose="020B0509040201040103" pitchFamily="49" charset="0"/>
+                <a:ea typeface="Calibri" panose="020F0502020204030204" pitchFamily="34" charset="0"/>
+                <a:cs typeface="Calibri" panose="020F0502020204030204" pitchFamily="34" charset="0"/>
+              </a:rPr>
+              <a:t>2024</a:t>
+            </a:r>
+            <a:r>
+              <a:rPr lang="es-CL" sz="1200" dirty="0">
+                <a:solidFill>
+                  <a:srgbClr val="2C2E38"/>
+                </a:solidFill>
+                <a:latin typeface="DM Sans" pitchFamily="2" charset="0"/>
+                <a:ea typeface="Calibri" panose="020F0502020204030204" pitchFamily="34" charset="0"/>
+                <a:cs typeface="Calibri" panose="020F0502020204030204" pitchFamily="34" charset="0"/>
+              </a:rPr>
+              <a:t>, la expansión es evidente en todos los trimestres. Esta trayectoria es consistente con la señal de spread que entrega el mercado: a mayor diferencial de precio día/noche, mayor el incentivo para cargar en horas solares y descargar en horarios no solares.</a:t>
             </a:r>
           </a:p>
         </p:txBody>
@@ -6523,8 +7250,8 @@
         </p:nvSpPr>
         <p:spPr>
           <a:xfrm>
-            <a:off x="6134512" y="11052821"/>
-            <a:ext cx="4080184" cy="2667653"/>
+            <a:off x="6134511" y="10789538"/>
+            <a:ext cx="4080184" cy="2883225"/>
           </a:xfrm>
           <a:prstGeom prst="rect">
             <a:avLst/>
@@ -6537,7 +7264,11 @@
           </a:bodyPr>
           <a:lstStyle/>
           <a:p>
-            <a:pPr algn="just"/>
+            <a:pPr algn="just">
+              <a:lnSpc>
+                <a:spcPct val="150000"/>
+              </a:lnSpc>
+            </a:pPr>
             <a:endParaRPr lang="es-CL" sz="1400" dirty="0">
               <a:latin typeface="Calibri" panose="020F0502020204030204" pitchFamily="34" charset="0"/>
               <a:ea typeface="Calibri" panose="020F0502020204030204" pitchFamily="34" charset="0"/>
@@ -6545,45 +7276,72 @@
             </a:endParaRPr>
           </a:p>
           <a:p>
-            <a:pPr algn="just">
+            <a:pPr>
               <a:lnSpc>
-                <a:spcPct val="110000"/>
+                <a:spcPct val="150000"/>
               </a:lnSpc>
             </a:pPr>
             <a:r>
-              <a:rPr lang="es-CL" sz="1400" b="1" dirty="0">
-                <a:solidFill>
-                  <a:srgbClr val="002060"/>
-                </a:solidFill>
-                <a:latin typeface="Candara" panose="020E0502030303020204" pitchFamily="34" charset="0"/>
+              <a:rPr lang="es-CL" sz="1200" dirty="0">
+                <a:solidFill>
+                  <a:srgbClr val="2C2E38"/>
+                </a:solidFill>
+                <a:latin typeface="DM Sans" pitchFamily="2" charset="0"/>
                 <a:ea typeface="Calibri" panose="020F0502020204030204" pitchFamily="34" charset="0"/>
                 <a:cs typeface="Calibri" panose="020F0502020204030204" pitchFamily="34" charset="0"/>
               </a:rPr>
-              <a:t>Los 3 primeros trimestres del 2025 </a:t>
-            </a:r>
-            <a:r>
-              <a:rPr lang="es-CL" sz="1400" b="1">
-                <a:solidFill>
-                  <a:srgbClr val="002060"/>
-                </a:solidFill>
-                <a:latin typeface="Candara" panose="020E0502030303020204" pitchFamily="34" charset="0"/>
+              <a:t>Los 3 primeros trimestres del </a:t>
+            </a:r>
+            <a:r>
+              <a:rPr lang="es-CL" sz="1200" dirty="0">
+                <a:solidFill>
+                  <a:srgbClr val="2C2E38"/>
+                </a:solidFill>
+                <a:latin typeface="DM Mono" panose="020B0509040201040103" pitchFamily="49" charset="0"/>
                 <a:ea typeface="Calibri" panose="020F0502020204030204" pitchFamily="34" charset="0"/>
                 <a:cs typeface="Calibri" panose="020F0502020204030204" pitchFamily="34" charset="0"/>
               </a:rPr>
-              <a:t>superaron a sus </a:t>
-            </a:r>
-            <a:r>
-              <a:rPr lang="es-CL" sz="1400" b="1" dirty="0">
-                <a:solidFill>
-                  <a:srgbClr val="002060"/>
-                </a:solidFill>
-                <a:latin typeface="Candara" panose="020E0502030303020204" pitchFamily="34" charset="0"/>
+              <a:t>2025</a:t>
+            </a:r>
+            <a:r>
+              <a:rPr lang="es-CL" sz="1200" dirty="0">
+                <a:solidFill>
+                  <a:srgbClr val="2C2E38"/>
+                </a:solidFill>
+                <a:latin typeface="DM Sans" pitchFamily="2" charset="0"/>
                 <a:ea typeface="Calibri" panose="020F0502020204030204" pitchFamily="34" charset="0"/>
                 <a:cs typeface="Calibri" panose="020F0502020204030204" pitchFamily="34" charset="0"/>
               </a:rPr>
-              <a:t>homólogos del 2024 en cuanto a la energía renovable reducida. No obstante, al comparar los últimos trimestres de ambos años, se observa una disminución de estas reducciones, lo que se condice con el acelerado aumento de la participación BESS en el sistema. Sin embargo, aún falta tiempo para poder concluir de manera certera que esta tecnología esté generando la tendencia a la baja. </a:t>
-            </a:r>
-            <a:endParaRPr lang="es-CL" sz="1400" dirty="0"/>
+              <a:t> superaron a sus homólogos del </a:t>
+            </a:r>
+            <a:r>
+              <a:rPr lang="es-CL" sz="1200" dirty="0">
+                <a:solidFill>
+                  <a:srgbClr val="2C2E38"/>
+                </a:solidFill>
+                <a:latin typeface="DM Mono" panose="020B0509040201040103" pitchFamily="49" charset="0"/>
+                <a:ea typeface="Calibri" panose="020F0502020204030204" pitchFamily="34" charset="0"/>
+                <a:cs typeface="Calibri" panose="020F0502020204030204" pitchFamily="34" charset="0"/>
+              </a:rPr>
+              <a:t>2024</a:t>
+            </a:r>
+            <a:r>
+              <a:rPr lang="es-CL" sz="1200" dirty="0">
+                <a:solidFill>
+                  <a:srgbClr val="2C2E38"/>
+                </a:solidFill>
+                <a:latin typeface="DM Sans" pitchFamily="2" charset="0"/>
+                <a:ea typeface="Calibri" panose="020F0502020204030204" pitchFamily="34" charset="0"/>
+                <a:cs typeface="Calibri" panose="020F0502020204030204" pitchFamily="34" charset="0"/>
+              </a:rPr>
+              <a:t> en cuanto a la energía renovable reducida. No obstante, al comparar los últimos trimestres de ambos años, se observa una disminución de estas reducciones, lo que se condice con el acelerado aumento de la participación BESS en el sistema. Sin embargo, aún falta tiempo para poder concluir de manera certera que esta tecnología esté generando la tendencia a la baja. </a:t>
+            </a:r>
+            <a:endParaRPr lang="es-CL" sz="1200" dirty="0">
+              <a:solidFill>
+                <a:srgbClr val="2C2E38"/>
+              </a:solidFill>
+              <a:latin typeface="DM Sans" pitchFamily="2" charset="0"/>
+            </a:endParaRPr>
           </a:p>
         </p:txBody>
       </p:sp>
@@ -6597,20 +7355,20 @@
             </a:extLst>
           </p:cNvPr>
           <p:cNvSpPr>
-            <a:spLocks noGrp="1" noRot="1" noMove="1" noResize="1" noEditPoints="1" noAdjustHandles="1" noChangeArrowheads="1" noChangeShapeType="1"/>
+            <a:spLocks/>
           </p:cNvSpPr>
           <p:nvPr/>
         </p:nvSpPr>
         <p:spPr>
           <a:xfrm>
-            <a:off x="273298" y="2918643"/>
-            <a:ext cx="5443754" cy="4034390"/>
+            <a:off x="224999" y="2025898"/>
+            <a:ext cx="5443754" cy="4466795"/>
           </a:xfrm>
           <a:prstGeom prst="roundRect">
             <a:avLst/>
           </a:prstGeom>
           <a:solidFill>
-            <a:srgbClr val="FFFFFF"/>
+            <a:srgbClr val="EDF4FB"/>
           </a:solidFill>
           <a:ln>
             <a:solidFill>
@@ -6664,20 +7422,20 @@
             </a:extLst>
           </p:cNvPr>
           <p:cNvSpPr>
-            <a:spLocks noGrp="1" noRot="1" noMove="1" noResize="1" noEditPoints="1" noAdjustHandles="1" noChangeArrowheads="1" noChangeShapeType="1"/>
+            <a:spLocks/>
           </p:cNvSpPr>
           <p:nvPr/>
         </p:nvSpPr>
         <p:spPr>
           <a:xfrm>
-            <a:off x="265845" y="7053992"/>
-            <a:ext cx="5508667" cy="3790200"/>
+            <a:off x="265845" y="6650182"/>
+            <a:ext cx="5508667" cy="4194010"/>
           </a:xfrm>
           <a:prstGeom prst="roundRect">
             <a:avLst/>
           </a:prstGeom>
           <a:solidFill>
-            <a:srgbClr val="FFFFFF"/>
+            <a:srgbClr val="EDF4FB"/>
           </a:solidFill>
           <a:ln>
             <a:solidFill>
@@ -6744,7 +7502,7 @@
             <a:avLst/>
           </a:prstGeom>
           <a:solidFill>
-            <a:srgbClr val="FFFFFF"/>
+            <a:srgbClr val="EDF4FB"/>
           </a:solidFill>
           <a:ln>
             <a:solidFill>
@@ -6788,6 +7546,804 @@
           </a:p>
         </p:txBody>
       </p:sp>
+      <p:sp>
+        <p:nvSpPr>
+          <p:cNvPr id="5" name="Rectángulo 4">
+            <a:extLst>
+              <a:ext uri="{FF2B5EF4-FFF2-40B4-BE49-F238E27FC236}">
+                <a16:creationId xmlns:a16="http://schemas.microsoft.com/office/drawing/2014/main" id="{2D7C80BE-0584-A939-1D91-2B67482C041E}"/>
+              </a:ext>
+            </a:extLst>
+          </p:cNvPr>
+          <p:cNvSpPr>
+            <a:spLocks noGrp="1" noRot="1" noMove="1" noResize="1" noEditPoints="1" noAdjustHandles="1" noChangeArrowheads="1" noChangeShapeType="1"/>
+          </p:cNvSpPr>
+          <p:nvPr/>
+        </p:nvSpPr>
+        <p:spPr>
+          <a:xfrm>
+            <a:off x="-21649" y="-15096"/>
+            <a:ext cx="10735109" cy="1183703"/>
+          </a:xfrm>
+          <a:prstGeom prst="rect">
+            <a:avLst/>
+          </a:prstGeom>
+          <a:solidFill>
+            <a:srgbClr val="0F2B4E"/>
+          </a:solidFill>
+        </p:spPr>
+        <p:style>
+          <a:lnRef idx="2">
+            <a:schemeClr val="accent1">
+              <a:shade val="15000"/>
+            </a:schemeClr>
+          </a:lnRef>
+          <a:fillRef idx="1">
+            <a:schemeClr val="accent1"/>
+          </a:fillRef>
+          <a:effectRef idx="0">
+            <a:schemeClr val="accent1"/>
+          </a:effectRef>
+          <a:fontRef idx="minor">
+            <a:schemeClr val="lt1"/>
+          </a:fontRef>
+        </p:style>
+        <p:txBody>
+          <a:bodyPr rot="0" spcFirstLastPara="0" vert="horz" wrap="square" lIns="125786" tIns="62893" rIns="125786" bIns="62893" numCol="1" spcCol="0" rtlCol="0" fromWordArt="0" anchor="ctr" anchorCtr="0" forceAA="0" compatLnSpc="1">
+            <a:prstTxWarp prst="textNoShape">
+              <a:avLst/>
+            </a:prstTxWarp>
+            <a:noAutofit/>
+          </a:bodyPr>
+          <a:lstStyle/>
+          <a:p>
+            <a:pPr marL="867437">
+              <a:lnSpc>
+                <a:spcPct val="115000"/>
+              </a:lnSpc>
+              <a:spcAft>
+                <a:spcPts val="1100"/>
+              </a:spcAft>
+            </a:pPr>
+            <a:r>
+              <a:rPr lang="es-CL" sz="2201" b="1" kern="100" dirty="0">
+                <a:latin typeface="Segoe UI" panose="020B0502040204020203" pitchFamily="34" charset="0"/>
+                <a:ea typeface="Aptos" panose="020B0004020202020204" pitchFamily="34" charset="0"/>
+                <a:cs typeface="Times New Roman" panose="02020603050405020304" pitchFamily="18" charset="0"/>
+              </a:rPr>
+              <a:t> </a:t>
+            </a:r>
+            <a:endParaRPr lang="es-CL" sz="1651" kern="100" dirty="0">
+              <a:ea typeface="Aptos" panose="020B0004020202020204" pitchFamily="34" charset="0"/>
+              <a:cs typeface="Times New Roman" panose="02020603050405020304" pitchFamily="18" charset="0"/>
+            </a:endParaRPr>
+          </a:p>
+          <a:p>
+            <a:pPr marL="867437">
+              <a:lnSpc>
+                <a:spcPct val="115000"/>
+              </a:lnSpc>
+              <a:spcAft>
+                <a:spcPts val="1100"/>
+              </a:spcAft>
+            </a:pPr>
+            <a:endParaRPr lang="es-CL" sz="3654" b="1" kern="100" dirty="0">
+              <a:latin typeface="Segoe UI" panose="020B0502040204020203" pitchFamily="34" charset="0"/>
+              <a:ea typeface="Aptos" panose="020B0004020202020204" pitchFamily="34" charset="0"/>
+              <a:cs typeface="Times New Roman" panose="02020603050405020304" pitchFamily="18" charset="0"/>
+            </a:endParaRPr>
+          </a:p>
+          <a:p>
+            <a:pPr marL="867437">
+              <a:lnSpc>
+                <a:spcPct val="115000"/>
+              </a:lnSpc>
+              <a:spcAft>
+                <a:spcPts val="1100"/>
+              </a:spcAft>
+            </a:pPr>
+            <a:r>
+              <a:rPr lang="es-CL" sz="1376" b="1" kern="100" dirty="0">
+                <a:latin typeface="Segoe UI" panose="020B0502040204020203" pitchFamily="34" charset="0"/>
+                <a:ea typeface="Aptos" panose="020B0004020202020204" pitchFamily="34" charset="0"/>
+                <a:cs typeface="Times New Roman" panose="02020603050405020304" pitchFamily="18" charset="0"/>
+              </a:rPr>
+              <a:t> </a:t>
+            </a:r>
+            <a:endParaRPr lang="es-CL" sz="1651" kern="100" dirty="0">
+              <a:ea typeface="Aptos" panose="020B0004020202020204" pitchFamily="34" charset="0"/>
+              <a:cs typeface="Times New Roman" panose="02020603050405020304" pitchFamily="18" charset="0"/>
+            </a:endParaRPr>
+          </a:p>
+          <a:p>
+            <a:pPr marL="867437">
+              <a:lnSpc>
+                <a:spcPct val="115000"/>
+              </a:lnSpc>
+              <a:spcAft>
+                <a:spcPts val="1100"/>
+              </a:spcAft>
+            </a:pPr>
+            <a:r>
+              <a:rPr lang="es-CL" sz="1376" b="1" kern="100" dirty="0">
+                <a:latin typeface="Segoe UI" panose="020B0502040204020203" pitchFamily="34" charset="0"/>
+                <a:ea typeface="Aptos" panose="020B0004020202020204" pitchFamily="34" charset="0"/>
+                <a:cs typeface="Times New Roman" panose="02020603050405020304" pitchFamily="18" charset="0"/>
+              </a:rPr>
+              <a:t> </a:t>
+            </a:r>
+            <a:endParaRPr lang="es-CL" sz="1651" kern="100" dirty="0">
+              <a:ea typeface="Aptos" panose="020B0004020202020204" pitchFamily="34" charset="0"/>
+              <a:cs typeface="Times New Roman" panose="02020603050405020304" pitchFamily="18" charset="0"/>
+            </a:endParaRPr>
+          </a:p>
+          <a:p>
+            <a:pPr marL="867437">
+              <a:lnSpc>
+                <a:spcPct val="115000"/>
+              </a:lnSpc>
+              <a:spcAft>
+                <a:spcPts val="1100"/>
+              </a:spcAft>
+            </a:pPr>
+            <a:r>
+              <a:rPr lang="es-CL" sz="1900" b="1" kern="100" dirty="0">
+                <a:latin typeface="DM Sans" pitchFamily="2" charset="0"/>
+                <a:ea typeface="Aptos" panose="020B0004020202020204" pitchFamily="34" charset="0"/>
+                <a:cs typeface="Times New Roman" panose="02020603050405020304" pitchFamily="18" charset="0"/>
+              </a:rPr>
+              <a:t> </a:t>
+            </a:r>
+            <a:endParaRPr lang="es-CL" sz="1900" kern="100" dirty="0">
+              <a:latin typeface="DM Sans" pitchFamily="2" charset="0"/>
+              <a:ea typeface="Aptos" panose="020B0004020202020204" pitchFamily="34" charset="0"/>
+              <a:cs typeface="Times New Roman" panose="02020603050405020304" pitchFamily="18" charset="0"/>
+            </a:endParaRPr>
+          </a:p>
+          <a:p>
+            <a:pPr marL="867437">
+              <a:lnSpc>
+                <a:spcPct val="115000"/>
+              </a:lnSpc>
+              <a:spcAft>
+                <a:spcPts val="1100"/>
+              </a:spcAft>
+            </a:pPr>
+            <a:r>
+              <a:rPr lang="es-CL" sz="2201" b="1" kern="100" dirty="0">
+                <a:latin typeface="Segoe UI" panose="020B0502040204020203" pitchFamily="34" charset="0"/>
+                <a:ea typeface="Aptos" panose="020B0004020202020204" pitchFamily="34" charset="0"/>
+                <a:cs typeface="Times New Roman" panose="02020603050405020304" pitchFamily="18" charset="0"/>
+              </a:rPr>
+              <a:t> </a:t>
+            </a:r>
+            <a:endParaRPr lang="es-CL" sz="1651" kern="100" dirty="0">
+              <a:ea typeface="Aptos" panose="020B0004020202020204" pitchFamily="34" charset="0"/>
+              <a:cs typeface="Times New Roman" panose="02020603050405020304" pitchFamily="18" charset="0"/>
+            </a:endParaRPr>
+          </a:p>
+        </p:txBody>
+      </p:sp>
+      <p:pic>
+        <p:nvPicPr>
+          <p:cNvPr id="6" name="Imagen 5">
+            <a:extLst>
+              <a:ext uri="{FF2B5EF4-FFF2-40B4-BE49-F238E27FC236}">
+                <a16:creationId xmlns:a16="http://schemas.microsoft.com/office/drawing/2014/main" id="{E408347F-49F3-A2DF-DB85-792C5FC4E46D}"/>
+              </a:ext>
+            </a:extLst>
+          </p:cNvPr>
+          <p:cNvPicPr/>
+          <p:nvPr/>
+        </p:nvPicPr>
+        <p:blipFill>
+          <a:blip r:embed="rId2" cstate="print">
+            <a:extLst>
+              <a:ext uri="{28A0092B-C50C-407E-A947-70E740481C1C}">
+                <a14:useLocalDpi xmlns:a14="http://schemas.microsoft.com/office/drawing/2010/main" val="0"/>
+              </a:ext>
+            </a:extLst>
+          </a:blip>
+          <a:stretch>
+            <a:fillRect/>
+          </a:stretch>
+        </p:blipFill>
+        <p:spPr>
+          <a:xfrm>
+            <a:off x="9245849" y="150947"/>
+            <a:ext cx="1010737" cy="918049"/>
+          </a:xfrm>
+          <a:prstGeom prst="rect">
+            <a:avLst/>
+          </a:prstGeom>
+        </p:spPr>
+      </p:pic>
+      <p:sp>
+        <p:nvSpPr>
+          <p:cNvPr id="8" name="CuadroTexto 7">
+            <a:extLst>
+              <a:ext uri="{FF2B5EF4-FFF2-40B4-BE49-F238E27FC236}">
+                <a16:creationId xmlns:a16="http://schemas.microsoft.com/office/drawing/2014/main" id="{C85CDD13-1620-F823-19CC-1252C64340FF}"/>
+              </a:ext>
+            </a:extLst>
+          </p:cNvPr>
+          <p:cNvSpPr txBox="1"/>
+          <p:nvPr/>
+        </p:nvSpPr>
+        <p:spPr>
+          <a:xfrm>
+            <a:off x="-652770" y="46814"/>
+            <a:ext cx="7720320" cy="566565"/>
+          </a:xfrm>
+          <a:prstGeom prst="rect">
+            <a:avLst/>
+          </a:prstGeom>
+          <a:noFill/>
+        </p:spPr>
+        <p:txBody>
+          <a:bodyPr wrap="square" rtlCol="0">
+            <a:spAutoFit/>
+          </a:bodyPr>
+          <a:lstStyle/>
+          <a:p>
+            <a:pPr marL="867437">
+              <a:lnSpc>
+                <a:spcPct val="115000"/>
+              </a:lnSpc>
+              <a:spcAft>
+                <a:spcPts val="1100"/>
+              </a:spcAft>
+            </a:pPr>
+            <a:r>
+              <a:rPr lang="es-CL" sz="2800" b="1" kern="100" dirty="0">
+                <a:solidFill>
+                  <a:schemeClr val="bg1"/>
+                </a:solidFill>
+                <a:latin typeface="DM Sans" pitchFamily="2" charset="0"/>
+                <a:ea typeface="Aptos" panose="020B0004020202020204" pitchFamily="34" charset="0"/>
+                <a:cs typeface="Times New Roman" panose="02020603050405020304" pitchFamily="18" charset="0"/>
+              </a:rPr>
+              <a:t>Mercados Mayoristas de generación</a:t>
+            </a:r>
+            <a:endParaRPr lang="es-CL" sz="1200" kern="100" dirty="0">
+              <a:solidFill>
+                <a:schemeClr val="bg1"/>
+              </a:solidFill>
+              <a:latin typeface="DM Sans" pitchFamily="2" charset="0"/>
+              <a:ea typeface="Aptos" panose="020B0004020202020204" pitchFamily="34" charset="0"/>
+              <a:cs typeface="Times New Roman" panose="02020603050405020304" pitchFamily="18" charset="0"/>
+            </a:endParaRPr>
+          </a:p>
+        </p:txBody>
+      </p:sp>
+      <p:sp>
+        <p:nvSpPr>
+          <p:cNvPr id="9" name="periodo_estudio">
+            <a:extLst>
+              <a:ext uri="{FF2B5EF4-FFF2-40B4-BE49-F238E27FC236}">
+                <a16:creationId xmlns:a16="http://schemas.microsoft.com/office/drawing/2014/main" id="{5EF819F9-2531-FE82-BC7C-46CBEF108FA6}"/>
+              </a:ext>
+            </a:extLst>
+          </p:cNvPr>
+          <p:cNvSpPr txBox="1"/>
+          <p:nvPr/>
+        </p:nvSpPr>
+        <p:spPr>
+          <a:xfrm>
+            <a:off x="-652771" y="609146"/>
+            <a:ext cx="5887207" cy="422039"/>
+          </a:xfrm>
+          <a:prstGeom prst="rect">
+            <a:avLst/>
+          </a:prstGeom>
+          <a:noFill/>
+        </p:spPr>
+        <p:txBody>
+          <a:bodyPr wrap="square" rtlCol="0">
+            <a:spAutoFit/>
+          </a:bodyPr>
+          <a:lstStyle/>
+          <a:p>
+            <a:pPr marL="867437">
+              <a:lnSpc>
+                <a:spcPct val="115000"/>
+              </a:lnSpc>
+              <a:spcAft>
+                <a:spcPts val="1100"/>
+              </a:spcAft>
+            </a:pPr>
+            <a:r>
+              <a:rPr lang="es-CL" sz="1926" b="1" kern="100" dirty="0">
+                <a:solidFill>
+                  <a:srgbClr val="6FA3CC"/>
+                </a:solidFill>
+                <a:latin typeface="DM Sans" pitchFamily="2" charset="0"/>
+                <a:cs typeface="Times New Roman" panose="02020603050405020304" pitchFamily="18" charset="0"/>
+              </a:rPr>
+              <a:t>Periodo de estudio: </a:t>
+            </a:r>
+            <a:r>
+              <a:rPr lang="es-CL" sz="1600" b="1" kern="100" dirty="0">
+                <a:solidFill>
+                  <a:srgbClr val="6FA3CC"/>
+                </a:solidFill>
+                <a:latin typeface="DM Mono" panose="020B0509040201040103" pitchFamily="49" charset="0"/>
+                <a:cs typeface="Times New Roman" panose="02020603050405020304" pitchFamily="18" charset="0"/>
+              </a:rPr>
+              <a:t>2025-01 → 2025-12</a:t>
+            </a:r>
+          </a:p>
+        </p:txBody>
+      </p:sp>
+      <p:sp>
+        <p:nvSpPr>
+          <p:cNvPr id="11" name="y_spread">
+            <a:extLst>
+              <a:ext uri="{FF2B5EF4-FFF2-40B4-BE49-F238E27FC236}">
+                <a16:creationId xmlns:a16="http://schemas.microsoft.com/office/drawing/2014/main" id="{D03CF166-63B5-8ADB-26EC-432458BCACEC}"/>
+              </a:ext>
+            </a:extLst>
+          </p:cNvPr>
+          <p:cNvSpPr txBox="1">
+            <a:spLocks/>
+          </p:cNvSpPr>
+          <p:nvPr/>
+        </p:nvSpPr>
+        <p:spPr>
+          <a:xfrm rot="16200000">
+            <a:off x="46646" y="3981010"/>
+            <a:ext cx="928814" cy="276999"/>
+          </a:xfrm>
+          <a:prstGeom prst="rect">
+            <a:avLst/>
+          </a:prstGeom>
+          <a:noFill/>
+        </p:spPr>
+        <p:txBody>
+          <a:bodyPr wrap="square" rtlCol="0">
+            <a:spAutoFit/>
+          </a:bodyPr>
+          <a:lstStyle/>
+          <a:p>
+            <a:pPr algn="ctr"/>
+            <a:r>
+              <a:rPr lang="es-ES" sz="1200" b="1" kern="100" dirty="0">
+                <a:solidFill>
+                  <a:srgbClr val="002060"/>
+                </a:solidFill>
+                <a:latin typeface="DM Sans" pitchFamily="2" charset="0"/>
+                <a:cs typeface="Times New Roman" panose="02020603050405020304" pitchFamily="18" charset="0"/>
+              </a:rPr>
+              <a:t>$/kWh</a:t>
+            </a:r>
+            <a:endParaRPr lang="es-CL" sz="1200" b="1" kern="100" dirty="0">
+              <a:solidFill>
+                <a:srgbClr val="002060"/>
+              </a:solidFill>
+              <a:latin typeface="DM Sans" pitchFamily="2" charset="0"/>
+              <a:cs typeface="Times New Roman" panose="02020603050405020304" pitchFamily="18" charset="0"/>
+            </a:endParaRPr>
+          </a:p>
+        </p:txBody>
+      </p:sp>
+      <p:sp>
+        <p:nvSpPr>
+          <p:cNvPr id="12" name="titulo_spread">
+            <a:extLst>
+              <a:ext uri="{FF2B5EF4-FFF2-40B4-BE49-F238E27FC236}">
+                <a16:creationId xmlns:a16="http://schemas.microsoft.com/office/drawing/2014/main" id="{8B5B6252-38CB-E86F-7778-CCCB047C9F0E}"/>
+              </a:ext>
+            </a:extLst>
+          </p:cNvPr>
+          <p:cNvSpPr txBox="1">
+            <a:spLocks/>
+          </p:cNvSpPr>
+          <p:nvPr/>
+        </p:nvSpPr>
+        <p:spPr>
+          <a:xfrm>
+            <a:off x="820698" y="2186592"/>
+            <a:ext cx="4709555" cy="338554"/>
+          </a:xfrm>
+          <a:prstGeom prst="rect">
+            <a:avLst/>
+          </a:prstGeom>
+          <a:noFill/>
+        </p:spPr>
+        <p:txBody>
+          <a:bodyPr wrap="square" rtlCol="0">
+            <a:spAutoFit/>
+          </a:bodyPr>
+          <a:lstStyle/>
+          <a:p>
+            <a:pPr algn="ctr"/>
+            <a:r>
+              <a:rPr lang="es-ES" sz="1600" b="1" kern="100" dirty="0" err="1">
+                <a:solidFill>
+                  <a:srgbClr val="002060"/>
+                </a:solidFill>
+                <a:latin typeface="DM Sans" pitchFamily="2" charset="0"/>
+                <a:cs typeface="Times New Roman" panose="02020603050405020304" pitchFamily="18" charset="0"/>
+              </a:rPr>
+              <a:t>CMg</a:t>
+            </a:r>
+            <a:r>
+              <a:rPr lang="es-ES" sz="1600" b="1" kern="100" dirty="0">
+                <a:solidFill>
+                  <a:srgbClr val="002060"/>
+                </a:solidFill>
+                <a:latin typeface="DM Sans" pitchFamily="2" charset="0"/>
+                <a:cs typeface="Times New Roman" panose="02020603050405020304" pitchFamily="18" charset="0"/>
+              </a:rPr>
+              <a:t> promedio: horas solares vs no solares</a:t>
+            </a:r>
+            <a:endParaRPr lang="es-CL" sz="1600" b="1" kern="100" dirty="0">
+              <a:solidFill>
+                <a:srgbClr val="002060"/>
+              </a:solidFill>
+              <a:latin typeface="DM Sans" pitchFamily="2" charset="0"/>
+              <a:cs typeface="Times New Roman" panose="02020603050405020304" pitchFamily="18" charset="0"/>
+            </a:endParaRPr>
+          </a:p>
+        </p:txBody>
+      </p:sp>
+      <p:sp>
+        <p:nvSpPr>
+          <p:cNvPr id="30" name="titulo_iny_bess">
+            <a:extLst>
+              <a:ext uri="{FF2B5EF4-FFF2-40B4-BE49-F238E27FC236}">
+                <a16:creationId xmlns:a16="http://schemas.microsoft.com/office/drawing/2014/main" id="{20CA8919-6D7E-E05E-F338-1DFDCF723379}"/>
+              </a:ext>
+            </a:extLst>
+          </p:cNvPr>
+          <p:cNvSpPr txBox="1">
+            <a:spLocks/>
+          </p:cNvSpPr>
+          <p:nvPr/>
+        </p:nvSpPr>
+        <p:spPr>
+          <a:xfrm>
+            <a:off x="820698" y="6788431"/>
+            <a:ext cx="4709555" cy="338554"/>
+          </a:xfrm>
+          <a:prstGeom prst="rect">
+            <a:avLst/>
+          </a:prstGeom>
+          <a:noFill/>
+        </p:spPr>
+        <p:txBody>
+          <a:bodyPr wrap="square" rtlCol="0">
+            <a:spAutoFit/>
+          </a:bodyPr>
+          <a:lstStyle/>
+          <a:p>
+            <a:pPr algn="ctr"/>
+            <a:r>
+              <a:rPr lang="es-ES" sz="1600" b="1" kern="100" dirty="0">
+                <a:solidFill>
+                  <a:srgbClr val="002060"/>
+                </a:solidFill>
+                <a:latin typeface="DM Sans" pitchFamily="2" charset="0"/>
+                <a:cs typeface="Times New Roman" panose="02020603050405020304" pitchFamily="18" charset="0"/>
+              </a:rPr>
+              <a:t>Evolución trimestral de inyección BESS</a:t>
+            </a:r>
+            <a:endParaRPr lang="es-CL" sz="1600" b="1" kern="100" dirty="0">
+              <a:solidFill>
+                <a:srgbClr val="002060"/>
+              </a:solidFill>
+              <a:latin typeface="DM Sans" pitchFamily="2" charset="0"/>
+              <a:cs typeface="Times New Roman" panose="02020603050405020304" pitchFamily="18" charset="0"/>
+            </a:endParaRPr>
+          </a:p>
+        </p:txBody>
+      </p:sp>
+      <p:sp>
+        <p:nvSpPr>
+          <p:cNvPr id="32" name="y_iny_bess">
+            <a:extLst>
+              <a:ext uri="{FF2B5EF4-FFF2-40B4-BE49-F238E27FC236}">
+                <a16:creationId xmlns:a16="http://schemas.microsoft.com/office/drawing/2014/main" id="{5FE8F156-B54D-6D2C-0641-4BEAF32F4A22}"/>
+              </a:ext>
+            </a:extLst>
+          </p:cNvPr>
+          <p:cNvSpPr txBox="1">
+            <a:spLocks/>
+          </p:cNvSpPr>
+          <p:nvPr/>
+        </p:nvSpPr>
+        <p:spPr>
+          <a:xfrm rot="16200000">
+            <a:off x="128568" y="8608687"/>
+            <a:ext cx="928814" cy="276999"/>
+          </a:xfrm>
+          <a:prstGeom prst="rect">
+            <a:avLst/>
+          </a:prstGeom>
+          <a:noFill/>
+        </p:spPr>
+        <p:txBody>
+          <a:bodyPr wrap="square" rtlCol="0">
+            <a:spAutoFit/>
+          </a:bodyPr>
+          <a:lstStyle/>
+          <a:p>
+            <a:pPr algn="ctr"/>
+            <a:r>
+              <a:rPr lang="es-ES" sz="1200" b="1" kern="100" dirty="0" err="1">
+                <a:solidFill>
+                  <a:srgbClr val="002060"/>
+                </a:solidFill>
+                <a:latin typeface="DM Sans" pitchFamily="2" charset="0"/>
+                <a:cs typeface="Times New Roman" panose="02020603050405020304" pitchFamily="18" charset="0"/>
+              </a:rPr>
+              <a:t>MWh</a:t>
+            </a:r>
+            <a:endParaRPr lang="es-CL" sz="1200" b="1" kern="100" dirty="0">
+              <a:solidFill>
+                <a:srgbClr val="002060"/>
+              </a:solidFill>
+              <a:latin typeface="DM Sans" pitchFamily="2" charset="0"/>
+              <a:cs typeface="Times New Roman" panose="02020603050405020304" pitchFamily="18" charset="0"/>
+            </a:endParaRPr>
+          </a:p>
+        </p:txBody>
+      </p:sp>
+      <p:sp>
+        <p:nvSpPr>
+          <p:cNvPr id="33" name="y_evol_vert">
+            <a:extLst>
+              <a:ext uri="{FF2B5EF4-FFF2-40B4-BE49-F238E27FC236}">
+                <a16:creationId xmlns:a16="http://schemas.microsoft.com/office/drawing/2014/main" id="{6D3157EE-83C7-6C4A-D1A1-F3C3E2D99E0D}"/>
+              </a:ext>
+            </a:extLst>
+          </p:cNvPr>
+          <p:cNvSpPr txBox="1">
+            <a:spLocks/>
+          </p:cNvSpPr>
+          <p:nvPr/>
+        </p:nvSpPr>
+        <p:spPr>
+          <a:xfrm rot="16200000">
+            <a:off x="217792" y="12564295"/>
+            <a:ext cx="928814" cy="276999"/>
+          </a:xfrm>
+          <a:prstGeom prst="rect">
+            <a:avLst/>
+          </a:prstGeom>
+          <a:noFill/>
+        </p:spPr>
+        <p:txBody>
+          <a:bodyPr wrap="square" rtlCol="0">
+            <a:spAutoFit/>
+          </a:bodyPr>
+          <a:lstStyle/>
+          <a:p>
+            <a:pPr algn="ctr"/>
+            <a:r>
+              <a:rPr lang="es-ES" sz="1200" b="1" kern="100" dirty="0" err="1">
+                <a:solidFill>
+                  <a:srgbClr val="002060"/>
+                </a:solidFill>
+                <a:latin typeface="DM Sans" pitchFamily="2" charset="0"/>
+                <a:cs typeface="Times New Roman" panose="02020603050405020304" pitchFamily="18" charset="0"/>
+              </a:rPr>
+              <a:t>MWh</a:t>
+            </a:r>
+            <a:endParaRPr lang="es-CL" sz="1200" b="1" kern="100" dirty="0">
+              <a:solidFill>
+                <a:srgbClr val="002060"/>
+              </a:solidFill>
+              <a:latin typeface="DM Sans" pitchFamily="2" charset="0"/>
+              <a:cs typeface="Times New Roman" panose="02020603050405020304" pitchFamily="18" charset="0"/>
+            </a:endParaRPr>
+          </a:p>
+        </p:txBody>
+      </p:sp>
+      <p:sp>
+        <p:nvSpPr>
+          <p:cNvPr id="14" name="titulo_evol_vert">
+            <a:extLst>
+              <a:ext uri="{FF2B5EF4-FFF2-40B4-BE49-F238E27FC236}">
+                <a16:creationId xmlns:a16="http://schemas.microsoft.com/office/drawing/2014/main" id="{5D447AE2-B61D-D1DC-05BC-F34B831CD16A}"/>
+              </a:ext>
+            </a:extLst>
+          </p:cNvPr>
+          <p:cNvSpPr txBox="1">
+            <a:spLocks/>
+          </p:cNvSpPr>
+          <p:nvPr/>
+        </p:nvSpPr>
+        <p:spPr>
+          <a:xfrm>
+            <a:off x="843276" y="11206422"/>
+            <a:ext cx="4709555" cy="338554"/>
+          </a:xfrm>
+          <a:prstGeom prst="rect">
+            <a:avLst/>
+          </a:prstGeom>
+          <a:noFill/>
+        </p:spPr>
+        <p:txBody>
+          <a:bodyPr wrap="square" rtlCol="0">
+            <a:spAutoFit/>
+          </a:bodyPr>
+          <a:lstStyle/>
+          <a:p>
+            <a:pPr algn="ctr"/>
+            <a:r>
+              <a:rPr lang="es-ES" sz="1600" b="1" kern="100" dirty="0">
+                <a:solidFill>
+                  <a:srgbClr val="002060"/>
+                </a:solidFill>
+                <a:latin typeface="DM Sans" pitchFamily="2" charset="0"/>
+                <a:cs typeface="Times New Roman" panose="02020603050405020304" pitchFamily="18" charset="0"/>
+              </a:rPr>
+              <a:t>Reducciones de energía renovable</a:t>
+            </a:r>
+            <a:endParaRPr lang="es-CL" sz="1600" b="1" kern="100" dirty="0">
+              <a:solidFill>
+                <a:srgbClr val="002060"/>
+              </a:solidFill>
+              <a:latin typeface="DM Sans" pitchFamily="2" charset="0"/>
+              <a:cs typeface="Times New Roman" panose="02020603050405020304" pitchFamily="18" charset="0"/>
+            </a:endParaRPr>
+          </a:p>
+        </p:txBody>
+      </p:sp>
+      <p:sp>
+        <p:nvSpPr>
+          <p:cNvPr id="15" name="x_spread">
+            <a:extLst>
+              <a:ext uri="{FF2B5EF4-FFF2-40B4-BE49-F238E27FC236}">
+                <a16:creationId xmlns:a16="http://schemas.microsoft.com/office/drawing/2014/main" id="{32AD3C9E-DDDF-4D9D-B63D-2A470824C62E}"/>
+              </a:ext>
+            </a:extLst>
+          </p:cNvPr>
+          <p:cNvSpPr txBox="1">
+            <a:spLocks/>
+          </p:cNvSpPr>
+          <p:nvPr/>
+        </p:nvSpPr>
+        <p:spPr>
+          <a:xfrm>
+            <a:off x="2290832" y="5256657"/>
+            <a:ext cx="1537367" cy="276999"/>
+          </a:xfrm>
+          <a:prstGeom prst="rect">
+            <a:avLst/>
+          </a:prstGeom>
+          <a:noFill/>
+        </p:spPr>
+        <p:txBody>
+          <a:bodyPr wrap="square" rtlCol="0">
+            <a:spAutoFit/>
+          </a:bodyPr>
+          <a:lstStyle/>
+          <a:p>
+            <a:pPr algn="ctr"/>
+            <a:r>
+              <a:rPr lang="es-ES" sz="1200" b="1" kern="100" dirty="0">
+                <a:solidFill>
+                  <a:srgbClr val="002060"/>
+                </a:solidFill>
+                <a:latin typeface="DM Sans" pitchFamily="2" charset="0"/>
+                <a:cs typeface="Times New Roman" panose="02020603050405020304" pitchFamily="18" charset="0"/>
+              </a:rPr>
+              <a:t>Ubicación barra</a:t>
+            </a:r>
+            <a:endParaRPr lang="es-CL" sz="1200" b="1" kern="100" dirty="0">
+              <a:solidFill>
+                <a:srgbClr val="002060"/>
+              </a:solidFill>
+              <a:latin typeface="DM Sans" pitchFamily="2" charset="0"/>
+              <a:cs typeface="Times New Roman" panose="02020603050405020304" pitchFamily="18" charset="0"/>
+            </a:endParaRPr>
+          </a:p>
+        </p:txBody>
+      </p:sp>
+      <p:sp>
+        <p:nvSpPr>
+          <p:cNvPr id="19" name="x_iny_bess">
+            <a:extLst>
+              <a:ext uri="{FF2B5EF4-FFF2-40B4-BE49-F238E27FC236}">
+                <a16:creationId xmlns:a16="http://schemas.microsoft.com/office/drawing/2014/main" id="{6959F0E8-D105-D742-C106-E9C86706510C}"/>
+              </a:ext>
+            </a:extLst>
+          </p:cNvPr>
+          <p:cNvSpPr txBox="1">
+            <a:spLocks/>
+          </p:cNvSpPr>
+          <p:nvPr/>
+        </p:nvSpPr>
+        <p:spPr>
+          <a:xfrm>
+            <a:off x="2742983" y="9585137"/>
+            <a:ext cx="928814" cy="276999"/>
+          </a:xfrm>
+          <a:prstGeom prst="rect">
+            <a:avLst/>
+          </a:prstGeom>
+          <a:noFill/>
+        </p:spPr>
+        <p:txBody>
+          <a:bodyPr wrap="square" rtlCol="0">
+            <a:spAutoFit/>
+          </a:bodyPr>
+          <a:lstStyle/>
+          <a:p>
+            <a:pPr algn="ctr"/>
+            <a:r>
+              <a:rPr lang="es-ES" sz="1200" b="1" kern="100" dirty="0">
+                <a:solidFill>
+                  <a:srgbClr val="002060"/>
+                </a:solidFill>
+                <a:latin typeface="DM Sans" pitchFamily="2" charset="0"/>
+                <a:cs typeface="Times New Roman" panose="02020603050405020304" pitchFamily="18" charset="0"/>
+              </a:rPr>
+              <a:t>Trimestre</a:t>
+            </a:r>
+            <a:endParaRPr lang="es-CL" sz="1200" b="1" kern="100" dirty="0">
+              <a:solidFill>
+                <a:srgbClr val="002060"/>
+              </a:solidFill>
+              <a:latin typeface="DM Sans" pitchFamily="2" charset="0"/>
+              <a:cs typeface="Times New Roman" panose="02020603050405020304" pitchFamily="18" charset="0"/>
+            </a:endParaRPr>
+          </a:p>
+        </p:txBody>
+      </p:sp>
+      <p:sp>
+        <p:nvSpPr>
+          <p:cNvPr id="20" name="x_evol_vert">
+            <a:extLst>
+              <a:ext uri="{FF2B5EF4-FFF2-40B4-BE49-F238E27FC236}">
+                <a16:creationId xmlns:a16="http://schemas.microsoft.com/office/drawing/2014/main" id="{B1B55D47-CF28-DB6B-E628-594A6C1F6DB8}"/>
+              </a:ext>
+            </a:extLst>
+          </p:cNvPr>
+          <p:cNvSpPr txBox="1">
+            <a:spLocks/>
+          </p:cNvSpPr>
+          <p:nvPr/>
+        </p:nvSpPr>
+        <p:spPr>
+          <a:xfrm>
+            <a:off x="2742983" y="13507701"/>
+            <a:ext cx="928814" cy="276999"/>
+          </a:xfrm>
+          <a:prstGeom prst="rect">
+            <a:avLst/>
+          </a:prstGeom>
+          <a:noFill/>
+        </p:spPr>
+        <p:txBody>
+          <a:bodyPr wrap="square" rtlCol="0">
+            <a:spAutoFit/>
+          </a:bodyPr>
+          <a:lstStyle/>
+          <a:p>
+            <a:pPr algn="ctr"/>
+            <a:r>
+              <a:rPr lang="es-ES" sz="1200" b="1" kern="100" dirty="0">
+                <a:solidFill>
+                  <a:srgbClr val="002060"/>
+                </a:solidFill>
+                <a:latin typeface="DM Sans" pitchFamily="2" charset="0"/>
+                <a:cs typeface="Times New Roman" panose="02020603050405020304" pitchFamily="18" charset="0"/>
+              </a:rPr>
+              <a:t>Trimestre</a:t>
+            </a:r>
+            <a:endParaRPr lang="es-CL" sz="1200" b="1" kern="100" dirty="0">
+              <a:solidFill>
+                <a:srgbClr val="002060"/>
+              </a:solidFill>
+              <a:latin typeface="DM Sans" pitchFamily="2" charset="0"/>
+              <a:cs typeface="Times New Roman" panose="02020603050405020304" pitchFamily="18" charset="0"/>
+            </a:endParaRPr>
+          </a:p>
+        </p:txBody>
+      </p:sp>
     </p:spTree>
     <p:extLst>
       <p:ext uri="{BB962C8B-B14F-4D97-AF65-F5344CB8AC3E}">
@@ -6818,456 +8374,62 @@
           <a:chExt cx="0" cy="0"/>
         </a:xfrm>
       </p:grpSpPr>
-      <p:grpSp>
-        <p:nvGrpSpPr>
-          <p:cNvPr id="19" name="Grupo 18">
+      <p:sp>
+        <p:nvSpPr>
+          <p:cNvPr id="10" name="Rectángulo 9">
             <a:extLst>
               <a:ext uri="{FF2B5EF4-FFF2-40B4-BE49-F238E27FC236}">
-                <a16:creationId xmlns:a16="http://schemas.microsoft.com/office/drawing/2014/main" id="{81922438-34E2-11A8-043B-60AE569049FD}"/>
+                <a16:creationId xmlns:a16="http://schemas.microsoft.com/office/drawing/2014/main" id="{1EE6DA1A-A93E-016D-1059-6B77A4223C42}"/>
               </a:ext>
             </a:extLst>
           </p:cNvPr>
-          <p:cNvGrpSpPr>
-            <a:grpSpLocks noGrp="1" noUngrp="1" noRot="1" noMove="1" noResize="1"/>
-          </p:cNvGrpSpPr>
+          <p:cNvSpPr>
+            <a:spLocks noGrp="1" noRot="1" noMove="1" noResize="1" noEditPoints="1" noAdjustHandles="1" noChangeArrowheads="1" noChangeShapeType="1"/>
+          </p:cNvSpPr>
           <p:nvPr/>
-        </p:nvGrpSpPr>
-        <p:grpSpPr>
+        </p:nvSpPr>
+        <p:spPr>
           <a:xfrm>
-            <a:off x="-652770" y="-15097"/>
-            <a:ext cx="11366231" cy="15134447"/>
-            <a:chOff x="-652770" y="-15097"/>
-            <a:chExt cx="11366231" cy="15134447"/>
+            <a:off x="1" y="1206418"/>
+            <a:ext cx="10691812" cy="13912932"/>
           </a:xfrm>
-        </p:grpSpPr>
-        <p:pic>
-          <p:nvPicPr>
-            <p:cNvPr id="21" name="Imagen 20">
-              <a:extLst>
-                <a:ext uri="{FF2B5EF4-FFF2-40B4-BE49-F238E27FC236}">
-                  <a16:creationId xmlns:a16="http://schemas.microsoft.com/office/drawing/2014/main" id="{C66DD272-C03B-441D-A760-5B89541BBE36}"/>
-                </a:ext>
-              </a:extLst>
-            </p:cNvPr>
-            <p:cNvPicPr>
-              <a:picLocks noGrp="1" noRot="1" noChangeAspect="1" noMove="1" noResize="1" noEditPoints="1" noAdjustHandles="1" noChangeArrowheads="1" noChangeShapeType="1" noCrop="1"/>
-            </p:cNvPicPr>
-            <p:nvPr/>
-          </p:nvPicPr>
-          <p:blipFill rotWithShape="1">
-            <a:blip r:embed="rId2" cstate="print">
-              <a:extLst>
-                <a:ext uri="{28A0092B-C50C-407E-A947-70E740481C1C}">
-                  <a14:useLocalDpi xmlns:a14="http://schemas.microsoft.com/office/drawing/2010/main" val="0"/>
-                </a:ext>
-              </a:extLst>
-            </a:blip>
-            <a:srcRect l="25875" t="-3385" r="25875" b="6771"/>
-            <a:stretch/>
-          </p:blipFill>
-          <p:spPr>
-            <a:xfrm>
-              <a:off x="21648" y="388565"/>
-              <a:ext cx="10691813" cy="14730785"/>
-            </a:xfrm>
-            <a:prstGeom prst="rect">
-              <a:avLst/>
-            </a:prstGeom>
-          </p:spPr>
-        </p:pic>
-        <p:sp>
-          <p:nvSpPr>
-            <p:cNvPr id="25" name="Rectángulo 24">
-              <a:extLst>
-                <a:ext uri="{FF2B5EF4-FFF2-40B4-BE49-F238E27FC236}">
-                  <a16:creationId xmlns:a16="http://schemas.microsoft.com/office/drawing/2014/main" id="{4EA10392-2533-5083-3D42-B270BFF2008E}"/>
-                </a:ext>
-              </a:extLst>
-            </p:cNvPr>
-            <p:cNvSpPr>
-              <a:spLocks noGrp="1" noRot="1" noMove="1" noResize="1" noEditPoints="1" noAdjustHandles="1" noChangeArrowheads="1" noChangeShapeType="1"/>
-            </p:cNvSpPr>
-            <p:nvPr/>
-          </p:nvSpPr>
-          <p:spPr>
-            <a:xfrm>
-              <a:off x="-21649" y="-15097"/>
-              <a:ext cx="10735109" cy="1931887"/>
-            </a:xfrm>
-            <a:prstGeom prst="rect">
-              <a:avLst/>
-            </a:prstGeom>
+          <a:prstGeom prst="rect">
+            <a:avLst/>
+          </a:prstGeom>
+          <a:solidFill>
+            <a:srgbClr val="F5F4F0"/>
+          </a:solidFill>
+          <a:ln>
             <a:solidFill>
-              <a:srgbClr val="1F3B73"/>
+              <a:srgbClr val="F5F4F0"/>
             </a:solidFill>
-          </p:spPr>
-          <p:style>
-            <a:lnRef idx="2">
-              <a:schemeClr val="accent1">
-                <a:shade val="15000"/>
-              </a:schemeClr>
-            </a:lnRef>
-            <a:fillRef idx="1">
-              <a:schemeClr val="accent1"/>
-            </a:fillRef>
-            <a:effectRef idx="0">
-              <a:schemeClr val="accent1"/>
-            </a:effectRef>
-            <a:fontRef idx="minor">
-              <a:schemeClr val="lt1"/>
-            </a:fontRef>
-          </p:style>
-          <p:txBody>
-            <a:bodyPr rot="0" spcFirstLastPara="0" vert="horz" wrap="square" lIns="125786" tIns="62893" rIns="125786" bIns="62893" numCol="1" spcCol="0" rtlCol="0" fromWordArt="0" anchor="ctr" anchorCtr="0" forceAA="0" compatLnSpc="1">
-              <a:prstTxWarp prst="textNoShape">
-                <a:avLst/>
-              </a:prstTxWarp>
-              <a:noAutofit/>
-            </a:bodyPr>
-            <a:lstStyle/>
-            <a:p>
-              <a:pPr marL="867437">
-                <a:lnSpc>
-                  <a:spcPct val="115000"/>
-                </a:lnSpc>
-                <a:spcAft>
-                  <a:spcPts val="1100"/>
-                </a:spcAft>
-              </a:pPr>
-              <a:r>
-                <a:rPr lang="es-CL" sz="2201" b="1" kern="100" dirty="0">
-                  <a:latin typeface="Segoe UI" panose="020B0502040204020203" pitchFamily="34" charset="0"/>
-                  <a:ea typeface="Aptos" panose="020B0004020202020204" pitchFamily="34" charset="0"/>
-                  <a:cs typeface="Times New Roman" panose="02020603050405020304" pitchFamily="18" charset="0"/>
-                </a:rPr>
-                <a:t> </a:t>
-              </a:r>
-              <a:endParaRPr lang="es-CL" sz="1651" kern="100" dirty="0">
-                <a:ea typeface="Aptos" panose="020B0004020202020204" pitchFamily="34" charset="0"/>
-                <a:cs typeface="Times New Roman" panose="02020603050405020304" pitchFamily="18" charset="0"/>
-              </a:endParaRPr>
-            </a:p>
-            <a:p>
-              <a:pPr marL="867437">
-                <a:lnSpc>
-                  <a:spcPct val="115000"/>
-                </a:lnSpc>
-                <a:spcAft>
-                  <a:spcPts val="1100"/>
-                </a:spcAft>
-              </a:pPr>
-              <a:endParaRPr lang="es-CL" sz="3654" b="1" kern="100" dirty="0">
-                <a:latin typeface="Segoe UI" panose="020B0502040204020203" pitchFamily="34" charset="0"/>
-                <a:ea typeface="Aptos" panose="020B0004020202020204" pitchFamily="34" charset="0"/>
-                <a:cs typeface="Times New Roman" panose="02020603050405020304" pitchFamily="18" charset="0"/>
-              </a:endParaRPr>
-            </a:p>
-            <a:p>
-              <a:pPr marL="867437">
-                <a:lnSpc>
-                  <a:spcPct val="115000"/>
-                </a:lnSpc>
-                <a:spcAft>
-                  <a:spcPts val="1100"/>
-                </a:spcAft>
-              </a:pPr>
-              <a:r>
-                <a:rPr lang="es-CL" sz="1376" b="1" kern="100" dirty="0">
-                  <a:latin typeface="Segoe UI" panose="020B0502040204020203" pitchFamily="34" charset="0"/>
-                  <a:ea typeface="Aptos" panose="020B0004020202020204" pitchFamily="34" charset="0"/>
-                  <a:cs typeface="Times New Roman" panose="02020603050405020304" pitchFamily="18" charset="0"/>
-                </a:rPr>
-                <a:t> </a:t>
-              </a:r>
-              <a:endParaRPr lang="es-CL" sz="1651" kern="100" dirty="0">
-                <a:ea typeface="Aptos" panose="020B0004020202020204" pitchFamily="34" charset="0"/>
-                <a:cs typeface="Times New Roman" panose="02020603050405020304" pitchFamily="18" charset="0"/>
-              </a:endParaRPr>
-            </a:p>
-            <a:p>
-              <a:pPr marL="867437">
-                <a:lnSpc>
-                  <a:spcPct val="115000"/>
-                </a:lnSpc>
-                <a:spcAft>
-                  <a:spcPts val="1100"/>
-                </a:spcAft>
-              </a:pPr>
-              <a:r>
-                <a:rPr lang="es-CL" sz="1376" b="1" kern="100" dirty="0">
-                  <a:latin typeface="Segoe UI" panose="020B0502040204020203" pitchFamily="34" charset="0"/>
-                  <a:ea typeface="Aptos" panose="020B0004020202020204" pitchFamily="34" charset="0"/>
-                  <a:cs typeface="Times New Roman" panose="02020603050405020304" pitchFamily="18" charset="0"/>
-                </a:rPr>
-                <a:t> </a:t>
-              </a:r>
-              <a:endParaRPr lang="es-CL" sz="1651" kern="100" dirty="0">
-                <a:ea typeface="Aptos" panose="020B0004020202020204" pitchFamily="34" charset="0"/>
-                <a:cs typeface="Times New Roman" panose="02020603050405020304" pitchFamily="18" charset="0"/>
-              </a:endParaRPr>
-            </a:p>
-            <a:p>
-              <a:pPr marL="867437">
-                <a:lnSpc>
-                  <a:spcPct val="115000"/>
-                </a:lnSpc>
-                <a:spcAft>
-                  <a:spcPts val="1100"/>
-                </a:spcAft>
-              </a:pPr>
-              <a:r>
-                <a:rPr lang="es-CL" sz="1376" b="1" kern="100" dirty="0">
-                  <a:latin typeface="Segoe UI" panose="020B0502040204020203" pitchFamily="34" charset="0"/>
-                  <a:ea typeface="Aptos" panose="020B0004020202020204" pitchFamily="34" charset="0"/>
-                  <a:cs typeface="Times New Roman" panose="02020603050405020304" pitchFamily="18" charset="0"/>
-                </a:rPr>
-                <a:t> </a:t>
-              </a:r>
-              <a:endParaRPr lang="es-CL" sz="1651" kern="100" dirty="0">
-                <a:ea typeface="Aptos" panose="020B0004020202020204" pitchFamily="34" charset="0"/>
-                <a:cs typeface="Times New Roman" panose="02020603050405020304" pitchFamily="18" charset="0"/>
-              </a:endParaRPr>
-            </a:p>
-            <a:p>
-              <a:pPr marL="867437">
-                <a:lnSpc>
-                  <a:spcPct val="115000"/>
-                </a:lnSpc>
-                <a:spcAft>
-                  <a:spcPts val="1100"/>
-                </a:spcAft>
-              </a:pPr>
-              <a:r>
-                <a:rPr lang="es-CL" sz="2201" b="1" kern="100" dirty="0">
-                  <a:latin typeface="Segoe UI" panose="020B0502040204020203" pitchFamily="34" charset="0"/>
-                  <a:ea typeface="Aptos" panose="020B0004020202020204" pitchFamily="34" charset="0"/>
-                  <a:cs typeface="Times New Roman" panose="02020603050405020304" pitchFamily="18" charset="0"/>
-                </a:rPr>
-                <a:t> </a:t>
-              </a:r>
-              <a:endParaRPr lang="es-CL" sz="1651" kern="100" dirty="0">
-                <a:ea typeface="Aptos" panose="020B0004020202020204" pitchFamily="34" charset="0"/>
-                <a:cs typeface="Times New Roman" panose="02020603050405020304" pitchFamily="18" charset="0"/>
-              </a:endParaRPr>
-            </a:p>
-          </p:txBody>
-        </p:sp>
-        <p:pic>
-          <p:nvPicPr>
-            <p:cNvPr id="27" name="Imagen 26">
-              <a:extLst>
-                <a:ext uri="{FF2B5EF4-FFF2-40B4-BE49-F238E27FC236}">
-                  <a16:creationId xmlns:a16="http://schemas.microsoft.com/office/drawing/2014/main" id="{5A6D1A26-5E2D-9017-4712-063F40C474D4}"/>
-                </a:ext>
-              </a:extLst>
-            </p:cNvPr>
-            <p:cNvPicPr>
-              <a:picLocks noGrp="1" noRot="1" noChangeAspect="1" noMove="1" noResize="1" noEditPoints="1" noAdjustHandles="1" noChangeArrowheads="1" noChangeShapeType="1" noCrop="1"/>
-            </p:cNvPicPr>
-            <p:nvPr/>
-          </p:nvPicPr>
-          <p:blipFill>
-            <a:blip r:embed="rId3" cstate="print">
-              <a:extLst>
-                <a:ext uri="{28A0092B-C50C-407E-A947-70E740481C1C}">
-                  <a14:useLocalDpi xmlns:a14="http://schemas.microsoft.com/office/drawing/2010/main" val="0"/>
-                </a:ext>
-              </a:extLst>
-            </a:blip>
-            <a:stretch>
-              <a:fillRect/>
-            </a:stretch>
-          </p:blipFill>
-          <p:spPr>
-            <a:xfrm>
-              <a:off x="8767282" y="215986"/>
-              <a:ext cx="1600278" cy="1453527"/>
-            </a:xfrm>
-            <a:prstGeom prst="rect">
-              <a:avLst/>
-            </a:prstGeom>
-          </p:spPr>
-        </p:pic>
-        <p:sp>
-          <p:nvSpPr>
-            <p:cNvPr id="30" name="CuadroTexto 29">
-              <a:extLst>
-                <a:ext uri="{FF2B5EF4-FFF2-40B4-BE49-F238E27FC236}">
-                  <a16:creationId xmlns:a16="http://schemas.microsoft.com/office/drawing/2014/main" id="{A38A1DF2-4121-CCA3-05E7-F4DE4ED06DAC}"/>
-                </a:ext>
-              </a:extLst>
-            </p:cNvPr>
-            <p:cNvSpPr txBox="1">
-              <a:spLocks noGrp="1" noRot="1" noMove="1" noResize="1" noEditPoints="1" noAdjustHandles="1" noChangeArrowheads="1" noChangeShapeType="1"/>
-            </p:cNvSpPr>
-            <p:nvPr/>
-          </p:nvSpPr>
-          <p:spPr>
-            <a:xfrm>
-              <a:off x="-652770" y="46814"/>
-              <a:ext cx="7720320" cy="559384"/>
-            </a:xfrm>
-            <a:prstGeom prst="rect">
-              <a:avLst/>
-            </a:prstGeom>
-            <a:noFill/>
-          </p:spPr>
-          <p:txBody>
-            <a:bodyPr wrap="square" rtlCol="0">
-              <a:spAutoFit/>
-            </a:bodyPr>
-            <a:lstStyle/>
-            <a:p>
-              <a:pPr marL="867437">
-                <a:lnSpc>
-                  <a:spcPct val="115000"/>
-                </a:lnSpc>
-                <a:spcAft>
-                  <a:spcPts val="1100"/>
-                </a:spcAft>
-              </a:pPr>
-              <a:r>
-                <a:rPr lang="es-CL" sz="2800" b="1" kern="100" dirty="0">
-                  <a:solidFill>
-                    <a:schemeClr val="bg1"/>
-                  </a:solidFill>
-                  <a:latin typeface="Segoe UI" panose="020B0502040204020203" pitchFamily="34" charset="0"/>
-                  <a:ea typeface="Aptos" panose="020B0004020202020204" pitchFamily="34" charset="0"/>
-                  <a:cs typeface="Times New Roman" panose="02020603050405020304" pitchFamily="18" charset="0"/>
-                </a:rPr>
-                <a:t>Mercados Mayoristas de generación</a:t>
-              </a:r>
-              <a:endParaRPr lang="es-CL" sz="1200" kern="100" dirty="0">
-                <a:solidFill>
-                  <a:schemeClr val="bg1"/>
-                </a:solidFill>
-                <a:ea typeface="Aptos" panose="020B0004020202020204" pitchFamily="34" charset="0"/>
-                <a:cs typeface="Times New Roman" panose="02020603050405020304" pitchFamily="18" charset="0"/>
-              </a:endParaRPr>
-            </a:p>
-          </p:txBody>
-        </p:sp>
-        <p:sp>
-          <p:nvSpPr>
-            <p:cNvPr id="31" name="CuadroTexto 30">
-              <a:extLst>
-                <a:ext uri="{FF2B5EF4-FFF2-40B4-BE49-F238E27FC236}">
-                  <a16:creationId xmlns:a16="http://schemas.microsoft.com/office/drawing/2014/main" id="{BDDFB370-EBF1-6CD6-5123-23F2F1D3937F}"/>
-                </a:ext>
-              </a:extLst>
-            </p:cNvPr>
-            <p:cNvSpPr txBox="1">
-              <a:spLocks noGrp="1" noRot="1" noMove="1" noResize="1" noEditPoints="1" noAdjustHandles="1" noChangeArrowheads="1" noChangeShapeType="1"/>
-            </p:cNvSpPr>
-            <p:nvPr/>
-          </p:nvSpPr>
-          <p:spPr>
-            <a:xfrm>
-              <a:off x="-652770" y="616124"/>
-              <a:ext cx="5329424" cy="403893"/>
-            </a:xfrm>
-            <a:prstGeom prst="rect">
-              <a:avLst/>
-            </a:prstGeom>
-            <a:noFill/>
-          </p:spPr>
-          <p:txBody>
-            <a:bodyPr wrap="square" rtlCol="0">
-              <a:spAutoFit/>
-            </a:bodyPr>
-            <a:lstStyle/>
-            <a:p>
-              <a:pPr marL="867437">
-                <a:lnSpc>
-                  <a:spcPct val="115000"/>
-                </a:lnSpc>
-                <a:spcAft>
-                  <a:spcPts val="1100"/>
-                </a:spcAft>
-              </a:pPr>
-              <a:r>
-                <a:rPr lang="es-CL" sz="1926" b="1" kern="100" dirty="0">
-                  <a:solidFill>
-                    <a:schemeClr val="bg1"/>
-                  </a:solidFill>
-                  <a:latin typeface="Segoe UI" panose="020B0502040204020203" pitchFamily="34" charset="0"/>
-                  <a:cs typeface="Times New Roman" panose="02020603050405020304" pitchFamily="18" charset="0"/>
-                </a:rPr>
-                <a:t>Periodo</a:t>
-              </a:r>
-              <a:r>
-                <a:rPr lang="es-CL" sz="1926" b="1" kern="100" dirty="0">
-                  <a:latin typeface="Segoe UI" panose="020B0502040204020203" pitchFamily="34" charset="0"/>
-                  <a:ea typeface="Aptos" panose="020B0004020202020204" pitchFamily="34" charset="0"/>
-                  <a:cs typeface="Times New Roman" panose="02020603050405020304" pitchFamily="18" charset="0"/>
-                </a:rPr>
-                <a:t> </a:t>
-              </a:r>
-              <a:r>
-                <a:rPr lang="es-CL" sz="1926" b="1" kern="100" dirty="0">
-                  <a:solidFill>
-                    <a:schemeClr val="bg1"/>
-                  </a:solidFill>
-                  <a:latin typeface="Segoe UI" panose="020B0502040204020203" pitchFamily="34" charset="0"/>
-                  <a:cs typeface="Times New Roman" panose="02020603050405020304" pitchFamily="18" charset="0"/>
-                </a:rPr>
-                <a:t>de estudio                                           </a:t>
-              </a:r>
-            </a:p>
-          </p:txBody>
-        </p:sp>
-        <p:sp>
-          <p:nvSpPr>
-            <p:cNvPr id="32" name="periodo_estudio">
-              <a:extLst>
-                <a:ext uri="{FF2B5EF4-FFF2-40B4-BE49-F238E27FC236}">
-                  <a16:creationId xmlns:a16="http://schemas.microsoft.com/office/drawing/2014/main" id="{4D4417FE-7CFB-581B-329C-DC62FDB4DC8A}"/>
-                </a:ext>
-              </a:extLst>
-            </p:cNvPr>
-            <p:cNvSpPr txBox="1">
-              <a:spLocks noGrp="1" noRot="1" noMove="1" noResize="1" noEditPoints="1" noAdjustHandles="1" noChangeArrowheads="1" noChangeShapeType="1"/>
-            </p:cNvSpPr>
-            <p:nvPr/>
-          </p:nvSpPr>
-          <p:spPr>
-            <a:xfrm>
-              <a:off x="-652770" y="1094598"/>
-              <a:ext cx="5329424" cy="403893"/>
-            </a:xfrm>
-            <a:prstGeom prst="rect">
-              <a:avLst/>
-            </a:prstGeom>
-            <a:noFill/>
-          </p:spPr>
-          <p:txBody>
-            <a:bodyPr wrap="square" rtlCol="0">
-              <a:spAutoFit/>
-            </a:bodyPr>
-            <a:lstStyle/>
-            <a:p>
-              <a:pPr marL="867437">
-                <a:lnSpc>
-                  <a:spcPct val="115000"/>
-                </a:lnSpc>
-                <a:spcAft>
-                  <a:spcPts val="1100"/>
-                </a:spcAft>
-              </a:pPr>
-              <a:r>
-                <a:rPr lang="es-CL" sz="1926" b="1" kern="100" dirty="0">
-                  <a:solidFill>
-                    <a:schemeClr val="bg1"/>
-                  </a:solidFill>
-                  <a:latin typeface="Segoe UI" panose="020B0502040204020203" pitchFamily="34" charset="0"/>
-                  <a:cs typeface="Times New Roman" panose="02020603050405020304" pitchFamily="18" charset="0"/>
-                </a:rPr>
-                <a:t>2025-01 → 2025-12</a:t>
-              </a:r>
-            </a:p>
-          </p:txBody>
-        </p:sp>
-      </p:grpSp>
+          </a:ln>
+        </p:spPr>
+        <p:style>
+          <a:lnRef idx="2">
+            <a:schemeClr val="accent1">
+              <a:shade val="15000"/>
+            </a:schemeClr>
+          </a:lnRef>
+          <a:fillRef idx="1">
+            <a:schemeClr val="accent1"/>
+          </a:fillRef>
+          <a:effectRef idx="0">
+            <a:schemeClr val="accent1"/>
+          </a:effectRef>
+          <a:fontRef idx="minor">
+            <a:schemeClr val="lt1"/>
+          </a:fontRef>
+        </p:style>
+        <p:txBody>
+          <a:bodyPr rtlCol="0" anchor="ctr"/>
+          <a:lstStyle/>
+          <a:p>
+            <a:pPr algn="ctr"/>
+            <a:endParaRPr lang="es-CL"/>
+          </a:p>
+        </p:txBody>
+      </p:sp>
       <p:sp>
         <p:nvSpPr>
           <p:cNvPr id="7" name="Rectángulo: esquinas redondeadas 6">
@@ -7278,20 +8440,20 @@
             </a:extLst>
           </p:cNvPr>
           <p:cNvSpPr>
-            <a:spLocks noGrp="1" noRot="1" noMove="1" noResize="1" noEditPoints="1" noAdjustHandles="1" noChangeArrowheads="1" noChangeShapeType="1"/>
+            <a:spLocks/>
           </p:cNvSpPr>
           <p:nvPr/>
         </p:nvSpPr>
         <p:spPr>
           <a:xfrm>
-            <a:off x="329699" y="2682763"/>
-            <a:ext cx="9820957" cy="1752930"/>
+            <a:off x="435426" y="1839596"/>
+            <a:ext cx="9820957" cy="2316767"/>
           </a:xfrm>
           <a:prstGeom prst="roundRect">
             <a:avLst/>
           </a:prstGeom>
           <a:solidFill>
-            <a:srgbClr val="FFFFFF"/>
+            <a:srgbClr val="EDF4FB"/>
           </a:solidFill>
           <a:ln>
             <a:solidFill>
@@ -7358,7 +8520,7 @@
             <a:avLst/>
           </a:prstGeom>
           <a:solidFill>
-            <a:srgbClr val="FFFFFF"/>
+            <a:srgbClr val="EDF4FB"/>
           </a:solidFill>
           <a:ln>
             <a:solidFill>
@@ -7418,7 +8580,7 @@
         </p:nvSpPr>
         <p:spPr>
           <a:xfrm>
-            <a:off x="252612" y="2157501"/>
+            <a:off x="160249" y="1331662"/>
             <a:ext cx="7176888" cy="388696"/>
           </a:xfrm>
           <a:prstGeom prst="rect">
@@ -7437,10 +8599,10 @@
                 <a:solidFill>
                   <a:srgbClr val="002060"/>
                 </a:solidFill>
-                <a:latin typeface="Segoe UI" panose="020B0502040204020203" pitchFamily="34" charset="0"/>
+                <a:latin typeface="DM Sans" pitchFamily="2" charset="0"/>
                 <a:cs typeface="Times New Roman" panose="02020603050405020304" pitchFamily="18" charset="0"/>
               </a:rPr>
-              <a:t>Perfil de generación</a:t>
+              <a:t>PERFIL DE GENERACIÓN</a:t>
             </a:r>
           </a:p>
         </p:txBody>
@@ -7454,13 +8616,15 @@
               </a:ext>
             </a:extLst>
           </p:cNvPr>
-          <p:cNvSpPr txBox="1"/>
+          <p:cNvSpPr txBox="1">
+            <a:spLocks noGrp="1" noRot="1" noMove="1" noResize="1" noEditPoints="1" noAdjustHandles="1" noChangeArrowheads="1" noChangeShapeType="1"/>
+          </p:cNvSpPr>
           <p:nvPr/>
         </p:nvSpPr>
         <p:spPr>
           <a:xfrm>
-            <a:off x="541157" y="2477436"/>
-            <a:ext cx="9231737" cy="2372637"/>
+            <a:off x="541157" y="1593517"/>
+            <a:ext cx="9231737" cy="2747996"/>
           </a:xfrm>
           <a:prstGeom prst="rect">
             <a:avLst/>
@@ -7473,7 +8637,11 @@
           </a:bodyPr>
           <a:lstStyle/>
           <a:p>
-            <a:pPr algn="just"/>
+            <a:pPr algn="just">
+              <a:lnSpc>
+                <a:spcPct val="150000"/>
+              </a:lnSpc>
+            </a:pPr>
             <a:endParaRPr lang="es-CL" sz="1238" dirty="0">
               <a:latin typeface="Calibri" panose="020F0502020204030204" pitchFamily="34" charset="0"/>
               <a:ea typeface="Calibri" panose="020F0502020204030204" pitchFamily="34" charset="0"/>
@@ -7481,21 +8649,87 @@
             </a:endParaRPr>
           </a:p>
           <a:p>
-            <a:pPr algn="just">
+            <a:pPr>
               <a:lnSpc>
-                <a:spcPct val="110000"/>
+                <a:spcPct val="150000"/>
               </a:lnSpc>
             </a:pPr>
             <a:r>
-              <a:rPr lang="es-CL" sz="1400" b="1" dirty="0">
-                <a:solidFill>
-                  <a:srgbClr val="002060"/>
-                </a:solidFill>
-                <a:latin typeface="Candara" panose="020E0502030303020204" pitchFamily="34" charset="0"/>
+              <a:rPr lang="es-CL" sz="1200" dirty="0">
+                <a:solidFill>
+                  <a:srgbClr val="2C2E38"/>
+                </a:solidFill>
+                <a:latin typeface="DM Sans" pitchFamily="2" charset="0"/>
                 <a:ea typeface="Calibri" panose="020F0502020204030204" pitchFamily="34" charset="0"/>
                 <a:cs typeface="Calibri" panose="020F0502020204030204" pitchFamily="34" charset="0"/>
               </a:rPr>
-              <a:t>La presente sección profundiza en el análisis de los vertimientos de energía renovable y el perfil de generación registrados durante 2025. Para dimensionar la evolución del fenómeno, se presentan dos perfiles diarios típicos de generación correspondientes a fechas de referencia distintas dentro del período —{{kpis.fecha_perfil_1}} y {{kpis.fecha_perfil_2}}— lo que permite observar cómo la participación de cada tecnología en la curva de carga varía según la estación y las condiciones del sistema. La comparación entre ambos perfiles ilustra el rol creciente del almacenamiento BESS en la gestión de la rampa vespertina, así como la persistencia de la generación solar como principal fuente de excedentes en horas centrales del día.</a:t>
+              <a:t>La presente sección profundiza en el análisis de los vertimientos de energía renovable y el perfil de generación registrados durante </a:t>
+            </a:r>
+            <a:r>
+              <a:rPr lang="es-CL" sz="1200" dirty="0">
+                <a:solidFill>
+                  <a:srgbClr val="2C2E38"/>
+                </a:solidFill>
+                <a:latin typeface="DM Mono" panose="020B0509040201040103" pitchFamily="49" charset="0"/>
+                <a:ea typeface="Calibri" panose="020F0502020204030204" pitchFamily="34" charset="0"/>
+                <a:cs typeface="Calibri" panose="020F0502020204030204" pitchFamily="34" charset="0"/>
+              </a:rPr>
+              <a:t>2025</a:t>
+            </a:r>
+            <a:r>
+              <a:rPr lang="es-CL" sz="1200" dirty="0">
+                <a:solidFill>
+                  <a:srgbClr val="2C2E38"/>
+                </a:solidFill>
+                <a:latin typeface="DM Sans" pitchFamily="2" charset="0"/>
+                <a:ea typeface="Calibri" panose="020F0502020204030204" pitchFamily="34" charset="0"/>
+                <a:cs typeface="Calibri" panose="020F0502020204030204" pitchFamily="34" charset="0"/>
+              </a:rPr>
+              <a:t>. Para dimensionar la evolución del fenómeno, se presentan dos perfiles diarios típicos de generación correspondientes a fechas de referencia distintas dentro del período —</a:t>
+            </a:r>
+            <a:r>
+              <a:rPr lang="es-CL" sz="1200" dirty="0">
+                <a:solidFill>
+                  <a:srgbClr val="2C2E38"/>
+                </a:solidFill>
+                <a:latin typeface="DM Mono" panose="020B0509040201040103" pitchFamily="49" charset="0"/>
+                <a:ea typeface="Calibri" panose="020F0502020204030204" pitchFamily="34" charset="0"/>
+                <a:cs typeface="Calibri" panose="020F0502020204030204" pitchFamily="34" charset="0"/>
+              </a:rPr>
+              <a:t>{{kpis.fecha_perfil_1}} </a:t>
+            </a:r>
+            <a:r>
+              <a:rPr lang="es-CL" sz="1200" dirty="0">
+                <a:solidFill>
+                  <a:srgbClr val="2C2E38"/>
+                </a:solidFill>
+                <a:latin typeface="DM Sans" pitchFamily="2" charset="0"/>
+                <a:ea typeface="Calibri" panose="020F0502020204030204" pitchFamily="34" charset="0"/>
+                <a:cs typeface="Calibri" panose="020F0502020204030204" pitchFamily="34" charset="0"/>
+              </a:rPr>
+              <a:t>y </a:t>
+            </a:r>
+            <a:r>
+              <a:rPr lang="es-CL" sz="1200" dirty="0">
+                <a:solidFill>
+                  <a:srgbClr val="2C2E38"/>
+                </a:solidFill>
+                <a:latin typeface="DM Mono" panose="020B0509040201040103" pitchFamily="49" charset="0"/>
+                <a:ea typeface="Calibri" panose="020F0502020204030204" pitchFamily="34" charset="0"/>
+                <a:cs typeface="Calibri" panose="020F0502020204030204" pitchFamily="34" charset="0"/>
+              </a:rPr>
+              <a:t>{{kpis.fecha_perfil_2}}— </a:t>
+            </a:r>
+            <a:r>
+              <a:rPr lang="es-CL" sz="1200" dirty="0">
+                <a:solidFill>
+                  <a:srgbClr val="2C2E38"/>
+                </a:solidFill>
+                <a:latin typeface="DM Sans" pitchFamily="2" charset="0"/>
+                <a:ea typeface="Calibri" panose="020F0502020204030204" pitchFamily="34" charset="0"/>
+                <a:cs typeface="Calibri" panose="020F0502020204030204" pitchFamily="34" charset="0"/>
+              </a:rPr>
+              <a:t>lo que permite observar cómo la participación de cada tecnología en la curva de carga varía según la estación y las condiciones del sistema. La comparación entre ambos perfiles ilustra el rol creciente del almacenamiento BESS en la gestión de la rampa vespertina, así como la persistencia de la generación solar como principal fuente de excedentes en horas centrales del día.</a:t>
             </a:r>
           </a:p>
           <a:p>
@@ -7525,13 +8759,13 @@
             </a:extLst>
           </p:cNvPr>
           <p:cNvCxnSpPr>
-            <a:cxnSpLocks noGrp="1" noRot="1" noMove="1" noResize="1" noEditPoints="1" noAdjustHandles="1" noChangeArrowheads="1" noChangeShapeType="1"/>
+            <a:cxnSpLocks/>
           </p:cNvCxnSpPr>
           <p:nvPr/>
         </p:nvCxnSpPr>
         <p:spPr>
           <a:xfrm flipV="1">
-            <a:off x="332752" y="2540627"/>
+            <a:off x="160249" y="1719481"/>
             <a:ext cx="10034808" cy="50465"/>
           </a:xfrm>
           <a:prstGeom prst="line">
@@ -7568,20 +8802,20 @@
             </a:extLst>
           </p:cNvPr>
           <p:cNvSpPr>
-            <a:spLocks noGrp="1" noRot="1" noMove="1" noResize="1" noEditPoints="1" noAdjustHandles="1" noChangeArrowheads="1" noChangeShapeType="1"/>
+            <a:spLocks/>
           </p:cNvSpPr>
           <p:nvPr/>
         </p:nvSpPr>
         <p:spPr>
           <a:xfrm>
-            <a:off x="372996" y="4585334"/>
-            <a:ext cx="9820954" cy="5442519"/>
+            <a:off x="372996" y="4467478"/>
+            <a:ext cx="9820954" cy="5560376"/>
           </a:xfrm>
           <a:prstGeom prst="roundRect">
             <a:avLst/>
           </a:prstGeom>
           <a:solidFill>
-            <a:srgbClr val="FFFFFF"/>
+            <a:srgbClr val="EDF4FB"/>
           </a:solidFill>
           <a:ln>
             <a:solidFill>
@@ -7648,7 +8882,7 @@
             <a:avLst/>
           </a:prstGeom>
           <a:solidFill>
-            <a:srgbClr val="FFFFFF"/>
+            <a:srgbClr val="EDF4FB"/>
           </a:solidFill>
           <a:ln>
             <a:solidFill>
@@ -7689,6 +8923,855 @@
           <a:lstStyle/>
           <a:p>
             <a:endParaRPr lang="es-CL" sz="3654"/>
+          </a:p>
+        </p:txBody>
+      </p:sp>
+      <p:sp>
+        <p:nvSpPr>
+          <p:cNvPr id="3" name="Rectángulo 2">
+            <a:extLst>
+              <a:ext uri="{FF2B5EF4-FFF2-40B4-BE49-F238E27FC236}">
+                <a16:creationId xmlns:a16="http://schemas.microsoft.com/office/drawing/2014/main" id="{90593913-2DFB-99D7-A7FF-E08423EBC5CB}"/>
+              </a:ext>
+            </a:extLst>
+          </p:cNvPr>
+          <p:cNvSpPr/>
+          <p:nvPr/>
+        </p:nvSpPr>
+        <p:spPr>
+          <a:xfrm>
+            <a:off x="-21649" y="-15096"/>
+            <a:ext cx="10735109" cy="1183703"/>
+          </a:xfrm>
+          <a:prstGeom prst="rect">
+            <a:avLst/>
+          </a:prstGeom>
+          <a:solidFill>
+            <a:srgbClr val="0F2B4E"/>
+          </a:solidFill>
+        </p:spPr>
+        <p:style>
+          <a:lnRef idx="2">
+            <a:schemeClr val="accent1">
+              <a:shade val="15000"/>
+            </a:schemeClr>
+          </a:lnRef>
+          <a:fillRef idx="1">
+            <a:schemeClr val="accent1"/>
+          </a:fillRef>
+          <a:effectRef idx="0">
+            <a:schemeClr val="accent1"/>
+          </a:effectRef>
+          <a:fontRef idx="minor">
+            <a:schemeClr val="lt1"/>
+          </a:fontRef>
+        </p:style>
+        <p:txBody>
+          <a:bodyPr rot="0" spcFirstLastPara="0" vert="horz" wrap="square" lIns="125786" tIns="62893" rIns="125786" bIns="62893" numCol="1" spcCol="0" rtlCol="0" fromWordArt="0" anchor="ctr" anchorCtr="0" forceAA="0" compatLnSpc="1">
+            <a:prstTxWarp prst="textNoShape">
+              <a:avLst/>
+            </a:prstTxWarp>
+            <a:noAutofit/>
+          </a:bodyPr>
+          <a:lstStyle/>
+          <a:p>
+            <a:pPr marL="867437">
+              <a:lnSpc>
+                <a:spcPct val="115000"/>
+              </a:lnSpc>
+              <a:spcAft>
+                <a:spcPts val="1100"/>
+              </a:spcAft>
+            </a:pPr>
+            <a:r>
+              <a:rPr lang="es-CL" sz="2201" b="1" kern="100" dirty="0">
+                <a:latin typeface="Segoe UI" panose="020B0502040204020203" pitchFamily="34" charset="0"/>
+                <a:ea typeface="Aptos" panose="020B0004020202020204" pitchFamily="34" charset="0"/>
+                <a:cs typeface="Times New Roman" panose="02020603050405020304" pitchFamily="18" charset="0"/>
+              </a:rPr>
+              <a:t> </a:t>
+            </a:r>
+            <a:endParaRPr lang="es-CL" sz="1651" kern="100" dirty="0">
+              <a:ea typeface="Aptos" panose="020B0004020202020204" pitchFamily="34" charset="0"/>
+              <a:cs typeface="Times New Roman" panose="02020603050405020304" pitchFamily="18" charset="0"/>
+            </a:endParaRPr>
+          </a:p>
+          <a:p>
+            <a:pPr marL="867437">
+              <a:lnSpc>
+                <a:spcPct val="115000"/>
+              </a:lnSpc>
+              <a:spcAft>
+                <a:spcPts val="1100"/>
+              </a:spcAft>
+            </a:pPr>
+            <a:endParaRPr lang="es-CL" sz="3654" b="1" kern="100" dirty="0">
+              <a:latin typeface="Segoe UI" panose="020B0502040204020203" pitchFamily="34" charset="0"/>
+              <a:ea typeface="Aptos" panose="020B0004020202020204" pitchFamily="34" charset="0"/>
+              <a:cs typeface="Times New Roman" panose="02020603050405020304" pitchFamily="18" charset="0"/>
+            </a:endParaRPr>
+          </a:p>
+          <a:p>
+            <a:pPr marL="867437">
+              <a:lnSpc>
+                <a:spcPct val="115000"/>
+              </a:lnSpc>
+              <a:spcAft>
+                <a:spcPts val="1100"/>
+              </a:spcAft>
+            </a:pPr>
+            <a:r>
+              <a:rPr lang="es-CL" sz="1376" b="1" kern="100" dirty="0">
+                <a:latin typeface="Segoe UI" panose="020B0502040204020203" pitchFamily="34" charset="0"/>
+                <a:ea typeface="Aptos" panose="020B0004020202020204" pitchFamily="34" charset="0"/>
+                <a:cs typeface="Times New Roman" panose="02020603050405020304" pitchFamily="18" charset="0"/>
+              </a:rPr>
+              <a:t> </a:t>
+            </a:r>
+            <a:endParaRPr lang="es-CL" sz="1651" kern="100" dirty="0">
+              <a:ea typeface="Aptos" panose="020B0004020202020204" pitchFamily="34" charset="0"/>
+              <a:cs typeface="Times New Roman" panose="02020603050405020304" pitchFamily="18" charset="0"/>
+            </a:endParaRPr>
+          </a:p>
+          <a:p>
+            <a:pPr marL="867437">
+              <a:lnSpc>
+                <a:spcPct val="115000"/>
+              </a:lnSpc>
+              <a:spcAft>
+                <a:spcPts val="1100"/>
+              </a:spcAft>
+            </a:pPr>
+            <a:r>
+              <a:rPr lang="es-CL" sz="1376" b="1" kern="100" dirty="0">
+                <a:latin typeface="Segoe UI" panose="020B0502040204020203" pitchFamily="34" charset="0"/>
+                <a:ea typeface="Aptos" panose="020B0004020202020204" pitchFamily="34" charset="0"/>
+                <a:cs typeface="Times New Roman" panose="02020603050405020304" pitchFamily="18" charset="0"/>
+              </a:rPr>
+              <a:t> </a:t>
+            </a:r>
+            <a:endParaRPr lang="es-CL" sz="1651" kern="100" dirty="0">
+              <a:ea typeface="Aptos" panose="020B0004020202020204" pitchFamily="34" charset="0"/>
+              <a:cs typeface="Times New Roman" panose="02020603050405020304" pitchFamily="18" charset="0"/>
+            </a:endParaRPr>
+          </a:p>
+          <a:p>
+            <a:pPr marL="867437">
+              <a:lnSpc>
+                <a:spcPct val="115000"/>
+              </a:lnSpc>
+              <a:spcAft>
+                <a:spcPts val="1100"/>
+              </a:spcAft>
+            </a:pPr>
+            <a:r>
+              <a:rPr lang="es-CL" sz="1376" b="1" kern="100" dirty="0">
+                <a:latin typeface="Segoe UI" panose="020B0502040204020203" pitchFamily="34" charset="0"/>
+                <a:ea typeface="Aptos" panose="020B0004020202020204" pitchFamily="34" charset="0"/>
+                <a:cs typeface="Times New Roman" panose="02020603050405020304" pitchFamily="18" charset="0"/>
+              </a:rPr>
+              <a:t> </a:t>
+            </a:r>
+            <a:endParaRPr lang="es-CL" sz="1651" kern="100" dirty="0">
+              <a:ea typeface="Aptos" panose="020B0004020202020204" pitchFamily="34" charset="0"/>
+              <a:cs typeface="Times New Roman" panose="02020603050405020304" pitchFamily="18" charset="0"/>
+            </a:endParaRPr>
+          </a:p>
+          <a:p>
+            <a:pPr marL="867437">
+              <a:lnSpc>
+                <a:spcPct val="115000"/>
+              </a:lnSpc>
+              <a:spcAft>
+                <a:spcPts val="1100"/>
+              </a:spcAft>
+            </a:pPr>
+            <a:r>
+              <a:rPr lang="es-CL" sz="2201" b="1" kern="100" dirty="0">
+                <a:latin typeface="Segoe UI" panose="020B0502040204020203" pitchFamily="34" charset="0"/>
+                <a:ea typeface="Aptos" panose="020B0004020202020204" pitchFamily="34" charset="0"/>
+                <a:cs typeface="Times New Roman" panose="02020603050405020304" pitchFamily="18" charset="0"/>
+              </a:rPr>
+              <a:t> </a:t>
+            </a:r>
+            <a:endParaRPr lang="es-CL" sz="1651" kern="100" dirty="0">
+              <a:ea typeface="Aptos" panose="020B0004020202020204" pitchFamily="34" charset="0"/>
+              <a:cs typeface="Times New Roman" panose="02020603050405020304" pitchFamily="18" charset="0"/>
+            </a:endParaRPr>
+          </a:p>
+        </p:txBody>
+      </p:sp>
+      <p:pic>
+        <p:nvPicPr>
+          <p:cNvPr id="6" name="Imagen 5">
+            <a:extLst>
+              <a:ext uri="{FF2B5EF4-FFF2-40B4-BE49-F238E27FC236}">
+                <a16:creationId xmlns:a16="http://schemas.microsoft.com/office/drawing/2014/main" id="{1FAE8E5D-1E43-A4B1-9A2A-6D098BE746BC}"/>
+              </a:ext>
+            </a:extLst>
+          </p:cNvPr>
+          <p:cNvPicPr/>
+          <p:nvPr/>
+        </p:nvPicPr>
+        <p:blipFill>
+          <a:blip r:embed="rId2" cstate="print">
+            <a:extLst>
+              <a:ext uri="{28A0092B-C50C-407E-A947-70E740481C1C}">
+                <a14:useLocalDpi xmlns:a14="http://schemas.microsoft.com/office/drawing/2010/main" val="0"/>
+              </a:ext>
+            </a:extLst>
+          </a:blip>
+          <a:stretch>
+            <a:fillRect/>
+          </a:stretch>
+        </p:blipFill>
+        <p:spPr>
+          <a:xfrm>
+            <a:off x="9245849" y="150947"/>
+            <a:ext cx="1010737" cy="918049"/>
+          </a:xfrm>
+          <a:prstGeom prst="rect">
+            <a:avLst/>
+          </a:prstGeom>
+        </p:spPr>
+      </p:pic>
+      <p:sp>
+        <p:nvSpPr>
+          <p:cNvPr id="8" name="CuadroTexto 7">
+            <a:extLst>
+              <a:ext uri="{FF2B5EF4-FFF2-40B4-BE49-F238E27FC236}">
+                <a16:creationId xmlns:a16="http://schemas.microsoft.com/office/drawing/2014/main" id="{435FB966-568C-37EE-1014-F8E3AB1EC1AA}"/>
+              </a:ext>
+            </a:extLst>
+          </p:cNvPr>
+          <p:cNvSpPr txBox="1"/>
+          <p:nvPr/>
+        </p:nvSpPr>
+        <p:spPr>
+          <a:xfrm>
+            <a:off x="-652770" y="46814"/>
+            <a:ext cx="7720320" cy="566565"/>
+          </a:xfrm>
+          <a:prstGeom prst="rect">
+            <a:avLst/>
+          </a:prstGeom>
+          <a:noFill/>
+        </p:spPr>
+        <p:txBody>
+          <a:bodyPr wrap="square" rtlCol="0">
+            <a:spAutoFit/>
+          </a:bodyPr>
+          <a:lstStyle/>
+          <a:p>
+            <a:pPr marL="867437">
+              <a:lnSpc>
+                <a:spcPct val="115000"/>
+              </a:lnSpc>
+              <a:spcAft>
+                <a:spcPts val="1100"/>
+              </a:spcAft>
+            </a:pPr>
+            <a:r>
+              <a:rPr lang="es-CL" sz="2800" b="1" kern="100" dirty="0">
+                <a:solidFill>
+                  <a:schemeClr val="bg1"/>
+                </a:solidFill>
+                <a:latin typeface="DM Sans" pitchFamily="2" charset="0"/>
+                <a:ea typeface="Aptos" panose="020B0004020202020204" pitchFamily="34" charset="0"/>
+                <a:cs typeface="Times New Roman" panose="02020603050405020304" pitchFamily="18" charset="0"/>
+              </a:rPr>
+              <a:t>Mercados Mayoristas de generación</a:t>
+            </a:r>
+            <a:endParaRPr lang="es-CL" sz="1200" kern="100" dirty="0">
+              <a:solidFill>
+                <a:schemeClr val="bg1"/>
+              </a:solidFill>
+              <a:latin typeface="DM Sans" pitchFamily="2" charset="0"/>
+              <a:ea typeface="Aptos" panose="020B0004020202020204" pitchFamily="34" charset="0"/>
+              <a:cs typeface="Times New Roman" panose="02020603050405020304" pitchFamily="18" charset="0"/>
+            </a:endParaRPr>
+          </a:p>
+        </p:txBody>
+      </p:sp>
+      <p:sp>
+        <p:nvSpPr>
+          <p:cNvPr id="9" name="periodo_estudio">
+            <a:extLst>
+              <a:ext uri="{FF2B5EF4-FFF2-40B4-BE49-F238E27FC236}">
+                <a16:creationId xmlns:a16="http://schemas.microsoft.com/office/drawing/2014/main" id="{77EAED91-E52D-A80E-3B34-EF3FA0018E9F}"/>
+              </a:ext>
+            </a:extLst>
+          </p:cNvPr>
+          <p:cNvSpPr txBox="1"/>
+          <p:nvPr/>
+        </p:nvSpPr>
+        <p:spPr>
+          <a:xfrm>
+            <a:off x="-652771" y="609146"/>
+            <a:ext cx="5887207" cy="422039"/>
+          </a:xfrm>
+          <a:prstGeom prst="rect">
+            <a:avLst/>
+          </a:prstGeom>
+          <a:noFill/>
+        </p:spPr>
+        <p:txBody>
+          <a:bodyPr wrap="square" rtlCol="0">
+            <a:spAutoFit/>
+          </a:bodyPr>
+          <a:lstStyle/>
+          <a:p>
+            <a:pPr marL="867437">
+              <a:lnSpc>
+                <a:spcPct val="115000"/>
+              </a:lnSpc>
+              <a:spcAft>
+                <a:spcPts val="1100"/>
+              </a:spcAft>
+            </a:pPr>
+            <a:r>
+              <a:rPr lang="es-CL" sz="1926" b="1" kern="100" dirty="0">
+                <a:solidFill>
+                  <a:srgbClr val="6FA3CC"/>
+                </a:solidFill>
+                <a:latin typeface="DM Sans" pitchFamily="2" charset="0"/>
+                <a:cs typeface="Times New Roman" panose="02020603050405020304" pitchFamily="18" charset="0"/>
+              </a:rPr>
+              <a:t>Periodo de estudio: </a:t>
+            </a:r>
+            <a:r>
+              <a:rPr lang="es-CL" sz="1600" b="1" kern="100" dirty="0">
+                <a:solidFill>
+                  <a:srgbClr val="6FA3CC"/>
+                </a:solidFill>
+                <a:latin typeface="DM Mono" panose="020B0509040201040103" pitchFamily="49" charset="0"/>
+                <a:cs typeface="Times New Roman" panose="02020603050405020304" pitchFamily="18" charset="0"/>
+              </a:rPr>
+              <a:t>2025-01 → 2025-12</a:t>
+            </a:r>
+          </a:p>
+        </p:txBody>
+      </p:sp>
+      <p:sp>
+        <p:nvSpPr>
+          <p:cNvPr id="11" name="titulo_gx_tipico">
+            <a:extLst>
+              <a:ext uri="{FF2B5EF4-FFF2-40B4-BE49-F238E27FC236}">
+                <a16:creationId xmlns:a16="http://schemas.microsoft.com/office/drawing/2014/main" id="{CA6A285F-1D96-3B77-E95B-45B0D5AD6B4C}"/>
+              </a:ext>
+            </a:extLst>
+          </p:cNvPr>
+          <p:cNvSpPr txBox="1">
+            <a:spLocks/>
+          </p:cNvSpPr>
+          <p:nvPr/>
+        </p:nvSpPr>
+        <p:spPr>
+          <a:xfrm>
+            <a:off x="2923385" y="4586010"/>
+            <a:ext cx="4709555" cy="338554"/>
+          </a:xfrm>
+          <a:prstGeom prst="rect">
+            <a:avLst/>
+          </a:prstGeom>
+          <a:noFill/>
+        </p:spPr>
+        <p:txBody>
+          <a:bodyPr wrap="square" rtlCol="0">
+            <a:spAutoFit/>
+          </a:bodyPr>
+          <a:lstStyle/>
+          <a:p>
+            <a:pPr algn="ctr"/>
+            <a:r>
+              <a:rPr lang="es-ES" sz="1600" b="1" kern="100" dirty="0">
+                <a:solidFill>
+                  <a:srgbClr val="002060"/>
+                </a:solidFill>
+                <a:latin typeface="DM Sans" pitchFamily="2" charset="0"/>
+                <a:cs typeface="Times New Roman" panose="02020603050405020304" pitchFamily="18" charset="0"/>
+              </a:rPr>
+              <a:t>Generación diaria típica por tecnología</a:t>
+            </a:r>
+            <a:endParaRPr lang="es-CL" sz="1600" b="1" kern="100" dirty="0">
+              <a:solidFill>
+                <a:srgbClr val="002060"/>
+              </a:solidFill>
+              <a:latin typeface="DM Sans" pitchFamily="2" charset="0"/>
+              <a:cs typeface="Times New Roman" panose="02020603050405020304" pitchFamily="18" charset="0"/>
+            </a:endParaRPr>
+          </a:p>
+        </p:txBody>
+      </p:sp>
+      <p:sp>
+        <p:nvSpPr>
+          <p:cNvPr id="12" name="titulo_fecha_referencia_1">
+            <a:extLst>
+              <a:ext uri="{FF2B5EF4-FFF2-40B4-BE49-F238E27FC236}">
+                <a16:creationId xmlns:a16="http://schemas.microsoft.com/office/drawing/2014/main" id="{C20A4FE8-703A-B4F6-E958-8947D382BD2C}"/>
+              </a:ext>
+            </a:extLst>
+          </p:cNvPr>
+          <p:cNvSpPr txBox="1">
+            <a:spLocks/>
+          </p:cNvSpPr>
+          <p:nvPr/>
+        </p:nvSpPr>
+        <p:spPr>
+          <a:xfrm>
+            <a:off x="372996" y="4924410"/>
+            <a:ext cx="5751952" cy="246221"/>
+          </a:xfrm>
+          <a:prstGeom prst="rect">
+            <a:avLst/>
+          </a:prstGeom>
+          <a:noFill/>
+        </p:spPr>
+        <p:txBody>
+          <a:bodyPr wrap="square" rtlCol="0">
+            <a:spAutoFit/>
+          </a:bodyPr>
+          <a:lstStyle/>
+          <a:p>
+            <a:pPr algn="ctr"/>
+            <a:r>
+              <a:rPr lang="es-ES" sz="1000" b="1" kern="100" dirty="0">
+                <a:solidFill>
+                  <a:srgbClr val="8A8775"/>
+                </a:solidFill>
+                <a:latin typeface="DM Sans" pitchFamily="2" charset="0"/>
+                <a:cs typeface="Times New Roman" panose="02020603050405020304" pitchFamily="18" charset="0"/>
+              </a:rPr>
+              <a:t>Fecha de referencia: </a:t>
+            </a:r>
+            <a:r>
+              <a:rPr lang="es-CL" sz="1000" b="1" kern="100" dirty="0">
+                <a:solidFill>
+                  <a:srgbClr val="8A8775"/>
+                </a:solidFill>
+                <a:latin typeface="DM Mono" panose="020B0509040201040103" pitchFamily="49" charset="0"/>
+                <a:cs typeface="Times New Roman" panose="02020603050405020304" pitchFamily="18" charset="0"/>
+              </a:rPr>
+              <a:t>{{kpis.fecha_referencia_1}} </a:t>
+            </a:r>
+          </a:p>
+        </p:txBody>
+      </p:sp>
+      <p:sp>
+        <p:nvSpPr>
+          <p:cNvPr id="13" name="titulo_fecha_referencia_2">
+            <a:extLst>
+              <a:ext uri="{FF2B5EF4-FFF2-40B4-BE49-F238E27FC236}">
+                <a16:creationId xmlns:a16="http://schemas.microsoft.com/office/drawing/2014/main" id="{B8807974-35D6-F383-1333-9C3290498B58}"/>
+              </a:ext>
+            </a:extLst>
+          </p:cNvPr>
+          <p:cNvSpPr txBox="1">
+            <a:spLocks/>
+          </p:cNvSpPr>
+          <p:nvPr/>
+        </p:nvSpPr>
+        <p:spPr>
+          <a:xfrm>
+            <a:off x="4690930" y="4927418"/>
+            <a:ext cx="5751952" cy="246221"/>
+          </a:xfrm>
+          <a:prstGeom prst="rect">
+            <a:avLst/>
+          </a:prstGeom>
+          <a:noFill/>
+        </p:spPr>
+        <p:txBody>
+          <a:bodyPr wrap="square" rtlCol="0">
+            <a:spAutoFit/>
+          </a:bodyPr>
+          <a:lstStyle/>
+          <a:p>
+            <a:pPr algn="ctr"/>
+            <a:r>
+              <a:rPr lang="es-ES" sz="1000" b="1" kern="100" dirty="0">
+                <a:solidFill>
+                  <a:srgbClr val="8A8775"/>
+                </a:solidFill>
+                <a:latin typeface="DM Sans" pitchFamily="2" charset="0"/>
+                <a:cs typeface="Times New Roman" panose="02020603050405020304" pitchFamily="18" charset="0"/>
+              </a:rPr>
+              <a:t>Fecha de referencia: </a:t>
+            </a:r>
+            <a:r>
+              <a:rPr lang="es-CL" sz="1000" b="1" kern="100" dirty="0">
+                <a:solidFill>
+                  <a:srgbClr val="8A8775"/>
+                </a:solidFill>
+                <a:latin typeface="DM Mono" panose="020B0509040201040103" pitchFamily="49" charset="0"/>
+                <a:cs typeface="Times New Roman" panose="02020603050405020304" pitchFamily="18" charset="0"/>
+              </a:rPr>
+              <a:t>{{kpis.fecha_referencia_2}} </a:t>
+            </a:r>
+            <a:endParaRPr lang="es-CL" sz="1000" b="1" kern="100" dirty="0">
+              <a:solidFill>
+                <a:srgbClr val="8A8775"/>
+              </a:solidFill>
+              <a:latin typeface="DM Sans" pitchFamily="2" charset="0"/>
+              <a:cs typeface="Times New Roman" panose="02020603050405020304" pitchFamily="18" charset="0"/>
+            </a:endParaRPr>
+          </a:p>
+        </p:txBody>
+      </p:sp>
+      <p:sp>
+        <p:nvSpPr>
+          <p:cNvPr id="18" name="y_gx_tipico">
+            <a:extLst>
+              <a:ext uri="{FF2B5EF4-FFF2-40B4-BE49-F238E27FC236}">
+                <a16:creationId xmlns:a16="http://schemas.microsoft.com/office/drawing/2014/main" id="{2375222D-2F78-AD62-BF92-27130F75C1C1}"/>
+              </a:ext>
+            </a:extLst>
+          </p:cNvPr>
+          <p:cNvSpPr txBox="1">
+            <a:spLocks/>
+          </p:cNvSpPr>
+          <p:nvPr/>
+        </p:nvSpPr>
+        <p:spPr>
+          <a:xfrm rot="16200000">
+            <a:off x="351619" y="6775995"/>
+            <a:ext cx="928814" cy="276999"/>
+          </a:xfrm>
+          <a:prstGeom prst="rect">
+            <a:avLst/>
+          </a:prstGeom>
+          <a:noFill/>
+        </p:spPr>
+        <p:txBody>
+          <a:bodyPr wrap="square" rtlCol="0">
+            <a:spAutoFit/>
+          </a:bodyPr>
+          <a:lstStyle/>
+          <a:p>
+            <a:pPr algn="ctr"/>
+            <a:r>
+              <a:rPr lang="es-ES" sz="1200" b="1" kern="100" dirty="0" err="1">
+                <a:solidFill>
+                  <a:srgbClr val="002060"/>
+                </a:solidFill>
+                <a:latin typeface="DM Sans" pitchFamily="2" charset="0"/>
+                <a:cs typeface="Times New Roman" panose="02020603050405020304" pitchFamily="18" charset="0"/>
+              </a:rPr>
+              <a:t>MWh</a:t>
+            </a:r>
+            <a:endParaRPr lang="es-CL" sz="1200" b="1" kern="100" dirty="0">
+              <a:solidFill>
+                <a:srgbClr val="002060"/>
+              </a:solidFill>
+              <a:latin typeface="DM Sans" pitchFamily="2" charset="0"/>
+              <a:cs typeface="Times New Roman" panose="02020603050405020304" pitchFamily="18" charset="0"/>
+            </a:endParaRPr>
+          </a:p>
+        </p:txBody>
+      </p:sp>
+      <p:sp>
+        <p:nvSpPr>
+          <p:cNvPr id="28" name="x_gx_tipico_1">
+            <a:extLst>
+              <a:ext uri="{FF2B5EF4-FFF2-40B4-BE49-F238E27FC236}">
+                <a16:creationId xmlns:a16="http://schemas.microsoft.com/office/drawing/2014/main" id="{86786845-CC56-E1E3-4964-D181189A233E}"/>
+              </a:ext>
+            </a:extLst>
+          </p:cNvPr>
+          <p:cNvSpPr txBox="1">
+            <a:spLocks/>
+          </p:cNvSpPr>
+          <p:nvPr/>
+        </p:nvSpPr>
+        <p:spPr>
+          <a:xfrm>
+            <a:off x="2730806" y="8625900"/>
+            <a:ext cx="1537367" cy="276999"/>
+          </a:xfrm>
+          <a:prstGeom prst="rect">
+            <a:avLst/>
+          </a:prstGeom>
+          <a:noFill/>
+        </p:spPr>
+        <p:txBody>
+          <a:bodyPr wrap="square" rtlCol="0">
+            <a:spAutoFit/>
+          </a:bodyPr>
+          <a:lstStyle/>
+          <a:p>
+            <a:pPr algn="ctr"/>
+            <a:r>
+              <a:rPr lang="es-ES" sz="1200" b="1" kern="100" dirty="0">
+                <a:solidFill>
+                  <a:srgbClr val="002060"/>
+                </a:solidFill>
+                <a:latin typeface="DM Sans" pitchFamily="2" charset="0"/>
+                <a:cs typeface="Times New Roman" panose="02020603050405020304" pitchFamily="18" charset="0"/>
+              </a:rPr>
+              <a:t>Hora del día</a:t>
+            </a:r>
+            <a:endParaRPr lang="es-CL" sz="1200" b="1" kern="100" dirty="0">
+              <a:solidFill>
+                <a:srgbClr val="002060"/>
+              </a:solidFill>
+              <a:latin typeface="DM Sans" pitchFamily="2" charset="0"/>
+              <a:cs typeface="Times New Roman" panose="02020603050405020304" pitchFamily="18" charset="0"/>
+            </a:endParaRPr>
+          </a:p>
+        </p:txBody>
+      </p:sp>
+      <p:sp>
+        <p:nvSpPr>
+          <p:cNvPr id="29" name="x_gx_tipico_2">
+            <a:extLst>
+              <a:ext uri="{FF2B5EF4-FFF2-40B4-BE49-F238E27FC236}">
+                <a16:creationId xmlns:a16="http://schemas.microsoft.com/office/drawing/2014/main" id="{58622CEC-E5AD-5E18-C243-D14B72FA5C93}"/>
+              </a:ext>
+            </a:extLst>
+          </p:cNvPr>
+          <p:cNvSpPr txBox="1">
+            <a:spLocks/>
+          </p:cNvSpPr>
+          <p:nvPr/>
+        </p:nvSpPr>
+        <p:spPr>
+          <a:xfrm>
+            <a:off x="6877356" y="8625900"/>
+            <a:ext cx="1537367" cy="276999"/>
+          </a:xfrm>
+          <a:prstGeom prst="rect">
+            <a:avLst/>
+          </a:prstGeom>
+          <a:noFill/>
+        </p:spPr>
+        <p:txBody>
+          <a:bodyPr wrap="square" rtlCol="0">
+            <a:spAutoFit/>
+          </a:bodyPr>
+          <a:lstStyle/>
+          <a:p>
+            <a:pPr algn="ctr"/>
+            <a:r>
+              <a:rPr lang="es-ES" sz="1200" b="1" kern="100" dirty="0">
+                <a:solidFill>
+                  <a:srgbClr val="002060"/>
+                </a:solidFill>
+                <a:latin typeface="DM Sans" pitchFamily="2" charset="0"/>
+                <a:cs typeface="Times New Roman" panose="02020603050405020304" pitchFamily="18" charset="0"/>
+              </a:rPr>
+              <a:t>Hora del día</a:t>
+            </a:r>
+            <a:endParaRPr lang="es-CL" sz="1200" b="1" kern="100" dirty="0">
+              <a:solidFill>
+                <a:srgbClr val="002060"/>
+              </a:solidFill>
+              <a:latin typeface="DM Sans" pitchFamily="2" charset="0"/>
+              <a:cs typeface="Times New Roman" panose="02020603050405020304" pitchFamily="18" charset="0"/>
+            </a:endParaRPr>
+          </a:p>
+        </p:txBody>
+      </p:sp>
+      <p:sp>
+        <p:nvSpPr>
+          <p:cNvPr id="30" name="titulo_iny_vert">
+            <a:extLst>
+              <a:ext uri="{FF2B5EF4-FFF2-40B4-BE49-F238E27FC236}">
+                <a16:creationId xmlns:a16="http://schemas.microsoft.com/office/drawing/2014/main" id="{532544CC-1C67-18AE-B59E-F19E5A86667F}"/>
+              </a:ext>
+            </a:extLst>
+          </p:cNvPr>
+          <p:cNvSpPr txBox="1">
+            <a:spLocks/>
+          </p:cNvSpPr>
+          <p:nvPr/>
+        </p:nvSpPr>
+        <p:spPr>
+          <a:xfrm>
+            <a:off x="943190" y="10485054"/>
+            <a:ext cx="4709555" cy="338554"/>
+          </a:xfrm>
+          <a:prstGeom prst="rect">
+            <a:avLst/>
+          </a:prstGeom>
+          <a:noFill/>
+        </p:spPr>
+        <p:txBody>
+          <a:bodyPr wrap="square" rtlCol="0">
+            <a:spAutoFit/>
+          </a:bodyPr>
+          <a:lstStyle/>
+          <a:p>
+            <a:pPr algn="ctr"/>
+            <a:r>
+              <a:rPr lang="es-ES" sz="1600" b="1" kern="100" dirty="0">
+                <a:solidFill>
+                  <a:srgbClr val="002060"/>
+                </a:solidFill>
+                <a:latin typeface="DM Sans" pitchFamily="2" charset="0"/>
+                <a:cs typeface="Times New Roman" panose="02020603050405020304" pitchFamily="18" charset="0"/>
+              </a:rPr>
+              <a:t>Energía inyectada vs vertida</a:t>
+            </a:r>
+            <a:endParaRPr lang="es-CL" sz="1600" b="1" kern="100" dirty="0">
+              <a:solidFill>
+                <a:srgbClr val="002060"/>
+              </a:solidFill>
+              <a:latin typeface="DM Sans" pitchFamily="2" charset="0"/>
+              <a:cs typeface="Times New Roman" panose="02020603050405020304" pitchFamily="18" charset="0"/>
+            </a:endParaRPr>
+          </a:p>
+        </p:txBody>
+      </p:sp>
+      <p:sp>
+        <p:nvSpPr>
+          <p:cNvPr id="31" name="titulo_tabla">
+            <a:extLst>
+              <a:ext uri="{FF2B5EF4-FFF2-40B4-BE49-F238E27FC236}">
+                <a16:creationId xmlns:a16="http://schemas.microsoft.com/office/drawing/2014/main" id="{2CAE3186-5C44-57B4-43B9-63A2689E8B9D}"/>
+              </a:ext>
+            </a:extLst>
+          </p:cNvPr>
+          <p:cNvSpPr txBox="1">
+            <a:spLocks/>
+          </p:cNvSpPr>
+          <p:nvPr/>
+        </p:nvSpPr>
+        <p:spPr>
+          <a:xfrm>
+            <a:off x="5345904" y="10434703"/>
+            <a:ext cx="4709555" cy="338554"/>
+          </a:xfrm>
+          <a:prstGeom prst="rect">
+            <a:avLst/>
+          </a:prstGeom>
+          <a:noFill/>
+        </p:spPr>
+        <p:txBody>
+          <a:bodyPr wrap="square" rtlCol="0">
+            <a:spAutoFit/>
+          </a:bodyPr>
+          <a:lstStyle/>
+          <a:p>
+            <a:pPr algn="ctr"/>
+            <a:r>
+              <a:rPr lang="es-ES" sz="1600" b="1" kern="100" dirty="0">
+                <a:solidFill>
+                  <a:srgbClr val="002060"/>
+                </a:solidFill>
+                <a:latin typeface="DM Sans" pitchFamily="2" charset="0"/>
+                <a:cs typeface="Times New Roman" panose="02020603050405020304" pitchFamily="18" charset="0"/>
+              </a:rPr>
+              <a:t>Top reducción por central</a:t>
+            </a:r>
+            <a:endParaRPr lang="es-CL" sz="1600" b="1" kern="100" dirty="0">
+              <a:solidFill>
+                <a:srgbClr val="002060"/>
+              </a:solidFill>
+              <a:latin typeface="DM Sans" pitchFamily="2" charset="0"/>
+              <a:cs typeface="Times New Roman" panose="02020603050405020304" pitchFamily="18" charset="0"/>
+            </a:endParaRPr>
+          </a:p>
+        </p:txBody>
+      </p:sp>
+      <p:sp>
+        <p:nvSpPr>
+          <p:cNvPr id="32" name="y_iny_vert">
+            <a:extLst>
+              <a:ext uri="{FF2B5EF4-FFF2-40B4-BE49-F238E27FC236}">
+                <a16:creationId xmlns:a16="http://schemas.microsoft.com/office/drawing/2014/main" id="{D683ACCB-ABC1-00AB-7206-B504E2159DB3}"/>
+              </a:ext>
+            </a:extLst>
+          </p:cNvPr>
+          <p:cNvSpPr txBox="1">
+            <a:spLocks/>
+          </p:cNvSpPr>
+          <p:nvPr/>
+        </p:nvSpPr>
+        <p:spPr>
+          <a:xfrm rot="16200000">
+            <a:off x="395454" y="12307560"/>
+            <a:ext cx="928814" cy="276999"/>
+          </a:xfrm>
+          <a:prstGeom prst="rect">
+            <a:avLst/>
+          </a:prstGeom>
+          <a:noFill/>
+        </p:spPr>
+        <p:txBody>
+          <a:bodyPr wrap="square" rtlCol="0">
+            <a:spAutoFit/>
+          </a:bodyPr>
+          <a:lstStyle/>
+          <a:p>
+            <a:pPr algn="ctr"/>
+            <a:r>
+              <a:rPr lang="es-ES" sz="1200" b="1" kern="100" dirty="0" err="1">
+                <a:solidFill>
+                  <a:srgbClr val="002060"/>
+                </a:solidFill>
+                <a:latin typeface="DM Sans" pitchFamily="2" charset="0"/>
+                <a:cs typeface="Times New Roman" panose="02020603050405020304" pitchFamily="18" charset="0"/>
+              </a:rPr>
+              <a:t>MWh</a:t>
+            </a:r>
+            <a:endParaRPr lang="es-CL" sz="1200" b="1" kern="100" dirty="0">
+              <a:solidFill>
+                <a:srgbClr val="002060"/>
+              </a:solidFill>
+              <a:latin typeface="DM Sans" pitchFamily="2" charset="0"/>
+              <a:cs typeface="Times New Roman" panose="02020603050405020304" pitchFamily="18" charset="0"/>
+            </a:endParaRPr>
+          </a:p>
+        </p:txBody>
+      </p:sp>
+      <p:sp>
+        <p:nvSpPr>
+          <p:cNvPr id="15" name="x_iny_vert">
+            <a:extLst>
+              <a:ext uri="{FF2B5EF4-FFF2-40B4-BE49-F238E27FC236}">
+                <a16:creationId xmlns:a16="http://schemas.microsoft.com/office/drawing/2014/main" id="{B4B0F660-3CC5-7C43-FBBB-E5E307ED2E66}"/>
+              </a:ext>
+            </a:extLst>
+          </p:cNvPr>
+          <p:cNvSpPr txBox="1">
+            <a:spLocks/>
+          </p:cNvSpPr>
+          <p:nvPr/>
+        </p:nvSpPr>
+        <p:spPr>
+          <a:xfrm>
+            <a:off x="2337106" y="13598287"/>
+            <a:ext cx="1537367" cy="276999"/>
+          </a:xfrm>
+          <a:prstGeom prst="rect">
+            <a:avLst/>
+          </a:prstGeom>
+          <a:noFill/>
+        </p:spPr>
+        <p:txBody>
+          <a:bodyPr wrap="square" rtlCol="0">
+            <a:spAutoFit/>
+          </a:bodyPr>
+          <a:lstStyle/>
+          <a:p>
+            <a:pPr algn="ctr"/>
+            <a:r>
+              <a:rPr lang="es-ES" sz="1200" b="1" kern="100" dirty="0">
+                <a:solidFill>
+                  <a:srgbClr val="002060"/>
+                </a:solidFill>
+                <a:latin typeface="DM Sans" pitchFamily="2" charset="0"/>
+                <a:cs typeface="Times New Roman" panose="02020603050405020304" pitchFamily="18" charset="0"/>
+              </a:rPr>
+              <a:t>Periodo</a:t>
+            </a:r>
+            <a:endParaRPr lang="es-CL" sz="1200" b="1" kern="100" dirty="0">
+              <a:solidFill>
+                <a:srgbClr val="002060"/>
+              </a:solidFill>
+              <a:latin typeface="DM Sans" pitchFamily="2" charset="0"/>
+              <a:cs typeface="Times New Roman" panose="02020603050405020304" pitchFamily="18" charset="0"/>
+            </a:endParaRPr>
           </a:p>
         </p:txBody>
       </p:sp>

--- a/data/raw/templates/template_reporte.pptx
+++ b/data/raw/templates/template_reporte.pptx
@@ -133,12 +133,12 @@
   <pc:docChgLst>
     <pc:chgData name="Pablo Inzunza" userId="be16ff5b34c21876" providerId="LiveId" clId="{CC6937A5-FA4E-485C-A7D4-0E92CAEDBC02}"/>
     <pc:docChg chg="undo custSel modSld">
-      <pc:chgData name="Pablo Inzunza" userId="be16ff5b34c21876" providerId="LiveId" clId="{CC6937A5-FA4E-485C-A7D4-0E92CAEDBC02}" dt="2026-03-22T02:46:25.307" v="1518" actId="20577"/>
+      <pc:chgData name="Pablo Inzunza" userId="be16ff5b34c21876" providerId="LiveId" clId="{CC6937A5-FA4E-485C-A7D4-0E92CAEDBC02}" dt="2026-03-27T23:16:01.630" v="1522" actId="20577"/>
       <pc:docMkLst>
         <pc:docMk/>
       </pc:docMkLst>
       <pc:sldChg chg="addSp delSp modSp mod">
-        <pc:chgData name="Pablo Inzunza" userId="be16ff5b34c21876" providerId="LiveId" clId="{CC6937A5-FA4E-485C-A7D4-0E92CAEDBC02}" dt="2026-03-22T01:57:01.275" v="1510"/>
+        <pc:chgData name="Pablo Inzunza" userId="be16ff5b34c21876" providerId="LiveId" clId="{CC6937A5-FA4E-485C-A7D4-0E92CAEDBC02}" dt="2026-03-27T23:16:01.630" v="1522" actId="20577"/>
         <pc:sldMkLst>
           <pc:docMk/>
           <pc:sldMk cId="1567814596" sldId="256"/>
@@ -216,7 +216,7 @@
           </ac:spMkLst>
         </pc:spChg>
         <pc:spChg chg="add mod">
-          <ac:chgData name="Pablo Inzunza" userId="be16ff5b34c21876" providerId="LiveId" clId="{CC6937A5-FA4E-485C-A7D4-0E92CAEDBC02}" dt="2026-03-21T16:51:16.553" v="1454" actId="1076"/>
+          <ac:chgData name="Pablo Inzunza" userId="be16ff5b34c21876" providerId="LiveId" clId="{CC6937A5-FA4E-485C-A7D4-0E92CAEDBC02}" dt="2026-03-27T23:15:59.165" v="1520" actId="20577"/>
           <ac:spMkLst>
             <pc:docMk/>
             <pc:sldMk cId="1567814596" sldId="256"/>
@@ -224,7 +224,7 @@
           </ac:spMkLst>
         </pc:spChg>
         <pc:spChg chg="add mod">
-          <ac:chgData name="Pablo Inzunza" userId="be16ff5b34c21876" providerId="LiveId" clId="{CC6937A5-FA4E-485C-A7D4-0E92CAEDBC02}" dt="2026-03-21T16:51:19.829" v="1455" actId="1076"/>
+          <ac:chgData name="Pablo Inzunza" userId="be16ff5b34c21876" providerId="LiveId" clId="{CC6937A5-FA4E-485C-A7D4-0E92CAEDBC02}" dt="2026-03-27T23:16:01.630" v="1522" actId="20577"/>
           <ac:spMkLst>
             <pc:docMk/>
             <pc:sldMk cId="1567814596" sldId="256"/>
@@ -239,44 +239,12 @@
             <ac:spMk id="14" creationId="{BC640CFB-D442-9CAF-05C2-333332C40FD7}"/>
           </ac:spMkLst>
         </pc:spChg>
-        <pc:spChg chg="add del mod">
-          <ac:chgData name="Pablo Inzunza" userId="be16ff5b34c21876" providerId="LiveId" clId="{CC6937A5-FA4E-485C-A7D4-0E92CAEDBC02}" dt="2026-03-21T16:38:20.728" v="1417" actId="478"/>
-          <ac:spMkLst>
-            <pc:docMk/>
-            <pc:sldMk cId="1567814596" sldId="256"/>
-            <ac:spMk id="15" creationId="{113C2EAD-B857-ADBF-753C-4CF369BB8BEE}"/>
-          </ac:spMkLst>
-        </pc:spChg>
         <pc:spChg chg="add mod">
           <ac:chgData name="Pablo Inzunza" userId="be16ff5b34c21876" providerId="LiveId" clId="{CC6937A5-FA4E-485C-A7D4-0E92CAEDBC02}" dt="2026-03-22T01:57:01.275" v="1510"/>
           <ac:spMkLst>
             <pc:docMk/>
             <pc:sldMk cId="1567814596" sldId="256"/>
             <ac:spMk id="15" creationId="{B4B0F660-3CC5-7C43-FBBB-E5E307ED2E66}"/>
-          </ac:spMkLst>
-        </pc:spChg>
-        <pc:spChg chg="add del mod">
-          <ac:chgData name="Pablo Inzunza" userId="be16ff5b34c21876" providerId="LiveId" clId="{CC6937A5-FA4E-485C-A7D4-0E92CAEDBC02}" dt="2026-03-21T16:38:20.728" v="1417" actId="478"/>
-          <ac:spMkLst>
-            <pc:docMk/>
-            <pc:sldMk cId="1567814596" sldId="256"/>
-            <ac:spMk id="16" creationId="{FC279485-E6B2-75B4-5A6D-7B330DA8EC68}"/>
-          </ac:spMkLst>
-        </pc:spChg>
-        <pc:spChg chg="add del mod">
-          <ac:chgData name="Pablo Inzunza" userId="be16ff5b34c21876" providerId="LiveId" clId="{CC6937A5-FA4E-485C-A7D4-0E92CAEDBC02}" dt="2026-03-21T16:38:20.728" v="1417" actId="478"/>
-          <ac:spMkLst>
-            <pc:docMk/>
-            <pc:sldMk cId="1567814596" sldId="256"/>
-            <ac:spMk id="17" creationId="{A5098A2E-E0DD-C51B-3171-F7D4BDB66FBA}"/>
-          </ac:spMkLst>
-        </pc:spChg>
-        <pc:spChg chg="add mod">
-          <ac:chgData name="Pablo Inzunza" userId="be16ff5b34c21876" providerId="LiveId" clId="{CC6937A5-FA4E-485C-A7D4-0E92CAEDBC02}" dt="2026-03-21T15:49:00.616" v="1203"/>
-          <ac:spMkLst>
-            <pc:docMk/>
-            <pc:sldMk cId="1567814596" sldId="256"/>
-            <ac:spMk id="18" creationId="{20BA1ECC-2922-A935-2D00-AF0F3548C179}"/>
           </ac:spMkLst>
         </pc:spChg>
         <pc:spChg chg="add mod">
@@ -287,76 +255,12 @@
             <ac:spMk id="18" creationId="{2375222D-2F78-AD62-BF92-27130F75C1C1}"/>
           </ac:spMkLst>
         </pc:spChg>
-        <pc:spChg chg="add del mod">
-          <ac:chgData name="Pablo Inzunza" userId="be16ff5b34c21876" providerId="LiveId" clId="{CC6937A5-FA4E-485C-A7D4-0E92CAEDBC02}" dt="2026-03-21T16:38:20.728" v="1417" actId="478"/>
-          <ac:spMkLst>
-            <pc:docMk/>
-            <pc:sldMk cId="1567814596" sldId="256"/>
-            <ac:spMk id="19" creationId="{781DABF3-EE42-FCAC-3BC4-B31846C56CDE}"/>
-          </ac:spMkLst>
-        </pc:spChg>
-        <pc:spChg chg="add del mod">
-          <ac:chgData name="Pablo Inzunza" userId="be16ff5b34c21876" providerId="LiveId" clId="{CC6937A5-FA4E-485C-A7D4-0E92CAEDBC02}" dt="2026-03-21T16:38:20.728" v="1417" actId="478"/>
-          <ac:spMkLst>
-            <pc:docMk/>
-            <pc:sldMk cId="1567814596" sldId="256"/>
-            <ac:spMk id="20" creationId="{A81CAB28-1D72-B48B-6595-23A6B2E712AE}"/>
-          </ac:spMkLst>
-        </pc:spChg>
-        <pc:spChg chg="add del mod">
-          <ac:chgData name="Pablo Inzunza" userId="be16ff5b34c21876" providerId="LiveId" clId="{CC6937A5-FA4E-485C-A7D4-0E92CAEDBC02}" dt="2026-03-21T16:38:20.728" v="1417" actId="478"/>
-          <ac:spMkLst>
-            <pc:docMk/>
-            <pc:sldMk cId="1567814596" sldId="256"/>
-            <ac:spMk id="21" creationId="{B296EC70-EE89-AB8A-BBA4-BB1470366BA6}"/>
-          </ac:spMkLst>
-        </pc:spChg>
-        <pc:spChg chg="add del mod">
-          <ac:chgData name="Pablo Inzunza" userId="be16ff5b34c21876" providerId="LiveId" clId="{CC6937A5-FA4E-485C-A7D4-0E92CAEDBC02}" dt="2026-03-21T16:38:20.728" v="1417" actId="478"/>
-          <ac:spMkLst>
-            <pc:docMk/>
-            <pc:sldMk cId="1567814596" sldId="256"/>
-            <ac:spMk id="22" creationId="{4A9A5098-92E2-35DC-B79F-D8C12E491AD2}"/>
-          </ac:spMkLst>
-        </pc:spChg>
         <pc:spChg chg="mod">
           <ac:chgData name="Pablo Inzunza" userId="be16ff5b34c21876" providerId="LiveId" clId="{CC6937A5-FA4E-485C-A7D4-0E92CAEDBC02}" dt="2026-03-21T14:46:45.849" v="838" actId="207"/>
           <ac:spMkLst>
             <pc:docMk/>
             <pc:sldMk cId="1567814596" sldId="256"/>
             <ac:spMk id="23" creationId="{470618BE-80E3-6578-FCC8-D12F7C467F04}"/>
-          </ac:spMkLst>
-        </pc:spChg>
-        <pc:spChg chg="add del mod">
-          <ac:chgData name="Pablo Inzunza" userId="be16ff5b34c21876" providerId="LiveId" clId="{CC6937A5-FA4E-485C-A7D4-0E92CAEDBC02}" dt="2026-03-21T16:38:20.728" v="1417" actId="478"/>
-          <ac:spMkLst>
-            <pc:docMk/>
-            <pc:sldMk cId="1567814596" sldId="256"/>
-            <ac:spMk id="24" creationId="{A100D73A-7C35-29B0-790A-39A09D8CE5DE}"/>
-          </ac:spMkLst>
-        </pc:spChg>
-        <pc:spChg chg="mod">
-          <ac:chgData name="Pablo Inzunza" userId="be16ff5b34c21876" providerId="LiveId" clId="{CC6937A5-FA4E-485C-A7D4-0E92CAEDBC02}" dt="2026-03-21T13:55:53.310" v="356" actId="34136"/>
-          <ac:spMkLst>
-            <pc:docMk/>
-            <pc:sldMk cId="1567814596" sldId="256"/>
-            <ac:spMk id="25" creationId="{4EA10392-2533-5083-3D42-B270BFF2008E}"/>
-          </ac:spMkLst>
-        </pc:spChg>
-        <pc:spChg chg="add del mod">
-          <ac:chgData name="Pablo Inzunza" userId="be16ff5b34c21876" providerId="LiveId" clId="{CC6937A5-FA4E-485C-A7D4-0E92CAEDBC02}" dt="2026-03-21T16:38:20.728" v="1417" actId="478"/>
-          <ac:spMkLst>
-            <pc:docMk/>
-            <pc:sldMk cId="1567814596" sldId="256"/>
-            <ac:spMk id="25" creationId="{8B615CDB-9907-5FDA-643E-F9723531D462}"/>
-          </ac:spMkLst>
-        </pc:spChg>
-        <pc:spChg chg="add del mod">
-          <ac:chgData name="Pablo Inzunza" userId="be16ff5b34c21876" providerId="LiveId" clId="{CC6937A5-FA4E-485C-A7D4-0E92CAEDBC02}" dt="2026-03-21T16:38:20.728" v="1417" actId="478"/>
-          <ac:spMkLst>
-            <pc:docMk/>
-            <pc:sldMk cId="1567814596" sldId="256"/>
-            <ac:spMk id="27" creationId="{70B7A1B5-EDE9-FD1C-682C-DDDDE0DC3A61}"/>
           </ac:spMkLst>
         </pc:spChg>
         <pc:spChg chg="add mod">
@@ -383,36 +287,12 @@
             <ac:spMk id="30" creationId="{532544CC-1C67-18AE-B59E-F19E5A86667F}"/>
           </ac:spMkLst>
         </pc:spChg>
-        <pc:spChg chg="mod">
-          <ac:chgData name="Pablo Inzunza" userId="be16ff5b34c21876" providerId="LiveId" clId="{CC6937A5-FA4E-485C-A7D4-0E92CAEDBC02}" dt="2026-03-21T13:55:53.310" v="356" actId="34136"/>
-          <ac:spMkLst>
-            <pc:docMk/>
-            <pc:sldMk cId="1567814596" sldId="256"/>
-            <ac:spMk id="30" creationId="{A38A1DF2-4121-CCA3-05E7-F4DE4ED06DAC}"/>
-          </ac:spMkLst>
-        </pc:spChg>
         <pc:spChg chg="add mod">
           <ac:chgData name="Pablo Inzunza" userId="be16ff5b34c21876" providerId="LiveId" clId="{CC6937A5-FA4E-485C-A7D4-0E92CAEDBC02}" dt="2026-03-21T16:38:33.637" v="1418"/>
           <ac:spMkLst>
             <pc:docMk/>
             <pc:sldMk cId="1567814596" sldId="256"/>
             <ac:spMk id="31" creationId="{2CAE3186-5C44-57B4-43B9-63A2689E8B9D}"/>
-          </ac:spMkLst>
-        </pc:spChg>
-        <pc:spChg chg="mod">
-          <ac:chgData name="Pablo Inzunza" userId="be16ff5b34c21876" providerId="LiveId" clId="{CC6937A5-FA4E-485C-A7D4-0E92CAEDBC02}" dt="2026-03-21T13:55:53.310" v="356" actId="34136"/>
-          <ac:spMkLst>
-            <pc:docMk/>
-            <pc:sldMk cId="1567814596" sldId="256"/>
-            <ac:spMk id="31" creationId="{BDDFB370-EBF1-6CD6-5123-23F2F1D3937F}"/>
-          </ac:spMkLst>
-        </pc:spChg>
-        <pc:spChg chg="mod">
-          <ac:chgData name="Pablo Inzunza" userId="be16ff5b34c21876" providerId="LiveId" clId="{CC6937A5-FA4E-485C-A7D4-0E92CAEDBC02}" dt="2026-03-21T13:55:53.310" v="356" actId="34136"/>
-          <ac:spMkLst>
-            <pc:docMk/>
-            <pc:sldMk cId="1567814596" sldId="256"/>
-            <ac:spMk id="32" creationId="{4D4417FE-7CFB-581B-329C-DC62FDB4DC8A}"/>
           </ac:spMkLst>
         </pc:spChg>
         <pc:spChg chg="add mod">
@@ -423,68 +303,12 @@
             <ac:spMk id="32" creationId="{D683ACCB-ABC1-00AB-7206-B504E2159DB3}"/>
           </ac:spMkLst>
         </pc:spChg>
-        <pc:spChg chg="add del mod">
-          <ac:chgData name="Pablo Inzunza" userId="be16ff5b34c21876" providerId="LiveId" clId="{CC6937A5-FA4E-485C-A7D4-0E92CAEDBC02}" dt="2026-03-22T01:56:58.159" v="1509" actId="478"/>
-          <ac:spMkLst>
-            <pc:docMk/>
-            <pc:sldMk cId="1567814596" sldId="256"/>
-            <ac:spMk id="33" creationId="{E3080204-BBF6-84B4-8294-33217DD052E2}"/>
-          </ac:spMkLst>
-        </pc:spChg>
-        <pc:grpChg chg="del mod">
-          <ac:chgData name="Pablo Inzunza" userId="be16ff5b34c21876" providerId="LiveId" clId="{CC6937A5-FA4E-485C-A7D4-0E92CAEDBC02}" dt="2026-03-21T13:55:55.485" v="357" actId="478"/>
-          <ac:grpSpMkLst>
-            <pc:docMk/>
-            <pc:sldMk cId="1567814596" sldId="256"/>
-            <ac:grpSpMk id="19" creationId="{81922438-34E2-11A8-043B-60AE569049FD}"/>
-          </ac:grpSpMkLst>
-        </pc:grpChg>
         <pc:picChg chg="add mod">
           <ac:chgData name="Pablo Inzunza" userId="be16ff5b34c21876" providerId="LiveId" clId="{CC6937A5-FA4E-485C-A7D4-0E92CAEDBC02}" dt="2026-03-21T13:55:56.770" v="358"/>
           <ac:picMkLst>
             <pc:docMk/>
             <pc:sldMk cId="1567814596" sldId="256"/>
             <ac:picMk id="6" creationId="{1FAE8E5D-1E43-A4B1-9A2A-6D098BE746BC}"/>
-          </ac:picMkLst>
-        </pc:picChg>
-        <pc:picChg chg="add del mod">
-          <ac:chgData name="Pablo Inzunza" userId="be16ff5b34c21876" providerId="LiveId" clId="{CC6937A5-FA4E-485C-A7D4-0E92CAEDBC02}" dt="2026-03-21T16:31:16.293" v="1388" actId="478"/>
-          <ac:picMkLst>
-            <pc:docMk/>
-            <pc:sldMk cId="1567814596" sldId="256"/>
-            <ac:picMk id="11" creationId="{8D34B8F5-0BA1-802C-5F84-F39075FD973C}"/>
-          </ac:picMkLst>
-        </pc:picChg>
-        <pc:picChg chg="add del mod">
-          <ac:chgData name="Pablo Inzunza" userId="be16ff5b34c21876" providerId="LiveId" clId="{CC6937A5-FA4E-485C-A7D4-0E92CAEDBC02}" dt="2026-03-21T16:31:16.878" v="1389" actId="478"/>
-          <ac:picMkLst>
-            <pc:docMk/>
-            <pc:sldMk cId="1567814596" sldId="256"/>
-            <ac:picMk id="12" creationId="{8C1EC1A2-8BEE-4DBB-4178-848AA8E8B0DC}"/>
-          </ac:picMkLst>
-        </pc:picChg>
-        <pc:picChg chg="add del mod">
-          <ac:chgData name="Pablo Inzunza" userId="be16ff5b34c21876" providerId="LiveId" clId="{CC6937A5-FA4E-485C-A7D4-0E92CAEDBC02}" dt="2026-03-21T16:31:17.582" v="1390" actId="478"/>
-          <ac:picMkLst>
-            <pc:docMk/>
-            <pc:sldMk cId="1567814596" sldId="256"/>
-            <ac:picMk id="13" creationId="{47C1491B-3E0E-25F6-4AD2-DE2A140E7620}"/>
-          </ac:picMkLst>
-        </pc:picChg>
-        <pc:picChg chg="mod">
-          <ac:chgData name="Pablo Inzunza" userId="be16ff5b34c21876" providerId="LiveId" clId="{CC6937A5-FA4E-485C-A7D4-0E92CAEDBC02}" dt="2026-03-21T13:55:53.310" v="356" actId="34136"/>
-          <ac:picMkLst>
-            <pc:docMk/>
-            <pc:sldMk cId="1567814596" sldId="256"/>
-            <ac:picMk id="21" creationId="{C66DD272-C03B-441D-A760-5B89541BBE36}"/>
-          </ac:picMkLst>
-        </pc:picChg>
-        <pc:picChg chg="mod">
-          <ac:chgData name="Pablo Inzunza" userId="be16ff5b34c21876" providerId="LiveId" clId="{CC6937A5-FA4E-485C-A7D4-0E92CAEDBC02}" dt="2026-03-21T13:55:53.310" v="356" actId="34136"/>
-          <ac:picMkLst>
-            <pc:docMk/>
-            <pc:sldMk cId="1567814596" sldId="256"/>
-            <ac:picMk id="27" creationId="{5A6D1A26-5E2D-9017-4712-063F40C474D4}"/>
           </ac:picMkLst>
         </pc:picChg>
         <pc:cxnChg chg="mod">
@@ -582,22 +406,6 @@
             <ac:spMk id="12" creationId="{8B5B6252-38CB-E86F-7778-CCCB047C9F0E}"/>
           </ac:spMkLst>
         </pc:spChg>
-        <pc:spChg chg="add del mod">
-          <ac:chgData name="Pablo Inzunza" userId="be16ff5b34c21876" providerId="LiveId" clId="{CC6937A5-FA4E-485C-A7D4-0E92CAEDBC02}" dt="2026-03-22T01:56:24.078" v="1505" actId="478"/>
-          <ac:spMkLst>
-            <pc:docMk/>
-            <pc:sldMk cId="1318690124" sldId="257"/>
-            <ac:spMk id="13" creationId="{7A9E681C-D0F8-E8B4-43B3-4985CE13B5F2}"/>
-          </ac:spMkLst>
-        </pc:spChg>
-        <pc:spChg chg="add del mod">
-          <ac:chgData name="Pablo Inzunza" userId="be16ff5b34c21876" providerId="LiveId" clId="{CC6937A5-FA4E-485C-A7D4-0E92CAEDBC02}" dt="2026-03-21T16:36:16.653" v="1405" actId="478"/>
-          <ac:spMkLst>
-            <pc:docMk/>
-            <pc:sldMk cId="1318690124" sldId="257"/>
-            <ac:spMk id="14" creationId="{38D99553-A305-9C67-A5B6-39AA8AEF663F}"/>
-          </ac:spMkLst>
-        </pc:spChg>
         <pc:spChg chg="add mod">
           <ac:chgData name="Pablo Inzunza" userId="be16ff5b34c21876" providerId="LiveId" clId="{CC6937A5-FA4E-485C-A7D4-0E92CAEDBC02}" dt="2026-03-22T01:44:34.786" v="1504" actId="962"/>
           <ac:spMkLst>
@@ -612,14 +420,6 @@
             <pc:docMk/>
             <pc:sldMk cId="1318690124" sldId="257"/>
             <ac:spMk id="15" creationId="{32AD3C9E-DDDF-4D9D-B63D-2A470824C62E}"/>
-          </ac:spMkLst>
-        </pc:spChg>
-        <pc:spChg chg="add del mod">
-          <ac:chgData name="Pablo Inzunza" userId="be16ff5b34c21876" providerId="LiveId" clId="{CC6937A5-FA4E-485C-A7D4-0E92CAEDBC02}" dt="2026-03-21T16:36:11.069" v="1402" actId="478"/>
-          <ac:spMkLst>
-            <pc:docMk/>
-            <pc:sldMk cId="1318690124" sldId="257"/>
-            <ac:spMk id="15" creationId="{AA70AF45-8965-7CAA-3FFD-A59B27FEBEB0}"/>
           </ac:spMkLst>
         </pc:spChg>
         <pc:spChg chg="mod">
@@ -654,36 +454,12 @@
             <ac:spMk id="19" creationId="{6959F0E8-D105-D742-C106-E9C86706510C}"/>
           </ac:spMkLst>
         </pc:spChg>
-        <pc:spChg chg="add del mod">
-          <ac:chgData name="Pablo Inzunza" userId="be16ff5b34c21876" providerId="LiveId" clId="{CC6937A5-FA4E-485C-A7D4-0E92CAEDBC02}" dt="2026-03-21T16:36:17.607" v="1406" actId="478"/>
-          <ac:spMkLst>
-            <pc:docMk/>
-            <pc:sldMk cId="1318690124" sldId="257"/>
-            <ac:spMk id="19" creationId="{D82E4024-2D91-B596-049E-3E01E350EEBF}"/>
-          </ac:spMkLst>
-        </pc:spChg>
         <pc:spChg chg="add mod">
           <ac:chgData name="Pablo Inzunza" userId="be16ff5b34c21876" providerId="LiveId" clId="{CC6937A5-FA4E-485C-A7D4-0E92CAEDBC02}" dt="2026-03-22T01:56:41.340" v="1508"/>
           <ac:spMkLst>
             <pc:docMk/>
             <pc:sldMk cId="1318690124" sldId="257"/>
             <ac:spMk id="20" creationId="{B1B55D47-CF28-DB6B-E628-594A6C1F6DB8}"/>
-          </ac:spMkLst>
-        </pc:spChg>
-        <pc:spChg chg="add del mod">
-          <ac:chgData name="Pablo Inzunza" userId="be16ff5b34c21876" providerId="LiveId" clId="{CC6937A5-FA4E-485C-A7D4-0E92CAEDBC02}" dt="2026-03-21T16:36:24.316" v="1411" actId="478"/>
-          <ac:spMkLst>
-            <pc:docMk/>
-            <pc:sldMk cId="1318690124" sldId="257"/>
-            <ac:spMk id="20" creationId="{D3D23205-E1C0-A772-4E9E-71D85BB59216}"/>
-          </ac:spMkLst>
-        </pc:spChg>
-        <pc:spChg chg="add del mod">
-          <ac:chgData name="Pablo Inzunza" userId="be16ff5b34c21876" providerId="LiveId" clId="{CC6937A5-FA4E-485C-A7D4-0E92CAEDBC02}" dt="2026-03-21T16:36:22.781" v="1410" actId="478"/>
-          <ac:spMkLst>
-            <pc:docMk/>
-            <pc:sldMk cId="1318690124" sldId="257"/>
-            <ac:spMk id="21" creationId="{CE678B47-E779-0794-2C39-4C5C5DA205DC}"/>
           </ac:spMkLst>
         </pc:spChg>
         <pc:spChg chg="mod">
@@ -694,28 +470,12 @@
             <ac:spMk id="22" creationId="{C3DE91E4-B638-A3E9-761B-B57DC14FC8AD}"/>
           </ac:spMkLst>
         </pc:spChg>
-        <pc:spChg chg="add del mod">
-          <ac:chgData name="Pablo Inzunza" userId="be16ff5b34c21876" providerId="LiveId" clId="{CC6937A5-FA4E-485C-A7D4-0E92CAEDBC02}" dt="2026-03-21T16:36:26.116" v="1412" actId="478"/>
-          <ac:spMkLst>
-            <pc:docMk/>
-            <pc:sldMk cId="1318690124" sldId="257"/>
-            <ac:spMk id="23" creationId="{B4DF88B3-4C8F-7B26-A3EF-6238A3000DE5}"/>
-          </ac:spMkLst>
-        </pc:spChg>
         <pc:spChg chg="mod">
           <ac:chgData name="Pablo Inzunza" userId="be16ff5b34c21876" providerId="LiveId" clId="{CC6937A5-FA4E-485C-A7D4-0E92CAEDBC02}" dt="2026-03-21T14:41:34.155" v="834" actId="207"/>
           <ac:spMkLst>
             <pc:docMk/>
             <pc:sldMk cId="1318690124" sldId="257"/>
             <ac:spMk id="24" creationId="{1DDD93A7-DCBA-B230-6C8C-0C1A8BD925B2}"/>
-          </ac:spMkLst>
-        </pc:spChg>
-        <pc:spChg chg="add del mod">
-          <ac:chgData name="Pablo Inzunza" userId="be16ff5b34c21876" providerId="LiveId" clId="{CC6937A5-FA4E-485C-A7D4-0E92CAEDBC02}" dt="2026-03-21T16:36:30.058" v="1414" actId="478"/>
-          <ac:spMkLst>
-            <pc:docMk/>
-            <pc:sldMk cId="1318690124" sldId="257"/>
-            <ac:spMk id="25" creationId="{6D9609C8-082F-B66E-CFEB-09324E0521E9}"/>
           </ac:spMkLst>
         </pc:spChg>
         <pc:spChg chg="mod">
@@ -726,44 +486,12 @@
             <ac:spMk id="26" creationId="{635183C3-63D2-1F5C-1885-FB3EB55E9821}"/>
           </ac:spMkLst>
         </pc:spChg>
-        <pc:spChg chg="add del mod">
-          <ac:chgData name="Pablo Inzunza" userId="be16ff5b34c21876" providerId="LiveId" clId="{CC6937A5-FA4E-485C-A7D4-0E92CAEDBC02}" dt="2026-03-21T16:36:31.549" v="1415" actId="478"/>
-          <ac:spMkLst>
-            <pc:docMk/>
-            <pc:sldMk cId="1318690124" sldId="257"/>
-            <ac:spMk id="28" creationId="{9CCA45EC-A42E-4F24-5130-A517797F3710}"/>
-          </ac:spMkLst>
-        </pc:spChg>
-        <pc:spChg chg="add del mod">
-          <ac:chgData name="Pablo Inzunza" userId="be16ff5b34c21876" providerId="LiveId" clId="{CC6937A5-FA4E-485C-A7D4-0E92CAEDBC02}" dt="2026-03-22T01:56:26.518" v="1506" actId="478"/>
-          <ac:spMkLst>
-            <pc:docMk/>
-            <pc:sldMk cId="1318690124" sldId="257"/>
-            <ac:spMk id="29" creationId="{43B29D3E-5659-4384-1BB7-0B4D00B64EC9}"/>
-          </ac:spMkLst>
-        </pc:spChg>
         <pc:spChg chg="add mod">
           <ac:chgData name="Pablo Inzunza" userId="be16ff5b34c21876" providerId="LiveId" clId="{CC6937A5-FA4E-485C-A7D4-0E92CAEDBC02}" dt="2026-03-21T16:36:50.106" v="1416"/>
           <ac:spMkLst>
             <pc:docMk/>
             <pc:sldMk cId="1318690124" sldId="257"/>
             <ac:spMk id="30" creationId="{20CA8919-6D7E-E05E-F338-1DFDCF723379}"/>
-          </ac:spMkLst>
-        </pc:spChg>
-        <pc:spChg chg="add del mod">
-          <ac:chgData name="Pablo Inzunza" userId="be16ff5b34c21876" providerId="LiveId" clId="{CC6937A5-FA4E-485C-A7D4-0E92CAEDBC02}" dt="2026-03-21T16:36:27.733" v="1413" actId="478"/>
-          <ac:spMkLst>
-            <pc:docMk/>
-            <pc:sldMk cId="1318690124" sldId="257"/>
-            <ac:spMk id="31" creationId="{85D1EDEC-ACA5-B3D4-28C4-3EE04B79291C}"/>
-          </ac:spMkLst>
-        </pc:spChg>
-        <pc:spChg chg="mod">
-          <ac:chgData name="Pablo Inzunza" userId="be16ff5b34c21876" providerId="LiveId" clId="{CC6937A5-FA4E-485C-A7D4-0E92CAEDBC02}" dt="2026-03-21T13:55:37.804" v="351" actId="34136"/>
-          <ac:spMkLst>
-            <pc:docMk/>
-            <pc:sldMk cId="1318690124" sldId="257"/>
-            <ac:spMk id="31" creationId="{B3EDA84E-48AF-BB5F-C13E-A83AB448BAA8}"/>
           </ac:spMkLst>
         </pc:spChg>
         <pc:spChg chg="add mod">
@@ -782,108 +510,12 @@
             <ac:spMk id="33" creationId="{6D3157EE-83C7-6C4A-D1A1-F3C3E2D99E0D}"/>
           </ac:spMkLst>
         </pc:spChg>
-        <pc:spChg chg="mod">
-          <ac:chgData name="Pablo Inzunza" userId="be16ff5b34c21876" providerId="LiveId" clId="{CC6937A5-FA4E-485C-A7D4-0E92CAEDBC02}" dt="2026-03-21T13:55:37.804" v="351" actId="34136"/>
-          <ac:spMkLst>
-            <pc:docMk/>
-            <pc:sldMk cId="1318690124" sldId="257"/>
-            <ac:spMk id="34" creationId="{B367FA57-8CF5-1C10-2208-7BCEA99B0481}"/>
-          </ac:spMkLst>
-        </pc:spChg>
-        <pc:spChg chg="add del mod">
-          <ac:chgData name="Pablo Inzunza" userId="be16ff5b34c21876" providerId="LiveId" clId="{CC6937A5-FA4E-485C-A7D4-0E92CAEDBC02}" dt="2026-03-22T01:56:28.646" v="1507" actId="478"/>
-          <ac:spMkLst>
-            <pc:docMk/>
-            <pc:sldMk cId="1318690124" sldId="257"/>
-            <ac:spMk id="34" creationId="{F9C5307C-DC4A-5263-57EA-E008049C85DA}"/>
-          </ac:spMkLst>
-        </pc:spChg>
-        <pc:spChg chg="mod">
-          <ac:chgData name="Pablo Inzunza" userId="be16ff5b34c21876" providerId="LiveId" clId="{CC6937A5-FA4E-485C-A7D4-0E92CAEDBC02}" dt="2026-03-21T13:55:41.125" v="352" actId="6549"/>
-          <ac:spMkLst>
-            <pc:docMk/>
-            <pc:sldMk cId="1318690124" sldId="257"/>
-            <ac:spMk id="35" creationId="{72F6A78F-813D-56B6-1ECD-BBA5581EEAAE}"/>
-          </ac:spMkLst>
-        </pc:spChg>
-        <pc:spChg chg="mod">
-          <ac:chgData name="Pablo Inzunza" userId="be16ff5b34c21876" providerId="LiveId" clId="{CC6937A5-FA4E-485C-A7D4-0E92CAEDBC02}" dt="2026-03-21T13:55:37.804" v="351" actId="34136"/>
-          <ac:spMkLst>
-            <pc:docMk/>
-            <pc:sldMk cId="1318690124" sldId="257"/>
-            <ac:spMk id="36" creationId="{89381C84-F153-3CF7-46C9-E4B16A0B4DAB}"/>
-          </ac:spMkLst>
-        </pc:spChg>
-        <pc:grpChg chg="del mod">
-          <ac:chgData name="Pablo Inzunza" userId="be16ff5b34c21876" providerId="LiveId" clId="{CC6937A5-FA4E-485C-A7D4-0E92CAEDBC02}" dt="2026-03-21T13:55:45.428" v="354" actId="478"/>
-          <ac:grpSpMkLst>
-            <pc:docMk/>
-            <pc:sldMk cId="1318690124" sldId="257"/>
-            <ac:grpSpMk id="28" creationId="{0D21D9B5-8A82-AA14-5E21-0805250645F7}"/>
-          </ac:grpSpMkLst>
-        </pc:grpChg>
         <pc:picChg chg="add mod">
           <ac:chgData name="Pablo Inzunza" userId="be16ff5b34c21876" providerId="LiveId" clId="{CC6937A5-FA4E-485C-A7D4-0E92CAEDBC02}" dt="2026-03-21T13:55:47.147" v="355"/>
           <ac:picMkLst>
             <pc:docMk/>
             <pc:sldMk cId="1318690124" sldId="257"/>
             <ac:picMk id="6" creationId="{E408347F-49F3-A2DF-DB85-792C5FC4E46D}"/>
-          </ac:picMkLst>
-        </pc:picChg>
-        <pc:picChg chg="add del mod">
-          <ac:chgData name="Pablo Inzunza" userId="be16ff5b34c21876" providerId="LiveId" clId="{CC6937A5-FA4E-485C-A7D4-0E92CAEDBC02}" dt="2026-03-21T16:31:13.654" v="1385" actId="478"/>
-          <ac:picMkLst>
-            <pc:docMk/>
-            <pc:sldMk cId="1318690124" sldId="257"/>
-            <ac:picMk id="11" creationId="{0179022E-0D0F-8C5B-7DF1-44C50E375BBA}"/>
-          </ac:picMkLst>
-        </pc:picChg>
-        <pc:picChg chg="add del mod">
-          <ac:chgData name="Pablo Inzunza" userId="be16ff5b34c21876" providerId="LiveId" clId="{CC6937A5-FA4E-485C-A7D4-0E92CAEDBC02}" dt="2026-03-21T16:31:14.213" v="1386" actId="478"/>
-          <ac:picMkLst>
-            <pc:docMk/>
-            <pc:sldMk cId="1318690124" sldId="257"/>
-            <ac:picMk id="12" creationId="{743BE4D1-BF71-6B65-6C8F-CDFA4A75A119}"/>
-          </ac:picMkLst>
-        </pc:picChg>
-        <pc:picChg chg="add del mod">
-          <ac:chgData name="Pablo Inzunza" userId="be16ff5b34c21876" providerId="LiveId" clId="{CC6937A5-FA4E-485C-A7D4-0E92CAEDBC02}" dt="2026-03-21T16:31:14.830" v="1387" actId="478"/>
-          <ac:picMkLst>
-            <pc:docMk/>
-            <pc:sldMk cId="1318690124" sldId="257"/>
-            <ac:picMk id="13" creationId="{2B7F81B7-A14C-DE33-12E5-BE5889C22DC4}"/>
-          </ac:picMkLst>
-        </pc:picChg>
-        <pc:picChg chg="mod">
-          <ac:chgData name="Pablo Inzunza" userId="be16ff5b34c21876" providerId="LiveId" clId="{CC6937A5-FA4E-485C-A7D4-0E92CAEDBC02}" dt="2026-03-21T13:55:37.804" v="351" actId="34136"/>
-          <ac:picMkLst>
-            <pc:docMk/>
-            <pc:sldMk cId="1318690124" sldId="257"/>
-            <ac:picMk id="29" creationId="{7AB97237-D587-2A7A-D147-042B3877270D}"/>
-          </ac:picMkLst>
-        </pc:picChg>
-        <pc:picChg chg="add mod">
-          <ac:chgData name="Pablo Inzunza" userId="be16ff5b34c21876" providerId="LiveId" clId="{CC6937A5-FA4E-485C-A7D4-0E92CAEDBC02}" dt="2026-03-21T15:44:45.347" v="1063"/>
-          <ac:picMkLst>
-            <pc:docMk/>
-            <pc:sldMk cId="1318690124" sldId="257"/>
-            <ac:picMk id="29" creationId="{B876E20D-0B8F-E49A-3F6C-A5817A606CBD}"/>
-          </ac:picMkLst>
-        </pc:picChg>
-        <pc:picChg chg="add mod">
-          <ac:chgData name="Pablo Inzunza" userId="be16ff5b34c21876" providerId="LiveId" clId="{CC6937A5-FA4E-485C-A7D4-0E92CAEDBC02}" dt="2026-03-21T15:44:48.347" v="1064"/>
-          <ac:picMkLst>
-            <pc:docMk/>
-            <pc:sldMk cId="1318690124" sldId="257"/>
-            <ac:picMk id="30" creationId="{1F363C94-84CD-58CF-45AB-EF504045AE74}"/>
-          </ac:picMkLst>
-        </pc:picChg>
-        <pc:picChg chg="del mod">
-          <ac:chgData name="Pablo Inzunza" userId="be16ff5b34c21876" providerId="LiveId" clId="{CC6937A5-FA4E-485C-A7D4-0E92CAEDBC02}" dt="2026-03-21T13:55:44.804" v="353" actId="478"/>
-          <ac:picMkLst>
-            <pc:docMk/>
-            <pc:sldMk cId="1318690124" sldId="257"/>
-            <ac:picMk id="33" creationId="{1BDD774F-6A13-76E7-BCD0-34D1968DF825}"/>
           </ac:picMkLst>
         </pc:picChg>
         <pc:cxnChg chg="mod">
@@ -933,14 +565,6 @@
             <ac:spMk id="6" creationId="{000A578B-A20E-7908-578D-E18B24957BF2}"/>
           </ac:spMkLst>
         </pc:spChg>
-        <pc:spChg chg="add del mod">
-          <ac:chgData name="Pablo Inzunza" userId="be16ff5b34c21876" providerId="LiveId" clId="{CC6937A5-FA4E-485C-A7D4-0E92CAEDBC02}" dt="2026-03-21T14:02:30.862" v="495" actId="478"/>
-          <ac:spMkLst>
-            <pc:docMk/>
-            <pc:sldMk cId="315006707" sldId="259"/>
-            <ac:spMk id="6" creationId="{84F53689-A4EC-76C3-4E1D-B4696037308C}"/>
-          </ac:spMkLst>
-        </pc:spChg>
         <pc:spChg chg="add mod ord">
           <ac:chgData name="Pablo Inzunza" userId="be16ff5b34c21876" providerId="LiveId" clId="{CC6937A5-FA4E-485C-A7D4-0E92CAEDBC02}" dt="2026-03-21T14:49:40.286" v="848" actId="14100"/>
           <ac:spMkLst>
@@ -973,36 +597,12 @@
             <ac:spMk id="10" creationId="{70D2677A-770C-318F-6217-1E531D1F3702}"/>
           </ac:spMkLst>
         </pc:spChg>
-        <pc:spChg chg="del mod">
-          <ac:chgData name="Pablo Inzunza" userId="be16ff5b34c21876" providerId="LiveId" clId="{CC6937A5-FA4E-485C-A7D4-0E92CAEDBC02}" dt="2026-03-21T14:01:52.102" v="484" actId="478"/>
-          <ac:spMkLst>
-            <pc:docMk/>
-            <pc:sldMk cId="315006707" sldId="259"/>
-            <ac:spMk id="10" creationId="{B94141C6-AF0A-5EEE-E06A-C7ADAD832418}"/>
-          </ac:spMkLst>
-        </pc:spChg>
-        <pc:spChg chg="del mod">
-          <ac:chgData name="Pablo Inzunza" userId="be16ff5b34c21876" providerId="LiveId" clId="{CC6937A5-FA4E-485C-A7D4-0E92CAEDBC02}" dt="2026-03-21T14:01:51.461" v="483" actId="478"/>
-          <ac:spMkLst>
-            <pc:docMk/>
-            <pc:sldMk cId="315006707" sldId="259"/>
-            <ac:spMk id="11" creationId="{3DB16137-132D-DC43-4F47-12244820A1BC}"/>
-          </ac:spMkLst>
-        </pc:spChg>
         <pc:spChg chg="add mod">
           <ac:chgData name="Pablo Inzunza" userId="be16ff5b34c21876" providerId="LiveId" clId="{CC6937A5-FA4E-485C-A7D4-0E92CAEDBC02}" dt="2026-03-22T01:26:28.694" v="1457"/>
           <ac:spMkLst>
             <pc:docMk/>
             <pc:sldMk cId="315006707" sldId="259"/>
             <ac:spMk id="11" creationId="{A2DC9657-1264-A813-03DC-3FDF24159EB4}"/>
-          </ac:spMkLst>
-        </pc:spChg>
-        <pc:spChg chg="add del mod">
-          <ac:chgData name="Pablo Inzunza" userId="be16ff5b34c21876" providerId="LiveId" clId="{CC6937A5-FA4E-485C-A7D4-0E92CAEDBC02}" dt="2026-03-21T16:35:21.051" v="1397" actId="478"/>
-          <ac:spMkLst>
-            <pc:docMk/>
-            <pc:sldMk cId="315006707" sldId="259"/>
-            <ac:spMk id="11" creationId="{D2DB5A9E-F939-2361-8CFE-BD3A92346D66}"/>
           </ac:spMkLst>
         </pc:spChg>
         <pc:spChg chg="mod">
@@ -1019,30 +619,6 @@
             <pc:docMk/>
             <pc:sldMk cId="315006707" sldId="259"/>
             <ac:spMk id="13" creationId="{2BED03D5-C8B5-D234-BF38-36DAB19265BF}"/>
-          </ac:spMkLst>
-        </pc:spChg>
-        <pc:spChg chg="add del mod">
-          <ac:chgData name="Pablo Inzunza" userId="be16ff5b34c21876" providerId="LiveId" clId="{CC6937A5-FA4E-485C-A7D4-0E92CAEDBC02}" dt="2026-03-21T16:35:23.380" v="1399" actId="478"/>
-          <ac:spMkLst>
-            <pc:docMk/>
-            <pc:sldMk cId="315006707" sldId="259"/>
-            <ac:spMk id="14" creationId="{705DE155-DA8B-EDDC-696D-5D89C4FCD2B4}"/>
-          </ac:spMkLst>
-        </pc:spChg>
-        <pc:spChg chg="add del mod">
-          <ac:chgData name="Pablo Inzunza" userId="be16ff5b34c21876" providerId="LiveId" clId="{CC6937A5-FA4E-485C-A7D4-0E92CAEDBC02}" dt="2026-03-21T14:02:30.862" v="495" actId="478"/>
-          <ac:spMkLst>
-            <pc:docMk/>
-            <pc:sldMk cId="315006707" sldId="259"/>
-            <ac:spMk id="14" creationId="{EF23481B-AFFE-1DF7-1DD4-7A4C02C62173}"/>
-          </ac:spMkLst>
-        </pc:spChg>
-        <pc:spChg chg="del mod">
-          <ac:chgData name="Pablo Inzunza" userId="be16ff5b34c21876" providerId="LiveId" clId="{CC6937A5-FA4E-485C-A7D4-0E92CAEDBC02}" dt="2026-03-21T13:47:43.594" v="297" actId="478"/>
-          <ac:spMkLst>
-            <pc:docMk/>
-            <pc:sldMk cId="315006707" sldId="259"/>
-            <ac:spMk id="14" creationId="{FF7C722F-9063-9D48-1EC4-C1E295146C78}"/>
           </ac:spMkLst>
         </pc:spChg>
         <pc:spChg chg="mod">
@@ -1069,14 +645,6 @@
             <ac:spMk id="17" creationId="{05F5D0CB-D0AA-EE82-E3D5-42C67015D445}"/>
           </ac:spMkLst>
         </pc:spChg>
-        <pc:spChg chg="del mod">
-          <ac:chgData name="Pablo Inzunza" userId="be16ff5b34c21876" providerId="LiveId" clId="{CC6937A5-FA4E-485C-A7D4-0E92CAEDBC02}" dt="2026-03-21T13:47:43.066" v="296" actId="478"/>
-          <ac:spMkLst>
-            <pc:docMk/>
-            <pc:sldMk cId="315006707" sldId="259"/>
-            <ac:spMk id="17" creationId="{D6E6AF4A-1DB9-6D06-B5C9-2FDA3F2E6904}"/>
-          </ac:spMkLst>
-        </pc:spChg>
         <pc:spChg chg="add mod ord">
           <ac:chgData name="Pablo Inzunza" userId="be16ff5b34c21876" providerId="LiveId" clId="{CC6937A5-FA4E-485C-A7D4-0E92CAEDBC02}" dt="2026-03-21T15:59:21.184" v="1372" actId="962"/>
           <ac:spMkLst>
@@ -1099,22 +667,6 @@
             <pc:docMk/>
             <pc:sldMk cId="315006707" sldId="259"/>
             <ac:spMk id="20" creationId="{D074A6F0-4B53-95B0-A880-60470F1EA1FC}"/>
-          </ac:spMkLst>
-        </pc:spChg>
-        <pc:spChg chg="del">
-          <ac:chgData name="Pablo Inzunza" userId="be16ff5b34c21876" providerId="LiveId" clId="{CC6937A5-FA4E-485C-A7D4-0E92CAEDBC02}" dt="2026-03-21T13:34:29.881" v="177" actId="478"/>
-          <ac:spMkLst>
-            <pc:docMk/>
-            <pc:sldMk cId="315006707" sldId="259"/>
-            <ac:spMk id="21" creationId="{4C24B7D0-229A-B8F3-DAA3-3D947D0AC2C7}"/>
-          </ac:spMkLst>
-        </pc:spChg>
-        <pc:spChg chg="add del mod">
-          <ac:chgData name="Pablo Inzunza" userId="be16ff5b34c21876" providerId="LiveId" clId="{CC6937A5-FA4E-485C-A7D4-0E92CAEDBC02}" dt="2026-03-21T16:35:24.924" v="1400" actId="478"/>
-          <ac:spMkLst>
-            <pc:docMk/>
-            <pc:sldMk cId="315006707" sldId="259"/>
-            <ac:spMk id="21" creationId="{692F6F5D-AC26-DD5B-54A2-FBC96E770072}"/>
           </ac:spMkLst>
         </pc:spChg>
         <pc:spChg chg="mod">
@@ -1197,44 +749,12 @@
             <ac:spMk id="32" creationId="{EACB6DFB-AB94-626B-15C5-C99FA0818214}"/>
           </ac:spMkLst>
         </pc:spChg>
-        <pc:spChg chg="add del mod">
-          <ac:chgData name="Pablo Inzunza" userId="be16ff5b34c21876" providerId="LiveId" clId="{CC6937A5-FA4E-485C-A7D4-0E92CAEDBC02}" dt="2026-03-22T01:26:24.453" v="1456" actId="478"/>
-          <ac:spMkLst>
-            <pc:docMk/>
-            <pc:sldMk cId="315006707" sldId="259"/>
-            <ac:spMk id="33" creationId="{D58C5EEC-0092-BC58-C508-239CA6A9A84F}"/>
-          </ac:spMkLst>
-        </pc:spChg>
-        <pc:grpChg chg="add del">
-          <ac:chgData name="Pablo Inzunza" userId="be16ff5b34c21876" providerId="LiveId" clId="{CC6937A5-FA4E-485C-A7D4-0E92CAEDBC02}" dt="2026-03-21T13:49:48.864" v="319" actId="165"/>
-          <ac:grpSpMkLst>
-            <pc:docMk/>
-            <pc:sldMk cId="315006707" sldId="259"/>
-            <ac:grpSpMk id="18" creationId="{15293861-804D-4902-202A-4F059A7981FD}"/>
-          </ac:grpSpMkLst>
-        </pc:grpChg>
         <pc:picChg chg="mod topLvl">
           <ac:chgData name="Pablo Inzunza" userId="be16ff5b34c21876" providerId="LiveId" clId="{CC6937A5-FA4E-485C-A7D4-0E92CAEDBC02}" dt="2026-03-21T13:49:48.864" v="319" actId="165"/>
           <ac:picMkLst>
             <pc:docMk/>
             <pc:sldMk cId="315006707" sldId="259"/>
             <ac:picMk id="4" creationId="{C989712D-2BB9-0543-3F3C-C500BEA7BFB9}"/>
-          </ac:picMkLst>
-        </pc:picChg>
-        <pc:picChg chg="del mod topLvl">
-          <ac:chgData name="Pablo Inzunza" userId="be16ff5b34c21876" providerId="LiveId" clId="{CC6937A5-FA4E-485C-A7D4-0E92CAEDBC02}" dt="2026-03-21T13:49:51.020" v="320" actId="478"/>
-          <ac:picMkLst>
-            <pc:docMk/>
-            <pc:sldMk cId="315006707" sldId="259"/>
-            <ac:picMk id="6" creationId="{8C91C574-6856-B273-0044-0652910EB494}"/>
-          </ac:picMkLst>
-        </pc:picChg>
-        <pc:picChg chg="add del mod">
-          <ac:chgData name="Pablo Inzunza" userId="be16ff5b34c21876" providerId="LiveId" clId="{CC6937A5-FA4E-485C-A7D4-0E92CAEDBC02}" dt="2026-03-21T16:31:11.599" v="1384" actId="478"/>
-          <ac:picMkLst>
-            <pc:docMk/>
-            <pc:sldMk cId="315006707" sldId="259"/>
-            <ac:picMk id="10" creationId="{FF956C1C-99F6-7F14-5F32-673D4674CA73}"/>
           </ac:picMkLst>
         </pc:picChg>
         <pc:cxnChg chg="mod">
@@ -1382,7 +902,7 @@
           <a:p>
             <a:fld id="{C1175F80-2F39-40DD-909D-7A02119CCA88}" type="datetimeFigureOut">
               <a:rPr lang="es-CL" smtClean="0"/>
-              <a:t>21-03-2026</a:t>
+              <a:t>27-03-2026</a:t>
             </a:fld>
             <a:endParaRPr lang="es-CL"/>
           </a:p>
@@ -1552,7 +1072,7 @@
           <a:p>
             <a:fld id="{C1175F80-2F39-40DD-909D-7A02119CCA88}" type="datetimeFigureOut">
               <a:rPr lang="es-CL" smtClean="0"/>
-              <a:t>21-03-2026</a:t>
+              <a:t>27-03-2026</a:t>
             </a:fld>
             <a:endParaRPr lang="es-CL"/>
           </a:p>
@@ -1732,7 +1252,7 @@
           <a:p>
             <a:fld id="{C1175F80-2F39-40DD-909D-7A02119CCA88}" type="datetimeFigureOut">
               <a:rPr lang="es-CL" smtClean="0"/>
-              <a:t>21-03-2026</a:t>
+              <a:t>27-03-2026</a:t>
             </a:fld>
             <a:endParaRPr lang="es-CL"/>
           </a:p>
@@ -1902,7 +1422,7 @@
           <a:p>
             <a:fld id="{C1175F80-2F39-40DD-909D-7A02119CCA88}" type="datetimeFigureOut">
               <a:rPr lang="es-CL" smtClean="0"/>
-              <a:t>21-03-2026</a:t>
+              <a:t>27-03-2026</a:t>
             </a:fld>
             <a:endParaRPr lang="es-CL"/>
           </a:p>
@@ -2148,7 +1668,7 @@
           <a:p>
             <a:fld id="{C1175F80-2F39-40DD-909D-7A02119CCA88}" type="datetimeFigureOut">
               <a:rPr lang="es-CL" smtClean="0"/>
-              <a:t>21-03-2026</a:t>
+              <a:t>27-03-2026</a:t>
             </a:fld>
             <a:endParaRPr lang="es-CL"/>
           </a:p>
@@ -2380,7 +1900,7 @@
           <a:p>
             <a:fld id="{C1175F80-2F39-40DD-909D-7A02119CCA88}" type="datetimeFigureOut">
               <a:rPr lang="es-CL" smtClean="0"/>
-              <a:t>21-03-2026</a:t>
+              <a:t>27-03-2026</a:t>
             </a:fld>
             <a:endParaRPr lang="es-CL"/>
           </a:p>
@@ -2747,7 +2267,7 @@
           <a:p>
             <a:fld id="{C1175F80-2F39-40DD-909D-7A02119CCA88}" type="datetimeFigureOut">
               <a:rPr lang="es-CL" smtClean="0"/>
-              <a:t>21-03-2026</a:t>
+              <a:t>27-03-2026</a:t>
             </a:fld>
             <a:endParaRPr lang="es-CL"/>
           </a:p>
@@ -2865,7 +2385,7 @@
           <a:p>
             <a:fld id="{C1175F80-2F39-40DD-909D-7A02119CCA88}" type="datetimeFigureOut">
               <a:rPr lang="es-CL" smtClean="0"/>
-              <a:t>21-03-2026</a:t>
+              <a:t>27-03-2026</a:t>
             </a:fld>
             <a:endParaRPr lang="es-CL"/>
           </a:p>
@@ -2960,7 +2480,7 @@
           <a:p>
             <a:fld id="{C1175F80-2F39-40DD-909D-7A02119CCA88}" type="datetimeFigureOut">
               <a:rPr lang="es-CL" smtClean="0"/>
-              <a:t>21-03-2026</a:t>
+              <a:t>27-03-2026</a:t>
             </a:fld>
             <a:endParaRPr lang="es-CL"/>
           </a:p>
@@ -3237,7 +2757,7 @@
           <a:p>
             <a:fld id="{C1175F80-2F39-40DD-909D-7A02119CCA88}" type="datetimeFigureOut">
               <a:rPr lang="es-CL" smtClean="0"/>
-              <a:t>21-03-2026</a:t>
+              <a:t>27-03-2026</a:t>
             </a:fld>
             <a:endParaRPr lang="es-CL"/>
           </a:p>
@@ -3494,7 +3014,7 @@
           <a:p>
             <a:fld id="{C1175F80-2F39-40DD-909D-7A02119CCA88}" type="datetimeFigureOut">
               <a:rPr lang="es-CL" smtClean="0"/>
-              <a:t>21-03-2026</a:t>
+              <a:t>27-03-2026</a:t>
             </a:fld>
             <a:endParaRPr lang="es-CL"/>
           </a:p>
@@ -3707,7 +3227,7 @@
           <a:p>
             <a:fld id="{C1175F80-2F39-40DD-909D-7A02119CCA88}" type="datetimeFigureOut">
               <a:rPr lang="es-CL" smtClean="0"/>
-              <a:t>21-03-2026</a:t>
+              <a:t>27-03-2026</a:t>
             </a:fld>
             <a:endParaRPr lang="es-CL"/>
           </a:p>
@@ -9352,7 +8872,7 @@
                 <a:latin typeface="DM Mono" panose="020B0509040201040103" pitchFamily="49" charset="0"/>
                 <a:cs typeface="Times New Roman" panose="02020603050405020304" pitchFamily="18" charset="0"/>
               </a:rPr>
-              <a:t>{{kpis.fecha_referencia_1}} </a:t>
+              <a:t>{{kpis.fecha_referencia_2}} </a:t>
             </a:r>
           </a:p>
         </p:txBody>
@@ -9406,7 +8926,7 @@
                 <a:latin typeface="DM Mono" panose="020B0509040201040103" pitchFamily="49" charset="0"/>
                 <a:cs typeface="Times New Roman" panose="02020603050405020304" pitchFamily="18" charset="0"/>
               </a:rPr>
-              <a:t>{{kpis.fecha_referencia_2}} </a:t>
+              <a:t>{{kpis.fecha_referencia_1}} </a:t>
             </a:r>
             <a:endParaRPr lang="es-CL" sz="1000" b="1" kern="100" dirty="0">
               <a:solidFill>

--- a/data/raw/templates/template_reporte.pptx
+++ b/data/raw/templates/template_reporte.pptx
@@ -902,7 +902,7 @@
           <a:p>
             <a:fld id="{C1175F80-2F39-40DD-909D-7A02119CCA88}" type="datetimeFigureOut">
               <a:rPr lang="es-CL" smtClean="0"/>
-              <a:t>27-03-2026</a:t>
+              <a:t>31-03-2026</a:t>
             </a:fld>
             <a:endParaRPr lang="es-CL"/>
           </a:p>
@@ -1072,7 +1072,7 @@
           <a:p>
             <a:fld id="{C1175F80-2F39-40DD-909D-7A02119CCA88}" type="datetimeFigureOut">
               <a:rPr lang="es-CL" smtClean="0"/>
-              <a:t>27-03-2026</a:t>
+              <a:t>31-03-2026</a:t>
             </a:fld>
             <a:endParaRPr lang="es-CL"/>
           </a:p>
@@ -1252,7 +1252,7 @@
           <a:p>
             <a:fld id="{C1175F80-2F39-40DD-909D-7A02119CCA88}" type="datetimeFigureOut">
               <a:rPr lang="es-CL" smtClean="0"/>
-              <a:t>27-03-2026</a:t>
+              <a:t>31-03-2026</a:t>
             </a:fld>
             <a:endParaRPr lang="es-CL"/>
           </a:p>
@@ -1422,7 +1422,7 @@
           <a:p>
             <a:fld id="{C1175F80-2F39-40DD-909D-7A02119CCA88}" type="datetimeFigureOut">
               <a:rPr lang="es-CL" smtClean="0"/>
-              <a:t>27-03-2026</a:t>
+              <a:t>31-03-2026</a:t>
             </a:fld>
             <a:endParaRPr lang="es-CL"/>
           </a:p>
@@ -1668,7 +1668,7 @@
           <a:p>
             <a:fld id="{C1175F80-2F39-40DD-909D-7A02119CCA88}" type="datetimeFigureOut">
               <a:rPr lang="es-CL" smtClean="0"/>
-              <a:t>27-03-2026</a:t>
+              <a:t>31-03-2026</a:t>
             </a:fld>
             <a:endParaRPr lang="es-CL"/>
           </a:p>
@@ -1900,7 +1900,7 @@
           <a:p>
             <a:fld id="{C1175F80-2F39-40DD-909D-7A02119CCA88}" type="datetimeFigureOut">
               <a:rPr lang="es-CL" smtClean="0"/>
-              <a:t>27-03-2026</a:t>
+              <a:t>31-03-2026</a:t>
             </a:fld>
             <a:endParaRPr lang="es-CL"/>
           </a:p>
@@ -2267,7 +2267,7 @@
           <a:p>
             <a:fld id="{C1175F80-2F39-40DD-909D-7A02119CCA88}" type="datetimeFigureOut">
               <a:rPr lang="es-CL" smtClean="0"/>
-              <a:t>27-03-2026</a:t>
+              <a:t>31-03-2026</a:t>
             </a:fld>
             <a:endParaRPr lang="es-CL"/>
           </a:p>
@@ -2385,7 +2385,7 @@
           <a:p>
             <a:fld id="{C1175F80-2F39-40DD-909D-7A02119CCA88}" type="datetimeFigureOut">
               <a:rPr lang="es-CL" smtClean="0"/>
-              <a:t>27-03-2026</a:t>
+              <a:t>31-03-2026</a:t>
             </a:fld>
             <a:endParaRPr lang="es-CL"/>
           </a:p>
@@ -2480,7 +2480,7 @@
           <a:p>
             <a:fld id="{C1175F80-2F39-40DD-909D-7A02119CCA88}" type="datetimeFigureOut">
               <a:rPr lang="es-CL" smtClean="0"/>
-              <a:t>27-03-2026</a:t>
+              <a:t>31-03-2026</a:t>
             </a:fld>
             <a:endParaRPr lang="es-CL"/>
           </a:p>
@@ -2757,7 +2757,7 @@
           <a:p>
             <a:fld id="{C1175F80-2F39-40DD-909D-7A02119CCA88}" type="datetimeFigureOut">
               <a:rPr lang="es-CL" smtClean="0"/>
-              <a:t>27-03-2026</a:t>
+              <a:t>31-03-2026</a:t>
             </a:fld>
             <a:endParaRPr lang="es-CL"/>
           </a:p>
@@ -3014,7 +3014,7 @@
           <a:p>
             <a:fld id="{C1175F80-2F39-40DD-909D-7A02119CCA88}" type="datetimeFigureOut">
               <a:rPr lang="es-CL" smtClean="0"/>
-              <a:t>27-03-2026</a:t>
+              <a:t>31-03-2026</a:t>
             </a:fld>
             <a:endParaRPr lang="es-CL"/>
           </a:p>
@@ -3227,7 +3227,7 @@
           <a:p>
             <a:fld id="{C1175F80-2F39-40DD-909D-7A02119CCA88}" type="datetimeFigureOut">
               <a:rPr lang="es-CL" smtClean="0"/>
-              <a:t>27-03-2026</a:t>
+              <a:t>31-03-2026</a:t>
             </a:fld>
             <a:endParaRPr lang="es-CL"/>
           </a:p>
@@ -4064,7 +4064,7 @@
                 <a:solidFill>
                   <a:schemeClr val="bg1"/>
                 </a:solidFill>
-                <a:latin typeface="DM Sans" pitchFamily="2" charset="0"/>
+                <a:latin typeface="gobCL" pitchFamily="50" charset="0"/>
                 <a:ea typeface="Aptos" panose="020B0004020202020204" pitchFamily="34" charset="0"/>
                 <a:cs typeface="Times New Roman" panose="02020603050405020304" pitchFamily="18" charset="0"/>
               </a:rPr>
@@ -4074,7 +4074,7 @@
               <a:solidFill>
                 <a:schemeClr val="bg1"/>
               </a:solidFill>
-              <a:latin typeface="DM Sans" pitchFamily="2" charset="0"/>
+              <a:latin typeface="gobCL" pitchFamily="50" charset="0"/>
               <a:ea typeface="Aptos" panose="020B0004020202020204" pitchFamily="34" charset="0"/>
               <a:cs typeface="Times New Roman" panose="02020603050405020304" pitchFamily="18" charset="0"/>
             </a:endParaRPr>
@@ -4124,17 +4124,27 @@
                 <a:solidFill>
                   <a:srgbClr val="6FA3CC"/>
                 </a:solidFill>
+                <a:latin typeface="gobCL" pitchFamily="50" charset="0"/>
+                <a:cs typeface="Times New Roman" panose="02020603050405020304" pitchFamily="18" charset="0"/>
+              </a:rPr>
+              <a:t>Mes de estudio</a:t>
+            </a:r>
+            <a:r>
+              <a:rPr lang="es-CL" sz="1926" b="1" kern="100" dirty="0">
+                <a:solidFill>
+                  <a:srgbClr val="6FA3CC"/>
+                </a:solidFill>
                 <a:latin typeface="DM Sans" pitchFamily="2" charset="0"/>
                 <a:cs typeface="Times New Roman" panose="02020603050405020304" pitchFamily="18" charset="0"/>
               </a:rPr>
-              <a:t>Periodo de estudio: </a:t>
+              <a:t>: </a:t>
             </a:r>
             <a:r>
               <a:rPr lang="es-CL" sz="1600" b="1" kern="100" dirty="0">
                 <a:solidFill>
                   <a:srgbClr val="6FA3CC"/>
                 </a:solidFill>
-                <a:latin typeface="DM Mono" panose="020B0509040201040103" pitchFamily="49" charset="0"/>
+                <a:latin typeface="Museo Sans 300" panose="02000000000000000000" pitchFamily="50" charset="0"/>
                 <a:cs typeface="Times New Roman" panose="02020603050405020304" pitchFamily="18" charset="0"/>
               </a:rPr>
               <a:t>2025-01 → 2025-12</a:t>
@@ -4411,7 +4421,7 @@
         <p:spPr>
           <a:xfrm>
             <a:off x="463919" y="4948946"/>
-            <a:ext cx="4788135" cy="5318059"/>
+            <a:ext cx="4788135" cy="4764061"/>
           </a:xfrm>
           <a:prstGeom prst="rect">
             <a:avLst/>
@@ -4446,7 +4456,7 @@
                 <a:solidFill>
                   <a:srgbClr val="2C2E38"/>
                 </a:solidFill>
-                <a:latin typeface="DM Sans" pitchFamily="2" charset="0"/>
+                <a:latin typeface="Museo Sans 300" panose="02000000000000000000" pitchFamily="50" charset="0"/>
                 <a:ea typeface="Calibri" panose="020F0502020204030204" pitchFamily="34" charset="0"/>
                 <a:cs typeface="Calibri" panose="020F0502020204030204" pitchFamily="34" charset="0"/>
               </a:rPr>
@@ -4457,7 +4467,7 @@
                 <a:solidFill>
                   <a:srgbClr val="2C2E38"/>
                 </a:solidFill>
-                <a:latin typeface="DM Sans" pitchFamily="2" charset="0"/>
+                <a:latin typeface="Museo Sans 300" panose="02000000000000000000" pitchFamily="50" charset="0"/>
                 <a:ea typeface="Calibri" panose="020F0502020204030204" pitchFamily="34" charset="0"/>
                 <a:cs typeface="Calibri" panose="020F0502020204030204" pitchFamily="34" charset="0"/>
               </a:rPr>
@@ -4468,128 +4478,73 @@
                 <a:solidFill>
                   <a:srgbClr val="2C2E38"/>
                 </a:solidFill>
-                <a:latin typeface="DM Sans" pitchFamily="2" charset="0"/>
+                <a:latin typeface="Museo Sans 300" panose="02000000000000000000" pitchFamily="50" charset="0"/>
                 <a:ea typeface="Calibri" panose="020F0502020204030204" pitchFamily="34" charset="0"/>
                 <a:cs typeface="Calibri" panose="020F0502020204030204" pitchFamily="34" charset="0"/>
               </a:rPr>
-              <a:t>durante este período fue de </a:t>
-            </a:r>
-            <a:r>
-              <a:rPr lang="es-CL" sz="1200" dirty="0">
+              <a:t>durante este período fue de {{</a:t>
+            </a:r>
+            <a:r>
+              <a:rPr lang="es-CL" sz="1200" dirty="0" err="1">
                 <a:solidFill>
                   <a:srgbClr val="2C2E38"/>
                 </a:solidFill>
-                <a:latin typeface="DM Mono" panose="020B0509040201040103" pitchFamily="49" charset="0"/>
+                <a:latin typeface="Museo Sans 300" panose="02000000000000000000" pitchFamily="50" charset="0"/>
                 <a:ea typeface="Calibri" panose="020F0502020204030204" pitchFamily="34" charset="0"/>
                 <a:cs typeface="Calibri" panose="020F0502020204030204" pitchFamily="34" charset="0"/>
               </a:rPr>
-              <a:t>{{</a:t>
-            </a:r>
-            <a:r>
-              <a:rPr lang="es-CL" sz="1200" dirty="0" err="1">
+              <a:t>kpis.cmg_promedio</a:t>
+            </a:r>
+            <a:r>
+              <a:rPr lang="es-CL" sz="1200" dirty="0">
                 <a:solidFill>
                   <a:srgbClr val="2C2E38"/>
                 </a:solidFill>
-                <a:latin typeface="DM Mono" panose="020B0509040201040103" pitchFamily="49" charset="0"/>
+                <a:latin typeface="Museo Sans 300" panose="02000000000000000000" pitchFamily="50" charset="0"/>
                 <a:ea typeface="Calibri" panose="020F0502020204030204" pitchFamily="34" charset="0"/>
                 <a:cs typeface="Calibri" panose="020F0502020204030204" pitchFamily="34" charset="0"/>
               </a:rPr>
-              <a:t>kpis.cmg_promedio</a:t>
-            </a:r>
-            <a:r>
-              <a:rPr lang="es-CL" sz="1200" dirty="0">
+              <a:t>}} $/kWh, alcanzando su máximo de {{</a:t>
+            </a:r>
+            <a:r>
+              <a:rPr lang="es-CL" sz="1200" dirty="0" err="1">
                 <a:solidFill>
                   <a:srgbClr val="2C2E38"/>
                 </a:solidFill>
-                <a:latin typeface="DM Mono" panose="020B0509040201040103" pitchFamily="49" charset="0"/>
+                <a:latin typeface="Museo Sans 300" panose="02000000000000000000" pitchFamily="50" charset="0"/>
                 <a:ea typeface="Calibri" panose="020F0502020204030204" pitchFamily="34" charset="0"/>
                 <a:cs typeface="Calibri" panose="020F0502020204030204" pitchFamily="34" charset="0"/>
               </a:rPr>
-              <a:t>}} </a:t>
+              <a:t>kpis.cmg_max</a:t>
             </a:r>
             <a:r>
               <a:rPr lang="es-CL" sz="1200" dirty="0">
                 <a:solidFill>
                   <a:srgbClr val="2C2E38"/>
                 </a:solidFill>
-                <a:latin typeface="DM Sans" pitchFamily="2" charset="0"/>
+                <a:latin typeface="Museo Sans 300" panose="02000000000000000000" pitchFamily="50" charset="0"/>
                 <a:ea typeface="Calibri" panose="020F0502020204030204" pitchFamily="34" charset="0"/>
                 <a:cs typeface="Calibri" panose="020F0502020204030204" pitchFamily="34" charset="0"/>
               </a:rPr>
-              <a:t>$/kWh, alcanzando su máximo de </a:t>
-            </a:r>
-            <a:r>
-              <a:rPr lang="es-CL" sz="1200" dirty="0">
+              <a:t>}} $/kWh en {{</a:t>
+            </a:r>
+            <a:r>
+              <a:rPr lang="es-CL" sz="1200" dirty="0" err="1">
                 <a:solidFill>
                   <a:srgbClr val="2C2E38"/>
                 </a:solidFill>
-                <a:latin typeface="DM Mono" panose="020B0509040201040103" pitchFamily="49" charset="0"/>
+                <a:latin typeface="Museo Sans 300" panose="02000000000000000000" pitchFamily="50" charset="0"/>
                 <a:ea typeface="Calibri" panose="020F0502020204030204" pitchFamily="34" charset="0"/>
                 <a:cs typeface="Calibri" panose="020F0502020204030204" pitchFamily="34" charset="0"/>
               </a:rPr>
-              <a:t>{{</a:t>
-            </a:r>
-            <a:r>
-              <a:rPr lang="es-CL" sz="1200" dirty="0" err="1">
+              <a:t>kpis.cmg_max_mensual_periodo</a:t>
+            </a:r>
+            <a:r>
+              <a:rPr lang="es-CL" sz="1200" dirty="0">
                 <a:solidFill>
                   <a:srgbClr val="2C2E38"/>
                 </a:solidFill>
-                <a:latin typeface="DM Mono" panose="020B0509040201040103" pitchFamily="49" charset="0"/>
-                <a:ea typeface="Calibri" panose="020F0502020204030204" pitchFamily="34" charset="0"/>
-                <a:cs typeface="Calibri" panose="020F0502020204030204" pitchFamily="34" charset="0"/>
-              </a:rPr>
-              <a:t>kpis.cmg_max</a:t>
-            </a:r>
-            <a:r>
-              <a:rPr lang="es-CL" sz="1200" dirty="0">
-                <a:solidFill>
-                  <a:srgbClr val="2C2E38"/>
-                </a:solidFill>
-                <a:latin typeface="DM Mono" panose="020B0509040201040103" pitchFamily="49" charset="0"/>
-                <a:ea typeface="Calibri" panose="020F0502020204030204" pitchFamily="34" charset="0"/>
-                <a:cs typeface="Calibri" panose="020F0502020204030204" pitchFamily="34" charset="0"/>
-              </a:rPr>
-              <a:t>}} </a:t>
-            </a:r>
-            <a:r>
-              <a:rPr lang="es-CL" sz="1200" dirty="0">
-                <a:solidFill>
-                  <a:srgbClr val="2C2E38"/>
-                </a:solidFill>
-                <a:latin typeface="DM Sans" pitchFamily="2" charset="0"/>
-                <a:ea typeface="Calibri" panose="020F0502020204030204" pitchFamily="34" charset="0"/>
-                <a:cs typeface="Calibri" panose="020F0502020204030204" pitchFamily="34" charset="0"/>
-              </a:rPr>
-              <a:t>$/kWh en </a:t>
-            </a:r>
-            <a:r>
-              <a:rPr lang="es-CL" sz="1200" dirty="0">
-                <a:solidFill>
-                  <a:srgbClr val="2C2E38"/>
-                </a:solidFill>
-                <a:latin typeface="DM Mono" panose="020B0509040201040103" pitchFamily="49" charset="0"/>
-                <a:ea typeface="Calibri" panose="020F0502020204030204" pitchFamily="34" charset="0"/>
-                <a:cs typeface="Calibri" panose="020F0502020204030204" pitchFamily="34" charset="0"/>
-              </a:rPr>
-              <a:t>{{</a:t>
-            </a:r>
-            <a:r>
-              <a:rPr lang="es-CL" sz="1200" dirty="0" err="1">
-                <a:solidFill>
-                  <a:srgbClr val="2C2E38"/>
-                </a:solidFill>
-                <a:latin typeface="DM Mono" panose="020B0509040201040103" pitchFamily="49" charset="0"/>
-                <a:ea typeface="Calibri" panose="020F0502020204030204" pitchFamily="34" charset="0"/>
-                <a:cs typeface="Calibri" panose="020F0502020204030204" pitchFamily="34" charset="0"/>
-              </a:rPr>
-              <a:t>kpis.cmg_max_mensual_periodo</a:t>
-            </a:r>
-            <a:r>
-              <a:rPr lang="es-CL" sz="1200" dirty="0">
-                <a:solidFill>
-                  <a:srgbClr val="2C2E38"/>
-                </a:solidFill>
-                <a:latin typeface="DM Mono" panose="020B0509040201040103" pitchFamily="49" charset="0"/>
+                <a:latin typeface="Museo Sans 300" panose="02000000000000000000" pitchFamily="50" charset="0"/>
                 <a:ea typeface="Calibri" panose="020F0502020204030204" pitchFamily="34" charset="0"/>
                 <a:cs typeface="Calibri" panose="020F0502020204030204" pitchFamily="34" charset="0"/>
               </a:rPr>
@@ -4607,7 +4562,7 @@
                 <a:solidFill>
                   <a:srgbClr val="2C2E38"/>
                 </a:solidFill>
-                <a:latin typeface="DM Sans" pitchFamily="2" charset="0"/>
+                <a:latin typeface="Museo Sans 300" panose="02000000000000000000" pitchFamily="50" charset="0"/>
                 <a:ea typeface="Calibri" panose="020F0502020204030204" pitchFamily="34" charset="0"/>
                 <a:cs typeface="Calibri" panose="020F0502020204030204" pitchFamily="34" charset="0"/>
               </a:rPr>
@@ -4625,7 +4580,7 @@
                 <a:solidFill>
                   <a:srgbClr val="2C2E38"/>
                 </a:solidFill>
-                <a:latin typeface="DM Sans" pitchFamily="2" charset="0"/>
+                <a:latin typeface="Museo Sans 300" panose="02000000000000000000" pitchFamily="50" charset="0"/>
                 <a:ea typeface="Calibri" panose="020F0502020204030204" pitchFamily="34" charset="0"/>
                 <a:cs typeface="Calibri" panose="020F0502020204030204" pitchFamily="34" charset="0"/>
               </a:rPr>
@@ -4636,7 +4591,7 @@
                 <a:solidFill>
                   <a:srgbClr val="2C2E38"/>
                 </a:solidFill>
-                <a:latin typeface="DM Sans" pitchFamily="2" charset="0"/>
+                <a:latin typeface="Museo Sans 300" panose="02000000000000000000" pitchFamily="50" charset="0"/>
                 <a:ea typeface="Calibri" panose="020F0502020204030204" pitchFamily="34" charset="0"/>
                 <a:cs typeface="Calibri" panose="020F0502020204030204" pitchFamily="34" charset="0"/>
               </a:rPr>
@@ -4647,7 +4602,7 @@
                 <a:solidFill>
                   <a:srgbClr val="2C2E38"/>
                 </a:solidFill>
-                <a:latin typeface="DM Sans" pitchFamily="2" charset="0"/>
+                <a:latin typeface="Museo Sans 300" panose="02000000000000000000" pitchFamily="50" charset="0"/>
                 <a:ea typeface="Calibri" panose="020F0502020204030204" pitchFamily="34" charset="0"/>
                 <a:cs typeface="Calibri" panose="020F0502020204030204" pitchFamily="34" charset="0"/>
               </a:rPr>
@@ -4658,7 +4613,7 @@
                 <a:solidFill>
                   <a:srgbClr val="2C2E38"/>
                 </a:solidFill>
-                <a:latin typeface="DM Sans" pitchFamily="2" charset="0"/>
+                <a:latin typeface="Museo Sans 300" panose="02000000000000000000" pitchFamily="50" charset="0"/>
                 <a:ea typeface="Calibri" panose="020F0502020204030204" pitchFamily="34" charset="0"/>
                 <a:cs typeface="Calibri" panose="020F0502020204030204" pitchFamily="34" charset="0"/>
               </a:rPr>
@@ -4669,99 +4624,55 @@
                 <a:solidFill>
                   <a:srgbClr val="2C2E38"/>
                 </a:solidFill>
-                <a:latin typeface="DM Sans" pitchFamily="2" charset="0"/>
+                <a:latin typeface="Museo Sans 300" panose="02000000000000000000" pitchFamily="50" charset="0"/>
                 <a:ea typeface="Calibri" panose="020F0502020204030204" pitchFamily="34" charset="0"/>
                 <a:cs typeface="Calibri" panose="020F0502020204030204" pitchFamily="34" charset="0"/>
               </a:rPr>
-              <a:t>entre horas solares y no solares registró un máximo de </a:t>
-            </a:r>
-            <a:r>
-              <a:rPr lang="es-CL" sz="1200" dirty="0">
+              <a:t>entre horas solares y no solares registró un máximo de {{</a:t>
+            </a:r>
+            <a:r>
+              <a:rPr lang="es-CL" sz="1200" dirty="0" err="1">
                 <a:solidFill>
                   <a:srgbClr val="2C2E38"/>
                 </a:solidFill>
-                <a:latin typeface="DM Mono" panose="020B0509040201040103" pitchFamily="49" charset="0"/>
+                <a:latin typeface="Museo Sans 300" panose="02000000000000000000" pitchFamily="50" charset="0"/>
                 <a:ea typeface="Calibri" panose="020F0502020204030204" pitchFamily="34" charset="0"/>
                 <a:cs typeface="Calibri" panose="020F0502020204030204" pitchFamily="34" charset="0"/>
               </a:rPr>
-              <a:t>{{</a:t>
-            </a:r>
-            <a:r>
-              <a:rPr lang="es-CL" sz="1200" dirty="0" err="1">
+              <a:t>kpis.cmg_spread_max_crucero</a:t>
+            </a:r>
+            <a:r>
+              <a:rPr lang="es-CL" sz="1200" dirty="0">
                 <a:solidFill>
                   <a:srgbClr val="2C2E38"/>
                 </a:solidFill>
-                <a:latin typeface="DM Mono" panose="020B0509040201040103" pitchFamily="49" charset="0"/>
+                <a:latin typeface="Museo Sans 300" panose="02000000000000000000" pitchFamily="50" charset="0"/>
                 <a:ea typeface="Calibri" panose="020F0502020204030204" pitchFamily="34" charset="0"/>
                 <a:cs typeface="Calibri" panose="020F0502020204030204" pitchFamily="34" charset="0"/>
               </a:rPr>
-              <a:t>kpis.cmg_spread_max_crucero</a:t>
-            </a:r>
-            <a:r>
-              <a:rPr lang="es-CL" sz="1200" dirty="0">
+              <a:t>}} en la barra Crucero 220kV , mientras que en la barra Puerto Montt 220kV el valor ascendió a {{</a:t>
+            </a:r>
+            <a:r>
+              <a:rPr lang="es-CL" sz="1200" dirty="0" err="1">
                 <a:solidFill>
                   <a:srgbClr val="2C2E38"/>
                 </a:solidFill>
-                <a:latin typeface="DM Mono" panose="020B0509040201040103" pitchFamily="49" charset="0"/>
+                <a:latin typeface="Museo Sans 300" panose="02000000000000000000" pitchFamily="50" charset="0"/>
                 <a:ea typeface="Calibri" panose="020F0502020204030204" pitchFamily="34" charset="0"/>
                 <a:cs typeface="Calibri" panose="020F0502020204030204" pitchFamily="34" charset="0"/>
               </a:rPr>
-              <a:t>}} </a:t>
+              <a:t>kpis.cmg_spread_max_p_montt</a:t>
             </a:r>
             <a:r>
               <a:rPr lang="es-CL" sz="1200" dirty="0">
                 <a:solidFill>
                   <a:srgbClr val="2C2E38"/>
                 </a:solidFill>
-                <a:latin typeface="DM Sans" pitchFamily="2" charset="0"/>
+                <a:latin typeface="Museo Sans 300" panose="02000000000000000000" pitchFamily="50" charset="0"/>
                 <a:ea typeface="Calibri" panose="020F0502020204030204" pitchFamily="34" charset="0"/>
                 <a:cs typeface="Calibri" panose="020F0502020204030204" pitchFamily="34" charset="0"/>
               </a:rPr>
-              <a:t>en la barra Crucero 220kV , mientras que en la barra Puerto Montt 220kV el valor ascendió a </a:t>
-            </a:r>
-            <a:r>
-              <a:rPr lang="es-CL" sz="1200" dirty="0">
-                <a:solidFill>
-                  <a:srgbClr val="2C2E38"/>
-                </a:solidFill>
-                <a:latin typeface="DM Mono" panose="020B0509040201040103" pitchFamily="49" charset="0"/>
-                <a:ea typeface="Calibri" panose="020F0502020204030204" pitchFamily="34" charset="0"/>
-                <a:cs typeface="Calibri" panose="020F0502020204030204" pitchFamily="34" charset="0"/>
-              </a:rPr>
-              <a:t>{{</a:t>
-            </a:r>
-            <a:r>
-              <a:rPr lang="es-CL" sz="1200" dirty="0" err="1">
-                <a:solidFill>
-                  <a:srgbClr val="2C2E38"/>
-                </a:solidFill>
-                <a:latin typeface="DM Mono" panose="020B0509040201040103" pitchFamily="49" charset="0"/>
-                <a:ea typeface="Calibri" panose="020F0502020204030204" pitchFamily="34" charset="0"/>
-                <a:cs typeface="Calibri" panose="020F0502020204030204" pitchFamily="34" charset="0"/>
-              </a:rPr>
-              <a:t>kpis.cmg_spread_max_p_montt</a:t>
-            </a:r>
-            <a:r>
-              <a:rPr lang="es-CL" sz="1200" dirty="0">
-                <a:solidFill>
-                  <a:srgbClr val="2C2E38"/>
-                </a:solidFill>
-                <a:latin typeface="DM Mono" panose="020B0509040201040103" pitchFamily="49" charset="0"/>
-                <a:ea typeface="Calibri" panose="020F0502020204030204" pitchFamily="34" charset="0"/>
-                <a:cs typeface="Calibri" panose="020F0502020204030204" pitchFamily="34" charset="0"/>
-              </a:rPr>
-              <a:t>}}. </a:t>
-            </a:r>
-            <a:r>
-              <a:rPr lang="es-CL" sz="1200" dirty="0">
-                <a:solidFill>
-                  <a:srgbClr val="2C2E38"/>
-                </a:solidFill>
-                <a:latin typeface="DM Sans" pitchFamily="2" charset="0"/>
-                <a:ea typeface="Calibri" panose="020F0502020204030204" pitchFamily="34" charset="0"/>
-                <a:cs typeface="Calibri" panose="020F0502020204030204" pitchFamily="34" charset="0"/>
-              </a:rPr>
-              <a:t>Esta última barra presenta la mayor variabilidad estacional de costos marginales, donde meses con baja disponibilidad de recurso hídrico presentan desacoples económicos y costos mayores respecto de otras zonas del país. </a:t>
+              <a:t>}}. Esta última barra presenta la mayor variabilidad estacional de costos marginales, donde meses con baja disponibilidad de recurso hídrico presentan desacoples económicos y costos mayores respecto de otras zonas del país. </a:t>
             </a:r>
           </a:p>
           <a:p>
@@ -4875,7 +4786,7 @@
                 <a:solidFill>
                   <a:srgbClr val="002060"/>
                 </a:solidFill>
-                <a:latin typeface="DM Sans" pitchFamily="2" charset="0"/>
+                <a:latin typeface="gobCL" pitchFamily="50" charset="0"/>
                 <a:cs typeface="Times New Roman" panose="02020603050405020304" pitchFamily="18" charset="0"/>
               </a:rPr>
               <a:t>INDICADORES CLAVE</a:t>
@@ -4884,7 +4795,7 @@
               <a:solidFill>
                 <a:srgbClr val="002060"/>
               </a:solidFill>
-              <a:latin typeface="DM Sans" pitchFamily="2" charset="0"/>
+              <a:latin typeface="gobCL" pitchFamily="50" charset="0"/>
               <a:cs typeface="Times New Roman" panose="02020603050405020304" pitchFamily="18" charset="0"/>
             </a:endParaRPr>
           </a:p>
@@ -4950,7 +4861,7 @@
         <p:spPr>
           <a:xfrm>
             <a:off x="5610453" y="4948946"/>
-            <a:ext cx="4427082" cy="3801041"/>
+            <a:ext cx="4427082" cy="3524042"/>
           </a:xfrm>
           <a:prstGeom prst="rect">
             <a:avLst/>
@@ -4980,7 +4891,7 @@
                 <a:solidFill>
                   <a:srgbClr val="2C2E38"/>
                 </a:solidFill>
-                <a:latin typeface="DM Sans" pitchFamily="2" charset="0"/>
+                <a:latin typeface="Museo Sans 300" panose="02000000000000000000" pitchFamily="50" charset="0"/>
                 <a:ea typeface="Calibri" panose="020F0502020204030204" pitchFamily="34" charset="0"/>
                 <a:cs typeface="Calibri" panose="020F0502020204030204" pitchFamily="34" charset="0"/>
               </a:rPr>
@@ -4991,7 +4902,7 @@
                 <a:solidFill>
                   <a:srgbClr val="2C2E38"/>
                 </a:solidFill>
-                <a:latin typeface="DM Sans" pitchFamily="2" charset="0"/>
+                <a:latin typeface="Museo Sans 300" panose="02000000000000000000" pitchFamily="50" charset="0"/>
                 <a:ea typeface="Calibri" panose="020F0502020204030204" pitchFamily="34" charset="0"/>
                 <a:cs typeface="Calibri" panose="020F0502020204030204" pitchFamily="34" charset="0"/>
               </a:rPr>
@@ -5002,154 +4913,99 @@
                 <a:solidFill>
                   <a:srgbClr val="2C2E38"/>
                 </a:solidFill>
-                <a:latin typeface="DM Sans" pitchFamily="2" charset="0"/>
+                <a:latin typeface="Museo Sans 300" panose="02000000000000000000" pitchFamily="50" charset="0"/>
                 <a:ea typeface="Calibri" panose="020F0502020204030204" pitchFamily="34" charset="0"/>
                 <a:cs typeface="Calibri" panose="020F0502020204030204" pitchFamily="34" charset="0"/>
               </a:rPr>
-              <a:t> asciende a </a:t>
-            </a:r>
-            <a:r>
-              <a:rPr lang="es-CL" sz="1200" dirty="0">
+              <a:t> asciende a {{</a:t>
+            </a:r>
+            <a:r>
+              <a:rPr lang="es-CL" sz="1200" dirty="0" err="1">
                 <a:solidFill>
                   <a:srgbClr val="2C2E38"/>
                 </a:solidFill>
-                <a:latin typeface="DM Mono" panose="020B0509040201040103" pitchFamily="49" charset="0"/>
+                <a:latin typeface="Museo Sans 300" panose="02000000000000000000" pitchFamily="50" charset="0"/>
                 <a:ea typeface="Calibri" panose="020F0502020204030204" pitchFamily="34" charset="0"/>
                 <a:cs typeface="Calibri" panose="020F0502020204030204" pitchFamily="34" charset="0"/>
               </a:rPr>
-              <a:t>{{</a:t>
-            </a:r>
-            <a:r>
-              <a:rPr lang="es-CL" sz="1200" dirty="0" err="1">
+              <a:t>kpis.vert_total_mwh</a:t>
+            </a:r>
+            <a:r>
+              <a:rPr lang="es-CL" sz="1200" dirty="0">
                 <a:solidFill>
                   <a:srgbClr val="2C2E38"/>
                 </a:solidFill>
-                <a:latin typeface="DM Mono" panose="020B0509040201040103" pitchFamily="49" charset="0"/>
+                <a:latin typeface="Museo Sans 300" panose="02000000000000000000" pitchFamily="50" charset="0"/>
                 <a:ea typeface="Calibri" panose="020F0502020204030204" pitchFamily="34" charset="0"/>
                 <a:cs typeface="Calibri" panose="020F0502020204030204" pitchFamily="34" charset="0"/>
               </a:rPr>
-              <a:t>kpis.vert_total_mwh</a:t>
-            </a:r>
-            <a:r>
-              <a:rPr lang="es-CL" sz="1200" dirty="0">
+              <a:t>}} </a:t>
+            </a:r>
+            <a:r>
+              <a:rPr lang="es-CL" sz="1200" dirty="0" err="1">
                 <a:solidFill>
                   <a:srgbClr val="2C2E38"/>
                 </a:solidFill>
-                <a:latin typeface="DM Mono" panose="020B0509040201040103" pitchFamily="49" charset="0"/>
+                <a:latin typeface="Museo Sans 300" panose="02000000000000000000" pitchFamily="50" charset="0"/>
                 <a:ea typeface="Calibri" panose="020F0502020204030204" pitchFamily="34" charset="0"/>
                 <a:cs typeface="Calibri" panose="020F0502020204030204" pitchFamily="34" charset="0"/>
               </a:rPr>
-              <a:t>}} </a:t>
-            </a:r>
-            <a:r>
-              <a:rPr lang="es-CL" sz="1200" dirty="0" err="1">
+              <a:t>MWh</a:t>
+            </a:r>
+            <a:r>
+              <a:rPr lang="es-CL" sz="1200" dirty="0">
                 <a:solidFill>
                   <a:srgbClr val="2C2E38"/>
                 </a:solidFill>
-                <a:latin typeface="DM Sans" pitchFamily="2" charset="0"/>
+                <a:latin typeface="Museo Sans 300" panose="02000000000000000000" pitchFamily="50" charset="0"/>
                 <a:ea typeface="Calibri" panose="020F0502020204030204" pitchFamily="34" charset="0"/>
                 <a:cs typeface="Calibri" panose="020F0502020204030204" pitchFamily="34" charset="0"/>
               </a:rPr>
-              <a:t>MWh</a:t>
-            </a:r>
-            <a:r>
-              <a:rPr lang="es-CL" sz="1200" dirty="0">
+              <a:t>, destacando el caso de la central solar {{</a:t>
+            </a:r>
+            <a:r>
+              <a:rPr lang="es-CL" sz="1200" dirty="0" err="1">
                 <a:solidFill>
                   <a:srgbClr val="2C2E38"/>
                 </a:solidFill>
-                <a:latin typeface="DM Sans" pitchFamily="2" charset="0"/>
+                <a:latin typeface="Museo Sans 300" panose="02000000000000000000" pitchFamily="50" charset="0"/>
                 <a:ea typeface="Calibri" panose="020F0502020204030204" pitchFamily="34" charset="0"/>
                 <a:cs typeface="Calibri" panose="020F0502020204030204" pitchFamily="34" charset="0"/>
               </a:rPr>
-              <a:t>, destacando el caso de la central solar </a:t>
+              <a:t>kpis.empresa_vert_max</a:t>
             </a:r>
             <a:r>
               <a:rPr lang="es-CL" sz="1200" dirty="0">
                 <a:solidFill>
                   <a:srgbClr val="2C2E38"/>
                 </a:solidFill>
-                <a:latin typeface="DM Mono" panose="020B0509040201040103" pitchFamily="49" charset="0"/>
+                <a:latin typeface="Museo Sans 300" panose="02000000000000000000" pitchFamily="50" charset="0"/>
                 <a:ea typeface="Calibri" panose="020F0502020204030204" pitchFamily="34" charset="0"/>
                 <a:cs typeface="Calibri" panose="020F0502020204030204" pitchFamily="34" charset="0"/>
               </a:rPr>
-              <a:t>{{</a:t>
+              <a:t>}}, que redujo sus inyecciones en un total de {{</a:t>
             </a:r>
             <a:r>
               <a:rPr lang="es-CL" sz="1200" dirty="0" err="1">
                 <a:solidFill>
                   <a:srgbClr val="2C2E38"/>
                 </a:solidFill>
-                <a:latin typeface="DM Mono" panose="020B0509040201040103" pitchFamily="49" charset="0"/>
+                <a:latin typeface="Museo Sans 300" panose="02000000000000000000" pitchFamily="50" charset="0"/>
                 <a:ea typeface="Calibri" panose="020F0502020204030204" pitchFamily="34" charset="0"/>
                 <a:cs typeface="Calibri" panose="020F0502020204030204" pitchFamily="34" charset="0"/>
               </a:rPr>
-              <a:t>kpis.empresa_vert_max</a:t>
+              <a:t>kpis.vert_empresa_vert_max</a:t>
             </a:r>
             <a:r>
               <a:rPr lang="es-CL" sz="1200" dirty="0">
                 <a:solidFill>
                   <a:srgbClr val="2C2E38"/>
                 </a:solidFill>
-                <a:latin typeface="DM Mono" panose="020B0509040201040103" pitchFamily="49" charset="0"/>
+                <a:latin typeface="Museo Sans 300" panose="02000000000000000000" pitchFamily="50" charset="0"/>
                 <a:ea typeface="Calibri" panose="020F0502020204030204" pitchFamily="34" charset="0"/>
                 <a:cs typeface="Calibri" panose="020F0502020204030204" pitchFamily="34" charset="0"/>
               </a:rPr>
-              <a:t>}}, </a:t>
-            </a:r>
-            <a:r>
-              <a:rPr lang="es-CL" sz="1200" dirty="0">
-                <a:solidFill>
-                  <a:srgbClr val="2C2E38"/>
-                </a:solidFill>
-                <a:latin typeface="DM Sans" pitchFamily="2" charset="0"/>
-                <a:ea typeface="Calibri" panose="020F0502020204030204" pitchFamily="34" charset="0"/>
-                <a:cs typeface="Calibri" panose="020F0502020204030204" pitchFamily="34" charset="0"/>
-              </a:rPr>
-              <a:t>que redujo sus inyecciones en un total de </a:t>
-            </a:r>
-            <a:r>
-              <a:rPr lang="es-CL" sz="1200" dirty="0">
-                <a:solidFill>
-                  <a:srgbClr val="2C2E38"/>
-                </a:solidFill>
-                <a:latin typeface="DM Mono" panose="020B0509040201040103" pitchFamily="49" charset="0"/>
-                <a:ea typeface="Calibri" panose="020F0502020204030204" pitchFamily="34" charset="0"/>
-                <a:cs typeface="Calibri" panose="020F0502020204030204" pitchFamily="34" charset="0"/>
-              </a:rPr>
-              <a:t>{{</a:t>
-            </a:r>
-            <a:r>
-              <a:rPr lang="es-CL" sz="1200" dirty="0" err="1">
-                <a:solidFill>
-                  <a:srgbClr val="2C2E38"/>
-                </a:solidFill>
-                <a:latin typeface="DM Mono" panose="020B0509040201040103" pitchFamily="49" charset="0"/>
-                <a:ea typeface="Calibri" panose="020F0502020204030204" pitchFamily="34" charset="0"/>
-                <a:cs typeface="Calibri" panose="020F0502020204030204" pitchFamily="34" charset="0"/>
-              </a:rPr>
-              <a:t>kpis.vert_empresa_vert_max</a:t>
-            </a:r>
-            <a:r>
-              <a:rPr lang="es-CL" sz="1200" dirty="0">
-                <a:solidFill>
-                  <a:srgbClr val="2C2E38"/>
-                </a:solidFill>
-                <a:latin typeface="DM Mono" panose="020B0509040201040103" pitchFamily="49" charset="0"/>
-                <a:ea typeface="Calibri" panose="020F0502020204030204" pitchFamily="34" charset="0"/>
-                <a:cs typeface="Calibri" panose="020F0502020204030204" pitchFamily="34" charset="0"/>
-              </a:rPr>
-              <a:t>}} </a:t>
-            </a:r>
-            <a:r>
-              <a:rPr lang="es-CL" sz="1200" dirty="0">
-                <a:solidFill>
-                  <a:srgbClr val="2C2E38"/>
-                </a:solidFill>
-                <a:latin typeface="DM Sans" pitchFamily="2" charset="0"/>
-                <a:ea typeface="Calibri" panose="020F0502020204030204" pitchFamily="34" charset="0"/>
-                <a:cs typeface="Calibri" panose="020F0502020204030204" pitchFamily="34" charset="0"/>
-              </a:rPr>
-              <a:t>durante el periodo de estudio. </a:t>
+              <a:t>}} durante el periodo de estudio. </a:t>
             </a:r>
           </a:p>
           <a:p>
@@ -5162,7 +5018,7 @@
               <a:solidFill>
                 <a:srgbClr val="2C2E38"/>
               </a:solidFill>
-              <a:latin typeface="DM Sans" pitchFamily="2" charset="0"/>
+              <a:latin typeface="Museo Sans 300" panose="02000000000000000000" pitchFamily="50" charset="0"/>
               <a:ea typeface="Calibri" panose="020F0502020204030204" pitchFamily="34" charset="0"/>
               <a:cs typeface="Calibri" panose="020F0502020204030204" pitchFamily="34" charset="0"/>
             </a:endParaRPr>
@@ -5178,7 +5034,7 @@
                 <a:solidFill>
                   <a:srgbClr val="2C2E38"/>
                 </a:solidFill>
-                <a:latin typeface="DM Sans" pitchFamily="2" charset="0"/>
+                <a:latin typeface="Museo Sans 300" panose="02000000000000000000" pitchFamily="50" charset="0"/>
                 <a:ea typeface="Calibri" panose="020F0502020204030204" pitchFamily="34" charset="0"/>
                 <a:cs typeface="Calibri" panose="020F0502020204030204" pitchFamily="34" charset="0"/>
               </a:rPr>
@@ -5293,7 +5149,7 @@
                 <a:solidFill>
                   <a:srgbClr val="2C2E38"/>
                 </a:solidFill>
-                <a:latin typeface="DM Mono" panose="020B0509040201040103" pitchFamily="49" charset="0"/>
+                <a:latin typeface="Museo Sans 500" panose="02000000000000000000" pitchFamily="50" charset="0"/>
                 <a:ea typeface="Calibri" panose="020F0502020204030204" pitchFamily="34" charset="0"/>
                 <a:cs typeface="Calibri" panose="020F0502020204030204" pitchFamily="34" charset="0"/>
               </a:rPr>
@@ -5304,7 +5160,7 @@
                 <a:solidFill>
                   <a:srgbClr val="2C2E38"/>
                 </a:solidFill>
-                <a:latin typeface="DM Mono" panose="020B0509040201040103" pitchFamily="49" charset="0"/>
+                <a:latin typeface="Museo Sans 500" panose="02000000000000000000" pitchFamily="50" charset="0"/>
                 <a:ea typeface="Calibri" panose="020F0502020204030204" pitchFamily="34" charset="0"/>
                 <a:cs typeface="Calibri" panose="020F0502020204030204" pitchFamily="34" charset="0"/>
               </a:rPr>
@@ -5315,7 +5171,7 @@
                 <a:solidFill>
                   <a:srgbClr val="2C2E38"/>
                 </a:solidFill>
-                <a:latin typeface="DM Mono" panose="020B0509040201040103" pitchFamily="49" charset="0"/>
+                <a:latin typeface="Museo Sans 500" panose="02000000000000000000" pitchFamily="50" charset="0"/>
                 <a:ea typeface="Calibri" panose="020F0502020204030204" pitchFamily="34" charset="0"/>
                 <a:cs typeface="Calibri" panose="020F0502020204030204" pitchFamily="34" charset="0"/>
               </a:rPr>
@@ -5341,7 +5197,7 @@
         <p:spPr>
           <a:xfrm>
             <a:off x="3104307" y="3793619"/>
-            <a:ext cx="2161743" cy="923330"/>
+            <a:ext cx="2161743" cy="646331"/>
           </a:xfrm>
           <a:prstGeom prst="rect">
             <a:avLst/>
@@ -5359,7 +5215,7 @@
                 <a:solidFill>
                   <a:srgbClr val="2C2E38"/>
                 </a:solidFill>
-                <a:latin typeface="DM Mono" panose="020B0509040201040103" pitchFamily="49" charset="0"/>
+                <a:latin typeface="Museo Sans 500" panose="02000000000000000000" pitchFamily="50" charset="0"/>
                 <a:ea typeface="Calibri" panose="020F0502020204030204" pitchFamily="34" charset="0"/>
                 <a:cs typeface="Calibri" panose="020F0502020204030204" pitchFamily="34" charset="0"/>
               </a:rPr>
@@ -5370,7 +5226,7 @@
                 <a:solidFill>
                   <a:srgbClr val="2C2E38"/>
                 </a:solidFill>
-                <a:latin typeface="DM Mono" panose="020B0509040201040103" pitchFamily="49" charset="0"/>
+                <a:latin typeface="Museo Sans 500" panose="02000000000000000000" pitchFamily="50" charset="0"/>
                 <a:ea typeface="Calibri" panose="020F0502020204030204" pitchFamily="34" charset="0"/>
                 <a:cs typeface="Calibri" panose="020F0502020204030204" pitchFamily="34" charset="0"/>
               </a:rPr>
@@ -5381,7 +5237,7 @@
                 <a:solidFill>
                   <a:srgbClr val="2C2E38"/>
                 </a:solidFill>
-                <a:latin typeface="DM Mono" panose="020B0509040201040103" pitchFamily="49" charset="0"/>
+                <a:latin typeface="Museo Sans 500" panose="02000000000000000000" pitchFamily="50" charset="0"/>
                 <a:ea typeface="Calibri" panose="020F0502020204030204" pitchFamily="34" charset="0"/>
                 <a:cs typeface="Calibri" panose="020F0502020204030204" pitchFamily="34" charset="0"/>
               </a:rPr>
@@ -5425,7 +5281,7 @@
                 <a:solidFill>
                   <a:srgbClr val="2C2E38"/>
                 </a:solidFill>
-                <a:latin typeface="DM Mono" panose="020B0509040201040103" pitchFamily="49" charset="0"/>
+                <a:latin typeface="Museo Sans 500" panose="02000000000000000000" pitchFamily="50" charset="0"/>
                 <a:ea typeface="Calibri" panose="020F0502020204030204" pitchFamily="34" charset="0"/>
                 <a:cs typeface="Calibri" panose="020F0502020204030204" pitchFamily="34" charset="0"/>
               </a:rPr>
@@ -5436,7 +5292,7 @@
                 <a:solidFill>
                   <a:srgbClr val="2C2E38"/>
                 </a:solidFill>
-                <a:latin typeface="DM Mono" panose="020B0509040201040103" pitchFamily="49" charset="0"/>
+                <a:latin typeface="Museo Sans 500" panose="02000000000000000000" pitchFamily="50" charset="0"/>
                 <a:ea typeface="Calibri" panose="020F0502020204030204" pitchFamily="34" charset="0"/>
                 <a:cs typeface="Calibri" panose="020F0502020204030204" pitchFamily="34" charset="0"/>
               </a:rPr>
@@ -5447,7 +5303,7 @@
                 <a:solidFill>
                   <a:srgbClr val="2C2E38"/>
                 </a:solidFill>
-                <a:latin typeface="DM Mono" panose="020B0509040201040103" pitchFamily="49" charset="0"/>
+                <a:latin typeface="Museo Sans 500" panose="02000000000000000000" pitchFamily="50" charset="0"/>
                 <a:ea typeface="Calibri" panose="020F0502020204030204" pitchFamily="34" charset="0"/>
                 <a:cs typeface="Calibri" panose="020F0502020204030204" pitchFamily="34" charset="0"/>
               </a:rPr>
@@ -5473,7 +5329,7 @@
         <p:spPr>
           <a:xfrm>
             <a:off x="8050444" y="3726784"/>
-            <a:ext cx="2161743" cy="923330"/>
+            <a:ext cx="2161743" cy="646331"/>
           </a:xfrm>
           <a:prstGeom prst="rect">
             <a:avLst/>
@@ -5491,7 +5347,7 @@
                 <a:solidFill>
                   <a:srgbClr val="2C2E38"/>
                 </a:solidFill>
-                <a:latin typeface="DM Mono" panose="020B0509040201040103" pitchFamily="49" charset="0"/>
+                <a:latin typeface="Museo Sans 500" panose="02000000000000000000" pitchFamily="50" charset="0"/>
                 <a:ea typeface="Calibri" panose="020F0502020204030204" pitchFamily="34" charset="0"/>
                 <a:cs typeface="Calibri" panose="020F0502020204030204" pitchFamily="34" charset="0"/>
               </a:rPr>
@@ -5502,7 +5358,7 @@
                 <a:solidFill>
                   <a:srgbClr val="2C2E38"/>
                 </a:solidFill>
-                <a:latin typeface="DM Mono" panose="020B0509040201040103" pitchFamily="49" charset="0"/>
+                <a:latin typeface="Museo Sans 500" panose="02000000000000000000" pitchFamily="50" charset="0"/>
                 <a:ea typeface="Calibri" panose="020F0502020204030204" pitchFamily="34" charset="0"/>
                 <a:cs typeface="Calibri" panose="020F0502020204030204" pitchFamily="34" charset="0"/>
               </a:rPr>
@@ -5513,7 +5369,7 @@
                 <a:solidFill>
                   <a:srgbClr val="2C2E38"/>
                 </a:solidFill>
-                <a:latin typeface="DM Mono" panose="020B0509040201040103" pitchFamily="49" charset="0"/>
+                <a:latin typeface="Museo Sans 500" panose="02000000000000000000" pitchFamily="50" charset="0"/>
                 <a:ea typeface="Calibri" panose="020F0502020204030204" pitchFamily="34" charset="0"/>
                 <a:cs typeface="Calibri" panose="020F0502020204030204" pitchFamily="34" charset="0"/>
               </a:rPr>
@@ -5606,7 +5462,7 @@
         <p:spPr>
           <a:xfrm>
             <a:off x="586802" y="1321902"/>
-            <a:ext cx="9518204" cy="1425840"/>
+            <a:ext cx="9518204" cy="1396664"/>
           </a:xfrm>
           <a:prstGeom prst="rect">
             <a:avLst/>
@@ -5635,7 +5491,7 @@
                 <a:solidFill>
                   <a:srgbClr val="E67E22"/>
                 </a:solidFill>
-                <a:latin typeface="DM Sans" pitchFamily="2" charset="0"/>
+                <a:latin typeface="Museo Sans 300" panose="02000000000000000000" pitchFamily="50" charset="0"/>
                 <a:ea typeface="Calibri" panose="020F0502020204030204" pitchFamily="34" charset="0"/>
                 <a:cs typeface="Calibri" panose="020F0502020204030204" pitchFamily="34" charset="0"/>
               </a:rPr>
@@ -5647,7 +5503,7 @@
               <a:solidFill>
                 <a:srgbClr val="E67E22"/>
               </a:solidFill>
-              <a:latin typeface="DM Sans" pitchFamily="2" charset="0"/>
+              <a:latin typeface="Museo Sans 300" panose="02000000000000000000" pitchFamily="50" charset="0"/>
               <a:ea typeface="Calibri" panose="020F0502020204030204" pitchFamily="34" charset="0"/>
               <a:cs typeface="Calibri" panose="020F0502020204030204" pitchFamily="34" charset="0"/>
             </a:endParaRPr>
@@ -5658,7 +5514,7 @@
                 <a:solidFill>
                   <a:srgbClr val="E67E22"/>
                 </a:solidFill>
-                <a:latin typeface="DM Sans" pitchFamily="2" charset="0"/>
+                <a:latin typeface="Museo Sans 300" panose="02000000000000000000" pitchFamily="50" charset="0"/>
                 <a:ea typeface="Calibri" panose="020F0502020204030204" pitchFamily="34" charset="0"/>
                 <a:cs typeface="Calibri" panose="020F0502020204030204" pitchFamily="34" charset="0"/>
               </a:rPr>
@@ -5669,7 +5525,7 @@
                 <a:solidFill>
                   <a:srgbClr val="E67E22"/>
                 </a:solidFill>
-                <a:latin typeface="DM Sans" pitchFamily="2" charset="0"/>
+                <a:latin typeface="Museo Sans 300" panose="02000000000000000000" pitchFamily="50" charset="0"/>
                 <a:ea typeface="Calibri" panose="020F0502020204030204" pitchFamily="34" charset="0"/>
                 <a:cs typeface="Calibri" panose="020F0502020204030204" pitchFamily="34" charset="0"/>
                 <a:hlinkClick r:id="rId3">
@@ -5686,7 +5542,7 @@
               <a:solidFill>
                 <a:srgbClr val="E67E22"/>
               </a:solidFill>
-              <a:latin typeface="DM Sans" pitchFamily="2" charset="0"/>
+              <a:latin typeface="Museo Sans 300" panose="02000000000000000000" pitchFamily="50" charset="0"/>
               <a:ea typeface="Calibri" panose="020F0502020204030204" pitchFamily="34" charset="0"/>
               <a:cs typeface="Calibri" panose="020F0502020204030204" pitchFamily="34" charset="0"/>
             </a:endParaRPr>
@@ -5721,7 +5577,7 @@
         <p:spPr>
           <a:xfrm>
             <a:off x="621460" y="3525080"/>
-            <a:ext cx="1232552" cy="246221"/>
+            <a:ext cx="1397840" cy="246221"/>
           </a:xfrm>
           <a:prstGeom prst="rect">
             <a:avLst/>
@@ -5739,7 +5595,7 @@
                 <a:solidFill>
                   <a:srgbClr val="002060"/>
                 </a:solidFill>
-                <a:latin typeface="DM Sans" pitchFamily="2" charset="0"/>
+                <a:latin typeface="Museo Sans 500" panose="02000000000000000000" pitchFamily="50" charset="0"/>
                 <a:cs typeface="Times New Roman" panose="02020603050405020304" pitchFamily="18" charset="0"/>
               </a:rPr>
               <a:t>CMG</a:t>
@@ -5749,7 +5605,7 @@
                 <a:solidFill>
                   <a:srgbClr val="8EC5FF"/>
                 </a:solidFill>
-                <a:latin typeface="DM Sans" pitchFamily="2" charset="0"/>
+                <a:latin typeface="Museo Sans 500" panose="02000000000000000000" pitchFamily="50" charset="0"/>
                 <a:ea typeface="Calibri" panose="020F0502020204030204" pitchFamily="34" charset="0"/>
                 <a:cs typeface="Calibri" panose="020F0502020204030204" pitchFamily="34" charset="0"/>
               </a:rPr>
@@ -5760,7 +5616,7 @@
                 <a:solidFill>
                   <a:srgbClr val="002060"/>
                 </a:solidFill>
-                <a:latin typeface="DM Sans" pitchFamily="2" charset="0"/>
+                <a:latin typeface="Museo Sans 500" panose="02000000000000000000" pitchFamily="50" charset="0"/>
                 <a:cs typeface="Times New Roman" panose="02020603050405020304" pitchFamily="18" charset="0"/>
               </a:rPr>
               <a:t>PROMEDIO</a:t>
@@ -5803,7 +5659,7 @@
                 <a:solidFill>
                   <a:srgbClr val="002060"/>
                 </a:solidFill>
-                <a:latin typeface="DM Sans" pitchFamily="2" charset="0"/>
+                <a:latin typeface="Museo Sans 500" panose="02000000000000000000" pitchFamily="50" charset="0"/>
                 <a:cs typeface="Times New Roman" panose="02020603050405020304" pitchFamily="18" charset="0"/>
               </a:rPr>
               <a:t>SPREAD</a:t>
@@ -5813,7 +5669,7 @@
                 <a:solidFill>
                   <a:srgbClr val="8EC5FF"/>
                 </a:solidFill>
-                <a:latin typeface="DM Sans" pitchFamily="2" charset="0"/>
+                <a:latin typeface="Museo Sans 500" panose="02000000000000000000" pitchFamily="50" charset="0"/>
                 <a:ea typeface="Calibri" panose="020F0502020204030204" pitchFamily="34" charset="0"/>
                 <a:cs typeface="Calibri" panose="020F0502020204030204" pitchFamily="34" charset="0"/>
               </a:rPr>
@@ -5824,7 +5680,7 @@
                 <a:solidFill>
                   <a:srgbClr val="002060"/>
                 </a:solidFill>
-                <a:latin typeface="DM Sans" pitchFamily="2" charset="0"/>
+                <a:latin typeface="Museo Sans 500" panose="02000000000000000000" pitchFamily="50" charset="0"/>
                 <a:cs typeface="Times New Roman" panose="02020603050405020304" pitchFamily="18" charset="0"/>
               </a:rPr>
               <a:t>MÁXIMO</a:t>
@@ -5833,7 +5689,7 @@
               <a:solidFill>
                 <a:srgbClr val="002060"/>
               </a:solidFill>
-              <a:latin typeface="DM Sans" pitchFamily="2" charset="0"/>
+              <a:latin typeface="Museo Sans 500" panose="02000000000000000000" pitchFamily="50" charset="0"/>
               <a:cs typeface="Times New Roman" panose="02020603050405020304" pitchFamily="18" charset="0"/>
             </a:endParaRPr>
           </a:p>
@@ -5855,8 +5711,8 @@
         </p:nvSpPr>
         <p:spPr>
           <a:xfrm>
-            <a:off x="5623588" y="3511340"/>
-            <a:ext cx="2183314" cy="246221"/>
+            <a:off x="5623587" y="3511340"/>
+            <a:ext cx="2302423" cy="246221"/>
           </a:xfrm>
           <a:prstGeom prst="rect">
             <a:avLst/>
@@ -5874,7 +5730,7 @@
                 <a:solidFill>
                   <a:srgbClr val="002060"/>
                 </a:solidFill>
-                <a:latin typeface="DM Sans" pitchFamily="2" charset="0"/>
+                <a:latin typeface="Museo Sans 500" panose="02000000000000000000" pitchFamily="50" charset="0"/>
                 <a:cs typeface="Times New Roman" panose="02020603050405020304" pitchFamily="18" charset="0"/>
               </a:rPr>
               <a:t>REDUCCIÓN RENOVABLE TOTAL</a:t>
@@ -5917,7 +5773,7 @@
                 <a:solidFill>
                   <a:srgbClr val="002060"/>
                 </a:solidFill>
-                <a:latin typeface="DM Sans" pitchFamily="2" charset="0"/>
+                <a:latin typeface="Museo Sans 500" panose="02000000000000000000" pitchFamily="50" charset="0"/>
                 <a:cs typeface="Times New Roman" panose="02020603050405020304" pitchFamily="18" charset="0"/>
               </a:rPr>
               <a:t>REDUCCIÓN RENOVABLE MAX.</a:t>
@@ -5961,7 +5817,7 @@
                 <a:solidFill>
                   <a:srgbClr val="002060"/>
                 </a:solidFill>
-                <a:latin typeface="DM Sans" pitchFamily="2" charset="0"/>
+                <a:latin typeface="Museo Sans 500" panose="02000000000000000000" pitchFamily="50" charset="0"/>
                 <a:cs typeface="Times New Roman" panose="02020603050405020304" pitchFamily="18" charset="0"/>
               </a:rPr>
               <a:t>CMg</a:t>
@@ -5971,7 +5827,7 @@
                 <a:solidFill>
                   <a:srgbClr val="002060"/>
                 </a:solidFill>
-                <a:latin typeface="DM Sans" pitchFamily="2" charset="0"/>
+                <a:latin typeface="Museo Sans 500" panose="02000000000000000000" pitchFamily="50" charset="0"/>
                 <a:cs typeface="Times New Roman" panose="02020603050405020304" pitchFamily="18" charset="0"/>
               </a:rPr>
               <a:t> promedio por mes</a:t>
@@ -5980,7 +5836,7 @@
               <a:solidFill>
                 <a:srgbClr val="002060"/>
               </a:solidFill>
-              <a:latin typeface="DM Sans" pitchFamily="2" charset="0"/>
+              <a:latin typeface="Museo Sans 500" panose="02000000000000000000" pitchFamily="50" charset="0"/>
               <a:cs typeface="Times New Roman" panose="02020603050405020304" pitchFamily="18" charset="0"/>
             </a:endParaRPr>
           </a:p>
@@ -6002,8 +5858,8 @@
         </p:nvSpPr>
         <p:spPr>
           <a:xfrm rot="16200000">
-            <a:off x="383566" y="11778810"/>
-            <a:ext cx="928814" cy="276999"/>
+            <a:off x="246385" y="11641629"/>
+            <a:ext cx="1203177" cy="276999"/>
           </a:xfrm>
           <a:prstGeom prst="rect">
             <a:avLst/>
@@ -6022,16 +5878,26 @@
                 <a:solidFill>
                   <a:srgbClr val="002060"/>
                 </a:solidFill>
-                <a:latin typeface="DM Sans" pitchFamily="2" charset="0"/>
+                <a:latin typeface="Museo Sans 500" panose="02000000000000000000" pitchFamily="50" charset="0"/>
                 <a:cs typeface="Times New Roman" panose="02020603050405020304" pitchFamily="18" charset="0"/>
               </a:rPr>
-              <a:t>$/kWh</a:t>
+              <a:t>USD/</a:t>
+            </a:r>
+            <a:r>
+              <a:rPr lang="es-ES" sz="1200" b="1" kern="100" dirty="0" err="1">
+                <a:solidFill>
+                  <a:srgbClr val="002060"/>
+                </a:solidFill>
+                <a:latin typeface="Museo Sans 500" panose="02000000000000000000" pitchFamily="50" charset="0"/>
+                <a:cs typeface="Times New Roman" panose="02020603050405020304" pitchFamily="18" charset="0"/>
+              </a:rPr>
+              <a:t>MWh</a:t>
             </a:r>
             <a:endParaRPr lang="es-CL" sz="1200" b="1" kern="100" dirty="0">
               <a:solidFill>
                 <a:srgbClr val="002060"/>
               </a:solidFill>
-              <a:latin typeface="DM Sans" pitchFamily="2" charset="0"/>
+              <a:latin typeface="Museo Sans 500" panose="02000000000000000000" pitchFamily="50" charset="0"/>
               <a:cs typeface="Times New Roman" panose="02020603050405020304" pitchFamily="18" charset="0"/>
             </a:endParaRPr>
           </a:p>
@@ -6073,7 +5939,7 @@
                 <a:solidFill>
                   <a:srgbClr val="002060"/>
                 </a:solidFill>
-                <a:latin typeface="DM Sans" pitchFamily="2" charset="0"/>
+                <a:latin typeface="Museo Sans 500" panose="02000000000000000000" pitchFamily="50" charset="0"/>
                 <a:cs typeface="Times New Roman" panose="02020603050405020304" pitchFamily="18" charset="0"/>
               </a:rPr>
               <a:t>Mes</a:t>
@@ -6082,7 +5948,58 @@
               <a:solidFill>
                 <a:srgbClr val="002060"/>
               </a:solidFill>
-              <a:latin typeface="DM Sans" pitchFamily="2" charset="0"/>
+              <a:latin typeface="Museo Sans 500" panose="02000000000000000000" pitchFamily="50" charset="0"/>
+              <a:cs typeface="Times New Roman" panose="02020603050405020304" pitchFamily="18" charset="0"/>
+            </a:endParaRPr>
+          </a:p>
+        </p:txBody>
+      </p:sp>
+      <p:sp>
+        <p:nvSpPr>
+          <p:cNvPr id="14" name="titulo_ubicacion_barras">
+            <a:extLst>
+              <a:ext uri="{FF2B5EF4-FFF2-40B4-BE49-F238E27FC236}">
+                <a16:creationId xmlns:a16="http://schemas.microsoft.com/office/drawing/2014/main" id="{97382C54-08E1-03B3-5C0F-3054406FE845}"/>
+              </a:ext>
+            </a:extLst>
+          </p:cNvPr>
+          <p:cNvSpPr txBox="1">
+            <a:spLocks/>
+          </p:cNvSpPr>
+          <p:nvPr/>
+        </p:nvSpPr>
+        <p:spPr>
+          <a:xfrm rot="5400000">
+            <a:off x="8800466" y="11314402"/>
+            <a:ext cx="2266947" cy="276999"/>
+          </a:xfrm>
+          <a:prstGeom prst="rect">
+            <a:avLst/>
+          </a:prstGeom>
+          <a:noFill/>
+        </p:spPr>
+        <p:txBody>
+          <a:bodyPr wrap="square" rtlCol="0">
+            <a:spAutoFit/>
+          </a:bodyPr>
+          <a:lstStyle/>
+          <a:p>
+            <a:pPr algn="ctr"/>
+            <a:r>
+              <a:rPr lang="es-ES" sz="1200" b="1" kern="100" dirty="0">
+                <a:solidFill>
+                  <a:srgbClr val="002060"/>
+                </a:solidFill>
+                <a:latin typeface="Museo Sans 500" panose="02000000000000000000" pitchFamily="50" charset="0"/>
+                <a:cs typeface="Times New Roman" panose="02020603050405020304" pitchFamily="18" charset="0"/>
+              </a:rPr>
+              <a:t>Ubicación de las barras</a:t>
+            </a:r>
+            <a:endParaRPr lang="es-CL" sz="1200" b="1" kern="100" dirty="0">
+              <a:solidFill>
+                <a:srgbClr val="002060"/>
+              </a:solidFill>
+              <a:latin typeface="Museo Sans 500" panose="02000000000000000000" pitchFamily="50" charset="0"/>
               <a:cs typeface="Times New Roman" panose="02020603050405020304" pitchFamily="18" charset="0"/>
             </a:endParaRPr>
           </a:p>
@@ -6209,7 +6126,7 @@
                 <a:solidFill>
                   <a:srgbClr val="002060"/>
                 </a:solidFill>
-                <a:latin typeface="DM Sans" pitchFamily="2" charset="0"/>
+                <a:latin typeface="gobCL" pitchFamily="50" charset="0"/>
                 <a:cs typeface="Times New Roman" panose="02020603050405020304" pitchFamily="18" charset="0"/>
               </a:rPr>
               <a:t>SEÑALES DE MERCADO PARA EL INVERSIONISTA</a:t>
@@ -6382,7 +6299,7 @@
                 <a:solidFill>
                   <a:srgbClr val="2C2E38"/>
                 </a:solidFill>
-                <a:latin typeface="DM Sans" pitchFamily="2" charset="0"/>
+                <a:latin typeface="Museo Sans 300" panose="02000000000000000000" pitchFamily="50" charset="0"/>
                 <a:ea typeface="Calibri" panose="020F0502020204030204" pitchFamily="34" charset="0"/>
                 <a:cs typeface="Calibri" panose="020F0502020204030204" pitchFamily="34" charset="0"/>
               </a:rPr>
@@ -6393,7 +6310,7 @@
                 <a:solidFill>
                   <a:srgbClr val="2C2E38"/>
                 </a:solidFill>
-                <a:latin typeface="DM Sans" pitchFamily="2" charset="0"/>
+                <a:latin typeface="Museo Sans 300" panose="02000000000000000000" pitchFamily="50" charset="0"/>
                 <a:ea typeface="Calibri" panose="020F0502020204030204" pitchFamily="34" charset="0"/>
                 <a:cs typeface="Calibri" panose="020F0502020204030204" pitchFamily="34" charset="0"/>
               </a:rPr>
@@ -6404,7 +6321,7 @@
                 <a:solidFill>
                   <a:srgbClr val="2C2E38"/>
                 </a:solidFill>
-                <a:latin typeface="DM Sans" pitchFamily="2" charset="0"/>
+                <a:latin typeface="Museo Sans 300" panose="02000000000000000000" pitchFamily="50" charset="0"/>
                 <a:ea typeface="Calibri" panose="020F0502020204030204" pitchFamily="34" charset="0"/>
                 <a:cs typeface="Calibri" panose="020F0502020204030204" pitchFamily="34" charset="0"/>
               </a:rPr>
@@ -6421,7 +6338,7 @@
               <a:solidFill>
                 <a:srgbClr val="2C2E38"/>
               </a:solidFill>
-              <a:latin typeface="DM Sans" pitchFamily="2" charset="0"/>
+              <a:latin typeface="Museo Sans 300" panose="02000000000000000000" pitchFamily="50" charset="0"/>
               <a:ea typeface="Calibri" panose="020F0502020204030204" pitchFamily="34" charset="0"/>
               <a:cs typeface="Calibri" panose="020F0502020204030204" pitchFamily="34" charset="0"/>
             </a:endParaRPr>
@@ -6437,7 +6354,7 @@
                 <a:solidFill>
                   <a:srgbClr val="2C2E38"/>
                 </a:solidFill>
-                <a:latin typeface="DM Sans" pitchFamily="2" charset="0"/>
+                <a:latin typeface="Museo Sans 300" panose="02000000000000000000" pitchFamily="50" charset="0"/>
                 <a:ea typeface="Calibri" panose="020F0502020204030204" pitchFamily="34" charset="0"/>
                 <a:cs typeface="Calibri" panose="020F0502020204030204" pitchFamily="34" charset="0"/>
               </a:rPr>
@@ -6448,7 +6365,7 @@
                 <a:solidFill>
                   <a:srgbClr val="2C2E38"/>
                 </a:solidFill>
-                <a:latin typeface="DM Sans" pitchFamily="2" charset="0"/>
+                <a:latin typeface="Museo Sans 300" panose="02000000000000000000" pitchFamily="50" charset="0"/>
                 <a:ea typeface="Calibri" panose="020F0502020204030204" pitchFamily="34" charset="0"/>
                 <a:cs typeface="Calibri" panose="020F0502020204030204" pitchFamily="34" charset="0"/>
               </a:rPr>
@@ -6459,7 +6376,7 @@
                 <a:solidFill>
                   <a:srgbClr val="2C2E38"/>
                 </a:solidFill>
-                <a:latin typeface="DM Sans" pitchFamily="2" charset="0"/>
+                <a:latin typeface="Museo Sans 300" panose="02000000000000000000" pitchFamily="50" charset="0"/>
                 <a:ea typeface="Calibri" panose="020F0502020204030204" pitchFamily="34" charset="0"/>
                 <a:cs typeface="Calibri" panose="020F0502020204030204" pitchFamily="34" charset="0"/>
               </a:rPr>
@@ -6648,55 +6565,33 @@
                 <a:solidFill>
                   <a:srgbClr val="2C2E38"/>
                 </a:solidFill>
-                <a:latin typeface="DM Sans" pitchFamily="2" charset="0"/>
+                <a:latin typeface="Museo Sans 300" panose="02000000000000000000" pitchFamily="50" charset="0"/>
                 <a:ea typeface="Calibri" panose="020F0502020204030204" pitchFamily="34" charset="0"/>
                 <a:cs typeface="Calibri" panose="020F0502020204030204" pitchFamily="34" charset="0"/>
               </a:rPr>
-              <a:t>La inyección de energía por parte de sistemas BESS muestra un crecimiento sostenido a lo largo del período, llegando a un acumulado de </a:t>
-            </a:r>
-            <a:r>
-              <a:rPr lang="es-CL" sz="1200" dirty="0">
+              <a:t>La inyección de energía por parte de sistemas BESS muestra un crecimiento sostenido a lo largo del período, llegando a un acumulado de 275.124 </a:t>
+            </a:r>
+            <a:r>
+              <a:rPr lang="es-CL" sz="1200" dirty="0" err="1">
                 <a:solidFill>
                   <a:srgbClr val="2C2E38"/>
                 </a:solidFill>
-                <a:latin typeface="DM Mono" panose="020B0509040201040103" pitchFamily="49" charset="0"/>
+                <a:latin typeface="Museo Sans 300" panose="02000000000000000000" pitchFamily="50" charset="0"/>
                 <a:ea typeface="Calibri" panose="020F0502020204030204" pitchFamily="34" charset="0"/>
                 <a:cs typeface="Calibri" panose="020F0502020204030204" pitchFamily="34" charset="0"/>
               </a:rPr>
-              <a:t>275.124 </a:t>
-            </a:r>
-            <a:r>
-              <a:rPr lang="es-CL" sz="1200" dirty="0" err="1">
+              <a:t>MWh</a:t>
+            </a:r>
+            <a:r>
+              <a:rPr lang="es-CL" sz="1200" dirty="0">
                 <a:solidFill>
                   <a:srgbClr val="2C2E38"/>
                 </a:solidFill>
-                <a:latin typeface="DM Mono" panose="020B0509040201040103" pitchFamily="49" charset="0"/>
+                <a:latin typeface="Museo Sans 300" panose="02000000000000000000" pitchFamily="50" charset="0"/>
                 <a:ea typeface="Calibri" panose="020F0502020204030204" pitchFamily="34" charset="0"/>
                 <a:cs typeface="Calibri" panose="020F0502020204030204" pitchFamily="34" charset="0"/>
               </a:rPr>
-              <a:t>MWh</a:t>
-            </a:r>
-            <a:r>
-              <a:rPr lang="es-CL" sz="1200" dirty="0">
-                <a:solidFill>
-                  <a:srgbClr val="2C2E38"/>
-                </a:solidFill>
-                <a:latin typeface="DM Mono" panose="020B0509040201040103" pitchFamily="49" charset="0"/>
-                <a:ea typeface="Calibri" panose="020F0502020204030204" pitchFamily="34" charset="0"/>
-                <a:cs typeface="Calibri" panose="020F0502020204030204" pitchFamily="34" charset="0"/>
-              </a:rPr>
-              <a:t> </a:t>
-            </a:r>
-            <a:r>
-              <a:rPr lang="es-CL" sz="1200" dirty="0">
-                <a:solidFill>
-                  <a:srgbClr val="2C2E38"/>
-                </a:solidFill>
-                <a:latin typeface="DM Sans" pitchFamily="2" charset="0"/>
-                <a:ea typeface="Calibri" panose="020F0502020204030204" pitchFamily="34" charset="0"/>
-                <a:cs typeface="Calibri" panose="020F0502020204030204" pitchFamily="34" charset="0"/>
-              </a:rPr>
-              <a:t>al fin del cuatro trimestre.</a:t>
+              <a:t> al fin del cuatro trimestre.</a:t>
             </a:r>
           </a:p>
           <a:p>
@@ -6709,7 +6604,7 @@
               <a:solidFill>
                 <a:srgbClr val="2C2E38"/>
               </a:solidFill>
-              <a:latin typeface="DM Sans" pitchFamily="2" charset="0"/>
+              <a:latin typeface="Museo Sans 300" panose="02000000000000000000" pitchFamily="50" charset="0"/>
               <a:ea typeface="Calibri" panose="020F0502020204030204" pitchFamily="34" charset="0"/>
               <a:cs typeface="Calibri" panose="020F0502020204030204" pitchFamily="34" charset="0"/>
             </a:endParaRPr>
@@ -6725,33 +6620,11 @@
                 <a:solidFill>
                   <a:srgbClr val="2C2E38"/>
                 </a:solidFill>
-                <a:latin typeface="DM Sans" pitchFamily="2" charset="0"/>
+                <a:latin typeface="Museo Sans 300" panose="02000000000000000000" pitchFamily="50" charset="0"/>
                 <a:ea typeface="Calibri" panose="020F0502020204030204" pitchFamily="34" charset="0"/>
                 <a:cs typeface="Calibri" panose="020F0502020204030204" pitchFamily="34" charset="0"/>
               </a:rPr>
-              <a:t> Al comparar con </a:t>
-            </a:r>
-            <a:r>
-              <a:rPr lang="es-CL" sz="1200" dirty="0">
-                <a:solidFill>
-                  <a:srgbClr val="2C2E38"/>
-                </a:solidFill>
-                <a:latin typeface="DM Mono" panose="020B0509040201040103" pitchFamily="49" charset="0"/>
-                <a:ea typeface="Calibri" panose="020F0502020204030204" pitchFamily="34" charset="0"/>
-                <a:cs typeface="Calibri" panose="020F0502020204030204" pitchFamily="34" charset="0"/>
-              </a:rPr>
-              <a:t>2024</a:t>
-            </a:r>
-            <a:r>
-              <a:rPr lang="es-CL" sz="1200" dirty="0">
-                <a:solidFill>
-                  <a:srgbClr val="2C2E38"/>
-                </a:solidFill>
-                <a:latin typeface="DM Sans" pitchFamily="2" charset="0"/>
-                <a:ea typeface="Calibri" panose="020F0502020204030204" pitchFamily="34" charset="0"/>
-                <a:cs typeface="Calibri" panose="020F0502020204030204" pitchFamily="34" charset="0"/>
-              </a:rPr>
-              <a:t>, la expansión es evidente en todos los trimestres. Esta trayectoria es consistente con la señal de spread que entrega el mercado: a mayor diferencial de precio día/noche, mayor el incentivo para cargar en horas solares y descargar en horarios no solares.</a:t>
+              <a:t> Al comparar con 2024, la expansión es evidente en todos los trimestres. Esta trayectoria es consistente con la señal de spread que entrega el mercado: a mayor diferencial de precio día/noche, mayor el incentivo para cargar en horas solares y descargar en horarios no solares.</a:t>
             </a:r>
           </a:p>
         </p:txBody>
@@ -6806,61 +6679,17 @@
                 <a:solidFill>
                   <a:srgbClr val="2C2E38"/>
                 </a:solidFill>
-                <a:latin typeface="DM Sans" pitchFamily="2" charset="0"/>
+                <a:latin typeface="Museo Sans 300" panose="02000000000000000000" pitchFamily="50" charset="0"/>
                 <a:ea typeface="Calibri" panose="020F0502020204030204" pitchFamily="34" charset="0"/>
                 <a:cs typeface="Calibri" panose="020F0502020204030204" pitchFamily="34" charset="0"/>
               </a:rPr>
-              <a:t>Los 3 primeros trimestres del </a:t>
-            </a:r>
-            <a:r>
-              <a:rPr lang="es-CL" sz="1200" dirty="0">
-                <a:solidFill>
-                  <a:srgbClr val="2C2E38"/>
-                </a:solidFill>
-                <a:latin typeface="DM Mono" panose="020B0509040201040103" pitchFamily="49" charset="0"/>
-                <a:ea typeface="Calibri" panose="020F0502020204030204" pitchFamily="34" charset="0"/>
-                <a:cs typeface="Calibri" panose="020F0502020204030204" pitchFamily="34" charset="0"/>
-              </a:rPr>
-              <a:t>2025</a:t>
-            </a:r>
-            <a:r>
-              <a:rPr lang="es-CL" sz="1200" dirty="0">
-                <a:solidFill>
-                  <a:srgbClr val="2C2E38"/>
-                </a:solidFill>
-                <a:latin typeface="DM Sans" pitchFamily="2" charset="0"/>
-                <a:ea typeface="Calibri" panose="020F0502020204030204" pitchFamily="34" charset="0"/>
-                <a:cs typeface="Calibri" panose="020F0502020204030204" pitchFamily="34" charset="0"/>
-              </a:rPr>
-              <a:t> superaron a sus homólogos del </a:t>
-            </a:r>
-            <a:r>
-              <a:rPr lang="es-CL" sz="1200" dirty="0">
-                <a:solidFill>
-                  <a:srgbClr val="2C2E38"/>
-                </a:solidFill>
-                <a:latin typeface="DM Mono" panose="020B0509040201040103" pitchFamily="49" charset="0"/>
-                <a:ea typeface="Calibri" panose="020F0502020204030204" pitchFamily="34" charset="0"/>
-                <a:cs typeface="Calibri" panose="020F0502020204030204" pitchFamily="34" charset="0"/>
-              </a:rPr>
-              <a:t>2024</a:t>
-            </a:r>
-            <a:r>
-              <a:rPr lang="es-CL" sz="1200" dirty="0">
-                <a:solidFill>
-                  <a:srgbClr val="2C2E38"/>
-                </a:solidFill>
-                <a:latin typeface="DM Sans" pitchFamily="2" charset="0"/>
-                <a:ea typeface="Calibri" panose="020F0502020204030204" pitchFamily="34" charset="0"/>
-                <a:cs typeface="Calibri" panose="020F0502020204030204" pitchFamily="34" charset="0"/>
-              </a:rPr>
-              <a:t> en cuanto a la energía renovable reducida. No obstante, al comparar los últimos trimestres de ambos años, se observa una disminución de estas reducciones, lo que se condice con el acelerado aumento de la participación BESS en el sistema. Sin embargo, aún falta tiempo para poder concluir de manera certera que esta tecnología esté generando la tendencia a la baja. </a:t>
+              <a:t>Los 3 primeros trimestres del 2025 superaron a sus homólogos del 2024 en cuanto a la energía renovable reducida. No obstante, al comparar los últimos trimestres de ambos años, se observa una disminución de estas reducciones, lo que se condice con el acelerado aumento de la participación BESS en el sistema. Sin embargo, aún falta tiempo para poder concluir de manera certera que esta tecnología esté generando la tendencia a la baja. </a:t>
             </a:r>
             <a:endParaRPr lang="es-CL" sz="1200" dirty="0">
               <a:solidFill>
                 <a:srgbClr val="2C2E38"/>
               </a:solidFill>
-              <a:latin typeface="DM Sans" pitchFamily="2" charset="0"/>
+              <a:latin typeface="Museo Sans 300" panose="02000000000000000000" pitchFamily="50" charset="0"/>
             </a:endParaRPr>
           </a:p>
         </p:txBody>
@@ -7319,7 +7148,7 @@
                 <a:solidFill>
                   <a:schemeClr val="bg1"/>
                 </a:solidFill>
-                <a:latin typeface="DM Sans" pitchFamily="2" charset="0"/>
+                <a:latin typeface="gobCL" pitchFamily="50" charset="0"/>
                 <a:ea typeface="Aptos" panose="020B0004020202020204" pitchFamily="34" charset="0"/>
                 <a:cs typeface="Times New Roman" panose="02020603050405020304" pitchFamily="18" charset="0"/>
               </a:rPr>
@@ -7329,7 +7158,7 @@
               <a:solidFill>
                 <a:schemeClr val="bg1"/>
               </a:solidFill>
-              <a:latin typeface="DM Sans" pitchFamily="2" charset="0"/>
+              <a:latin typeface="gobCL" pitchFamily="50" charset="0"/>
               <a:ea typeface="Aptos" panose="020B0004020202020204" pitchFamily="34" charset="0"/>
               <a:cs typeface="Times New Roman" panose="02020603050405020304" pitchFamily="18" charset="0"/>
             </a:endParaRPr>
@@ -7377,17 +7206,17 @@
                 <a:solidFill>
                   <a:srgbClr val="6FA3CC"/>
                 </a:solidFill>
-                <a:latin typeface="DM Sans" pitchFamily="2" charset="0"/>
+                <a:latin typeface="gobCL" pitchFamily="50" charset="0"/>
                 <a:cs typeface="Times New Roman" panose="02020603050405020304" pitchFamily="18" charset="0"/>
               </a:rPr>
-              <a:t>Periodo de estudio: </a:t>
+              <a:t>Mes de estudio: </a:t>
             </a:r>
             <a:r>
               <a:rPr lang="es-CL" sz="1600" b="1" kern="100" dirty="0">
                 <a:solidFill>
                   <a:srgbClr val="6FA3CC"/>
                 </a:solidFill>
-                <a:latin typeface="DM Mono" panose="020B0509040201040103" pitchFamily="49" charset="0"/>
+                <a:latin typeface="Museo Sans 300" panose="02000000000000000000" pitchFamily="50" charset="0"/>
                 <a:cs typeface="Times New Roman" panose="02020603050405020304" pitchFamily="18" charset="0"/>
               </a:rPr>
               <a:t>2025-01 → 2025-12</a:t>
@@ -7411,8 +7240,8 @@
         </p:nvSpPr>
         <p:spPr>
           <a:xfrm rot="16200000">
-            <a:off x="46646" y="3981010"/>
-            <a:ext cx="928814" cy="276999"/>
+            <a:off x="-24495" y="3909869"/>
+            <a:ext cx="1071097" cy="276999"/>
           </a:xfrm>
           <a:prstGeom prst="rect">
             <a:avLst/>
@@ -7434,7 +7263,17 @@
                 <a:latin typeface="DM Sans" pitchFamily="2" charset="0"/>
                 <a:cs typeface="Times New Roman" panose="02020603050405020304" pitchFamily="18" charset="0"/>
               </a:rPr>
-              <a:t>$/kWh</a:t>
+              <a:t>USH/</a:t>
+            </a:r>
+            <a:r>
+              <a:rPr lang="es-ES" sz="1200" b="1" kern="100" dirty="0" err="1">
+                <a:solidFill>
+                  <a:srgbClr val="002060"/>
+                </a:solidFill>
+                <a:latin typeface="DM Sans" pitchFamily="2" charset="0"/>
+                <a:cs typeface="Times New Roman" panose="02020603050405020304" pitchFamily="18" charset="0"/>
+              </a:rPr>
+              <a:t>MWh</a:t>
             </a:r>
             <a:endParaRPr lang="es-CL" sz="1200" b="1" kern="100" dirty="0">
               <a:solidFill>
@@ -7482,7 +7321,7 @@
                 <a:solidFill>
                   <a:srgbClr val="002060"/>
                 </a:solidFill>
-                <a:latin typeface="DM Sans" pitchFamily="2" charset="0"/>
+                <a:latin typeface="Museo Sans 300" panose="02000000000000000000" pitchFamily="50" charset="0"/>
                 <a:cs typeface="Times New Roman" panose="02020603050405020304" pitchFamily="18" charset="0"/>
               </a:rPr>
               <a:t>CMg</a:t>
@@ -7492,7 +7331,7 @@
                 <a:solidFill>
                   <a:srgbClr val="002060"/>
                 </a:solidFill>
-                <a:latin typeface="DM Sans" pitchFamily="2" charset="0"/>
+                <a:latin typeface="Museo Sans 300" panose="02000000000000000000" pitchFamily="50" charset="0"/>
                 <a:cs typeface="Times New Roman" panose="02020603050405020304" pitchFamily="18" charset="0"/>
               </a:rPr>
               <a:t> promedio: horas solares vs no solares</a:t>
@@ -7501,7 +7340,7 @@
               <a:solidFill>
                 <a:srgbClr val="002060"/>
               </a:solidFill>
-              <a:latin typeface="DM Sans" pitchFamily="2" charset="0"/>
+              <a:latin typeface="Museo Sans 300" panose="02000000000000000000" pitchFamily="50" charset="0"/>
               <a:cs typeface="Times New Roman" panose="02020603050405020304" pitchFamily="18" charset="0"/>
             </a:endParaRPr>
           </a:p>
@@ -7543,7 +7382,7 @@
                 <a:solidFill>
                   <a:srgbClr val="002060"/>
                 </a:solidFill>
-                <a:latin typeface="DM Sans" pitchFamily="2" charset="0"/>
+                <a:latin typeface="Museo Sans 500" panose="02000000000000000000" pitchFamily="50" charset="0"/>
                 <a:cs typeface="Times New Roman" panose="02020603050405020304" pitchFamily="18" charset="0"/>
               </a:rPr>
               <a:t>Evolución trimestral de inyección BESS</a:t>
@@ -7552,7 +7391,7 @@
               <a:solidFill>
                 <a:srgbClr val="002060"/>
               </a:solidFill>
-              <a:latin typeface="DM Sans" pitchFamily="2" charset="0"/>
+              <a:latin typeface="Museo Sans 500" panose="02000000000000000000" pitchFamily="50" charset="0"/>
               <a:cs typeface="Times New Roman" panose="02020603050405020304" pitchFamily="18" charset="0"/>
             </a:endParaRPr>
           </a:p>
@@ -7594,7 +7433,7 @@
                 <a:solidFill>
                   <a:srgbClr val="002060"/>
                 </a:solidFill>
-                <a:latin typeface="DM Sans" pitchFamily="2" charset="0"/>
+                <a:latin typeface="Museo Sans 500" panose="02000000000000000000" pitchFamily="50" charset="0"/>
                 <a:cs typeface="Times New Roman" panose="02020603050405020304" pitchFamily="18" charset="0"/>
               </a:rPr>
               <a:t>MWh</a:t>
@@ -7603,7 +7442,7 @@
               <a:solidFill>
                 <a:srgbClr val="002060"/>
               </a:solidFill>
-              <a:latin typeface="DM Sans" pitchFamily="2" charset="0"/>
+              <a:latin typeface="Museo Sans 500" panose="02000000000000000000" pitchFamily="50" charset="0"/>
               <a:cs typeface="Times New Roman" panose="02020603050405020304" pitchFamily="18" charset="0"/>
             </a:endParaRPr>
           </a:p>
@@ -7645,7 +7484,7 @@
                 <a:solidFill>
                   <a:srgbClr val="002060"/>
                 </a:solidFill>
-                <a:latin typeface="DM Sans" pitchFamily="2" charset="0"/>
+                <a:latin typeface="Museo Sans 500" panose="02000000000000000000" pitchFamily="50" charset="0"/>
                 <a:cs typeface="Times New Roman" panose="02020603050405020304" pitchFamily="18" charset="0"/>
               </a:rPr>
               <a:t>MWh</a:t>
@@ -7654,7 +7493,7 @@
               <a:solidFill>
                 <a:srgbClr val="002060"/>
               </a:solidFill>
-              <a:latin typeface="DM Sans" pitchFamily="2" charset="0"/>
+              <a:latin typeface="Museo Sans 500" panose="02000000000000000000" pitchFamily="50" charset="0"/>
               <a:cs typeface="Times New Roman" panose="02020603050405020304" pitchFamily="18" charset="0"/>
             </a:endParaRPr>
           </a:p>
@@ -7696,7 +7535,7 @@
                 <a:solidFill>
                   <a:srgbClr val="002060"/>
                 </a:solidFill>
-                <a:latin typeface="DM Sans" pitchFamily="2" charset="0"/>
+                <a:latin typeface="Museo Sans 500" panose="02000000000000000000" pitchFamily="50" charset="0"/>
                 <a:cs typeface="Times New Roman" panose="02020603050405020304" pitchFamily="18" charset="0"/>
               </a:rPr>
               <a:t>Reducciones de energía renovable</a:t>
@@ -7705,7 +7544,7 @@
               <a:solidFill>
                 <a:srgbClr val="002060"/>
               </a:solidFill>
-              <a:latin typeface="DM Sans" pitchFamily="2" charset="0"/>
+              <a:latin typeface="Museo Sans 500" panose="02000000000000000000" pitchFamily="50" charset="0"/>
               <a:cs typeface="Times New Roman" panose="02020603050405020304" pitchFamily="18" charset="0"/>
             </a:endParaRPr>
           </a:p>
@@ -7778,7 +7617,7 @@
         </p:nvSpPr>
         <p:spPr>
           <a:xfrm>
-            <a:off x="2742983" y="9585137"/>
+            <a:off x="2711068" y="9438023"/>
             <a:ext cx="928814" cy="276999"/>
           </a:xfrm>
           <a:prstGeom prst="rect">
@@ -7798,7 +7637,7 @@
                 <a:solidFill>
                   <a:srgbClr val="002060"/>
                 </a:solidFill>
-                <a:latin typeface="DM Sans" pitchFamily="2" charset="0"/>
+                <a:latin typeface="Museo Sans 500" panose="02000000000000000000" pitchFamily="50" charset="0"/>
                 <a:cs typeface="Times New Roman" panose="02020603050405020304" pitchFamily="18" charset="0"/>
               </a:rPr>
               <a:t>Trimestre</a:t>
@@ -7807,7 +7646,7 @@
               <a:solidFill>
                 <a:srgbClr val="002060"/>
               </a:solidFill>
-              <a:latin typeface="DM Sans" pitchFamily="2" charset="0"/>
+              <a:latin typeface="Museo Sans 500" panose="02000000000000000000" pitchFamily="50" charset="0"/>
               <a:cs typeface="Times New Roman" panose="02020603050405020304" pitchFamily="18" charset="0"/>
             </a:endParaRPr>
           </a:p>
@@ -7829,7 +7668,7 @@
         </p:nvSpPr>
         <p:spPr>
           <a:xfrm>
-            <a:off x="2742983" y="13507701"/>
+            <a:off x="2711068" y="13360587"/>
             <a:ext cx="928814" cy="276999"/>
           </a:xfrm>
           <a:prstGeom prst="rect">
@@ -7849,7 +7688,7 @@
                 <a:solidFill>
                   <a:srgbClr val="002060"/>
                 </a:solidFill>
-                <a:latin typeface="DM Sans" pitchFamily="2" charset="0"/>
+                <a:latin typeface="Museo Sans 500" panose="02000000000000000000" pitchFamily="50" charset="0"/>
                 <a:cs typeface="Times New Roman" panose="02020603050405020304" pitchFamily="18" charset="0"/>
               </a:rPr>
               <a:t>Trimestre</a:t>
@@ -7858,7 +7697,7 @@
               <a:solidFill>
                 <a:srgbClr val="002060"/>
               </a:solidFill>
-              <a:latin typeface="DM Sans" pitchFamily="2" charset="0"/>
+              <a:latin typeface="Museo Sans 500" panose="02000000000000000000" pitchFamily="50" charset="0"/>
               <a:cs typeface="Times New Roman" panose="02020603050405020304" pitchFamily="18" charset="0"/>
             </a:endParaRPr>
           </a:p>
@@ -8119,7 +7958,7 @@
                 <a:solidFill>
                   <a:srgbClr val="002060"/>
                 </a:solidFill>
-                <a:latin typeface="DM Sans" pitchFamily="2" charset="0"/>
+                <a:latin typeface="gobCL" pitchFamily="50" charset="0"/>
                 <a:cs typeface="Times New Roman" panose="02020603050405020304" pitchFamily="18" charset="0"/>
               </a:rPr>
               <a:t>PERFIL DE GENERACIÓN</a:t>
@@ -8144,7 +7983,7 @@
         <p:spPr>
           <a:xfrm>
             <a:off x="541157" y="1593517"/>
-            <a:ext cx="9231737" cy="2747996"/>
+            <a:ext cx="9231737" cy="2470997"/>
           </a:xfrm>
           <a:prstGeom prst="rect">
             <a:avLst/>
@@ -8179,77 +8018,11 @@
                 <a:solidFill>
                   <a:srgbClr val="2C2E38"/>
                 </a:solidFill>
-                <a:latin typeface="DM Sans" pitchFamily="2" charset="0"/>
+                <a:latin typeface="Museo Sans 300" panose="02000000000000000000" pitchFamily="50" charset="0"/>
                 <a:ea typeface="Calibri" panose="020F0502020204030204" pitchFamily="34" charset="0"/>
                 <a:cs typeface="Calibri" panose="020F0502020204030204" pitchFamily="34" charset="0"/>
               </a:rPr>
-              <a:t>La presente sección profundiza en el análisis de los vertimientos de energía renovable y el perfil de generación registrados durante </a:t>
-            </a:r>
-            <a:r>
-              <a:rPr lang="es-CL" sz="1200" dirty="0">
-                <a:solidFill>
-                  <a:srgbClr val="2C2E38"/>
-                </a:solidFill>
-                <a:latin typeface="DM Mono" panose="020B0509040201040103" pitchFamily="49" charset="0"/>
-                <a:ea typeface="Calibri" panose="020F0502020204030204" pitchFamily="34" charset="0"/>
-                <a:cs typeface="Calibri" panose="020F0502020204030204" pitchFamily="34" charset="0"/>
-              </a:rPr>
-              <a:t>2025</a:t>
-            </a:r>
-            <a:r>
-              <a:rPr lang="es-CL" sz="1200" dirty="0">
-                <a:solidFill>
-                  <a:srgbClr val="2C2E38"/>
-                </a:solidFill>
-                <a:latin typeface="DM Sans" pitchFamily="2" charset="0"/>
-                <a:ea typeface="Calibri" panose="020F0502020204030204" pitchFamily="34" charset="0"/>
-                <a:cs typeface="Calibri" panose="020F0502020204030204" pitchFamily="34" charset="0"/>
-              </a:rPr>
-              <a:t>. Para dimensionar la evolución del fenómeno, se presentan dos perfiles diarios típicos de generación correspondientes a fechas de referencia distintas dentro del período —</a:t>
-            </a:r>
-            <a:r>
-              <a:rPr lang="es-CL" sz="1200" dirty="0">
-                <a:solidFill>
-                  <a:srgbClr val="2C2E38"/>
-                </a:solidFill>
-                <a:latin typeface="DM Mono" panose="020B0509040201040103" pitchFamily="49" charset="0"/>
-                <a:ea typeface="Calibri" panose="020F0502020204030204" pitchFamily="34" charset="0"/>
-                <a:cs typeface="Calibri" panose="020F0502020204030204" pitchFamily="34" charset="0"/>
-              </a:rPr>
-              <a:t>{{kpis.fecha_perfil_1}} </a:t>
-            </a:r>
-            <a:r>
-              <a:rPr lang="es-CL" sz="1200" dirty="0">
-                <a:solidFill>
-                  <a:srgbClr val="2C2E38"/>
-                </a:solidFill>
-                <a:latin typeface="DM Sans" pitchFamily="2" charset="0"/>
-                <a:ea typeface="Calibri" panose="020F0502020204030204" pitchFamily="34" charset="0"/>
-                <a:cs typeface="Calibri" panose="020F0502020204030204" pitchFamily="34" charset="0"/>
-              </a:rPr>
-              <a:t>y </a:t>
-            </a:r>
-            <a:r>
-              <a:rPr lang="es-CL" sz="1200" dirty="0">
-                <a:solidFill>
-                  <a:srgbClr val="2C2E38"/>
-                </a:solidFill>
-                <a:latin typeface="DM Mono" panose="020B0509040201040103" pitchFamily="49" charset="0"/>
-                <a:ea typeface="Calibri" panose="020F0502020204030204" pitchFamily="34" charset="0"/>
-                <a:cs typeface="Calibri" panose="020F0502020204030204" pitchFamily="34" charset="0"/>
-              </a:rPr>
-              <a:t>{{kpis.fecha_perfil_2}}— </a:t>
-            </a:r>
-            <a:r>
-              <a:rPr lang="es-CL" sz="1200" dirty="0">
-                <a:solidFill>
-                  <a:srgbClr val="2C2E38"/>
-                </a:solidFill>
-                <a:latin typeface="DM Sans" pitchFamily="2" charset="0"/>
-                <a:ea typeface="Calibri" panose="020F0502020204030204" pitchFamily="34" charset="0"/>
-                <a:cs typeface="Calibri" panose="020F0502020204030204" pitchFamily="34" charset="0"/>
-              </a:rPr>
-              <a:t>lo que permite observar cómo la participación de cada tecnología en la curva de carga varía según la estación y las condiciones del sistema. La comparación entre ambos perfiles ilustra el rol creciente del almacenamiento BESS en la gestión de la rampa vespertina, así como la persistencia de la generación solar como principal fuente de excedentes en horas centrales del día.</a:t>
+              <a:t>La presente sección profundiza en el análisis de los vertimientos de energía renovable y el perfil de generación registrados durante 2025. Para dimensionar la evolución del fenómeno, se presentan dos perfiles diarios típicos de generación correspondientes a fechas de referencia distintas dentro del período —{{kpis.fecha_perfil_1}} y {{kpis.fecha_perfil_2}}— lo que permite observar cómo la participación de cada tecnología en la curva de carga varía según la estación y las condiciones del sistema. La comparación entre ambos perfiles ilustra el rol creciente del almacenamiento BESS en la gestión de la rampa vespertina, así como la persistencia de la generación solar como principal fuente de excedentes en horas centrales del día.</a:t>
             </a:r>
           </a:p>
           <a:p>
@@ -8696,7 +8469,7 @@
                 <a:solidFill>
                   <a:schemeClr val="bg1"/>
                 </a:solidFill>
-                <a:latin typeface="DM Sans" pitchFamily="2" charset="0"/>
+                <a:latin typeface="gobCL" pitchFamily="50" charset="0"/>
                 <a:ea typeface="Aptos" panose="020B0004020202020204" pitchFamily="34" charset="0"/>
                 <a:cs typeface="Times New Roman" panose="02020603050405020304" pitchFamily="18" charset="0"/>
               </a:rPr>
@@ -8706,7 +8479,7 @@
               <a:solidFill>
                 <a:schemeClr val="bg1"/>
               </a:solidFill>
-              <a:latin typeface="DM Sans" pitchFamily="2" charset="0"/>
+              <a:latin typeface="gobCL" pitchFamily="50" charset="0"/>
               <a:ea typeface="Aptos" panose="020B0004020202020204" pitchFamily="34" charset="0"/>
               <a:cs typeface="Times New Roman" panose="02020603050405020304" pitchFamily="18" charset="0"/>
             </a:endParaRPr>
@@ -8754,17 +8527,17 @@
                 <a:solidFill>
                   <a:srgbClr val="6FA3CC"/>
                 </a:solidFill>
-                <a:latin typeface="DM Sans" pitchFamily="2" charset="0"/>
+                <a:latin typeface="gobCL" pitchFamily="50" charset="0"/>
                 <a:cs typeface="Times New Roman" panose="02020603050405020304" pitchFamily="18" charset="0"/>
               </a:rPr>
-              <a:t>Periodo de estudio: </a:t>
+              <a:t>Mes de estudio: </a:t>
             </a:r>
             <a:r>
               <a:rPr lang="es-CL" sz="1600" b="1" kern="100" dirty="0">
                 <a:solidFill>
                   <a:srgbClr val="6FA3CC"/>
                 </a:solidFill>
-                <a:latin typeface="DM Mono" panose="020B0509040201040103" pitchFamily="49" charset="0"/>
+                <a:latin typeface="Museo Sans 300" panose="02000000000000000000" pitchFamily="50" charset="0"/>
                 <a:cs typeface="Times New Roman" panose="02020603050405020304" pitchFamily="18" charset="0"/>
               </a:rPr>
               <a:t>2025-01 → 2025-12</a:t>
@@ -8808,7 +8581,7 @@
                 <a:solidFill>
                   <a:srgbClr val="002060"/>
                 </a:solidFill>
-                <a:latin typeface="DM Sans" pitchFamily="2" charset="0"/>
+                <a:latin typeface="Museo Sans 500" panose="02000000000000000000" pitchFamily="50" charset="0"/>
                 <a:cs typeface="Times New Roman" panose="02020603050405020304" pitchFamily="18" charset="0"/>
               </a:rPr>
               <a:t>Generación diaria típica por tecnología</a:t>
@@ -8817,7 +8590,7 @@
               <a:solidFill>
                 <a:srgbClr val="002060"/>
               </a:solidFill>
-              <a:latin typeface="DM Sans" pitchFamily="2" charset="0"/>
+              <a:latin typeface="Museo Sans 500" panose="02000000000000000000" pitchFamily="50" charset="0"/>
               <a:cs typeface="Times New Roman" panose="02020603050405020304" pitchFamily="18" charset="0"/>
             </a:endParaRPr>
           </a:p>
@@ -8859,7 +8632,7 @@
                 <a:solidFill>
                   <a:srgbClr val="8A8775"/>
                 </a:solidFill>
-                <a:latin typeface="DM Sans" pitchFamily="2" charset="0"/>
+                <a:latin typeface="Museo Sans 500" panose="02000000000000000000" pitchFamily="50" charset="0"/>
                 <a:cs typeface="Times New Roman" panose="02020603050405020304" pitchFamily="18" charset="0"/>
               </a:rPr>
               <a:t>Fecha de referencia: </a:t>
@@ -8869,7 +8642,7 @@
                 <a:solidFill>
                   <a:srgbClr val="8A8775"/>
                 </a:solidFill>
-                <a:latin typeface="DM Mono" panose="020B0509040201040103" pitchFamily="49" charset="0"/>
+                <a:latin typeface="Museo Sans 500" panose="02000000000000000000" pitchFamily="50" charset="0"/>
                 <a:cs typeface="Times New Roman" panose="02020603050405020304" pitchFamily="18" charset="0"/>
               </a:rPr>
               <a:t>{{kpis.fecha_referencia_2}} </a:t>
@@ -8913,7 +8686,7 @@
                 <a:solidFill>
                   <a:srgbClr val="8A8775"/>
                 </a:solidFill>
-                <a:latin typeface="DM Sans" pitchFamily="2" charset="0"/>
+                <a:latin typeface="Museo Sans 500" panose="02000000000000000000" pitchFamily="50" charset="0"/>
                 <a:cs typeface="Times New Roman" panose="02020603050405020304" pitchFamily="18" charset="0"/>
               </a:rPr>
               <a:t>Fecha de referencia: </a:t>
@@ -8923,18 +8696,11 @@
                 <a:solidFill>
                   <a:srgbClr val="8A8775"/>
                 </a:solidFill>
-                <a:latin typeface="DM Mono" panose="020B0509040201040103" pitchFamily="49" charset="0"/>
+                <a:latin typeface="Museo Sans 500" panose="02000000000000000000" pitchFamily="50" charset="0"/>
                 <a:cs typeface="Times New Roman" panose="02020603050405020304" pitchFamily="18" charset="0"/>
               </a:rPr>
               <a:t>{{kpis.fecha_referencia_1}} </a:t>
             </a:r>
-            <a:endParaRPr lang="es-CL" sz="1000" b="1" kern="100" dirty="0">
-              <a:solidFill>
-                <a:srgbClr val="8A8775"/>
-              </a:solidFill>
-              <a:latin typeface="DM Sans" pitchFamily="2" charset="0"/>
-              <a:cs typeface="Times New Roman" panose="02020603050405020304" pitchFamily="18" charset="0"/>
-            </a:endParaRPr>
           </a:p>
         </p:txBody>
       </p:sp>
@@ -8974,7 +8740,7 @@
                 <a:solidFill>
                   <a:srgbClr val="002060"/>
                 </a:solidFill>
-                <a:latin typeface="DM Sans" pitchFamily="2" charset="0"/>
+                <a:latin typeface="Museo Sans 500" panose="02000000000000000000" pitchFamily="50" charset="0"/>
                 <a:cs typeface="Times New Roman" panose="02020603050405020304" pitchFamily="18" charset="0"/>
               </a:rPr>
               <a:t>MWh</a:t>
@@ -8983,7 +8749,7 @@
               <a:solidFill>
                 <a:srgbClr val="002060"/>
               </a:solidFill>
-              <a:latin typeface="DM Sans" pitchFamily="2" charset="0"/>
+              <a:latin typeface="Museo Sans 500" panose="02000000000000000000" pitchFamily="50" charset="0"/>
               <a:cs typeface="Times New Roman" panose="02020603050405020304" pitchFamily="18" charset="0"/>
             </a:endParaRPr>
           </a:p>
@@ -9025,7 +8791,7 @@
                 <a:solidFill>
                   <a:srgbClr val="002060"/>
                 </a:solidFill>
-                <a:latin typeface="DM Sans" pitchFamily="2" charset="0"/>
+                <a:latin typeface="Museo Sans 500" panose="02000000000000000000" pitchFamily="50" charset="0"/>
                 <a:cs typeface="Times New Roman" panose="02020603050405020304" pitchFamily="18" charset="0"/>
               </a:rPr>
               <a:t>Hora del día</a:t>
@@ -9034,7 +8800,7 @@
               <a:solidFill>
                 <a:srgbClr val="002060"/>
               </a:solidFill>
-              <a:latin typeface="DM Sans" pitchFamily="2" charset="0"/>
+              <a:latin typeface="Museo Sans 500" panose="02000000000000000000" pitchFamily="50" charset="0"/>
               <a:cs typeface="Times New Roman" panose="02020603050405020304" pitchFamily="18" charset="0"/>
             </a:endParaRPr>
           </a:p>
@@ -9076,7 +8842,7 @@
                 <a:solidFill>
                   <a:srgbClr val="002060"/>
                 </a:solidFill>
-                <a:latin typeface="DM Sans" pitchFamily="2" charset="0"/>
+                <a:latin typeface="Museo Sans 500" panose="02000000000000000000" pitchFamily="50" charset="0"/>
                 <a:cs typeface="Times New Roman" panose="02020603050405020304" pitchFamily="18" charset="0"/>
               </a:rPr>
               <a:t>Hora del día</a:t>
@@ -9085,7 +8851,7 @@
               <a:solidFill>
                 <a:srgbClr val="002060"/>
               </a:solidFill>
-              <a:latin typeface="DM Sans" pitchFamily="2" charset="0"/>
+              <a:latin typeface="Museo Sans 500" panose="02000000000000000000" pitchFamily="50" charset="0"/>
               <a:cs typeface="Times New Roman" panose="02020603050405020304" pitchFamily="18" charset="0"/>
             </a:endParaRPr>
           </a:p>
